--- a/draft/fraud-detection/slide/[Nhom9]_Slide_FraudDetection_Academic_VN.pptx
+++ b/draft/fraud-detection/slide/[Nhom9]_Slide_FraudDetection_Academic_VN.pptx
@@ -3025,6 +3025,9 @@
   <p:clrMapOvr>
     <a:masterClrMapping/>
   </p:clrMapOvr>
+  <p:transition xmlns:p14="http://schemas.microsoft.com/office/powerpoint/2010/main" xmlns:p15="http://schemas.microsoft.com/office/powerpoint/2012/main" spd="slow" p14:dur="2000">
+    <p15:prstTrans prst="fracture"/>
+  </p:transition>
 </p:sld>
 </file>
 
@@ -3349,6 +3352,9 @@
   <p:clrMapOvr>
     <a:masterClrMapping/>
   </p:clrMapOvr>
+  <p:transition xmlns:p14="http://schemas.microsoft.com/office/powerpoint/2010/main" spd="slow" p14:dur="1500">
+    <p:split orient="vert"/>
+  </p:transition>
 </p:sld>
 </file>
 
@@ -4862,6 +4868,9 @@
   <p:clrMapOvr>
     <a:masterClrMapping/>
   </p:clrMapOvr>
+  <p:transition xmlns:p14="http://schemas.microsoft.com/office/powerpoint/2010/main" xmlns:p159="http://schemas.microsoft.com/office/powerpoint/2015/09/main" spd="slow" p14:dur="2000">
+    <p159:morph option="byObject"/>
+  </p:transition>
 </p:sld>
 </file>
 
@@ -5765,6 +5774,9 @@
   <p:clrMapOvr>
     <a:masterClrMapping/>
   </p:clrMapOvr>
+  <p:transition xmlns:p14="http://schemas.microsoft.com/office/powerpoint/2010/main" xmlns:p159="http://schemas.microsoft.com/office/powerpoint/2015/09/main" spd="slow" p14:dur="2000">
+    <p159:morph option="byObject"/>
+  </p:transition>
 </p:sld>
 </file>
 
@@ -7774,6 +7786,9 @@
   <p:clrMapOvr>
     <a:masterClrMapping/>
   </p:clrMapOvr>
+  <p:transition xmlns:p14="http://schemas.microsoft.com/office/powerpoint/2010/main" xmlns:p159="http://schemas.microsoft.com/office/powerpoint/2015/09/main" spd="slow" p14:dur="2000">
+    <p159:morph option="byObject"/>
+  </p:transition>
 </p:sld>
 </file>
 
@@ -8122,6 +8137,9 @@
   <p:clrMapOvr>
     <a:masterClrMapping/>
   </p:clrMapOvr>
+  <p:transition xmlns:p14="http://schemas.microsoft.com/office/powerpoint/2010/main" spd="slow" p14:dur="1500">
+    <p:split orient="vert"/>
+  </p:transition>
 </p:sld>
 </file>
 
@@ -11149,6 +11167,9 @@
   <p:clrMapOvr>
     <a:masterClrMapping/>
   </p:clrMapOvr>
+  <p:transition spd="slow">
+    <p:wipe/>
+  </p:transition>
 </p:sld>
 </file>
 
@@ -11911,6 +11932,9 @@
   <p:clrMapOvr>
     <a:masterClrMapping/>
   </p:clrMapOvr>
+  <p:transition xmlns:p14="http://schemas.microsoft.com/office/powerpoint/2010/main" spd="slow" p14:dur="1500">
+    <p:split orient="vert"/>
+  </p:transition>
 </p:sld>
 </file>
 
@@ -13711,6 +13735,9 @@
   <p:clrMapOvr>
     <a:masterClrMapping/>
   </p:clrMapOvr>
+  <p:transition xmlns:p14="http://schemas.microsoft.com/office/powerpoint/2010/main" spd="slow" p14:dur="1500">
+    <p:split orient="vert"/>
+  </p:transition>
 </p:sld>
 </file>
 
@@ -15646,6 +15673,9 @@
   <p:clrMapOvr>
     <a:masterClrMapping/>
   </p:clrMapOvr>
+  <p:transition xmlns:p14="http://schemas.microsoft.com/office/powerpoint/2010/main" spd="slow" p14:dur="1500">
+    <p:split orient="vert"/>
+  </p:transition>
 </p:sld>
 </file>
 
@@ -15970,6 +16000,9 @@
   <p:clrMapOvr>
     <a:masterClrMapping/>
   </p:clrMapOvr>
+  <p:transition xmlns:p14="http://schemas.microsoft.com/office/powerpoint/2010/main" spd="slow" p14:dur="1500">
+    <p:split orient="vert"/>
+  </p:transition>
 </p:sld>
 </file>
 
@@ -16743,6 +16776,9 @@
   <p:clrMapOvr>
     <a:masterClrMapping/>
   </p:clrMapOvr>
+  <p:transition spd="slow">
+    <p:cover/>
+  </p:transition>
 </p:sld>
 </file>
 
@@ -17678,6 +17714,9 @@
   <p:clrMapOvr>
     <a:masterClrMapping/>
   </p:clrMapOvr>
+  <p:transition spd="slow">
+    <p:wipe/>
+  </p:transition>
 </p:sld>
 </file>
 
@@ -18059,6 +18098,9 @@
   <p:clrMapOvr>
     <a:masterClrMapping/>
   </p:clrMapOvr>
+  <p:transition spd="slow">
+    <p:wipe/>
+  </p:transition>
 </p:sld>
 </file>
 
@@ -18383,6 +18425,9 @@
   <p:clrMapOvr>
     <a:masterClrMapping/>
   </p:clrMapOvr>
+  <p:transition xmlns:p14="http://schemas.microsoft.com/office/powerpoint/2010/main" xmlns:p15="http://schemas.microsoft.com/office/powerpoint/2012/main" spd="slow" p14:dur="1250">
+    <p15:prstTrans prst="pageCurlDouble"/>
+  </p:transition>
 </p:sld>
 </file>
 
@@ -20042,6 +20087,9 @@
   <p:clrMapOvr>
     <a:masterClrMapping/>
   </p:clrMapOvr>
+  <p:transition xmlns:p14="http://schemas.microsoft.com/office/powerpoint/2010/main" xmlns:p15="http://schemas.microsoft.com/office/powerpoint/2012/main" spd="slow" p14:dur="1250">
+    <p15:prstTrans prst="pageCurlDouble"/>
+  </p:transition>
 </p:sld>
 </file>
 
@@ -22029,6 +22077,9 @@
   <p:clrMapOvr>
     <a:masterClrMapping/>
   </p:clrMapOvr>
+  <p:transition xmlns:p14="http://schemas.microsoft.com/office/powerpoint/2010/main" xmlns:p15="http://schemas.microsoft.com/office/powerpoint/2012/main" spd="slow" p14:dur="1250">
+    <p15:prstTrans prst="pageCurlDouble"/>
+  </p:transition>
 </p:sld>
 </file>
 
@@ -22353,6 +22404,9 @@
   <p:clrMapOvr>
     <a:masterClrMapping/>
   </p:clrMapOvr>
+  <p:transition xmlns:p14="http://schemas.microsoft.com/office/powerpoint/2010/main" xmlns:p15="http://schemas.microsoft.com/office/powerpoint/2012/main" spd="slow" p14:dur="1250">
+    <p15:prstTrans prst="airplane"/>
+  </p:transition>
 </p:sld>
 </file>
 
@@ -23214,6 +23268,9 @@
   <p:clrMapOvr>
     <a:masterClrMapping/>
   </p:clrMapOvr>
+  <p:transition xmlns:p14="http://schemas.microsoft.com/office/powerpoint/2010/main" spd="slow" p14:dur="1500">
+    <p:split orient="vert"/>
+  </p:transition>
 </p:sld>
 </file>
 
@@ -25146,6 +25203,9 @@
   <p:clrMapOvr>
     <a:masterClrMapping/>
   </p:clrMapOvr>
+  <p:transition xmlns:p14="http://schemas.microsoft.com/office/powerpoint/2010/main" xmlns:p159="http://schemas.microsoft.com/office/powerpoint/2015/09/main" spd="slow" p14:dur="2000">
+    <p159:morph option="byObject"/>
+  </p:transition>
 </p:sld>
 </file>
 
@@ -26939,6 +26999,9 @@
   <p:clrMapOvr>
     <a:masterClrMapping/>
   </p:clrMapOvr>
+  <p:transition xmlns:p14="http://schemas.microsoft.com/office/powerpoint/2010/main" xmlns:p159="http://schemas.microsoft.com/office/powerpoint/2015/09/main" spd="slow" p14:dur="2000">
+    <p159:morph option="byObject"/>
+  </p:transition>
 </p:sld>
 </file>
 

--- a/draft/fraud-detection/slide/[Nhom9]_Slide_FraudDetection_Academic_VN.pptx
+++ b/draft/fraud-detection/slide/[Nhom9]_Slide_FraudDetection_Academic_VN.pptx
@@ -4,6 +4,9 @@
   <p:sldMasterIdLst>
     <p:sldMasterId id="2147483648" r:id="rId1"/>
   </p:sldMasterIdLst>
+  <p:notesMasterIdLst>
+    <p:notesMasterId r:id="rId23"/>
+  </p:notesMasterIdLst>
   <p:sldIdLst>
     <p:sldId id="256" r:id="rId2"/>
     <p:sldId id="257" r:id="rId3"/>
@@ -27,10 +30,7 @@
     <p:sldId id="275" r:id="rId21"/>
     <p:sldId id="276" r:id="rId22"/>
   </p:sldIdLst>
-  <p:notesMasterIdLst>
-    <p:notesMasterId r:id="rId23"/>
-  </p:notesMasterIdLst>
-  <p:sldSz cx="9144000" cy="5143500"/>
+  <p:sldSz cx="9144000" cy="5143500" type="screen16x9"/>
   <p:notesSz cx="5143500" cy="9144000"/>
   <p:defaultTextStyle>
     <a:lvl1pPr marL="0" algn="l" defTabSz="914400" rtl="0" eaLnBrk="1" latinLnBrk="0" hangingPunct="1">
@@ -124,6 +124,11 @@
       </a:defRPr>
     </a:lvl9pPr>
   </p:defaultTextStyle>
+  <p:extLst>
+    <p:ext uri="{EFAFB233-063F-42B5-8137-9DF3F51BA10A}">
+      <p15:sldGuideLst xmlns:p15="http://schemas.microsoft.com/office/powerpoint/2012/main"/>
+    </p:ext>
+  </p:extLst>
 </p:presentation>
 </file>
 
@@ -149,234 +154,10 @@
           <a:chExt cx="0" cy="0"/>
         </a:xfrm>
       </p:grpSpPr>
-      <p:sp>
-        <p:nvSpPr>
-          <p:cNvPr id="2" name="Header Placeholder 1"/>
-          <p:cNvSpPr>
-            <a:spLocks noGrp="1"/>
-          </p:cNvSpPr>
-          <p:nvPr>
-            <p:ph type="hdr" sz="quarter"/>
-          </p:nvPr>
-        </p:nvSpPr>
-        <p:spPr>
-          <a:xfrm>
-            <a:off x="0" y="0"/>
-            <a:ext cx="2971800" cy="458788"/>
-          </a:xfrm>
-          <a:prstGeom prst="rect">
-            <a:avLst/>
-          </a:prstGeom>
-        </p:spPr>
-        <p:txBody>
-          <a:bodyPr vert="horz" lIns="91440" tIns="45720" rIns="91440" bIns="45720" rtlCol="0"/>
-          <a:lstStyle>
-            <a:lvl1pPr algn="l">
-              <a:defRPr sz="1200"/>
-            </a:lvl1pPr>
-          </a:lstStyle>
-          <a:p>
-            <a:endParaRPr lang="en-US"/>
-          </a:p>
-        </p:txBody>
-      </p:sp>
-      <p:sp>
-        <p:nvSpPr>
-          <p:cNvPr id="3" name="Date Placeholder 2"/>
-          <p:cNvSpPr>
-            <a:spLocks noGrp="1"/>
-          </p:cNvSpPr>
-          <p:nvPr>
-            <p:ph type="dt" idx="1"/>
-          </p:nvPr>
-        </p:nvSpPr>
-        <p:spPr>
-          <a:xfrm>
-            <a:off x="3884613" y="0"/>
-            <a:ext cx="2971800" cy="458788"/>
-          </a:xfrm>
-          <a:prstGeom prst="rect">
-            <a:avLst/>
-          </a:prstGeom>
-        </p:spPr>
-        <p:txBody>
-          <a:bodyPr vert="horz" lIns="91440" tIns="45720" rIns="91440" bIns="45720" rtlCol="0"/>
-          <a:lstStyle>
-            <a:lvl1pPr algn="r">
-              <a:defRPr sz="1200"/>
-            </a:lvl1pPr>
-          </a:lstStyle>
-          <a:p>
-            <a:fld id="{5282F153-3F37-0F45-9E97-73ACFA13230C}" type="datetimeFigureOut">
-              <a:rPr lang="en-US"/>
-              <a:t>7/23/19</a:t>
-            </a:fld>
-            <a:endParaRPr lang="en-US"/>
-          </a:p>
-        </p:txBody>
-      </p:sp>
-      <p:sp>
-        <p:nvSpPr>
-          <p:cNvPr id="4" name="Slide Image Placeholder 3"/>
-          <p:cNvSpPr>
-            <a:spLocks noGrp="1" noRot="1" noChangeAspect="1"/>
-          </p:cNvSpPr>
-          <p:nvPr>
-            <p:ph type="sldImg" idx="2"/>
-          </p:nvPr>
-        </p:nvSpPr>
-        <p:spPr>
-          <a:xfrm>
-            <a:off x="685800" y="1143000"/>
-            <a:ext cx="5486400" cy="3086100"/>
-          </a:xfrm>
-          <a:prstGeom prst="rect">
-            <a:avLst/>
-          </a:prstGeom>
-          <a:noFill/>
-          <a:ln w="12700">
-            <a:solidFill>
-              <a:prstClr val="black"/>
-            </a:solidFill>
-          </a:ln>
-        </p:spPr>
-        <p:txBody>
-          <a:bodyPr vert="horz" lIns="91440" tIns="45720" rIns="91440" bIns="45720" rtlCol="0" anchor="ctr"/>
-          <a:lstStyle/>
-          <a:p>
-            <a:endParaRPr lang="en-US"/>
-          </a:p>
-        </p:txBody>
-      </p:sp>
-      <p:sp>
-        <p:nvSpPr>
-          <p:cNvPr id="5" name="Notes Placeholder 4"/>
-          <p:cNvSpPr>
-            <a:spLocks noGrp="1"/>
-          </p:cNvSpPr>
-          <p:nvPr>
-            <p:ph type="body" sz="quarter" idx="3"/>
-          </p:nvPr>
-        </p:nvSpPr>
-        <p:spPr>
-          <a:xfrm>
-            <a:off x="685800" y="4400550"/>
-            <a:ext cx="5486400" cy="3600450"/>
-          </a:xfrm>
-          <a:prstGeom prst="rect">
-            <a:avLst/>
-          </a:prstGeom>
-        </p:spPr>
-        <p:txBody>
-          <a:bodyPr vert="horz" lIns="91440" tIns="45720" rIns="91440" bIns="45720" rtlCol="0"/>
-          <a:lstStyle/>
-          <a:p>
-            <a:pPr lvl="0"/>
-            <a:r>
-              <a:rPr lang="en-US"/>
-              <a:t>Click to edit Master text styles</a:t>
-            </a:r>
-          </a:p>
-          <a:p>
-            <a:pPr lvl="1"/>
-            <a:r>
-              <a:rPr lang="en-US"/>
-              <a:t>Second level</a:t>
-            </a:r>
-          </a:p>
-          <a:p>
-            <a:pPr lvl="2"/>
-            <a:r>
-              <a:rPr lang="en-US"/>
-              <a:t>Third level</a:t>
-            </a:r>
-          </a:p>
-          <a:p>
-            <a:pPr lvl="3"/>
-            <a:r>
-              <a:rPr lang="en-US"/>
-              <a:t>Fourth level</a:t>
-            </a:r>
-          </a:p>
-          <a:p>
-            <a:pPr lvl="4"/>
-            <a:r>
-              <a:rPr lang="en-US"/>
-              <a:t>Fifth level</a:t>
-            </a:r>
-          </a:p>
-        </p:txBody>
-      </p:sp>
-      <p:sp>
-        <p:nvSpPr>
-          <p:cNvPr id="6" name="Footer Placeholder 5"/>
-          <p:cNvSpPr>
-            <a:spLocks noGrp="1"/>
-          </p:cNvSpPr>
-          <p:nvPr>
-            <p:ph type="ftr" sz="quarter" idx="4"/>
-          </p:nvPr>
-        </p:nvSpPr>
-        <p:spPr>
-          <a:xfrm>
-            <a:off x="0" y="8685213"/>
-            <a:ext cx="2971800" cy="458787"/>
-          </a:xfrm>
-          <a:prstGeom prst="rect">
-            <a:avLst/>
-          </a:prstGeom>
-        </p:spPr>
-        <p:txBody>
-          <a:bodyPr vert="horz" lIns="91440" tIns="45720" rIns="91440" bIns="45720" rtlCol="0" anchor="b"/>
-          <a:lstStyle>
-            <a:lvl1pPr algn="l">
-              <a:defRPr sz="1200"/>
-            </a:lvl1pPr>
-          </a:lstStyle>
-          <a:p>
-            <a:endParaRPr lang="en-US"/>
-          </a:p>
-        </p:txBody>
-      </p:sp>
-      <p:sp>
-        <p:nvSpPr>
-          <p:cNvPr id="7" name="Slide Number Placeholder 6"/>
-          <p:cNvSpPr>
-            <a:spLocks noGrp="1"/>
-          </p:cNvSpPr>
-          <p:nvPr>
-            <p:ph type="sldNum" sz="quarter" idx="5"/>
-          </p:nvPr>
-        </p:nvSpPr>
-        <p:spPr>
-          <a:xfrm>
-            <a:off x="3884613" y="8685213"/>
-            <a:ext cx="2971800" cy="458787"/>
-          </a:xfrm>
-          <a:prstGeom prst="rect">
-            <a:avLst/>
-          </a:prstGeom>
-        </p:spPr>
-        <p:txBody>
-          <a:bodyPr vert="horz" lIns="91440" tIns="45720" rIns="91440" bIns="45720" rtlCol="0" anchor="b"/>
-          <a:lstStyle>
-            <a:lvl1pPr algn="r">
-              <a:defRPr sz="1200"/>
-            </a:lvl1pPr>
-          </a:lstStyle>
-          <a:p>
-            <a:fld id="{CE5E9CC1-C706-0F49-92D6-E571CC5EEA8F}" type="slidenum">
-              <a:rPr lang="en-US"/>
-              <a:t>‹#›</a:t>
-            </a:fld>
-            <a:endParaRPr lang="en-US"/>
-          </a:p>
-        </p:txBody>
-      </p:sp>
     </p:spTree>
     <p:extLst>
       <p:ext uri="{BB962C8B-B14F-4D97-AF65-F5344CB8AC3E}">
-        <p14:creationId xmlns:p14="http://schemas.microsoft.com/office/powerpoint/2010/main" val="1024086991"/>
+        <p14:creationId xmlns:p14="http://schemas.microsoft.com/office/powerpoint/2010/main" val="1946013802"/>
       </p:ext>
     </p:extLst>
   </p:cSld>
@@ -520,10 +301,6 @@
           <a:bodyPr/>
           <a:lstStyle/>
           <a:p>
-            <a:r>
-              <a:rPr lang="en-US" dirty="0"/>
-              <a:t/>
-            </a:r>
             <a:endParaRPr lang="en-US" dirty="0"/>
           </a:p>
         </p:txBody>
@@ -608,10 +385,6 @@
           <a:bodyPr/>
           <a:lstStyle/>
           <a:p>
-            <a:r>
-              <a:rPr lang="en-US" dirty="0"/>
-              <a:t/>
-            </a:r>
             <a:endParaRPr lang="en-US" dirty="0"/>
           </a:p>
         </p:txBody>
@@ -696,10 +469,6 @@
           <a:bodyPr/>
           <a:lstStyle/>
           <a:p>
-            <a:r>
-              <a:rPr lang="en-US" dirty="0"/>
-              <a:t/>
-            </a:r>
             <a:endParaRPr lang="en-US" dirty="0"/>
           </a:p>
         </p:txBody>
@@ -784,10 +553,6 @@
           <a:bodyPr/>
           <a:lstStyle/>
           <a:p>
-            <a:r>
-              <a:rPr lang="en-US" dirty="0"/>
-              <a:t/>
-            </a:r>
             <a:endParaRPr lang="en-US" dirty="0"/>
           </a:p>
         </p:txBody>
@@ -872,10 +637,6 @@
           <a:bodyPr/>
           <a:lstStyle/>
           <a:p>
-            <a:r>
-              <a:rPr lang="en-US" dirty="0"/>
-              <a:t/>
-            </a:r>
             <a:endParaRPr lang="en-US" dirty="0"/>
           </a:p>
         </p:txBody>
@@ -960,10 +721,6 @@
           <a:bodyPr/>
           <a:lstStyle/>
           <a:p>
-            <a:r>
-              <a:rPr lang="en-US" dirty="0"/>
-              <a:t/>
-            </a:r>
             <a:endParaRPr lang="en-US" dirty="0"/>
           </a:p>
         </p:txBody>
@@ -1048,10 +805,6 @@
           <a:bodyPr/>
           <a:lstStyle/>
           <a:p>
-            <a:r>
-              <a:rPr lang="en-US" dirty="0"/>
-              <a:t/>
-            </a:r>
             <a:endParaRPr lang="en-US" dirty="0"/>
           </a:p>
         </p:txBody>
@@ -1136,10 +889,6 @@
           <a:bodyPr/>
           <a:lstStyle/>
           <a:p>
-            <a:r>
-              <a:rPr lang="en-US" dirty="0"/>
-              <a:t/>
-            </a:r>
             <a:endParaRPr lang="en-US" dirty="0"/>
           </a:p>
         </p:txBody>
@@ -1224,10 +973,6 @@
           <a:bodyPr/>
           <a:lstStyle/>
           <a:p>
-            <a:r>
-              <a:rPr lang="en-US" dirty="0"/>
-              <a:t/>
-            </a:r>
             <a:endParaRPr lang="en-US" dirty="0"/>
           </a:p>
         </p:txBody>
@@ -1312,10 +1057,6 @@
           <a:bodyPr/>
           <a:lstStyle/>
           <a:p>
-            <a:r>
-              <a:rPr lang="en-US" dirty="0"/>
-              <a:t/>
-            </a:r>
             <a:endParaRPr lang="en-US" dirty="0"/>
           </a:p>
         </p:txBody>
@@ -1400,10 +1141,6 @@
           <a:bodyPr/>
           <a:lstStyle/>
           <a:p>
-            <a:r>
-              <a:rPr lang="en-US" dirty="0"/>
-              <a:t/>
-            </a:r>
             <a:endParaRPr lang="en-US" dirty="0"/>
           </a:p>
         </p:txBody>
@@ -1488,10 +1225,6 @@
           <a:bodyPr/>
           <a:lstStyle/>
           <a:p>
-            <a:r>
-              <a:rPr lang="en-US" dirty="0"/>
-              <a:t/>
-            </a:r>
             <a:endParaRPr lang="en-US" dirty="0"/>
           </a:p>
         </p:txBody>
@@ -1576,10 +1309,6 @@
           <a:bodyPr/>
           <a:lstStyle/>
           <a:p>
-            <a:r>
-              <a:rPr lang="en-US" dirty="0"/>
-              <a:t/>
-            </a:r>
             <a:endParaRPr lang="en-US" dirty="0"/>
           </a:p>
         </p:txBody>
@@ -1664,10 +1393,6 @@
           <a:bodyPr/>
           <a:lstStyle/>
           <a:p>
-            <a:r>
-              <a:rPr lang="en-US" dirty="0"/>
-              <a:t/>
-            </a:r>
             <a:endParaRPr lang="en-US" dirty="0"/>
           </a:p>
         </p:txBody>
@@ -1752,10 +1477,6 @@
           <a:bodyPr/>
           <a:lstStyle/>
           <a:p>
-            <a:r>
-              <a:rPr lang="en-US" dirty="0"/>
-              <a:t/>
-            </a:r>
             <a:endParaRPr lang="en-US" dirty="0"/>
           </a:p>
         </p:txBody>
@@ -1840,10 +1561,6 @@
           <a:bodyPr/>
           <a:lstStyle/>
           <a:p>
-            <a:r>
-              <a:rPr lang="en-US" dirty="0"/>
-              <a:t/>
-            </a:r>
             <a:endParaRPr lang="en-US" dirty="0"/>
           </a:p>
         </p:txBody>
@@ -1928,10 +1645,6 @@
           <a:bodyPr/>
           <a:lstStyle/>
           <a:p>
-            <a:r>
-              <a:rPr lang="en-US" dirty="0"/>
-              <a:t/>
-            </a:r>
             <a:endParaRPr lang="en-US" dirty="0"/>
           </a:p>
         </p:txBody>
@@ -2016,10 +1729,6 @@
           <a:bodyPr/>
           <a:lstStyle/>
           <a:p>
-            <a:r>
-              <a:rPr lang="en-US" dirty="0"/>
-              <a:t/>
-            </a:r>
             <a:endParaRPr lang="en-US" dirty="0"/>
           </a:p>
         </p:txBody>
@@ -2104,10 +1813,6 @@
           <a:bodyPr/>
           <a:lstStyle/>
           <a:p>
-            <a:r>
-              <a:rPr lang="en-US" dirty="0"/>
-              <a:t/>
-            </a:r>
             <a:endParaRPr lang="en-US" dirty="0"/>
           </a:p>
         </p:txBody>
@@ -2192,10 +1897,6 @@
           <a:bodyPr/>
           <a:lstStyle/>
           <a:p>
-            <a:r>
-              <a:rPr lang="en-US" dirty="0"/>
-              <a:t/>
-            </a:r>
             <a:endParaRPr lang="en-US" dirty="0"/>
           </a:p>
         </p:txBody>
@@ -2280,10 +1981,6 @@
           <a:bodyPr/>
           <a:lstStyle/>
           <a:p>
-            <a:r>
-              <a:rPr lang="en-US" dirty="0"/>
-              <a:t/>
-            </a:r>
             <a:endParaRPr lang="en-US" dirty="0"/>
           </a:p>
         </p:txBody>
@@ -2357,6 +2054,11 @@
 <file path=ppt/slideMasters/slideMaster1.xml><?xml version="1.0" encoding="utf-8"?>
 <p:sldMaster xmlns:a="http://schemas.openxmlformats.org/drawingml/2006/main" xmlns:r="http://schemas.openxmlformats.org/officeDocument/2006/relationships" xmlns:p="http://schemas.openxmlformats.org/presentationml/2006/main">
   <p:cSld>
+    <p:bg>
+      <p:bgRef idx="1001">
+        <a:schemeClr val="bg1"/>
+      </p:bgRef>
+    </p:bg>
     <p:spTree>
       <p:nvGrpSpPr>
         <p:cNvPr id="1" name=""/>
@@ -2639,6 +2341,7 @@
         <a:solidFill>
           <a:srgbClr val="1E295C"/>
         </a:solidFill>
+        <a:effectLst/>
       </p:bgPr>
     </p:bg>
     <p:spTree>
@@ -2676,7 +2379,7 @@
           <a:bodyPr wrap="square" rtlCol="0" anchor="ctr"/>
           <a:lstStyle/>
           <a:p>
-            <a:pPr algn="ctr" indent="0" marL="0">
+            <a:pPr marL="0" indent="0" algn="ctr">
               <a:lnSpc>
                 <a:spcPct val="120000"/>
               </a:lnSpc>
@@ -2696,7 +2399,7 @@
             <a:endParaRPr lang="en-US" sz="950" dirty="0"/>
           </a:p>
           <a:p>
-            <a:pPr algn="ctr" indent="0" marL="0">
+            <a:pPr marL="0" indent="0" algn="ctr">
               <a:lnSpc>
                 <a:spcPct val="120000"/>
               </a:lnSpc>
@@ -2738,7 +2441,7 @@
           <a:bodyPr wrap="square" rtlCol="0" anchor="ctr"/>
           <a:lstStyle/>
           <a:p>
-            <a:pPr algn="ctr" indent="0" marL="0">
+            <a:pPr marL="0" indent="0" algn="ctr">
               <a:buNone/>
             </a:pPr>
             <a:r>
@@ -2777,7 +2480,7 @@
           <a:bodyPr wrap="square" rtlCol="0" anchor="ctr"/>
           <a:lstStyle/>
           <a:p>
-            <a:pPr algn="ctr" indent="0" marL="0">
+            <a:pPr marL="0" indent="0" algn="ctr">
               <a:buNone/>
             </a:pPr>
             <a:r>
@@ -2816,7 +2519,7 @@
           <a:bodyPr wrap="square" rtlCol="0" anchor="ctr"/>
           <a:lstStyle/>
           <a:p>
-            <a:pPr algn="ctr" indent="0" marL="0">
+            <a:pPr marL="0" indent="0" algn="ctr">
               <a:buNone/>
             </a:pPr>
             <a:r>
@@ -2856,6 +2559,13 @@
             <a:prstDash val="solid"/>
           </a:ln>
         </p:spPr>
+        <p:txBody>
+          <a:bodyPr/>
+          <a:lstStyle/>
+          <a:p>
+            <a:endParaRPr lang="en-VN"/>
+          </a:p>
+        </p:txBody>
       </p:sp>
       <p:sp>
         <p:nvSpPr>
@@ -2878,7 +2588,7 @@
           <a:bodyPr wrap="square" rtlCol="0" anchor="ctr"/>
           <a:lstStyle/>
           <a:p>
-            <a:pPr algn="ctr" indent="0" marL="0">
+            <a:pPr marL="0" indent="0" algn="ctr">
               <a:buNone/>
             </a:pPr>
             <a:r>
@@ -2918,6 +2628,13 @@
             <a:prstDash val="solid"/>
           </a:ln>
         </p:spPr>
+        <p:txBody>
+          <a:bodyPr/>
+          <a:lstStyle/>
+          <a:p>
+            <a:endParaRPr lang="en-VN"/>
+          </a:p>
+        </p:txBody>
       </p:sp>
       <p:sp>
         <p:nvSpPr>
@@ -2940,7 +2657,7 @@
           <a:bodyPr wrap="square" rtlCol="0" anchor="ctr"/>
           <a:lstStyle/>
           <a:p>
-            <a:pPr algn="ctr" indent="0" marL="0">
+            <a:pPr marL="0" indent="0" algn="ctr">
               <a:lnSpc>
                 <a:spcPct val="130000"/>
               </a:lnSpc>
@@ -2960,7 +2677,7 @@
             <a:endParaRPr lang="en-US" sz="1000" dirty="0"/>
           </a:p>
           <a:p>
-            <a:pPr algn="ctr" indent="0" marL="0">
+            <a:pPr marL="0" indent="0" algn="ctr">
               <a:lnSpc>
                 <a:spcPct val="130000"/>
               </a:lnSpc>
@@ -3002,7 +2719,7 @@
           <a:bodyPr wrap="square" rtlCol="0" anchor="ctr"/>
           <a:lstStyle/>
           <a:p>
-            <a:pPr algn="ctr" indent="0" marL="0">
+            <a:pPr marL="0" indent="0" algn="ctr">
               <a:buNone/>
             </a:pPr>
             <a:r>
@@ -3025,9 +2742,18 @@
   <p:clrMapOvr>
     <a:masterClrMapping/>
   </p:clrMapOvr>
-  <p:transition xmlns:p14="http://schemas.microsoft.com/office/powerpoint/2010/main" xmlns:p15="http://schemas.microsoft.com/office/powerpoint/2012/main" spd="slow" p14:dur="2000">
-    <p15:prstTrans prst="fracture"/>
-  </p:transition>
+  <mc:AlternateContent xmlns:mc="http://schemas.openxmlformats.org/markup-compatibility/2006">
+    <mc:Choice xmlns:p14="http://schemas.microsoft.com/office/powerpoint/2010/main" Requires="p14">
+      <p:transition spd="slow" p14:dur="800">
+        <p14:flythrough/>
+      </p:transition>
+    </mc:Choice>
+    <mc:Fallback>
+      <p:transition spd="slow">
+        <p:fade/>
+      </p:transition>
+    </mc:Fallback>
+  </mc:AlternateContent>
 </p:sld>
 </file>
 
@@ -3039,6 +2765,7 @@
         <a:solidFill>
           <a:srgbClr val="1E295C"/>
         </a:solidFill>
+        <a:effectLst/>
       </p:bgPr>
     </p:bg>
     <p:spTree>
@@ -3076,7 +2803,7 @@
           <a:bodyPr wrap="square" rtlCol="0" anchor="ctr"/>
           <a:lstStyle/>
           <a:p>
-            <a:pPr algn="ctr" indent="0" marL="0">
+            <a:pPr marL="0" indent="0" algn="ctr">
               <a:buNone/>
             </a:pPr>
             <a:r>
@@ -3120,6 +2847,13 @@
             <a:prstDash val="solid"/>
           </a:ln>
         </p:spPr>
+        <p:txBody>
+          <a:bodyPr/>
+          <a:lstStyle/>
+          <a:p>
+            <a:endParaRPr lang="en-VN"/>
+          </a:p>
+        </p:txBody>
       </p:sp>
       <p:sp>
         <p:nvSpPr>
@@ -3142,7 +2876,7 @@
           <a:bodyPr wrap="square" rtlCol="0" anchor="ctr"/>
           <a:lstStyle/>
           <a:p>
-            <a:pPr algn="ctr" indent="0" marL="0">
+            <a:pPr marL="0" indent="0" algn="ctr">
               <a:buNone/>
             </a:pPr>
             <a:r>
@@ -3183,7 +2917,7 @@
           </a:bodyPr>
           <a:lstStyle/>
           <a:p>
-            <a:pPr algn="ctr" indent="0" marL="0">
+            <a:pPr marL="0" indent="0" algn="ctr">
               <a:buNone/>
             </a:pPr>
             <a:r>
@@ -3223,6 +2957,13 @@
             <a:prstDash val="solid"/>
           </a:ln>
         </p:spPr>
+        <p:txBody>
+          <a:bodyPr/>
+          <a:lstStyle/>
+          <a:p>
+            <a:endParaRPr lang="en-VN"/>
+          </a:p>
+        </p:txBody>
       </p:sp>
       <p:sp>
         <p:nvSpPr>
@@ -3250,6 +2991,13 @@
             <a:prstDash val="solid"/>
           </a:ln>
         </p:spPr>
+        <p:txBody>
+          <a:bodyPr/>
+          <a:lstStyle/>
+          <a:p>
+            <a:endParaRPr lang="en-VN"/>
+          </a:p>
+        </p:txBody>
       </p:sp>
       <p:sp>
         <p:nvSpPr>
@@ -3352,9 +3100,18 @@
   <p:clrMapOvr>
     <a:masterClrMapping/>
   </p:clrMapOvr>
-  <p:transition xmlns:p14="http://schemas.microsoft.com/office/powerpoint/2010/main" spd="slow" p14:dur="1500">
-    <p:split orient="vert"/>
-  </p:transition>
+  <mc:AlternateContent xmlns:mc="http://schemas.openxmlformats.org/markup-compatibility/2006">
+    <mc:Choice xmlns:p14="http://schemas.microsoft.com/office/powerpoint/2010/main" Requires="p14">
+      <p:transition spd="slow" p14:dur="1200">
+        <p14:prism/>
+      </p:transition>
+    </mc:Choice>
+    <mc:Fallback>
+      <p:transition spd="slow">
+        <p:fade/>
+      </p:transition>
+    </mc:Fallback>
+  </mc:AlternateContent>
 </p:sld>
 </file>
 
@@ -3366,6 +3123,7 @@
         <a:solidFill>
           <a:srgbClr val="FFFFFF"/>
         </a:solidFill>
+        <a:effectLst/>
       </p:bgPr>
     </p:bg>
     <p:spTree>
@@ -3403,7 +3161,7 @@
           <a:bodyPr wrap="square" rtlCol="0" anchor="ctr"/>
           <a:lstStyle/>
           <a:p>
-            <a:pPr algn="ctr" indent="0" marL="0">
+            <a:pPr marL="0" indent="0" algn="ctr">
               <a:buNone/>
             </a:pPr>
             <a:r>
@@ -3444,7 +3202,7 @@
           </a:bodyPr>
           <a:lstStyle/>
           <a:p>
-            <a:pPr indent="0" marL="0">
+            <a:pPr marL="0" indent="0">
               <a:buNone/>
             </a:pPr>
             <a:r>
@@ -3484,6 +3242,13 @@
             <a:prstDash val="solid"/>
           </a:ln>
         </p:spPr>
+        <p:txBody>
+          <a:bodyPr/>
+          <a:lstStyle/>
+          <a:p>
+            <a:endParaRPr lang="en-VN"/>
+          </a:p>
+        </p:txBody>
       </p:sp>
       <p:sp>
         <p:nvSpPr>
@@ -3506,7 +3271,7 @@
           <a:bodyPr wrap="square" rtlCol="0" anchor="ctr"/>
           <a:lstStyle/>
           <a:p>
-            <a:pPr indent="0" marL="0">
+            <a:pPr marL="0" indent="0">
               <a:buNone/>
             </a:pPr>
             <a:r>
@@ -3545,7 +3310,7 @@
           <a:bodyPr wrap="square" rtlCol="0" anchor="ctr"/>
           <a:lstStyle/>
           <a:p>
-            <a:pPr algn="r" indent="0" marL="0">
+            <a:pPr marL="0" indent="0" algn="r">
               <a:buNone/>
             </a:pPr>
             <a:r>
@@ -3587,6 +3352,13 @@
             <a:prstDash val="solid"/>
           </a:ln>
         </p:spPr>
+        <p:txBody>
+          <a:bodyPr/>
+          <a:lstStyle/>
+          <a:p>
+            <a:endParaRPr lang="en-VN"/>
+          </a:p>
+        </p:txBody>
       </p:sp>
       <p:sp>
         <p:nvSpPr>
@@ -3607,6 +3379,13 @@
           </a:solidFill>
           <a:ln/>
         </p:spPr>
+        <p:txBody>
+          <a:bodyPr/>
+          <a:lstStyle/>
+          <a:p>
+            <a:endParaRPr lang="en-VN"/>
+          </a:p>
+        </p:txBody>
       </p:sp>
       <p:sp>
         <p:nvSpPr>
@@ -3629,7 +3408,7 @@
           <a:bodyPr wrap="square" rtlCol="0" anchor="ctr"/>
           <a:lstStyle/>
           <a:p>
-            <a:pPr algn="ctr" indent="0" marL="0">
+            <a:pPr marL="0" indent="0" algn="ctr">
               <a:buNone/>
             </a:pPr>
             <a:r>
@@ -3667,7 +3446,7 @@
           </a:bodyPr>
           <a:lstStyle/>
           <a:p>
-            <a:pPr algn="ctr" indent="0" marL="0">
+            <a:pPr marL="0" indent="0" algn="ctr">
               <a:lnSpc>
                 <a:spcPct val="115000"/>
               </a:lnSpc>
@@ -3684,7 +3463,7 @@
             <a:endParaRPr lang="en-US" sz="880" dirty="0"/>
           </a:p>
           <a:p>
-            <a:pPr algn="ctr" indent="0" marL="0">
+            <a:pPr marL="0" indent="0" algn="ctr">
               <a:lnSpc>
                 <a:spcPct val="115000"/>
               </a:lnSpc>
@@ -3701,7 +3480,7 @@
             <a:endParaRPr lang="en-US" sz="880" dirty="0"/>
           </a:p>
           <a:p>
-            <a:pPr algn="ctr" indent="0" marL="0">
+            <a:pPr marL="0" indent="0" algn="ctr">
               <a:lnSpc>
                 <a:spcPct val="115000"/>
               </a:lnSpc>
@@ -3740,7 +3519,7 @@
           <a:bodyPr wrap="square" rtlCol="0" anchor="ctr"/>
           <a:lstStyle/>
           <a:p>
-            <a:pPr algn="ctr" indent="0" marL="0">
+            <a:pPr marL="0" indent="0" algn="ctr">
               <a:buNone/>
             </a:pPr>
             <a:r>
@@ -3779,6 +3558,13 @@
             <a:prstDash val="solid"/>
           </a:ln>
         </p:spPr>
+        <p:txBody>
+          <a:bodyPr/>
+          <a:lstStyle/>
+          <a:p>
+            <a:endParaRPr lang="en-VN"/>
+          </a:p>
+        </p:txBody>
       </p:sp>
       <p:sp>
         <p:nvSpPr>
@@ -3799,6 +3585,13 @@
           </a:solidFill>
           <a:ln/>
         </p:spPr>
+        <p:txBody>
+          <a:bodyPr/>
+          <a:lstStyle/>
+          <a:p>
+            <a:endParaRPr lang="en-VN"/>
+          </a:p>
+        </p:txBody>
       </p:sp>
       <p:sp>
         <p:nvSpPr>
@@ -3821,7 +3614,7 @@
           <a:bodyPr wrap="square" rtlCol="0" anchor="ctr"/>
           <a:lstStyle/>
           <a:p>
-            <a:pPr algn="ctr" indent="0" marL="0">
+            <a:pPr marL="0" indent="0" algn="ctr">
               <a:buNone/>
             </a:pPr>
             <a:r>
@@ -3859,7 +3652,7 @@
           </a:bodyPr>
           <a:lstStyle/>
           <a:p>
-            <a:pPr algn="ctr" indent="0" marL="0">
+            <a:pPr marL="0" indent="0" algn="ctr">
               <a:lnSpc>
                 <a:spcPct val="115000"/>
               </a:lnSpc>
@@ -3876,7 +3669,7 @@
             <a:endParaRPr lang="en-US" sz="880" dirty="0"/>
           </a:p>
           <a:p>
-            <a:pPr algn="ctr" indent="0" marL="0">
+            <a:pPr marL="0" indent="0" algn="ctr">
               <a:lnSpc>
                 <a:spcPct val="115000"/>
               </a:lnSpc>
@@ -3893,7 +3686,7 @@
             <a:endParaRPr lang="en-US" sz="880" dirty="0"/>
           </a:p>
           <a:p>
-            <a:pPr algn="ctr" indent="0" marL="0">
+            <a:pPr marL="0" indent="0" algn="ctr">
               <a:lnSpc>
                 <a:spcPct val="115000"/>
               </a:lnSpc>
@@ -3932,7 +3725,7 @@
           <a:bodyPr wrap="square" rtlCol="0" anchor="ctr"/>
           <a:lstStyle/>
           <a:p>
-            <a:pPr algn="ctr" indent="0" marL="0">
+            <a:pPr marL="0" indent="0" algn="ctr">
               <a:buNone/>
             </a:pPr>
             <a:r>
@@ -3971,6 +3764,13 @@
             <a:prstDash val="solid"/>
           </a:ln>
         </p:spPr>
+        <p:txBody>
+          <a:bodyPr/>
+          <a:lstStyle/>
+          <a:p>
+            <a:endParaRPr lang="en-VN"/>
+          </a:p>
+        </p:txBody>
       </p:sp>
       <p:sp>
         <p:nvSpPr>
@@ -3991,6 +3791,13 @@
           </a:solidFill>
           <a:ln/>
         </p:spPr>
+        <p:txBody>
+          <a:bodyPr/>
+          <a:lstStyle/>
+          <a:p>
+            <a:endParaRPr lang="en-VN"/>
+          </a:p>
+        </p:txBody>
       </p:sp>
       <p:sp>
         <p:nvSpPr>
@@ -4013,7 +3820,7 @@
           <a:bodyPr wrap="square" rtlCol="0" anchor="ctr"/>
           <a:lstStyle/>
           <a:p>
-            <a:pPr algn="ctr" indent="0" marL="0">
+            <a:pPr marL="0" indent="0" algn="ctr">
               <a:buNone/>
             </a:pPr>
             <a:r>
@@ -4051,7 +3858,7 @@
           </a:bodyPr>
           <a:lstStyle/>
           <a:p>
-            <a:pPr algn="ctr" indent="0" marL="0">
+            <a:pPr marL="0" indent="0" algn="ctr">
               <a:lnSpc>
                 <a:spcPct val="115000"/>
               </a:lnSpc>
@@ -4068,7 +3875,7 @@
             <a:endParaRPr lang="en-US" sz="880" dirty="0"/>
           </a:p>
           <a:p>
-            <a:pPr algn="ctr" indent="0" marL="0">
+            <a:pPr marL="0" indent="0" algn="ctr">
               <a:lnSpc>
                 <a:spcPct val="115000"/>
               </a:lnSpc>
@@ -4085,7 +3892,7 @@
             <a:endParaRPr lang="en-US" sz="880" dirty="0"/>
           </a:p>
           <a:p>
-            <a:pPr algn="ctr" indent="0" marL="0">
+            <a:pPr marL="0" indent="0" algn="ctr">
               <a:lnSpc>
                 <a:spcPct val="115000"/>
               </a:lnSpc>
@@ -4124,7 +3931,7 @@
           <a:bodyPr wrap="square" rtlCol="0" anchor="ctr"/>
           <a:lstStyle/>
           <a:p>
-            <a:pPr algn="ctr" indent="0" marL="0">
+            <a:pPr marL="0" indent="0" algn="ctr">
               <a:buNone/>
             </a:pPr>
             <a:r>
@@ -4163,6 +3970,13 @@
             <a:prstDash val="solid"/>
           </a:ln>
         </p:spPr>
+        <p:txBody>
+          <a:bodyPr/>
+          <a:lstStyle/>
+          <a:p>
+            <a:endParaRPr lang="en-VN"/>
+          </a:p>
+        </p:txBody>
       </p:sp>
       <p:sp>
         <p:nvSpPr>
@@ -4183,6 +3997,13 @@
           </a:solidFill>
           <a:ln/>
         </p:spPr>
+        <p:txBody>
+          <a:bodyPr/>
+          <a:lstStyle/>
+          <a:p>
+            <a:endParaRPr lang="en-VN"/>
+          </a:p>
+        </p:txBody>
       </p:sp>
       <p:sp>
         <p:nvSpPr>
@@ -4205,7 +4026,7 @@
           <a:bodyPr wrap="square" rtlCol="0" anchor="ctr"/>
           <a:lstStyle/>
           <a:p>
-            <a:pPr algn="ctr" indent="0" marL="0">
+            <a:pPr marL="0" indent="0" algn="ctr">
               <a:buNone/>
             </a:pPr>
             <a:r>
@@ -4243,7 +4064,7 @@
           </a:bodyPr>
           <a:lstStyle/>
           <a:p>
-            <a:pPr algn="ctr" indent="0" marL="0">
+            <a:pPr marL="0" indent="0" algn="ctr">
               <a:lnSpc>
                 <a:spcPct val="115000"/>
               </a:lnSpc>
@@ -4260,7 +4081,7 @@
             <a:endParaRPr lang="en-US" sz="880" dirty="0"/>
           </a:p>
           <a:p>
-            <a:pPr algn="ctr" indent="0" marL="0">
+            <a:pPr marL="0" indent="0" algn="ctr">
               <a:lnSpc>
                 <a:spcPct val="115000"/>
               </a:lnSpc>
@@ -4277,7 +4098,7 @@
             <a:endParaRPr lang="en-US" sz="880" dirty="0"/>
           </a:p>
           <a:p>
-            <a:pPr algn="ctr" indent="0" marL="0">
+            <a:pPr marL="0" indent="0" algn="ctr">
               <a:lnSpc>
                 <a:spcPct val="115000"/>
               </a:lnSpc>
@@ -4316,7 +4137,7 @@
           <a:bodyPr wrap="square" rtlCol="0" anchor="ctr"/>
           <a:lstStyle/>
           <a:p>
-            <a:pPr algn="ctr" indent="0" marL="0">
+            <a:pPr marL="0" indent="0" algn="ctr">
               <a:buNone/>
             </a:pPr>
             <a:r>
@@ -4355,6 +4176,13 @@
             <a:prstDash val="solid"/>
           </a:ln>
         </p:spPr>
+        <p:txBody>
+          <a:bodyPr/>
+          <a:lstStyle/>
+          <a:p>
+            <a:endParaRPr lang="en-VN"/>
+          </a:p>
+        </p:txBody>
       </p:sp>
       <p:sp>
         <p:nvSpPr>
@@ -4375,6 +4203,13 @@
           </a:solidFill>
           <a:ln/>
         </p:spPr>
+        <p:txBody>
+          <a:bodyPr/>
+          <a:lstStyle/>
+          <a:p>
+            <a:endParaRPr lang="en-VN"/>
+          </a:p>
+        </p:txBody>
       </p:sp>
       <p:sp>
         <p:nvSpPr>
@@ -4397,7 +4232,7 @@
           <a:bodyPr wrap="square" rtlCol="0" anchor="ctr"/>
           <a:lstStyle/>
           <a:p>
-            <a:pPr algn="ctr" indent="0" marL="0">
+            <a:pPr marL="0" indent="0" algn="ctr">
               <a:buNone/>
             </a:pPr>
             <a:r>
@@ -4435,7 +4270,7 @@
           </a:bodyPr>
           <a:lstStyle/>
           <a:p>
-            <a:pPr algn="ctr" indent="0" marL="0">
+            <a:pPr marL="0" indent="0" algn="ctr">
               <a:lnSpc>
                 <a:spcPct val="115000"/>
               </a:lnSpc>
@@ -4452,7 +4287,7 @@
             <a:endParaRPr lang="en-US" sz="880" dirty="0"/>
           </a:p>
           <a:p>
-            <a:pPr algn="ctr" indent="0" marL="0">
+            <a:pPr marL="0" indent="0" algn="ctr">
               <a:lnSpc>
                 <a:spcPct val="115000"/>
               </a:lnSpc>
@@ -4469,7 +4304,7 @@
             <a:endParaRPr lang="en-US" sz="880" dirty="0"/>
           </a:p>
           <a:p>
-            <a:pPr algn="ctr" indent="0" marL="0">
+            <a:pPr marL="0" indent="0" algn="ctr">
               <a:lnSpc>
                 <a:spcPct val="115000"/>
               </a:lnSpc>
@@ -4508,7 +4343,7 @@
           <a:bodyPr wrap="square" rtlCol="0" anchor="ctr"/>
           <a:lstStyle/>
           <a:p>
-            <a:pPr algn="ctr" indent="0" marL="0">
+            <a:pPr marL="0" indent="0" algn="ctr">
               <a:buNone/>
             </a:pPr>
             <a:r>
@@ -4547,6 +4382,13 @@
             <a:prstDash val="solid"/>
           </a:ln>
         </p:spPr>
+        <p:txBody>
+          <a:bodyPr/>
+          <a:lstStyle/>
+          <a:p>
+            <a:endParaRPr lang="en-VN"/>
+          </a:p>
+        </p:txBody>
       </p:sp>
       <p:sp>
         <p:nvSpPr>
@@ -4567,6 +4409,13 @@
           </a:solidFill>
           <a:ln/>
         </p:spPr>
+        <p:txBody>
+          <a:bodyPr/>
+          <a:lstStyle/>
+          <a:p>
+            <a:endParaRPr lang="en-VN"/>
+          </a:p>
+        </p:txBody>
       </p:sp>
       <p:sp>
         <p:nvSpPr>
@@ -4589,7 +4438,7 @@
           <a:bodyPr wrap="square" rtlCol="0" anchor="ctr"/>
           <a:lstStyle/>
           <a:p>
-            <a:pPr algn="ctr" indent="0" marL="0">
+            <a:pPr marL="0" indent="0" algn="ctr">
               <a:buNone/>
             </a:pPr>
             <a:r>
@@ -4627,7 +4476,7 @@
           </a:bodyPr>
           <a:lstStyle/>
           <a:p>
-            <a:pPr algn="ctr" indent="0" marL="0">
+            <a:pPr marL="0" indent="0" algn="ctr">
               <a:lnSpc>
                 <a:spcPct val="115000"/>
               </a:lnSpc>
@@ -4644,7 +4493,7 @@
             <a:endParaRPr lang="en-US" sz="880" dirty="0"/>
           </a:p>
           <a:p>
-            <a:pPr algn="ctr" indent="0" marL="0">
+            <a:pPr marL="0" indent="0" algn="ctr">
               <a:lnSpc>
                 <a:spcPct val="115000"/>
               </a:lnSpc>
@@ -4661,7 +4510,7 @@
             <a:endParaRPr lang="en-US" sz="880" dirty="0"/>
           </a:p>
           <a:p>
-            <a:pPr algn="ctr" indent="0" marL="0">
+            <a:pPr marL="0" indent="0" algn="ctr">
               <a:lnSpc>
                 <a:spcPct val="115000"/>
               </a:lnSpc>
@@ -4703,6 +4552,13 @@
             <a:prstDash val="solid"/>
           </a:ln>
         </p:spPr>
+        <p:txBody>
+          <a:bodyPr/>
+          <a:lstStyle/>
+          <a:p>
+            <a:endParaRPr lang="en-VN"/>
+          </a:p>
+        </p:txBody>
       </p:sp>
       <p:sp>
         <p:nvSpPr>
@@ -4725,7 +4581,7 @@
           <a:bodyPr wrap="square" rtlCol="0" anchor="ctr"/>
           <a:lstStyle/>
           <a:p>
-            <a:pPr indent="0" marL="0">
+            <a:pPr marL="0" indent="0">
               <a:buNone/>
             </a:pPr>
             <a:r>
@@ -4868,9 +4724,18 @@
   <p:clrMapOvr>
     <a:masterClrMapping/>
   </p:clrMapOvr>
-  <p:transition xmlns:p14="http://schemas.microsoft.com/office/powerpoint/2010/main" xmlns:p159="http://schemas.microsoft.com/office/powerpoint/2015/09/main" spd="slow" p14:dur="2000">
-    <p159:morph option="byObject"/>
-  </p:transition>
+  <mc:AlternateContent xmlns:mc="http://schemas.openxmlformats.org/markup-compatibility/2006">
+    <mc:Choice xmlns:p14="http://schemas.microsoft.com/office/powerpoint/2010/main" Requires="p14">
+      <p:transition spd="slow" p14:dur="1300">
+        <p14:pan dir="u"/>
+      </p:transition>
+    </mc:Choice>
+    <mc:Fallback>
+      <p:transition spd="slow">
+        <p:fade/>
+      </p:transition>
+    </mc:Fallback>
+  </mc:AlternateContent>
 </p:sld>
 </file>
 
@@ -4882,6 +4747,7 @@
         <a:solidFill>
           <a:srgbClr val="FFFFFF"/>
         </a:solidFill>
+        <a:effectLst/>
       </p:bgPr>
     </p:bg>
     <p:spTree>
@@ -4919,7 +4785,7 @@
           <a:bodyPr wrap="square" rtlCol="0" anchor="ctr"/>
           <a:lstStyle/>
           <a:p>
-            <a:pPr algn="ctr" indent="0" marL="0">
+            <a:pPr marL="0" indent="0" algn="ctr">
               <a:buNone/>
             </a:pPr>
             <a:r>
@@ -4960,7 +4826,7 @@
           </a:bodyPr>
           <a:lstStyle/>
           <a:p>
-            <a:pPr indent="0" marL="0">
+            <a:pPr marL="0" indent="0">
               <a:buNone/>
             </a:pPr>
             <a:r>
@@ -5000,6 +4866,13 @@
             <a:prstDash val="solid"/>
           </a:ln>
         </p:spPr>
+        <p:txBody>
+          <a:bodyPr/>
+          <a:lstStyle/>
+          <a:p>
+            <a:endParaRPr lang="en-VN"/>
+          </a:p>
+        </p:txBody>
       </p:sp>
       <p:sp>
         <p:nvSpPr>
@@ -5022,7 +4895,7 @@
           <a:bodyPr wrap="square" rtlCol="0" anchor="ctr"/>
           <a:lstStyle/>
           <a:p>
-            <a:pPr indent="0" marL="0">
+            <a:pPr marL="0" indent="0">
               <a:buNone/>
             </a:pPr>
             <a:r>
@@ -5061,7 +4934,7 @@
           <a:bodyPr wrap="square" rtlCol="0" anchor="ctr"/>
           <a:lstStyle/>
           <a:p>
-            <a:pPr algn="r" indent="0" marL="0">
+            <a:pPr marL="0" indent="0" algn="r">
               <a:buNone/>
             </a:pPr>
             <a:r>
@@ -5103,6 +4976,13 @@
             <a:prstDash val="solid"/>
           </a:ln>
         </p:spPr>
+        <p:txBody>
+          <a:bodyPr/>
+          <a:lstStyle/>
+          <a:p>
+            <a:endParaRPr lang="en-VN"/>
+          </a:p>
+        </p:txBody>
       </p:sp>
       <p:sp>
         <p:nvSpPr>
@@ -5123,6 +5003,13 @@
           </a:solidFill>
           <a:ln/>
         </p:spPr>
+        <p:txBody>
+          <a:bodyPr/>
+          <a:lstStyle/>
+          <a:p>
+            <a:endParaRPr lang="en-VN"/>
+          </a:p>
+        </p:txBody>
       </p:sp>
       <p:sp>
         <p:nvSpPr>
@@ -5145,7 +5032,7 @@
           <a:bodyPr wrap="square" rtlCol="0" anchor="ctr"/>
           <a:lstStyle/>
           <a:p>
-            <a:pPr algn="ctr" indent="0" marL="0">
+            <a:pPr marL="0" indent="0" algn="ctr">
               <a:buNone/>
             </a:pPr>
             <a:r>
@@ -5184,6 +5071,13 @@
             <a:prstDash val="solid"/>
           </a:ln>
         </p:spPr>
+        <p:txBody>
+          <a:bodyPr/>
+          <a:lstStyle/>
+          <a:p>
+            <a:endParaRPr lang="en-VN"/>
+          </a:p>
+        </p:txBody>
       </p:sp>
       <p:sp>
         <p:nvSpPr>
@@ -5206,7 +5100,7 @@
           <a:bodyPr wrap="square" rtlCol="0" anchor="ctr"/>
           <a:lstStyle/>
           <a:p>
-            <a:pPr indent="0" marL="0">
+            <a:pPr marL="0" indent="0">
               <a:buNone/>
             </a:pPr>
             <a:r>
@@ -5248,6 +5142,13 @@
             <a:prstDash val="solid"/>
           </a:ln>
         </p:spPr>
+        <p:txBody>
+          <a:bodyPr/>
+          <a:lstStyle/>
+          <a:p>
+            <a:endParaRPr lang="en-VN"/>
+          </a:p>
+        </p:txBody>
       </p:sp>
       <p:sp>
         <p:nvSpPr>
@@ -5270,7 +5171,7 @@
           <a:bodyPr wrap="square" rtlCol="0" anchor="ctr"/>
           <a:lstStyle/>
           <a:p>
-            <a:pPr indent="0" marL="0">
+            <a:pPr marL="0" indent="0">
               <a:lnSpc>
                 <a:spcPct val="115000"/>
               </a:lnSpc>
@@ -5290,7 +5191,7 @@
             <a:endParaRPr lang="en-US" sz="820" dirty="0"/>
           </a:p>
           <a:p>
-            <a:pPr indent="0" marL="0">
+            <a:pPr marL="0" indent="0">
               <a:lnSpc>
                 <a:spcPct val="115000"/>
               </a:lnSpc>
@@ -5334,7 +5235,7 @@
           </a:bodyPr>
           <a:lstStyle/>
           <a:p>
-            <a:pPr indent="0" marL="0">
+            <a:pPr marL="0" indent="0">
               <a:lnSpc>
                 <a:spcPct val="120000"/>
               </a:lnSpc>
@@ -5348,12 +5249,6 @@
               </a:rPr>
               <a:t>• Cơ chế: </a:t>
             </a:r>
-            <a:pPr indent="0" marL="0">
-              <a:lnSpc>
-                <a:spcPct val="120000"/>
-              </a:lnSpc>
-              <a:buNone/>
-            </a:pPr>
             <a:r>
               <a:rPr lang="en-US" sz="900" dirty="0">
                 <a:solidFill>
@@ -5363,12 +5258,6 @@
               <a:t>Tập hợp 100 cây quyết định độc lập (Bagging) với kỹ thuật lấy mẫu ngẫu nhiên không gian con đặc trưng (Random Subspace).
 </a:t>
             </a:r>
-            <a:pPr indent="0" marL="0">
-              <a:lnSpc>
-                <a:spcPct val="120000"/>
-              </a:lnSpc>
-              <a:buNone/>
-            </a:pPr>
             <a:r>
               <a:rPr lang="en-US" sz="900" b="1" dirty="0">
                 <a:solidFill>
@@ -5377,12 +5266,6 @@
               </a:rPr>
               <a:t>• Peak Precision: </a:t>
             </a:r>
-            <a:pPr indent="0" marL="0">
-              <a:lnSpc>
-                <a:spcPct val="120000"/>
-              </a:lnSpc>
-              <a:buNone/>
-            </a:pPr>
             <a:r>
               <a:rPr lang="en-US" sz="900" dirty="0">
                 <a:solidFill>
@@ -5392,12 +5275,6 @@
               <a:t>Chỉ sinh duy nhất 1 False Positive trên 38,357 giao dịch hợp lệ (Precision = 99.94%).
 </a:t>
             </a:r>
-            <a:pPr indent="0" marL="0">
-              <a:lnSpc>
-                <a:spcPct val="120000"/>
-              </a:lnSpc>
-              <a:buNone/>
-            </a:pPr>
             <a:r>
               <a:rPr lang="en-US" sz="900" b="1" dirty="0">
                 <a:solidFill>
@@ -5406,12 +5283,6 @@
               </a:rPr>
               <a:t>• Hạn chế: </a:t>
             </a:r>
-            <a:pPr indent="0" marL="0">
-              <a:lnSpc>
-                <a:spcPct val="120000"/>
-              </a:lnSpc>
-              <a:buNone/>
-            </a:pPr>
             <a:r>
               <a:rPr lang="en-US" sz="900" dirty="0">
                 <a:solidFill>
@@ -5448,6 +5319,13 @@
             <a:prstDash val="solid"/>
           </a:ln>
         </p:spPr>
+        <p:txBody>
+          <a:bodyPr/>
+          <a:lstStyle/>
+          <a:p>
+            <a:endParaRPr lang="en-VN"/>
+          </a:p>
+        </p:txBody>
       </p:sp>
       <p:sp>
         <p:nvSpPr>
@@ -5468,6 +5346,13 @@
           </a:solidFill>
           <a:ln/>
         </p:spPr>
+        <p:txBody>
+          <a:bodyPr/>
+          <a:lstStyle/>
+          <a:p>
+            <a:endParaRPr lang="en-VN"/>
+          </a:p>
+        </p:txBody>
       </p:sp>
       <p:sp>
         <p:nvSpPr>
@@ -5490,7 +5375,7 @@
           <a:bodyPr wrap="square" rtlCol="0" anchor="ctr"/>
           <a:lstStyle/>
           <a:p>
-            <a:pPr algn="ctr" indent="0" marL="0">
+            <a:pPr marL="0" indent="0" algn="ctr">
               <a:buNone/>
             </a:pPr>
             <a:r>
@@ -5529,6 +5414,13 @@
             <a:prstDash val="solid"/>
           </a:ln>
         </p:spPr>
+        <p:txBody>
+          <a:bodyPr/>
+          <a:lstStyle/>
+          <a:p>
+            <a:endParaRPr lang="en-VN"/>
+          </a:p>
+        </p:txBody>
       </p:sp>
       <p:sp>
         <p:nvSpPr>
@@ -5551,7 +5443,7 @@
           <a:bodyPr wrap="square" rtlCol="0" anchor="ctr"/>
           <a:lstStyle/>
           <a:p>
-            <a:pPr indent="0" marL="0">
+            <a:pPr marL="0" indent="0">
               <a:buNone/>
             </a:pPr>
             <a:r>
@@ -5593,6 +5485,13 @@
             <a:prstDash val="solid"/>
           </a:ln>
         </p:spPr>
+        <p:txBody>
+          <a:bodyPr/>
+          <a:lstStyle/>
+          <a:p>
+            <a:endParaRPr lang="en-VN"/>
+          </a:p>
+        </p:txBody>
       </p:sp>
       <p:sp>
         <p:nvSpPr>
@@ -5615,7 +5514,7 @@
           <a:bodyPr wrap="square" rtlCol="0" anchor="ctr"/>
           <a:lstStyle/>
           <a:p>
-            <a:pPr indent="0" marL="0">
+            <a:pPr marL="0" indent="0">
               <a:lnSpc>
                 <a:spcPct val="115000"/>
               </a:lnSpc>
@@ -5635,7 +5534,7 @@
             <a:endParaRPr lang="en-US" sz="800" dirty="0"/>
           </a:p>
           <a:p>
-            <a:pPr indent="0" marL="0">
+            <a:pPr marL="0" indent="0">
               <a:lnSpc>
                 <a:spcPct val="115000"/>
               </a:lnSpc>
@@ -5679,7 +5578,7 @@
           </a:bodyPr>
           <a:lstStyle/>
           <a:p>
-            <a:pPr indent="0" marL="0">
+            <a:pPr marL="0" indent="0">
               <a:lnSpc>
                 <a:spcPct val="120000"/>
               </a:lnSpc>
@@ -5693,12 +5592,6 @@
               </a:rPr>
               <a:t>• Cơ chế: </a:t>
             </a:r>
-            <a:pPr indent="0" marL="0">
-              <a:lnSpc>
-                <a:spcPct val="120000"/>
-              </a:lnSpc>
-              <a:buNone/>
-            </a:pPr>
             <a:r>
               <a:rPr lang="en-US" sz="900" dirty="0">
                 <a:solidFill>
@@ -5708,12 +5601,6 @@
               <a:t>Gradient Boosting cải tiến với gradient bậc 1 (g_i) và Hessian bậc 2 (h_i), bổ sung L2 regularization chống Overfitting.
 </a:t>
             </a:r>
-            <a:pPr indent="0" marL="0">
-              <a:lnSpc>
-                <a:spcPct val="120000"/>
-              </a:lnSpc>
-              <a:buNone/>
-            </a:pPr>
             <a:r>
               <a:rPr lang="en-US" sz="900" b="1" dirty="0">
                 <a:solidFill>
@@ -5722,12 +5609,6 @@
               </a:rPr>
               <a:t>• Ưu thế Vượt trội: </a:t>
             </a:r>
-            <a:pPr indent="0" marL="0">
-              <a:lnSpc>
-                <a:spcPct val="120000"/>
-              </a:lnSpc>
-              <a:buNone/>
-            </a:pPr>
             <a:r>
               <a:rPr lang="en-US" sz="900" dirty="0">
                 <a:solidFill>
@@ -5737,12 +5618,6 @@
               <a:t>F1-Score đạt 99.63% tương đương RF, nhưng tốc độ huấn luyện nhanh gấp 28.5 lần (~41.7s).
 </a:t>
             </a:r>
-            <a:pPr indent="0" marL="0">
-              <a:lnSpc>
-                <a:spcPct val="120000"/>
-              </a:lnSpc>
-              <a:buNone/>
-            </a:pPr>
             <a:r>
               <a:rPr lang="en-US" sz="900" b="1" dirty="0">
                 <a:solidFill>
@@ -5751,12 +5626,6 @@
               </a:rPr>
               <a:t>• Production Ready: </a:t>
             </a:r>
-            <a:pPr indent="0" marL="0">
-              <a:lnSpc>
-                <a:spcPct val="120000"/>
-              </a:lnSpc>
-              <a:buNone/>
-            </a:pPr>
             <a:r>
               <a:rPr lang="en-US" sz="900" dirty="0">
                 <a:solidFill>
@@ -5774,9 +5643,18 @@
   <p:clrMapOvr>
     <a:masterClrMapping/>
   </p:clrMapOvr>
-  <p:transition xmlns:p14="http://schemas.microsoft.com/office/powerpoint/2010/main" xmlns:p159="http://schemas.microsoft.com/office/powerpoint/2015/09/main" spd="slow" p14:dur="2000">
-    <p159:morph option="byObject"/>
-  </p:transition>
+  <mc:AlternateContent xmlns:mc="http://schemas.openxmlformats.org/markup-compatibility/2006" xmlns:p159="http://schemas.microsoft.com/office/powerpoint/2015/09/main">
+    <mc:Choice Requires="p159">
+      <p:transition xmlns:p14="http://schemas.microsoft.com/office/powerpoint/2010/main" spd="slow" p14:dur="2000">
+        <p159:morph option="byObject"/>
+      </p:transition>
+    </mc:Choice>
+    <mc:Fallback xmlns="">
+      <p:transition spd="slow">
+        <p:fade/>
+      </p:transition>
+    </mc:Fallback>
+  </mc:AlternateContent>
 </p:sld>
 </file>
 
@@ -5788,6 +5666,7 @@
         <a:solidFill>
           <a:srgbClr val="FFFFFF"/>
         </a:solidFill>
+        <a:effectLst/>
       </p:bgPr>
     </p:bg>
     <p:spTree>
@@ -5825,7 +5704,7 @@
           <a:bodyPr wrap="square" rtlCol="0" anchor="ctr"/>
           <a:lstStyle/>
           <a:p>
-            <a:pPr algn="ctr" indent="0" marL="0">
+            <a:pPr marL="0" indent="0" algn="ctr">
               <a:buNone/>
             </a:pPr>
             <a:r>
@@ -5866,7 +5745,7 @@
           </a:bodyPr>
           <a:lstStyle/>
           <a:p>
-            <a:pPr indent="0" marL="0">
+            <a:pPr marL="0" indent="0">
               <a:buNone/>
             </a:pPr>
             <a:r>
@@ -5906,6 +5785,13 @@
             <a:prstDash val="solid"/>
           </a:ln>
         </p:spPr>
+        <p:txBody>
+          <a:bodyPr/>
+          <a:lstStyle/>
+          <a:p>
+            <a:endParaRPr lang="en-VN"/>
+          </a:p>
+        </p:txBody>
       </p:sp>
       <p:sp>
         <p:nvSpPr>
@@ -5928,7 +5814,7 @@
           <a:bodyPr wrap="square" rtlCol="0" anchor="ctr"/>
           <a:lstStyle/>
           <a:p>
-            <a:pPr indent="0" marL="0">
+            <a:pPr marL="0" indent="0">
               <a:buNone/>
             </a:pPr>
             <a:r>
@@ -5967,7 +5853,7 @@
           <a:bodyPr wrap="square" rtlCol="0" anchor="ctr"/>
           <a:lstStyle/>
           <a:p>
-            <a:pPr algn="r" indent="0" marL="0">
+            <a:pPr marL="0" indent="0" algn="r">
               <a:buNone/>
             </a:pPr>
             <a:r>
@@ -6009,6 +5895,13 @@
             <a:prstDash val="solid"/>
           </a:ln>
         </p:spPr>
+        <p:txBody>
+          <a:bodyPr/>
+          <a:lstStyle/>
+          <a:p>
+            <a:endParaRPr lang="en-VN"/>
+          </a:p>
+        </p:txBody>
       </p:sp>
       <p:sp>
         <p:nvSpPr>
@@ -6031,7 +5924,7 @@
           <a:bodyPr wrap="square" rtlCol="0" anchor="ctr"/>
           <a:lstStyle/>
           <a:p>
-            <a:pPr indent="0" marL="0">
+            <a:pPr marL="0" indent="0">
               <a:buNone/>
             </a:pPr>
             <a:r>
@@ -6054,7 +5947,7 @@
         </p:nvSpPr>
         <p:spPr>
           <a:xfrm>
-            <a:off x="640080" y="1298448"/>
+            <a:off x="640080" y="1351213"/>
             <a:ext cx="4114800" cy="292608"/>
           </a:xfrm>
           <a:prstGeom prst="rect">
@@ -6070,6 +5963,13 @@
             <a:prstDash val="solid"/>
           </a:ln>
         </p:spPr>
+        <p:txBody>
+          <a:bodyPr/>
+          <a:lstStyle/>
+          <a:p>
+            <a:endParaRPr lang="en-VN"/>
+          </a:p>
+        </p:txBody>
       </p:sp>
       <p:sp>
         <p:nvSpPr>
@@ -6079,7 +5979,7 @@
         </p:nvSpPr>
         <p:spPr>
           <a:xfrm>
-            <a:off x="685800" y="1325880"/>
+            <a:off x="685800" y="1391986"/>
             <a:ext cx="4023360" cy="237744"/>
           </a:xfrm>
           <a:prstGeom prst="rect">
@@ -6092,7 +5992,7 @@
           <a:bodyPr wrap="square" rtlCol="0" anchor="ctr"/>
           <a:lstStyle/>
           <a:p>
-            <a:pPr indent="0" marL="0">
+            <a:pPr marL="0" indent="0">
               <a:buNone/>
             </a:pPr>
             <a:r>
@@ -6118,7 +6018,7 @@
         </p:nvSpPr>
         <p:spPr>
           <a:xfrm>
-            <a:off x="640080" y="1645920"/>
+            <a:off x="640080" y="1763442"/>
             <a:ext cx="4114800" cy="310896"/>
           </a:xfrm>
           <a:prstGeom prst="rect">
@@ -6134,6 +6034,13 @@
             <a:prstDash val="solid"/>
           </a:ln>
         </p:spPr>
+        <p:txBody>
+          <a:bodyPr/>
+          <a:lstStyle/>
+          <a:p>
+            <a:endParaRPr lang="en-VN"/>
+          </a:p>
+        </p:txBody>
       </p:sp>
       <p:sp>
         <p:nvSpPr>
@@ -6143,7 +6050,7 @@
         </p:nvSpPr>
         <p:spPr>
           <a:xfrm>
-            <a:off x="685800" y="1673352"/>
+            <a:off x="685800" y="1793122"/>
             <a:ext cx="4023360" cy="256032"/>
           </a:xfrm>
           <a:prstGeom prst="rect">
@@ -6156,7 +6063,7 @@
           <a:bodyPr wrap="square" rtlCol="0" anchor="ctr"/>
           <a:lstStyle/>
           <a:p>
-            <a:pPr indent="0" marL="0">
+            <a:pPr marL="0" indent="0">
               <a:buNone/>
             </a:pPr>
             <a:r>
@@ -6197,7 +6104,7 @@
           </a:bodyPr>
           <a:lstStyle/>
           <a:p>
-            <a:pPr indent="0" marL="0">
+            <a:pPr marL="0" indent="0">
               <a:lnSpc>
                 <a:spcPct val="118000"/>
               </a:lnSpc>
@@ -6212,12 +6119,6 @@
               <a:t>1. Giai đoạn Học Chuẩn (Normal Manifold):
 </a:t>
             </a:r>
-            <a:pPr indent="0" marL="0">
-              <a:lnSpc>
-                <a:spcPct val="118000"/>
-              </a:lnSpc>
-              <a:buNone/>
-            </a:pPr>
             <a:r>
               <a:rPr lang="en-US" sz="900" dirty="0">
                 <a:solidFill>
@@ -6227,12 +6128,6 @@
               <a:t>• Mạng chỉ huấn luyện trên giao dịch HỢP LỆ, học cách nén và tái tạo cấu trúc luồng tiền bình thường.
 </a:t>
             </a:r>
-            <a:pPr indent="0" marL="0">
-              <a:lnSpc>
-                <a:spcPct val="118000"/>
-              </a:lnSpc>
-              <a:buNone/>
-            </a:pPr>
             <a:r>
               <a:rPr lang="en-US" sz="900" b="1" dirty="0">
                 <a:solidFill>
@@ -6242,12 +6137,6 @@
               <a:t>2. Giai đoạn Bắt Lỗi (Anomaly Spike):
 </a:t>
             </a:r>
-            <a:pPr indent="0" marL="0">
-              <a:lnSpc>
-                <a:spcPct val="118000"/>
-              </a:lnSpc>
-              <a:buNone/>
-            </a:pPr>
             <a:r>
               <a:rPr lang="en-US" sz="900" dirty="0">
                 <a:solidFill>
@@ -6257,12 +6146,6 @@
               <a:t>• Khi gặp giao dịch gian lận/Zero-Day, mạng không thể tái tạo chính xác → Sai số MSE tăng vọt.
 </a:t>
             </a:r>
-            <a:pPr indent="0" marL="0">
-              <a:lnSpc>
-                <a:spcPct val="118000"/>
-              </a:lnSpc>
-              <a:buNone/>
-            </a:pPr>
             <a:r>
               <a:rPr lang="en-US" sz="900" b="1" dirty="0">
                 <a:solidFill>
@@ -6272,12 +6155,6 @@
               <a:t>3. Giai đoạn Ra Quyết định (Thresholding):
 </a:t>
             </a:r>
-            <a:pPr indent="0" marL="0">
-              <a:lnSpc>
-                <a:spcPct val="118000"/>
-              </a:lnSpc>
-              <a:buNone/>
-            </a:pPr>
             <a:r>
               <a:rPr lang="en-US" sz="900" dirty="0">
                 <a:solidFill>
@@ -6314,6 +6191,13 @@
             <a:prstDash val="solid"/>
           </a:ln>
         </p:spPr>
+        <p:txBody>
+          <a:bodyPr/>
+          <a:lstStyle/>
+          <a:p>
+            <a:endParaRPr lang="en-VN"/>
+          </a:p>
+        </p:txBody>
       </p:sp>
       <p:sp>
         <p:nvSpPr>
@@ -6336,7 +6220,7 @@
           <a:bodyPr wrap="square" rtlCol="0" anchor="ctr"/>
           <a:lstStyle/>
           <a:p>
-            <a:pPr indent="0" marL="0">
+            <a:pPr marL="0" indent="0">
               <a:buNone/>
             </a:pPr>
             <a:r>
@@ -6356,38 +6240,56 @@
       </p:sp>
       <p:graphicFrame>
         <p:nvGraphicFramePr>
-          <p:cNvPr id="14" name="Table 0"/>
+          <p:cNvPr id="16" name="Table 0"/>
           <p:cNvGraphicFramePr>
             <a:graphicFrameLocks noGrp="1"/>
           </p:cNvGraphicFramePr>
           <p:nvPr>
             <p:extLst>
               <p:ext uri="{D42A27DB-BD31-4B8C-83A1-F6EECF244321}">
-                <p14:modId xmlns:p14="http://schemas.microsoft.com/office/powerpoint/2010/main" val="1579011935"/>
+                <p14:modId xmlns:p14="http://schemas.microsoft.com/office/powerpoint/2010/main" val="3692609567"/>
               </p:ext>
             </p:extLst>
           </p:nvPr>
         </p:nvGraphicFramePr>
         <p:xfrm>
-          <a:off x="5120640" y="1243584"/>
-          <a:ext cx="3520440" cy="914400"/>
+          <a:off x="5120640" y="1243583"/>
+          <a:ext cx="3520440" cy="1739158"/>
         </p:xfrm>
         <a:graphic>
           <a:graphicData uri="http://schemas.openxmlformats.org/drawingml/2006/table">
             <a:tbl>
               <a:tblPr/>
               <a:tblGrid>
-                <a:gridCol w="1232154"/>
-                <a:gridCol w="1056132"/>
-                <a:gridCol w="1232154"/>
+                <a:gridCol w="1232154">
+                  <a:extLst>
+                    <a:ext uri="{9D8B030D-6E8A-4147-A177-3AD203B41FA5}">
+                      <a16:colId xmlns:a16="http://schemas.microsoft.com/office/drawing/2014/main" val="20000"/>
+                    </a:ext>
+                  </a:extLst>
+                </a:gridCol>
+                <a:gridCol w="1056132">
+                  <a:extLst>
+                    <a:ext uri="{9D8B030D-6E8A-4147-A177-3AD203B41FA5}">
+                      <a16:colId xmlns:a16="http://schemas.microsoft.com/office/drawing/2014/main" val="20001"/>
+                    </a:ext>
+                  </a:extLst>
+                </a:gridCol>
+                <a:gridCol w="1232154">
+                  <a:extLst>
+                    <a:ext uri="{9D8B030D-6E8A-4147-A177-3AD203B41FA5}">
+                      <a16:colId xmlns:a16="http://schemas.microsoft.com/office/drawing/2014/main" val="20002"/>
+                    </a:ext>
+                  </a:extLst>
+                </a:gridCol>
               </a:tblGrid>
-              <a:tr h="0">
+              <a:tr h="189678">
                 <a:tc>
                   <a:txBody>
                     <a:bodyPr/>
                     <a:lstStyle/>
                     <a:p>
-                      <a:pPr algn="ctr" indent="0" marL="0">
+                      <a:pPr marL="0" indent="0" algn="ctr">
                         <a:buNone/>
                       </a:pPr>
                       <a:r>
@@ -6455,7 +6357,7 @@
                     <a:bodyPr/>
                     <a:lstStyle/>
                     <a:p>
-                      <a:pPr algn="ctr" indent="0" marL="0">
+                      <a:pPr marL="0" indent="0" algn="ctr">
                         <a:buNone/>
                       </a:pPr>
                       <a:r>
@@ -6523,7 +6425,7 @@
                     <a:bodyPr/>
                     <a:lstStyle/>
                     <a:p>
-                      <a:pPr algn="ctr" indent="0" marL="0">
+                      <a:pPr marL="0" indent="0" algn="ctr">
                         <a:buNone/>
                       </a:pPr>
                       <a:r>
@@ -6586,14 +6488,19 @@
                     </a:solidFill>
                   </a:tcPr>
                 </a:tc>
+                <a:extLst>
+                  <a:ext uri="{0D108BD9-81ED-4DB2-BD59-A6C34878D82A}">
+                    <a16:rowId xmlns:a16="http://schemas.microsoft.com/office/drawing/2014/main" val="10000"/>
+                  </a:ext>
+                </a:extLst>
               </a:tr>
-              <a:tr h="0">
+              <a:tr h="309896">
                 <a:tc>
                   <a:txBody>
                     <a:bodyPr/>
                     <a:lstStyle/>
                     <a:p>
-                      <a:pPr indent="0" marL="0">
+                      <a:pPr marL="0" indent="0">
                         <a:buNone/>
                       </a:pPr>
                       <a:r>
@@ -6661,7 +6568,7 @@
                     <a:bodyPr/>
                     <a:lstStyle/>
                     <a:p>
-                      <a:pPr indent="0" marL="0">
+                      <a:pPr marL="0" indent="0">
                         <a:buNone/>
                       </a:pPr>
                       <a:r>
@@ -6729,7 +6636,7 @@
                     <a:bodyPr/>
                     <a:lstStyle/>
                     <a:p>
-                      <a:pPr indent="0" marL="0">
+                      <a:pPr marL="0" indent="0">
                         <a:buNone/>
                       </a:pPr>
                       <a:r>
@@ -6792,14 +6699,19 @@
                     </a:solidFill>
                   </a:tcPr>
                 </a:tc>
+                <a:extLst>
+                  <a:ext uri="{0D108BD9-81ED-4DB2-BD59-A6C34878D82A}">
+                    <a16:rowId xmlns:a16="http://schemas.microsoft.com/office/drawing/2014/main" val="10001"/>
+                  </a:ext>
+                </a:extLst>
               </a:tr>
-              <a:tr h="0">
+              <a:tr h="309896">
                 <a:tc>
                   <a:txBody>
                     <a:bodyPr/>
                     <a:lstStyle/>
                     <a:p>
-                      <a:pPr indent="0" marL="0">
+                      <a:pPr marL="0" indent="0">
                         <a:buNone/>
                       </a:pPr>
                       <a:r>
@@ -6867,7 +6779,7 @@
                     <a:bodyPr/>
                     <a:lstStyle/>
                     <a:p>
-                      <a:pPr indent="0" marL="0">
+                      <a:pPr marL="0" indent="0">
                         <a:buNone/>
                       </a:pPr>
                       <a:r>
@@ -6935,7 +6847,7 @@
                     <a:bodyPr/>
                     <a:lstStyle/>
                     <a:p>
-                      <a:pPr indent="0" marL="0">
+                      <a:pPr marL="0" indent="0">
                         <a:buNone/>
                       </a:pPr>
                       <a:r>
@@ -6998,14 +6910,19 @@
                     </a:solidFill>
                   </a:tcPr>
                 </a:tc>
+                <a:extLst>
+                  <a:ext uri="{0D108BD9-81ED-4DB2-BD59-A6C34878D82A}">
+                    <a16:rowId xmlns:a16="http://schemas.microsoft.com/office/drawing/2014/main" val="10002"/>
+                  </a:ext>
+                </a:extLst>
               </a:tr>
-              <a:tr h="0">
+              <a:tr h="309896">
                 <a:tc>
                   <a:txBody>
                     <a:bodyPr/>
                     <a:lstStyle/>
                     <a:p>
-                      <a:pPr indent="0" marL="0">
+                      <a:pPr marL="0" indent="0">
                         <a:buNone/>
                       </a:pPr>
                       <a:r>
@@ -7073,7 +6990,7 @@
                     <a:bodyPr/>
                     <a:lstStyle/>
                     <a:p>
-                      <a:pPr indent="0" marL="0">
+                      <a:pPr marL="0" indent="0">
                         <a:buNone/>
                       </a:pPr>
                       <a:r>
@@ -7141,7 +7058,7 @@
                     <a:bodyPr/>
                     <a:lstStyle/>
                     <a:p>
-                      <a:pPr indent="0" marL="0">
+                      <a:pPr marL="0" indent="0">
                         <a:buNone/>
                       </a:pPr>
                       <a:r>
@@ -7204,14 +7121,19 @@
                     </a:solidFill>
                   </a:tcPr>
                 </a:tc>
+                <a:extLst>
+                  <a:ext uri="{0D108BD9-81ED-4DB2-BD59-A6C34878D82A}">
+                    <a16:rowId xmlns:a16="http://schemas.microsoft.com/office/drawing/2014/main" val="10003"/>
+                  </a:ext>
+                </a:extLst>
               </a:tr>
-              <a:tr h="0">
+              <a:tr h="309896">
                 <a:tc>
                   <a:txBody>
                     <a:bodyPr/>
                     <a:lstStyle/>
                     <a:p>
-                      <a:pPr indent="0" marL="0">
+                      <a:pPr marL="0" indent="0">
                         <a:buNone/>
                       </a:pPr>
                       <a:r>
@@ -7279,7 +7201,7 @@
                     <a:bodyPr/>
                     <a:lstStyle/>
                     <a:p>
-                      <a:pPr indent="0" marL="0">
+                      <a:pPr marL="0" indent="0">
                         <a:buNone/>
                       </a:pPr>
                       <a:r>
@@ -7347,7 +7269,7 @@
                     <a:bodyPr/>
                     <a:lstStyle/>
                     <a:p>
-                      <a:pPr indent="0" marL="0">
+                      <a:pPr marL="0" indent="0">
                         <a:buNone/>
                       </a:pPr>
                       <a:r>
@@ -7410,14 +7332,19 @@
                     </a:solidFill>
                   </a:tcPr>
                 </a:tc>
+                <a:extLst>
+                  <a:ext uri="{0D108BD9-81ED-4DB2-BD59-A6C34878D82A}">
+                    <a16:rowId xmlns:a16="http://schemas.microsoft.com/office/drawing/2014/main" val="10004"/>
+                  </a:ext>
+                </a:extLst>
               </a:tr>
-              <a:tr h="0">
+              <a:tr h="309896">
                 <a:tc>
                   <a:txBody>
                     <a:bodyPr/>
                     <a:lstStyle/>
                     <a:p>
-                      <a:pPr indent="0" marL="0">
+                      <a:pPr marL="0" indent="0">
                         <a:buNone/>
                       </a:pPr>
                       <a:r>
@@ -7485,7 +7412,7 @@
                     <a:bodyPr/>
                     <a:lstStyle/>
                     <a:p>
-                      <a:pPr indent="0" marL="0">
+                      <a:pPr marL="0" indent="0">
                         <a:buNone/>
                       </a:pPr>
                       <a:r>
@@ -7553,7 +7480,7 @@
                     <a:bodyPr/>
                     <a:lstStyle/>
                     <a:p>
-                      <a:pPr indent="0" marL="0">
+                      <a:pPr marL="0" indent="0">
                         <a:buNone/>
                       </a:pPr>
                       <a:r>
@@ -7616,6 +7543,11 @@
                     </a:solidFill>
                   </a:tcPr>
                 </a:tc>
+                <a:extLst>
+                  <a:ext uri="{0D108BD9-81ED-4DB2-BD59-A6C34878D82A}">
+                    <a16:rowId xmlns:a16="http://schemas.microsoft.com/office/drawing/2014/main" val="10005"/>
+                  </a:ext>
+                </a:extLst>
               </a:tr>
             </a:tbl>
           </a:graphicData>
@@ -7629,8 +7561,8 @@
         </p:nvSpPr>
         <p:spPr>
           <a:xfrm>
-            <a:off x="5120640" y="2816352"/>
-            <a:ext cx="3520440" cy="1755648"/>
+            <a:off x="5120640" y="3055894"/>
+            <a:ext cx="3520440" cy="1516106"/>
           </a:xfrm>
           <a:prstGeom prst="rect">
             <a:avLst/>
@@ -7645,6 +7577,13 @@
             <a:prstDash val="solid"/>
           </a:ln>
         </p:spPr>
+        <p:txBody>
+          <a:bodyPr/>
+          <a:lstStyle/>
+          <a:p>
+            <a:endParaRPr lang="en-VN"/>
+          </a:p>
+        </p:txBody>
       </p:sp>
       <p:sp>
         <p:nvSpPr>
@@ -7654,7 +7593,7 @@
         </p:nvSpPr>
         <p:spPr>
           <a:xfrm>
-            <a:off x="5257800" y="2889504"/>
+            <a:off x="5257800" y="3116580"/>
             <a:ext cx="3246120" cy="219456"/>
           </a:xfrm>
           <a:prstGeom prst="rect">
@@ -7667,7 +7606,7 @@
           <a:bodyPr wrap="square" rtlCol="0" anchor="ctr"/>
           <a:lstStyle/>
           <a:p>
-            <a:pPr indent="0" marL="0">
+            <a:pPr marL="0" indent="0">
               <a:buNone/>
             </a:pPr>
             <a:r>
@@ -7693,8 +7632,8 @@
         </p:nvSpPr>
         <p:spPr>
           <a:xfrm>
-            <a:off x="5257800" y="3108960"/>
-            <a:ext cx="3246120" cy="1389888"/>
+            <a:off x="5257800" y="3336036"/>
+            <a:ext cx="3246120" cy="1162811"/>
           </a:xfrm>
           <a:prstGeom prst="rect">
             <a:avLst/>
@@ -7704,7 +7643,7 @@
         </p:spPr>
         <p:txBody>
           <a:bodyPr wrap="square" lIns="25400" tIns="50800" rIns="50800" bIns="25400" rtlCol="0" anchor="ctr">
-            <a:normAutofit/>
+            <a:normAutofit fontScale="92500" lnSpcReduction="10000"/>
           </a:bodyPr>
           <a:lstStyle/>
           <a:p>
@@ -7786,9 +7725,18 @@
   <p:clrMapOvr>
     <a:masterClrMapping/>
   </p:clrMapOvr>
-  <p:transition xmlns:p14="http://schemas.microsoft.com/office/powerpoint/2010/main" xmlns:p159="http://schemas.microsoft.com/office/powerpoint/2015/09/main" spd="slow" p14:dur="2000">
-    <p159:morph option="byObject"/>
-  </p:transition>
+  <mc:AlternateContent xmlns:mc="http://schemas.openxmlformats.org/markup-compatibility/2006" xmlns:p159="http://schemas.microsoft.com/office/powerpoint/2015/09/main">
+    <mc:Choice Requires="p159">
+      <p:transition xmlns:p14="http://schemas.microsoft.com/office/powerpoint/2010/main" spd="slow" p14:dur="2000">
+        <p159:morph option="byObject"/>
+      </p:transition>
+    </mc:Choice>
+    <mc:Fallback xmlns="">
+      <p:transition spd="slow">
+        <p:fade/>
+      </p:transition>
+    </mc:Fallback>
+  </mc:AlternateContent>
 </p:sld>
 </file>
 
@@ -7800,6 +7748,7 @@
         <a:solidFill>
           <a:srgbClr val="1E295C"/>
         </a:solidFill>
+        <a:effectLst/>
       </p:bgPr>
     </p:bg>
     <p:spTree>
@@ -7837,7 +7786,7 @@
           <a:bodyPr wrap="square" rtlCol="0" anchor="ctr"/>
           <a:lstStyle/>
           <a:p>
-            <a:pPr algn="ctr" indent="0" marL="0">
+            <a:pPr marL="0" indent="0" algn="ctr">
               <a:buNone/>
             </a:pPr>
             <a:r>
@@ -7881,6 +7830,13 @@
             <a:prstDash val="solid"/>
           </a:ln>
         </p:spPr>
+        <p:txBody>
+          <a:bodyPr/>
+          <a:lstStyle/>
+          <a:p>
+            <a:endParaRPr lang="en-VN"/>
+          </a:p>
+        </p:txBody>
       </p:sp>
       <p:sp>
         <p:nvSpPr>
@@ -7903,7 +7859,7 @@
           <a:bodyPr wrap="square" rtlCol="0" anchor="ctr"/>
           <a:lstStyle/>
           <a:p>
-            <a:pPr algn="ctr" indent="0" marL="0">
+            <a:pPr marL="0" indent="0" algn="ctr">
               <a:buNone/>
             </a:pPr>
             <a:r>
@@ -7944,7 +7900,7 @@
           </a:bodyPr>
           <a:lstStyle/>
           <a:p>
-            <a:pPr algn="ctr" indent="0" marL="0">
+            <a:pPr marL="0" indent="0" algn="ctr">
               <a:buNone/>
             </a:pPr>
             <a:r>
@@ -7984,6 +7940,13 @@
             <a:prstDash val="solid"/>
           </a:ln>
         </p:spPr>
+        <p:txBody>
+          <a:bodyPr/>
+          <a:lstStyle/>
+          <a:p>
+            <a:endParaRPr lang="en-VN"/>
+          </a:p>
+        </p:txBody>
       </p:sp>
       <p:sp>
         <p:nvSpPr>
@@ -8011,6 +7974,13 @@
             <a:prstDash val="solid"/>
           </a:ln>
         </p:spPr>
+        <p:txBody>
+          <a:bodyPr/>
+          <a:lstStyle/>
+          <a:p>
+            <a:endParaRPr lang="en-VN"/>
+          </a:p>
+        </p:txBody>
       </p:sp>
       <p:sp>
         <p:nvSpPr>
@@ -8137,9 +8107,18 @@
   <p:clrMapOvr>
     <a:masterClrMapping/>
   </p:clrMapOvr>
-  <p:transition xmlns:p14="http://schemas.microsoft.com/office/powerpoint/2010/main" spd="slow" p14:dur="1500">
-    <p:split orient="vert"/>
-  </p:transition>
+  <mc:AlternateContent xmlns:mc="http://schemas.openxmlformats.org/markup-compatibility/2006">
+    <mc:Choice xmlns:p14="http://schemas.microsoft.com/office/powerpoint/2010/main" Requires="p14">
+      <p:transition spd="slow" p14:dur="1200">
+        <p14:prism/>
+      </p:transition>
+    </mc:Choice>
+    <mc:Fallback>
+      <p:transition spd="slow">
+        <p:fade/>
+      </p:transition>
+    </mc:Fallback>
+  </mc:AlternateContent>
 </p:sld>
 </file>
 
@@ -8151,6 +8130,7 @@
         <a:solidFill>
           <a:srgbClr val="FFFFFF"/>
         </a:solidFill>
+        <a:effectLst/>
       </p:bgPr>
     </p:bg>
     <p:spTree>
@@ -8188,7 +8168,7 @@
           <a:bodyPr wrap="square" rtlCol="0" anchor="ctr"/>
           <a:lstStyle/>
           <a:p>
-            <a:pPr algn="ctr" indent="0" marL="0">
+            <a:pPr marL="0" indent="0" algn="ctr">
               <a:buNone/>
             </a:pPr>
             <a:r>
@@ -8229,7 +8209,7 @@
           </a:bodyPr>
           <a:lstStyle/>
           <a:p>
-            <a:pPr indent="0" marL="0">
+            <a:pPr marL="0" indent="0">
               <a:buNone/>
             </a:pPr>
             <a:r>
@@ -8269,6 +8249,13 @@
             <a:prstDash val="solid"/>
           </a:ln>
         </p:spPr>
+        <p:txBody>
+          <a:bodyPr/>
+          <a:lstStyle/>
+          <a:p>
+            <a:endParaRPr lang="en-VN"/>
+          </a:p>
+        </p:txBody>
       </p:sp>
       <p:sp>
         <p:nvSpPr>
@@ -8291,7 +8278,7 @@
           <a:bodyPr wrap="square" rtlCol="0" anchor="ctr"/>
           <a:lstStyle/>
           <a:p>
-            <a:pPr indent="0" marL="0">
+            <a:pPr marL="0" indent="0">
               <a:buNone/>
             </a:pPr>
             <a:r>
@@ -8330,7 +8317,7 @@
           <a:bodyPr wrap="square" rtlCol="0" anchor="ctr"/>
           <a:lstStyle/>
           <a:p>
-            <a:pPr algn="r" indent="0" marL="0">
+            <a:pPr marL="0" indent="0" algn="r">
               <a:buNone/>
             </a:pPr>
             <a:r>
@@ -8357,34 +8344,70 @@
           <p:nvPr>
             <p:extLst>
               <p:ext uri="{D42A27DB-BD31-4B8C-83A1-F6EECF244321}">
-                <p14:modId xmlns:p14="http://schemas.microsoft.com/office/powerpoint/2010/main" val="1579011935"/>
+                <p14:modId xmlns:p14="http://schemas.microsoft.com/office/powerpoint/2010/main" val="1346571680"/>
               </p:ext>
             </p:extLst>
           </p:nvPr>
         </p:nvGraphicFramePr>
         <p:xfrm>
-          <a:off x="502920" y="987552"/>
-          <a:ext cx="4069080" cy="914400"/>
+          <a:off x="502920" y="987551"/>
+          <a:ext cx="4069082" cy="1303020"/>
         </p:xfrm>
         <a:graphic>
           <a:graphicData uri="http://schemas.openxmlformats.org/drawingml/2006/table">
             <a:tbl>
               <a:tblPr/>
               <a:tblGrid>
-                <a:gridCol w="1302106"/>
-                <a:gridCol w="813816"/>
-                <a:gridCol w="488290"/>
-                <a:gridCol w="488290"/>
-                <a:gridCol w="488290"/>
-                <a:gridCol w="488290"/>
+                <a:gridCol w="1302106">
+                  <a:extLst>
+                    <a:ext uri="{9D8B030D-6E8A-4147-A177-3AD203B41FA5}">
+                      <a16:colId xmlns:a16="http://schemas.microsoft.com/office/drawing/2014/main" val="20000"/>
+                    </a:ext>
+                  </a:extLst>
+                </a:gridCol>
+                <a:gridCol w="813816">
+                  <a:extLst>
+                    <a:ext uri="{9D8B030D-6E8A-4147-A177-3AD203B41FA5}">
+                      <a16:colId xmlns:a16="http://schemas.microsoft.com/office/drawing/2014/main" val="20001"/>
+                    </a:ext>
+                  </a:extLst>
+                </a:gridCol>
+                <a:gridCol w="488290">
+                  <a:extLst>
+                    <a:ext uri="{9D8B030D-6E8A-4147-A177-3AD203B41FA5}">
+                      <a16:colId xmlns:a16="http://schemas.microsoft.com/office/drawing/2014/main" val="20002"/>
+                    </a:ext>
+                  </a:extLst>
+                </a:gridCol>
+                <a:gridCol w="488290">
+                  <a:extLst>
+                    <a:ext uri="{9D8B030D-6E8A-4147-A177-3AD203B41FA5}">
+                      <a16:colId xmlns:a16="http://schemas.microsoft.com/office/drawing/2014/main" val="20003"/>
+                    </a:ext>
+                  </a:extLst>
+                </a:gridCol>
+                <a:gridCol w="488290">
+                  <a:extLst>
+                    <a:ext uri="{9D8B030D-6E8A-4147-A177-3AD203B41FA5}">
+                      <a16:colId xmlns:a16="http://schemas.microsoft.com/office/drawing/2014/main" val="20004"/>
+                    </a:ext>
+                  </a:extLst>
+                </a:gridCol>
+                <a:gridCol w="488290">
+                  <a:extLst>
+                    <a:ext uri="{9D8B030D-6E8A-4147-A177-3AD203B41FA5}">
+                      <a16:colId xmlns:a16="http://schemas.microsoft.com/office/drawing/2014/main" val="20005"/>
+                    </a:ext>
+                  </a:extLst>
+                </a:gridCol>
               </a:tblGrid>
-              <a:tr h="0">
+              <a:tr h="217170">
                 <a:tc>
                   <a:txBody>
                     <a:bodyPr/>
                     <a:lstStyle/>
                     <a:p>
-                      <a:pPr algn="ctr" indent="0" marL="0">
+                      <a:pPr marL="0" indent="0" algn="ctr">
                         <a:buNone/>
                       </a:pPr>
                       <a:r>
@@ -8452,7 +8475,7 @@
                     <a:bodyPr/>
                     <a:lstStyle/>
                     <a:p>
-                      <a:pPr algn="ctr" indent="0" marL="0">
+                      <a:pPr marL="0" indent="0" algn="ctr">
                         <a:buNone/>
                       </a:pPr>
                       <a:r>
@@ -8520,7 +8543,7 @@
                     <a:bodyPr/>
                     <a:lstStyle/>
                     <a:p>
-                      <a:pPr algn="ctr" indent="0" marL="0">
+                      <a:pPr marL="0" indent="0" algn="ctr">
                         <a:buNone/>
                       </a:pPr>
                       <a:r>
@@ -8588,7 +8611,7 @@
                     <a:bodyPr/>
                     <a:lstStyle/>
                     <a:p>
-                      <a:pPr algn="ctr" indent="0" marL="0">
+                      <a:pPr marL="0" indent="0" algn="ctr">
                         <a:buNone/>
                       </a:pPr>
                       <a:r>
@@ -8656,7 +8679,7 @@
                     <a:bodyPr/>
                     <a:lstStyle/>
                     <a:p>
-                      <a:pPr algn="ctr" indent="0" marL="0">
+                      <a:pPr marL="0" indent="0" algn="ctr">
                         <a:buNone/>
                       </a:pPr>
                       <a:r>
@@ -8724,7 +8747,7 @@
                     <a:bodyPr/>
                     <a:lstStyle/>
                     <a:p>
-                      <a:pPr algn="ctr" indent="0" marL="0">
+                      <a:pPr marL="0" indent="0" algn="ctr">
                         <a:buNone/>
                       </a:pPr>
                       <a:r>
@@ -8787,14 +8810,19 @@
                     </a:solidFill>
                   </a:tcPr>
                 </a:tc>
+                <a:extLst>
+                  <a:ext uri="{0D108BD9-81ED-4DB2-BD59-A6C34878D82A}">
+                    <a16:rowId xmlns:a16="http://schemas.microsoft.com/office/drawing/2014/main" val="10000"/>
+                  </a:ext>
+                </a:extLst>
               </a:tr>
-              <a:tr h="0">
+              <a:tr h="217170">
                 <a:tc>
                   <a:txBody>
                     <a:bodyPr/>
                     <a:lstStyle/>
                     <a:p>
-                      <a:pPr indent="0" marL="0">
+                      <a:pPr marL="0" indent="0">
                         <a:buNone/>
                       </a:pPr>
                       <a:r>
@@ -8862,7 +8890,7 @@
                     <a:bodyPr/>
                     <a:lstStyle/>
                     <a:p>
-                      <a:pPr indent="0" marL="0">
+                      <a:pPr marL="0" indent="0">
                         <a:buNone/>
                       </a:pPr>
                       <a:r>
@@ -8930,7 +8958,7 @@
                     <a:bodyPr/>
                     <a:lstStyle/>
                     <a:p>
-                      <a:pPr indent="0" marL="0">
+                      <a:pPr marL="0" indent="0">
                         <a:buNone/>
                       </a:pPr>
                       <a:r>
@@ -8998,7 +9026,7 @@
                     <a:bodyPr/>
                     <a:lstStyle/>
                     <a:p>
-                      <a:pPr indent="0" marL="0">
+                      <a:pPr marL="0" indent="0">
                         <a:buNone/>
                       </a:pPr>
                       <a:r>
@@ -9066,7 +9094,7 @@
                     <a:bodyPr/>
                     <a:lstStyle/>
                     <a:p>
-                      <a:pPr indent="0" marL="0">
+                      <a:pPr marL="0" indent="0">
                         <a:buNone/>
                       </a:pPr>
                       <a:r>
@@ -9134,7 +9162,7 @@
                     <a:bodyPr/>
                     <a:lstStyle/>
                     <a:p>
-                      <a:pPr indent="0" marL="0">
+                      <a:pPr marL="0" indent="0">
                         <a:buNone/>
                       </a:pPr>
                       <a:r>
@@ -9197,14 +9225,19 @@
                     </a:solidFill>
                   </a:tcPr>
                 </a:tc>
+                <a:extLst>
+                  <a:ext uri="{0D108BD9-81ED-4DB2-BD59-A6C34878D82A}">
+                    <a16:rowId xmlns:a16="http://schemas.microsoft.com/office/drawing/2014/main" val="10001"/>
+                  </a:ext>
+                </a:extLst>
               </a:tr>
-              <a:tr h="0">
+              <a:tr h="217170">
                 <a:tc>
                   <a:txBody>
                     <a:bodyPr/>
                     <a:lstStyle/>
                     <a:p>
-                      <a:pPr indent="0" marL="0">
+                      <a:pPr marL="0" indent="0">
                         <a:buNone/>
                       </a:pPr>
                       <a:r>
@@ -9272,7 +9305,7 @@
                     <a:bodyPr/>
                     <a:lstStyle/>
                     <a:p>
-                      <a:pPr indent="0" marL="0">
+                      <a:pPr marL="0" indent="0">
                         <a:buNone/>
                       </a:pPr>
                       <a:r>
@@ -9340,7 +9373,7 @@
                     <a:bodyPr/>
                     <a:lstStyle/>
                     <a:p>
-                      <a:pPr indent="0" marL="0">
+                      <a:pPr marL="0" indent="0">
                         <a:buNone/>
                       </a:pPr>
                       <a:r>
@@ -9408,7 +9441,7 @@
                     <a:bodyPr/>
                     <a:lstStyle/>
                     <a:p>
-                      <a:pPr indent="0" marL="0">
+                      <a:pPr marL="0" indent="0">
                         <a:buNone/>
                       </a:pPr>
                       <a:r>
@@ -9476,7 +9509,7 @@
                     <a:bodyPr/>
                     <a:lstStyle/>
                     <a:p>
-                      <a:pPr indent="0" marL="0">
+                      <a:pPr marL="0" indent="0">
                         <a:buNone/>
                       </a:pPr>
                       <a:r>
@@ -9544,7 +9577,7 @@
                     <a:bodyPr/>
                     <a:lstStyle/>
                     <a:p>
-                      <a:pPr indent="0" marL="0">
+                      <a:pPr marL="0" indent="0">
                         <a:buNone/>
                       </a:pPr>
                       <a:r>
@@ -9607,14 +9640,19 @@
                     </a:solidFill>
                   </a:tcPr>
                 </a:tc>
+                <a:extLst>
+                  <a:ext uri="{0D108BD9-81ED-4DB2-BD59-A6C34878D82A}">
+                    <a16:rowId xmlns:a16="http://schemas.microsoft.com/office/drawing/2014/main" val="10002"/>
+                  </a:ext>
+                </a:extLst>
               </a:tr>
-              <a:tr h="0">
+              <a:tr h="217170">
                 <a:tc>
                   <a:txBody>
                     <a:bodyPr/>
                     <a:lstStyle/>
                     <a:p>
-                      <a:pPr indent="0" marL="0">
+                      <a:pPr marL="0" indent="0">
                         <a:buNone/>
                       </a:pPr>
                       <a:r>
@@ -9682,7 +9720,7 @@
                     <a:bodyPr/>
                     <a:lstStyle/>
                     <a:p>
-                      <a:pPr indent="0" marL="0">
+                      <a:pPr marL="0" indent="0">
                         <a:buNone/>
                       </a:pPr>
                       <a:r>
@@ -9750,7 +9788,7 @@
                     <a:bodyPr/>
                     <a:lstStyle/>
                     <a:p>
-                      <a:pPr indent="0" marL="0">
+                      <a:pPr marL="0" indent="0">
                         <a:buNone/>
                       </a:pPr>
                       <a:r>
@@ -9818,7 +9856,7 @@
                     <a:bodyPr/>
                     <a:lstStyle/>
                     <a:p>
-                      <a:pPr indent="0" marL="0">
+                      <a:pPr marL="0" indent="0">
                         <a:buNone/>
                       </a:pPr>
                       <a:r>
@@ -9886,7 +9924,7 @@
                     <a:bodyPr/>
                     <a:lstStyle/>
                     <a:p>
-                      <a:pPr indent="0" marL="0">
+                      <a:pPr marL="0" indent="0">
                         <a:buNone/>
                       </a:pPr>
                       <a:r>
@@ -9954,7 +9992,7 @@
                     <a:bodyPr/>
                     <a:lstStyle/>
                     <a:p>
-                      <a:pPr indent="0" marL="0">
+                      <a:pPr marL="0" indent="0">
                         <a:buNone/>
                       </a:pPr>
                       <a:r>
@@ -10017,14 +10055,19 @@
                     </a:solidFill>
                   </a:tcPr>
                 </a:tc>
+                <a:extLst>
+                  <a:ext uri="{0D108BD9-81ED-4DB2-BD59-A6C34878D82A}">
+                    <a16:rowId xmlns:a16="http://schemas.microsoft.com/office/drawing/2014/main" val="10003"/>
+                  </a:ext>
+                </a:extLst>
               </a:tr>
-              <a:tr h="0">
+              <a:tr h="217170">
                 <a:tc>
                   <a:txBody>
                     <a:bodyPr/>
                     <a:lstStyle/>
                     <a:p>
-                      <a:pPr indent="0" marL="0">
+                      <a:pPr marL="0" indent="0">
                         <a:buNone/>
                       </a:pPr>
                       <a:r>
@@ -10092,7 +10135,7 @@
                     <a:bodyPr/>
                     <a:lstStyle/>
                     <a:p>
-                      <a:pPr indent="0" marL="0">
+                      <a:pPr marL="0" indent="0">
                         <a:buNone/>
                       </a:pPr>
                       <a:r>
@@ -10160,7 +10203,7 @@
                     <a:bodyPr/>
                     <a:lstStyle/>
                     <a:p>
-                      <a:pPr indent="0" marL="0">
+                      <a:pPr marL="0" indent="0">
                         <a:buNone/>
                       </a:pPr>
                       <a:r>
@@ -10228,7 +10271,7 @@
                     <a:bodyPr/>
                     <a:lstStyle/>
                     <a:p>
-                      <a:pPr indent="0" marL="0">
+                      <a:pPr marL="0" indent="0">
                         <a:buNone/>
                       </a:pPr>
                       <a:r>
@@ -10296,7 +10339,7 @@
                     <a:bodyPr/>
                     <a:lstStyle/>
                     <a:p>
-                      <a:pPr indent="0" marL="0">
+                      <a:pPr marL="0" indent="0">
                         <a:buNone/>
                       </a:pPr>
                       <a:r>
@@ -10364,7 +10407,7 @@
                     <a:bodyPr/>
                     <a:lstStyle/>
                     <a:p>
-                      <a:pPr indent="0" marL="0">
+                      <a:pPr marL="0" indent="0">
                         <a:buNone/>
                       </a:pPr>
                       <a:r>
@@ -10427,14 +10470,19 @@
                     </a:solidFill>
                   </a:tcPr>
                 </a:tc>
+                <a:extLst>
+                  <a:ext uri="{0D108BD9-81ED-4DB2-BD59-A6C34878D82A}">
+                    <a16:rowId xmlns:a16="http://schemas.microsoft.com/office/drawing/2014/main" val="10004"/>
+                  </a:ext>
+                </a:extLst>
               </a:tr>
-              <a:tr h="0">
+              <a:tr h="217170">
                 <a:tc>
                   <a:txBody>
                     <a:bodyPr/>
                     <a:lstStyle/>
                     <a:p>
-                      <a:pPr indent="0" marL="0">
+                      <a:pPr marL="0" indent="0">
                         <a:buNone/>
                       </a:pPr>
                       <a:r>
@@ -10502,7 +10550,7 @@
                     <a:bodyPr/>
                     <a:lstStyle/>
                     <a:p>
-                      <a:pPr indent="0" marL="0">
+                      <a:pPr marL="0" indent="0">
                         <a:buNone/>
                       </a:pPr>
                       <a:r>
@@ -10570,7 +10618,7 @@
                     <a:bodyPr/>
                     <a:lstStyle/>
                     <a:p>
-                      <a:pPr indent="0" marL="0">
+                      <a:pPr marL="0" indent="0">
                         <a:buNone/>
                       </a:pPr>
                       <a:r>
@@ -10638,7 +10686,7 @@
                     <a:bodyPr/>
                     <a:lstStyle/>
                     <a:p>
-                      <a:pPr indent="0" marL="0">
+                      <a:pPr marL="0" indent="0">
                         <a:buNone/>
                       </a:pPr>
                       <a:r>
@@ -10706,7 +10754,7 @@
                     <a:bodyPr/>
                     <a:lstStyle/>
                     <a:p>
-                      <a:pPr indent="0" marL="0">
+                      <a:pPr marL="0" indent="0">
                         <a:buNone/>
                       </a:pPr>
                       <a:r>
@@ -10774,7 +10822,7 @@
                     <a:bodyPr/>
                     <a:lstStyle/>
                     <a:p>
-                      <a:pPr indent="0" marL="0">
+                      <a:pPr marL="0" indent="0">
                         <a:buNone/>
                       </a:pPr>
                       <a:r>
@@ -10837,6 +10885,11 @@
                     </a:solidFill>
                   </a:tcPr>
                 </a:tc>
+                <a:extLst>
+                  <a:ext uri="{0D108BD9-81ED-4DB2-BD59-A6C34878D82A}">
+                    <a16:rowId xmlns:a16="http://schemas.microsoft.com/office/drawing/2014/main" val="10005"/>
+                  </a:ext>
+                </a:extLst>
               </a:tr>
             </a:tbl>
           </a:graphicData>
@@ -10866,6 +10919,13 @@
             <a:prstDash val="solid"/>
           </a:ln>
         </p:spPr>
+        <p:txBody>
+          <a:bodyPr/>
+          <a:lstStyle/>
+          <a:p>
+            <a:endParaRPr lang="en-VN"/>
+          </a:p>
+        </p:txBody>
       </p:sp>
       <p:sp>
         <p:nvSpPr>
@@ -10888,7 +10948,7 @@
           <a:bodyPr wrap="square" rtlCol="0" anchor="ctr"/>
           <a:lstStyle/>
           <a:p>
-            <a:pPr indent="0" marL="0">
+            <a:pPr marL="0" indent="0">
               <a:buNone/>
             </a:pPr>
             <a:r>
@@ -11004,14 +11064,14 @@
       </p:sp>
       <p:pic>
         <p:nvPicPr>
-          <p:cNvPr id="11" name="Image 0" descr="/Users/tcdtist/dev/uit/cs106/assignments/Final/draft/fraud-detection/slide/slide_assets/academic_metrics_comparison.png">    </p:cNvPr>
+          <p:cNvPr id="11" name="Image 0" descr="/Users/tcdtist/dev/uit/cs106/assignments/Final/draft/fraud-detection/slide/slide_assets/academic_metrics_comparison.png"/>
           <p:cNvPicPr>
             <a:picLocks noChangeAspect="1"/>
           </p:cNvPicPr>
           <p:nvPr/>
         </p:nvPicPr>
         <p:blipFill>
-          <a:blip r:embed="rId1"/>
+          <a:blip r:embed="rId3"/>
           <a:stretch>
             <a:fillRect/>
           </a:stretch>
@@ -11034,8 +11094,8 @@
         </p:nvSpPr>
         <p:spPr>
           <a:xfrm>
-            <a:off x="4754880" y="2913836"/>
-            <a:ext cx="3886200" cy="1658164"/>
+            <a:off x="4754880" y="2852928"/>
+            <a:ext cx="3886200" cy="1719072"/>
           </a:xfrm>
           <a:prstGeom prst="rect">
             <a:avLst/>
@@ -11050,6 +11110,13 @@
             <a:prstDash val="solid"/>
           </a:ln>
         </p:spPr>
+        <p:txBody>
+          <a:bodyPr/>
+          <a:lstStyle/>
+          <a:p>
+            <a:endParaRPr lang="en-VN"/>
+          </a:p>
+        </p:txBody>
       </p:sp>
       <p:sp>
         <p:nvSpPr>
@@ -11059,7 +11126,7 @@
         </p:nvSpPr>
         <p:spPr>
           <a:xfrm>
-            <a:off x="4892040" y="2986988"/>
+            <a:off x="4892040" y="2926080"/>
             <a:ext cx="3611880" cy="219456"/>
           </a:xfrm>
           <a:prstGeom prst="rect">
@@ -11072,7 +11139,7 @@
           <a:bodyPr wrap="square" rtlCol="0" anchor="ctr"/>
           <a:lstStyle/>
           <a:p>
-            <a:pPr indent="0" marL="0">
+            <a:pPr marL="0" indent="0">
               <a:buNone/>
             </a:pPr>
             <a:r>
@@ -11167,9 +11234,18 @@
   <p:clrMapOvr>
     <a:masterClrMapping/>
   </p:clrMapOvr>
-  <p:transition spd="slow">
-    <p:wipe/>
-  </p:transition>
+  <mc:AlternateContent xmlns:mc="http://schemas.openxmlformats.org/markup-compatibility/2006">
+    <mc:Choice xmlns:p14="http://schemas.microsoft.com/office/powerpoint/2010/main" Requires="p14">
+      <p:transition spd="slow" p14:dur="1300">
+        <p14:pan dir="u"/>
+      </p:transition>
+    </mc:Choice>
+    <mc:Fallback>
+      <p:transition spd="slow">
+        <p:fade/>
+      </p:transition>
+    </mc:Fallback>
+  </mc:AlternateContent>
 </p:sld>
 </file>
 
@@ -11181,6 +11257,7 @@
         <a:solidFill>
           <a:srgbClr val="FFFFFF"/>
         </a:solidFill>
+        <a:effectLst/>
       </p:bgPr>
     </p:bg>
     <p:spTree>
@@ -11218,7 +11295,7 @@
           <a:bodyPr wrap="square" rtlCol="0" anchor="ctr"/>
           <a:lstStyle/>
           <a:p>
-            <a:pPr algn="ctr" indent="0" marL="0">
+            <a:pPr marL="0" indent="0" algn="ctr">
               <a:buNone/>
             </a:pPr>
             <a:r>
@@ -11259,7 +11336,7 @@
           </a:bodyPr>
           <a:lstStyle/>
           <a:p>
-            <a:pPr indent="0" marL="0">
+            <a:pPr marL="0" indent="0">
               <a:buNone/>
             </a:pPr>
             <a:r>
@@ -11299,6 +11376,13 @@
             <a:prstDash val="solid"/>
           </a:ln>
         </p:spPr>
+        <p:txBody>
+          <a:bodyPr/>
+          <a:lstStyle/>
+          <a:p>
+            <a:endParaRPr lang="en-VN"/>
+          </a:p>
+        </p:txBody>
       </p:sp>
       <p:sp>
         <p:nvSpPr>
@@ -11321,7 +11405,7 @@
           <a:bodyPr wrap="square" rtlCol="0" anchor="ctr"/>
           <a:lstStyle/>
           <a:p>
-            <a:pPr indent="0" marL="0">
+            <a:pPr marL="0" indent="0">
               <a:buNone/>
             </a:pPr>
             <a:r>
@@ -11360,7 +11444,7 @@
           <a:bodyPr wrap="square" rtlCol="0" anchor="ctr"/>
           <a:lstStyle/>
           <a:p>
-            <a:pPr algn="r" indent="0" marL="0">
+            <a:pPr marL="0" indent="0" algn="r">
               <a:buNone/>
             </a:pPr>
             <a:r>
@@ -11380,21 +11464,21 @@
       </p:sp>
       <p:pic>
         <p:nvPicPr>
-          <p:cNvPr id="7" name="Image 0" descr="/Users/tcdtist/dev/uit/cs106/assignments/Final/draft/fraud-detection/slide/slide_assets/academic_confusion_matrices.png">    </p:cNvPr>
+          <p:cNvPr id="7" name="Image 0" descr="/Users/tcdtist/dev/uit/cs106/assignments/Final/draft/fraud-detection/slide/slide_assets/academic_confusion_matrices.png"/>
           <p:cNvPicPr>
             <a:picLocks noChangeAspect="1"/>
           </p:cNvPicPr>
           <p:nvPr/>
         </p:nvPicPr>
         <p:blipFill>
-          <a:blip r:embed="rId1"/>
+          <a:blip r:embed="rId3"/>
           <a:stretch>
             <a:fillRect/>
           </a:stretch>
         </p:blipFill>
         <p:spPr>
           <a:xfrm>
-            <a:off x="778703" y="969264"/>
+            <a:off x="658782" y="969264"/>
             <a:ext cx="7586594" cy="2194560"/>
           </a:xfrm>
           <a:prstGeom prst="rect">
@@ -11426,6 +11510,13 @@
             <a:prstDash val="solid"/>
           </a:ln>
         </p:spPr>
+        <p:txBody>
+          <a:bodyPr/>
+          <a:lstStyle/>
+          <a:p>
+            <a:endParaRPr lang="en-VN"/>
+          </a:p>
+        </p:txBody>
       </p:sp>
       <p:sp>
         <p:nvSpPr>
@@ -11448,7 +11539,7 @@
           <a:bodyPr wrap="square" rtlCol="0" anchor="ctr"/>
           <a:lstStyle/>
           <a:p>
-            <a:pPr indent="0" marL="0">
+            <a:pPr marL="0" indent="0">
               <a:buNone/>
             </a:pPr>
             <a:r>
@@ -11484,7 +11575,7 @@
           <a:bodyPr wrap="square" rtlCol="0" anchor="ctr"/>
           <a:lstStyle/>
           <a:p>
-            <a:pPr indent="0" marL="0">
+            <a:pPr marL="0" indent="0">
               <a:buNone/>
             </a:pPr>
             <a:r>
@@ -11501,7 +11592,7 @@
             <a:endParaRPr lang="en-US" sz="850" dirty="0"/>
           </a:p>
           <a:p>
-            <a:pPr indent="0" marL="0">
+            <a:pPr marL="0" indent="0">
               <a:buNone/>
             </a:pPr>
             <a:r>
@@ -11542,7 +11633,7 @@
           </a:bodyPr>
           <a:lstStyle/>
           <a:p>
-            <a:pPr indent="0" marL="0">
+            <a:pPr marL="0" indent="0">
               <a:lnSpc>
                 <a:spcPct val="115000"/>
               </a:lnSpc>
@@ -11559,7 +11650,7 @@
             <a:endParaRPr lang="en-US" sz="820" dirty="0"/>
           </a:p>
           <a:p>
-            <a:pPr indent="0" marL="0">
+            <a:pPr marL="0" indent="0">
               <a:lnSpc>
                 <a:spcPct val="115000"/>
               </a:lnSpc>
@@ -11601,6 +11692,13 @@
             <a:prstDash val="solid"/>
           </a:ln>
         </p:spPr>
+        <p:txBody>
+          <a:bodyPr/>
+          <a:lstStyle/>
+          <a:p>
+            <a:endParaRPr lang="en-VN"/>
+          </a:p>
+        </p:txBody>
       </p:sp>
       <p:sp>
         <p:nvSpPr>
@@ -11623,7 +11721,7 @@
           <a:bodyPr wrap="square" rtlCol="0" anchor="ctr"/>
           <a:lstStyle/>
           <a:p>
-            <a:pPr indent="0" marL="0">
+            <a:pPr marL="0" indent="0">
               <a:buNone/>
             </a:pPr>
             <a:r>
@@ -11659,7 +11757,7 @@
           <a:bodyPr wrap="square" rtlCol="0" anchor="ctr"/>
           <a:lstStyle/>
           <a:p>
-            <a:pPr indent="0" marL="0">
+            <a:pPr marL="0" indent="0">
               <a:buNone/>
             </a:pPr>
             <a:r>
@@ -11676,7 +11774,7 @@
             <a:endParaRPr lang="en-US" sz="850" dirty="0"/>
           </a:p>
           <a:p>
-            <a:pPr indent="0" marL="0">
+            <a:pPr marL="0" indent="0">
               <a:buNone/>
             </a:pPr>
             <a:r>
@@ -11717,7 +11815,7 @@
           </a:bodyPr>
           <a:lstStyle/>
           <a:p>
-            <a:pPr indent="0" marL="0">
+            <a:pPr marL="0" indent="0">
               <a:lnSpc>
                 <a:spcPct val="115000"/>
               </a:lnSpc>
@@ -11734,7 +11832,7 @@
             <a:endParaRPr lang="en-US" sz="820" dirty="0"/>
           </a:p>
           <a:p>
-            <a:pPr indent="0" marL="0">
+            <a:pPr marL="0" indent="0">
               <a:lnSpc>
                 <a:spcPct val="115000"/>
               </a:lnSpc>
@@ -11776,6 +11874,13 @@
             <a:prstDash val="solid"/>
           </a:ln>
         </p:spPr>
+        <p:txBody>
+          <a:bodyPr/>
+          <a:lstStyle/>
+          <a:p>
+            <a:endParaRPr lang="en-VN"/>
+          </a:p>
+        </p:txBody>
       </p:sp>
       <p:sp>
         <p:nvSpPr>
@@ -11798,7 +11903,7 @@
           <a:bodyPr wrap="square" rtlCol="0" anchor="ctr"/>
           <a:lstStyle/>
           <a:p>
-            <a:pPr indent="0" marL="0">
+            <a:pPr marL="0" indent="0">
               <a:buNone/>
             </a:pPr>
             <a:r>
@@ -11834,7 +11939,7 @@
           <a:bodyPr wrap="square" rtlCol="0" anchor="ctr"/>
           <a:lstStyle/>
           <a:p>
-            <a:pPr indent="0" marL="0">
+            <a:pPr marL="0" indent="0">
               <a:buNone/>
             </a:pPr>
             <a:r>
@@ -11851,7 +11956,7 @@
             <a:endParaRPr lang="en-US" sz="850" dirty="0"/>
           </a:p>
           <a:p>
-            <a:pPr indent="0" marL="0">
+            <a:pPr marL="0" indent="0">
               <a:buNone/>
             </a:pPr>
             <a:r>
@@ -11892,7 +11997,7 @@
           </a:bodyPr>
           <a:lstStyle/>
           <a:p>
-            <a:pPr indent="0" marL="0">
+            <a:pPr marL="0" indent="0">
               <a:lnSpc>
                 <a:spcPct val="115000"/>
               </a:lnSpc>
@@ -11909,7 +12014,7 @@
             <a:endParaRPr lang="en-US" sz="820" dirty="0"/>
           </a:p>
           <a:p>
-            <a:pPr indent="0" marL="0">
+            <a:pPr marL="0" indent="0">
               <a:lnSpc>
                 <a:spcPct val="115000"/>
               </a:lnSpc>
@@ -11932,9 +12037,18 @@
   <p:clrMapOvr>
     <a:masterClrMapping/>
   </p:clrMapOvr>
-  <p:transition xmlns:p14="http://schemas.microsoft.com/office/powerpoint/2010/main" spd="slow" p14:dur="1500">
-    <p:split orient="vert"/>
-  </p:transition>
+  <mc:AlternateContent xmlns:mc="http://schemas.openxmlformats.org/markup-compatibility/2006">
+    <mc:Choice xmlns:p159="http://schemas.microsoft.com/office/powerpoint/2015/09/main" Requires="p159">
+      <p:transition xmlns:p14="http://schemas.microsoft.com/office/powerpoint/2010/main" spd="slow" p14:dur="2000">
+        <p159:morph option="byObject"/>
+      </p:transition>
+    </mc:Choice>
+    <mc:Fallback>
+      <p:transition spd="slow">
+        <p:fade/>
+      </p:transition>
+    </mc:Fallback>
+  </mc:AlternateContent>
 </p:sld>
 </file>
 
@@ -11946,6 +12060,7 @@
         <a:solidFill>
           <a:srgbClr val="FFFFFF"/>
         </a:solidFill>
+        <a:effectLst/>
       </p:bgPr>
     </p:bg>
     <p:spTree>
@@ -11983,7 +12098,7 @@
           <a:bodyPr wrap="square" rtlCol="0" anchor="ctr"/>
           <a:lstStyle/>
           <a:p>
-            <a:pPr algn="ctr" indent="0" marL="0">
+            <a:pPr marL="0" indent="0" algn="ctr">
               <a:buNone/>
             </a:pPr>
             <a:r>
@@ -12024,7 +12139,7 @@
           </a:bodyPr>
           <a:lstStyle/>
           <a:p>
-            <a:pPr indent="0" marL="0">
+            <a:pPr marL="0" indent="0">
               <a:buNone/>
             </a:pPr>
             <a:r>
@@ -12064,6 +12179,13 @@
             <a:prstDash val="solid"/>
           </a:ln>
         </p:spPr>
+        <p:txBody>
+          <a:bodyPr/>
+          <a:lstStyle/>
+          <a:p>
+            <a:endParaRPr lang="en-VN"/>
+          </a:p>
+        </p:txBody>
       </p:sp>
       <p:sp>
         <p:nvSpPr>
@@ -12086,7 +12208,7 @@
           <a:bodyPr wrap="square" rtlCol="0" anchor="ctr"/>
           <a:lstStyle/>
           <a:p>
-            <a:pPr indent="0" marL="0">
+            <a:pPr marL="0" indent="0">
               <a:buNone/>
             </a:pPr>
             <a:r>
@@ -12125,7 +12247,7 @@
           <a:bodyPr wrap="square" rtlCol="0" anchor="ctr"/>
           <a:lstStyle/>
           <a:p>
-            <a:pPr algn="r" indent="0" marL="0">
+            <a:pPr marL="0" indent="0" algn="r">
               <a:buNone/>
             </a:pPr>
             <a:r>
@@ -12145,14 +12267,14 @@
       </p:sp>
       <p:pic>
         <p:nvPicPr>
-          <p:cNvPr id="7" name="Image 0" descr="/Users/tcdtist/dev/uit/cs106/assignments/Final/draft/fraud-detection/slide/slide_assets/academic_feature_importance.png">    </p:cNvPr>
+          <p:cNvPr id="7" name="Image 0" descr="/Users/tcdtist/dev/uit/cs106/assignments/Final/draft/fraud-detection/slide/slide_assets/academic_feature_importance.png"/>
           <p:cNvPicPr>
             <a:picLocks noChangeAspect="1"/>
           </p:cNvPicPr>
           <p:nvPr/>
         </p:nvPicPr>
         <p:blipFill>
-          <a:blip r:embed="rId1"/>
+          <a:blip r:embed="rId3"/>
           <a:stretch>
             <a:fillRect/>
           </a:stretch>
@@ -12191,6 +12313,13 @@
             <a:prstDash val="solid"/>
           </a:ln>
         </p:spPr>
+        <p:txBody>
+          <a:bodyPr/>
+          <a:lstStyle/>
+          <a:p>
+            <a:endParaRPr lang="en-VN"/>
+          </a:p>
+        </p:txBody>
       </p:sp>
       <p:sp>
         <p:nvSpPr>
@@ -12213,7 +12342,7 @@
           <a:bodyPr wrap="square" rtlCol="0" anchor="ctr"/>
           <a:lstStyle/>
           <a:p>
-            <a:pPr indent="0" marL="0">
+            <a:pPr marL="0" indent="0">
               <a:buNone/>
             </a:pPr>
             <a:r>
@@ -12312,31 +12441,49 @@
           <p:nvPr>
             <p:extLst>
               <p:ext uri="{D42A27DB-BD31-4B8C-83A1-F6EECF244321}">
-                <p14:modId xmlns:p14="http://schemas.microsoft.com/office/powerpoint/2010/main" val="1579011935"/>
+                <p14:modId xmlns:p14="http://schemas.microsoft.com/office/powerpoint/2010/main" val="1670112556"/>
               </p:ext>
             </p:extLst>
           </p:nvPr>
         </p:nvGraphicFramePr>
         <p:xfrm>
-          <a:off x="4754880" y="987552"/>
-          <a:ext cx="3886200" cy="914400"/>
+          <a:off x="4754880" y="987551"/>
+          <a:ext cx="3886200" cy="1494028"/>
         </p:xfrm>
         <a:graphic>
           <a:graphicData uri="http://schemas.openxmlformats.org/drawingml/2006/table">
             <a:tbl>
               <a:tblPr/>
               <a:tblGrid>
-                <a:gridCol w="1476756"/>
-                <a:gridCol w="854964"/>
-                <a:gridCol w="1554480"/>
+                <a:gridCol w="1476756">
+                  <a:extLst>
+                    <a:ext uri="{9D8B030D-6E8A-4147-A177-3AD203B41FA5}">
+                      <a16:colId xmlns:a16="http://schemas.microsoft.com/office/drawing/2014/main" val="20000"/>
+                    </a:ext>
+                  </a:extLst>
+                </a:gridCol>
+                <a:gridCol w="854964">
+                  <a:extLst>
+                    <a:ext uri="{9D8B030D-6E8A-4147-A177-3AD203B41FA5}">
+                      <a16:colId xmlns:a16="http://schemas.microsoft.com/office/drawing/2014/main" val="20001"/>
+                    </a:ext>
+                  </a:extLst>
+                </a:gridCol>
+                <a:gridCol w="1554480">
+                  <a:extLst>
+                    <a:ext uri="{9D8B030D-6E8A-4147-A177-3AD203B41FA5}">
+                      <a16:colId xmlns:a16="http://schemas.microsoft.com/office/drawing/2014/main" val="20002"/>
+                    </a:ext>
+                  </a:extLst>
+                </a:gridCol>
               </a:tblGrid>
-              <a:tr h="0">
+              <a:tr h="222624">
                 <a:tc>
                   <a:txBody>
                     <a:bodyPr/>
                     <a:lstStyle/>
                     <a:p>
-                      <a:pPr algn="ctr" indent="0" marL="0">
+                      <a:pPr marL="0" indent="0" algn="ctr">
                         <a:buNone/>
                       </a:pPr>
                       <a:r>
@@ -12404,7 +12551,7 @@
                     <a:bodyPr/>
                     <a:lstStyle/>
                     <a:p>
-                      <a:pPr algn="ctr" indent="0" marL="0">
+                      <a:pPr marL="0" indent="0" algn="ctr">
                         <a:buNone/>
                       </a:pPr>
                       <a:r>
@@ -12472,7 +12619,7 @@
                     <a:bodyPr/>
                     <a:lstStyle/>
                     <a:p>
-                      <a:pPr algn="ctr" indent="0" marL="0">
+                      <a:pPr marL="0" indent="0" algn="ctr">
                         <a:buNone/>
                       </a:pPr>
                       <a:r>
@@ -12535,14 +12682,19 @@
                     </a:solidFill>
                   </a:tcPr>
                 </a:tc>
+                <a:extLst>
+                  <a:ext uri="{0D108BD9-81ED-4DB2-BD59-A6C34878D82A}">
+                    <a16:rowId xmlns:a16="http://schemas.microsoft.com/office/drawing/2014/main" val="10000"/>
+                  </a:ext>
+                </a:extLst>
               </a:tr>
-              <a:tr h="0">
+              <a:tr h="222624">
                 <a:tc>
                   <a:txBody>
                     <a:bodyPr/>
                     <a:lstStyle/>
                     <a:p>
-                      <a:pPr indent="0" marL="0">
+                      <a:pPr marL="0" indent="0">
                         <a:buNone/>
                       </a:pPr>
                       <a:r>
@@ -12610,7 +12762,7 @@
                     <a:bodyPr/>
                     <a:lstStyle/>
                     <a:p>
-                      <a:pPr indent="0" marL="0">
+                      <a:pPr marL="0" indent="0">
                         <a:buNone/>
                       </a:pPr>
                       <a:r>
@@ -12678,7 +12830,7 @@
                     <a:bodyPr/>
                     <a:lstStyle/>
                     <a:p>
-                      <a:pPr indent="0" marL="0">
+                      <a:pPr marL="0" indent="0">
                         <a:buNone/>
                       </a:pPr>
                       <a:r>
@@ -12741,14 +12893,19 @@
                     </a:solidFill>
                   </a:tcPr>
                 </a:tc>
+                <a:extLst>
+                  <a:ext uri="{0D108BD9-81ED-4DB2-BD59-A6C34878D82A}">
+                    <a16:rowId xmlns:a16="http://schemas.microsoft.com/office/drawing/2014/main" val="10001"/>
+                  </a:ext>
+                </a:extLst>
               </a:tr>
-              <a:tr h="0">
+              <a:tr h="222624">
                 <a:tc>
                   <a:txBody>
                     <a:bodyPr/>
                     <a:lstStyle/>
                     <a:p>
-                      <a:pPr indent="0" marL="0">
+                      <a:pPr marL="0" indent="0">
                         <a:buNone/>
                       </a:pPr>
                       <a:r>
@@ -12816,7 +12973,7 @@
                     <a:bodyPr/>
                     <a:lstStyle/>
                     <a:p>
-                      <a:pPr indent="0" marL="0">
+                      <a:pPr marL="0" indent="0">
                         <a:buNone/>
                       </a:pPr>
                       <a:r>
@@ -12884,7 +13041,7 @@
                     <a:bodyPr/>
                     <a:lstStyle/>
                     <a:p>
-                      <a:pPr indent="0" marL="0">
+                      <a:pPr marL="0" indent="0">
                         <a:buNone/>
                       </a:pPr>
                       <a:r>
@@ -12947,14 +13104,19 @@
                     </a:solidFill>
                   </a:tcPr>
                 </a:tc>
+                <a:extLst>
+                  <a:ext uri="{0D108BD9-81ED-4DB2-BD59-A6C34878D82A}">
+                    <a16:rowId xmlns:a16="http://schemas.microsoft.com/office/drawing/2014/main" val="10002"/>
+                  </a:ext>
+                </a:extLst>
               </a:tr>
-              <a:tr h="0">
+              <a:tr h="222624">
                 <a:tc>
                   <a:txBody>
                     <a:bodyPr/>
                     <a:lstStyle/>
                     <a:p>
-                      <a:pPr indent="0" marL="0">
+                      <a:pPr marL="0" indent="0">
                         <a:buNone/>
                       </a:pPr>
                       <a:r>
@@ -13022,7 +13184,7 @@
                     <a:bodyPr/>
                     <a:lstStyle/>
                     <a:p>
-                      <a:pPr indent="0" marL="0">
+                      <a:pPr marL="0" indent="0">
                         <a:buNone/>
                       </a:pPr>
                       <a:r>
@@ -13090,7 +13252,7 @@
                     <a:bodyPr/>
                     <a:lstStyle/>
                     <a:p>
-                      <a:pPr indent="0" marL="0">
+                      <a:pPr marL="0" indent="0">
                         <a:buNone/>
                       </a:pPr>
                       <a:r>
@@ -13153,14 +13315,19 @@
                     </a:solidFill>
                   </a:tcPr>
                 </a:tc>
+                <a:extLst>
+                  <a:ext uri="{0D108BD9-81ED-4DB2-BD59-A6C34878D82A}">
+                    <a16:rowId xmlns:a16="http://schemas.microsoft.com/office/drawing/2014/main" val="10003"/>
+                  </a:ext>
+                </a:extLst>
               </a:tr>
-              <a:tr h="0">
+              <a:tr h="380908">
                 <a:tc>
                   <a:txBody>
                     <a:bodyPr/>
                     <a:lstStyle/>
                     <a:p>
-                      <a:pPr indent="0" marL="0">
+                      <a:pPr marL="0" indent="0">
                         <a:buNone/>
                       </a:pPr>
                       <a:r>
@@ -13228,7 +13395,7 @@
                     <a:bodyPr/>
                     <a:lstStyle/>
                     <a:p>
-                      <a:pPr indent="0" marL="0">
+                      <a:pPr marL="0" indent="0">
                         <a:buNone/>
                       </a:pPr>
                       <a:r>
@@ -13296,7 +13463,7 @@
                     <a:bodyPr/>
                     <a:lstStyle/>
                     <a:p>
-                      <a:pPr indent="0" marL="0">
+                      <a:pPr marL="0" indent="0">
                         <a:buNone/>
                       </a:pPr>
                       <a:r>
@@ -13359,14 +13526,19 @@
                     </a:solidFill>
                   </a:tcPr>
                 </a:tc>
+                <a:extLst>
+                  <a:ext uri="{0D108BD9-81ED-4DB2-BD59-A6C34878D82A}">
+                    <a16:rowId xmlns:a16="http://schemas.microsoft.com/office/drawing/2014/main" val="10004"/>
+                  </a:ext>
+                </a:extLst>
               </a:tr>
-              <a:tr h="0">
+              <a:tr h="222624">
                 <a:tc>
                   <a:txBody>
                     <a:bodyPr/>
                     <a:lstStyle/>
                     <a:p>
-                      <a:pPr indent="0" marL="0">
+                      <a:pPr marL="0" indent="0">
                         <a:buNone/>
                       </a:pPr>
                       <a:r>
@@ -13434,7 +13606,7 @@
                     <a:bodyPr/>
                     <a:lstStyle/>
                     <a:p>
-                      <a:pPr indent="0" marL="0">
+                      <a:pPr marL="0" indent="0">
                         <a:buNone/>
                       </a:pPr>
                       <a:r>
@@ -13502,7 +13674,7 @@
                     <a:bodyPr/>
                     <a:lstStyle/>
                     <a:p>
-                      <a:pPr indent="0" marL="0">
+                      <a:pPr marL="0" indent="0">
                         <a:buNone/>
                       </a:pPr>
                       <a:r>
@@ -13565,6 +13737,11 @@
                     </a:solidFill>
                   </a:tcPr>
                 </a:tc>
+                <a:extLst>
+                  <a:ext uri="{0D108BD9-81ED-4DB2-BD59-A6C34878D82A}">
+                    <a16:rowId xmlns:a16="http://schemas.microsoft.com/office/drawing/2014/main" val="10005"/>
+                  </a:ext>
+                </a:extLst>
               </a:tr>
             </a:tbl>
           </a:graphicData>
@@ -13594,6 +13771,13 @@
             <a:prstDash val="solid"/>
           </a:ln>
         </p:spPr>
+        <p:txBody>
+          <a:bodyPr/>
+          <a:lstStyle/>
+          <a:p>
+            <a:endParaRPr lang="en-VN"/>
+          </a:p>
+        </p:txBody>
       </p:sp>
       <p:sp>
         <p:nvSpPr>
@@ -13616,7 +13800,7 @@
           <a:bodyPr wrap="square" rtlCol="0" anchor="ctr"/>
           <a:lstStyle/>
           <a:p>
-            <a:pPr indent="0" marL="0">
+            <a:pPr marL="0" indent="0">
               <a:buNone/>
             </a:pPr>
             <a:r>
@@ -13735,9 +13919,18 @@
   <p:clrMapOvr>
     <a:masterClrMapping/>
   </p:clrMapOvr>
-  <p:transition xmlns:p14="http://schemas.microsoft.com/office/powerpoint/2010/main" spd="slow" p14:dur="1500">
-    <p:split orient="vert"/>
-  </p:transition>
+  <mc:AlternateContent xmlns:mc="http://schemas.openxmlformats.org/markup-compatibility/2006">
+    <mc:Choice xmlns:p159="http://schemas.microsoft.com/office/powerpoint/2015/09/main" Requires="p159">
+      <p:transition xmlns:p14="http://schemas.microsoft.com/office/powerpoint/2010/main" spd="slow" p14:dur="2000">
+        <p159:morph option="byObject"/>
+      </p:transition>
+    </mc:Choice>
+    <mc:Fallback>
+      <p:transition spd="slow">
+        <p:fade/>
+      </p:transition>
+    </mc:Fallback>
+  </mc:AlternateContent>
 </p:sld>
 </file>
 
@@ -13749,6 +13942,7 @@
         <a:solidFill>
           <a:srgbClr val="FFFFFF"/>
         </a:solidFill>
+        <a:effectLst/>
       </p:bgPr>
     </p:bg>
     <p:spTree>
@@ -13786,7 +13980,7 @@
           <a:bodyPr wrap="square" rtlCol="0" anchor="ctr"/>
           <a:lstStyle/>
           <a:p>
-            <a:pPr algn="ctr" indent="0" marL="0">
+            <a:pPr marL="0" indent="0" algn="ctr">
               <a:buNone/>
             </a:pPr>
             <a:r>
@@ -13827,7 +14021,7 @@
           </a:bodyPr>
           <a:lstStyle/>
           <a:p>
-            <a:pPr indent="0" marL="0">
+            <a:pPr marL="0" indent="0">
               <a:buNone/>
             </a:pPr>
             <a:r>
@@ -13867,6 +14061,13 @@
             <a:prstDash val="solid"/>
           </a:ln>
         </p:spPr>
+        <p:txBody>
+          <a:bodyPr/>
+          <a:lstStyle/>
+          <a:p>
+            <a:endParaRPr lang="en-VN"/>
+          </a:p>
+        </p:txBody>
       </p:sp>
       <p:sp>
         <p:nvSpPr>
@@ -13889,7 +14090,7 @@
           <a:bodyPr wrap="square" rtlCol="0" anchor="ctr"/>
           <a:lstStyle/>
           <a:p>
-            <a:pPr indent="0" marL="0">
+            <a:pPr marL="0" indent="0">
               <a:buNone/>
             </a:pPr>
             <a:r>
@@ -13928,7 +14129,7 @@
           <a:bodyPr wrap="square" rtlCol="0" anchor="ctr"/>
           <a:lstStyle/>
           <a:p>
-            <a:pPr algn="r" indent="0" marL="0">
+            <a:pPr marL="0" indent="0" algn="r">
               <a:buNone/>
             </a:pPr>
             <a:r>
@@ -13948,14 +14149,14 @@
       </p:sp>
       <p:pic>
         <p:nvPicPr>
-          <p:cNvPr id="7" name="Image 0" descr="/Users/tcdtist/dev/uit/cs106/assignments/Final/draft/fraud-detection/slide/slide_assets/academic_autoencoder_dist.png">    </p:cNvPr>
+          <p:cNvPr id="7" name="Image 0" descr="/Users/tcdtist/dev/uit/cs106/assignments/Final/draft/fraud-detection/slide/slide_assets/academic_autoencoder_dist.png"/>
           <p:cNvPicPr>
             <a:picLocks noChangeAspect="1"/>
           </p:cNvPicPr>
           <p:nvPr/>
         </p:nvPicPr>
         <p:blipFill>
-          <a:blip r:embed="rId1"/>
+          <a:blip r:embed="rId3"/>
           <a:stretch>
             <a:fillRect/>
           </a:stretch>
@@ -13994,6 +14195,13 @@
             <a:prstDash val="solid"/>
           </a:ln>
         </p:spPr>
+        <p:txBody>
+          <a:bodyPr/>
+          <a:lstStyle/>
+          <a:p>
+            <a:endParaRPr lang="en-VN"/>
+          </a:p>
+        </p:txBody>
       </p:sp>
       <p:sp>
         <p:nvSpPr>
@@ -14016,7 +14224,7 @@
           <a:bodyPr wrap="square" rtlCol="0" anchor="ctr"/>
           <a:lstStyle/>
           <a:p>
-            <a:pPr indent="0" marL="0">
+            <a:pPr marL="0" indent="0">
               <a:buNone/>
             </a:pPr>
             <a:r>
@@ -14115,32 +14323,56 @@
           <p:nvPr>
             <p:extLst>
               <p:ext uri="{D42A27DB-BD31-4B8C-83A1-F6EECF244321}">
-                <p14:modId xmlns:p14="http://schemas.microsoft.com/office/powerpoint/2010/main" val="1579011935"/>
+                <p14:modId xmlns:p14="http://schemas.microsoft.com/office/powerpoint/2010/main" val="2618080533"/>
               </p:ext>
             </p:extLst>
           </p:nvPr>
         </p:nvGraphicFramePr>
         <p:xfrm>
-          <a:off x="4754880" y="987552"/>
-          <a:ext cx="3886200" cy="914400"/>
+          <a:off x="4754880" y="987551"/>
+          <a:ext cx="3886200" cy="1110870"/>
         </p:xfrm>
         <a:graphic>
           <a:graphicData uri="http://schemas.openxmlformats.org/drawingml/2006/table">
             <a:tbl>
               <a:tblPr/>
               <a:tblGrid>
-                <a:gridCol w="1088136"/>
-                <a:gridCol w="932688"/>
-                <a:gridCol w="932688"/>
-                <a:gridCol w="932688"/>
+                <a:gridCol w="1088136">
+                  <a:extLst>
+                    <a:ext uri="{9D8B030D-6E8A-4147-A177-3AD203B41FA5}">
+                      <a16:colId xmlns:a16="http://schemas.microsoft.com/office/drawing/2014/main" val="20000"/>
+                    </a:ext>
+                  </a:extLst>
+                </a:gridCol>
+                <a:gridCol w="932688">
+                  <a:extLst>
+                    <a:ext uri="{9D8B030D-6E8A-4147-A177-3AD203B41FA5}">
+                      <a16:colId xmlns:a16="http://schemas.microsoft.com/office/drawing/2014/main" val="20001"/>
+                    </a:ext>
+                  </a:extLst>
+                </a:gridCol>
+                <a:gridCol w="932688">
+                  <a:extLst>
+                    <a:ext uri="{9D8B030D-6E8A-4147-A177-3AD203B41FA5}">
+                      <a16:colId xmlns:a16="http://schemas.microsoft.com/office/drawing/2014/main" val="20002"/>
+                    </a:ext>
+                  </a:extLst>
+                </a:gridCol>
+                <a:gridCol w="932688">
+                  <a:extLst>
+                    <a:ext uri="{9D8B030D-6E8A-4147-A177-3AD203B41FA5}">
+                      <a16:colId xmlns:a16="http://schemas.microsoft.com/office/drawing/2014/main" val="20003"/>
+                    </a:ext>
+                  </a:extLst>
+                </a:gridCol>
               </a:tblGrid>
-              <a:tr h="0">
+              <a:tr h="222174">
                 <a:tc>
                   <a:txBody>
                     <a:bodyPr/>
                     <a:lstStyle/>
                     <a:p>
-                      <a:pPr algn="ctr" indent="0" marL="0">
+                      <a:pPr marL="0" indent="0" algn="ctr">
                         <a:buNone/>
                       </a:pPr>
                       <a:r>
@@ -14208,7 +14440,7 @@
                     <a:bodyPr/>
                     <a:lstStyle/>
                     <a:p>
-                      <a:pPr algn="ctr" indent="0" marL="0">
+                      <a:pPr marL="0" indent="0" algn="ctr">
                         <a:buNone/>
                       </a:pPr>
                       <a:r>
@@ -14276,7 +14508,7 @@
                     <a:bodyPr/>
                     <a:lstStyle/>
                     <a:p>
-                      <a:pPr algn="ctr" indent="0" marL="0">
+                      <a:pPr marL="0" indent="0" algn="ctr">
                         <a:buNone/>
                       </a:pPr>
                       <a:r>
@@ -14344,7 +14576,7 @@
                     <a:bodyPr/>
                     <a:lstStyle/>
                     <a:p>
-                      <a:pPr algn="ctr" indent="0" marL="0">
+                      <a:pPr marL="0" indent="0" algn="ctr">
                         <a:buNone/>
                       </a:pPr>
                       <a:r>
@@ -14407,14 +14639,19 @@
                     </a:solidFill>
                   </a:tcPr>
                 </a:tc>
+                <a:extLst>
+                  <a:ext uri="{0D108BD9-81ED-4DB2-BD59-A6C34878D82A}">
+                    <a16:rowId xmlns:a16="http://schemas.microsoft.com/office/drawing/2014/main" val="10000"/>
+                  </a:ext>
+                </a:extLst>
               </a:tr>
-              <a:tr h="0">
+              <a:tr h="222174">
                 <a:tc>
                   <a:txBody>
                     <a:bodyPr/>
                     <a:lstStyle/>
                     <a:p>
-                      <a:pPr indent="0" marL="0">
+                      <a:pPr marL="0" indent="0">
                         <a:buNone/>
                       </a:pPr>
                       <a:r>
@@ -14482,7 +14719,7 @@
                     <a:bodyPr/>
                     <a:lstStyle/>
                     <a:p>
-                      <a:pPr indent="0" marL="0">
+                      <a:pPr marL="0" indent="0">
                         <a:buNone/>
                       </a:pPr>
                       <a:r>
@@ -14550,7 +14787,7 @@
                     <a:bodyPr/>
                     <a:lstStyle/>
                     <a:p>
-                      <a:pPr indent="0" marL="0">
+                      <a:pPr marL="0" indent="0">
                         <a:buNone/>
                       </a:pPr>
                       <a:r>
@@ -14618,7 +14855,7 @@
                     <a:bodyPr/>
                     <a:lstStyle/>
                     <a:p>
-                      <a:pPr indent="0" marL="0">
+                      <a:pPr marL="0" indent="0">
                         <a:buNone/>
                       </a:pPr>
                       <a:r>
@@ -14681,14 +14918,19 @@
                     </a:solidFill>
                   </a:tcPr>
                 </a:tc>
+                <a:extLst>
+                  <a:ext uri="{0D108BD9-81ED-4DB2-BD59-A6C34878D82A}">
+                    <a16:rowId xmlns:a16="http://schemas.microsoft.com/office/drawing/2014/main" val="10001"/>
+                  </a:ext>
+                </a:extLst>
               </a:tr>
-              <a:tr h="0">
+              <a:tr h="222174">
                 <a:tc>
                   <a:txBody>
                     <a:bodyPr/>
                     <a:lstStyle/>
                     <a:p>
-                      <a:pPr indent="0" marL="0">
+                      <a:pPr marL="0" indent="0">
                         <a:buNone/>
                       </a:pPr>
                       <a:r>
@@ -14756,7 +14998,7 @@
                     <a:bodyPr/>
                     <a:lstStyle/>
                     <a:p>
-                      <a:pPr indent="0" marL="0">
+                      <a:pPr marL="0" indent="0">
                         <a:buNone/>
                       </a:pPr>
                       <a:r>
@@ -14824,7 +15066,7 @@
                     <a:bodyPr/>
                     <a:lstStyle/>
                     <a:p>
-                      <a:pPr indent="0" marL="0">
+                      <a:pPr marL="0" indent="0">
                         <a:buNone/>
                       </a:pPr>
                       <a:r>
@@ -14892,7 +15134,7 @@
                     <a:bodyPr/>
                     <a:lstStyle/>
                     <a:p>
-                      <a:pPr indent="0" marL="0">
+                      <a:pPr marL="0" indent="0">
                         <a:buNone/>
                       </a:pPr>
                       <a:r>
@@ -14955,14 +15197,19 @@
                     </a:solidFill>
                   </a:tcPr>
                 </a:tc>
+                <a:extLst>
+                  <a:ext uri="{0D108BD9-81ED-4DB2-BD59-A6C34878D82A}">
+                    <a16:rowId xmlns:a16="http://schemas.microsoft.com/office/drawing/2014/main" val="10002"/>
+                  </a:ext>
+                </a:extLst>
               </a:tr>
-              <a:tr h="0">
+              <a:tr h="222174">
                 <a:tc>
                   <a:txBody>
                     <a:bodyPr/>
                     <a:lstStyle/>
                     <a:p>
-                      <a:pPr indent="0" marL="0">
+                      <a:pPr marL="0" indent="0">
                         <a:buNone/>
                       </a:pPr>
                       <a:r>
@@ -15030,7 +15277,7 @@
                     <a:bodyPr/>
                     <a:lstStyle/>
                     <a:p>
-                      <a:pPr indent="0" marL="0">
+                      <a:pPr marL="0" indent="0">
                         <a:buNone/>
                       </a:pPr>
                       <a:r>
@@ -15098,7 +15345,7 @@
                     <a:bodyPr/>
                     <a:lstStyle/>
                     <a:p>
-                      <a:pPr indent="0" marL="0">
+                      <a:pPr marL="0" indent="0">
                         <a:buNone/>
                       </a:pPr>
                       <a:r>
@@ -15166,7 +15413,7 @@
                     <a:bodyPr/>
                     <a:lstStyle/>
                     <a:p>
-                      <a:pPr indent="0" marL="0">
+                      <a:pPr marL="0" indent="0">
                         <a:buNone/>
                       </a:pPr>
                       <a:r>
@@ -15229,14 +15476,19 @@
                     </a:solidFill>
                   </a:tcPr>
                 </a:tc>
+                <a:extLst>
+                  <a:ext uri="{0D108BD9-81ED-4DB2-BD59-A6C34878D82A}">
+                    <a16:rowId xmlns:a16="http://schemas.microsoft.com/office/drawing/2014/main" val="10003"/>
+                  </a:ext>
+                </a:extLst>
               </a:tr>
-              <a:tr h="0">
+              <a:tr h="222174">
                 <a:tc>
                   <a:txBody>
                     <a:bodyPr/>
                     <a:lstStyle/>
                     <a:p>
-                      <a:pPr indent="0" marL="0">
+                      <a:pPr marL="0" indent="0">
                         <a:buNone/>
                       </a:pPr>
                       <a:r>
@@ -15304,7 +15556,7 @@
                     <a:bodyPr/>
                     <a:lstStyle/>
                     <a:p>
-                      <a:pPr indent="0" marL="0">
+                      <a:pPr marL="0" indent="0">
                         <a:buNone/>
                       </a:pPr>
                       <a:r>
@@ -15372,7 +15624,7 @@
                     <a:bodyPr/>
                     <a:lstStyle/>
                     <a:p>
-                      <a:pPr indent="0" marL="0">
+                      <a:pPr marL="0" indent="0">
                         <a:buNone/>
                       </a:pPr>
                       <a:r>
@@ -15440,7 +15692,7 @@
                     <a:bodyPr/>
                     <a:lstStyle/>
                     <a:p>
-                      <a:pPr indent="0" marL="0">
+                      <a:pPr marL="0" indent="0">
                         <a:buNone/>
                       </a:pPr>
                       <a:r>
@@ -15503,6 +15755,11 @@
                     </a:solidFill>
                   </a:tcPr>
                 </a:tc>
+                <a:extLst>
+                  <a:ext uri="{0D108BD9-81ED-4DB2-BD59-A6C34878D82A}">
+                    <a16:rowId xmlns:a16="http://schemas.microsoft.com/office/drawing/2014/main" val="10004"/>
+                  </a:ext>
+                </a:extLst>
               </a:tr>
             </a:tbl>
           </a:graphicData>
@@ -15532,6 +15789,13 @@
             <a:prstDash val="solid"/>
           </a:ln>
         </p:spPr>
+        <p:txBody>
+          <a:bodyPr/>
+          <a:lstStyle/>
+          <a:p>
+            <a:endParaRPr lang="en-VN"/>
+          </a:p>
+        </p:txBody>
       </p:sp>
       <p:sp>
         <p:nvSpPr>
@@ -15554,7 +15818,7 @@
           <a:bodyPr wrap="square" rtlCol="0" anchor="ctr"/>
           <a:lstStyle/>
           <a:p>
-            <a:pPr indent="0" marL="0">
+            <a:pPr marL="0" indent="0">
               <a:buNone/>
             </a:pPr>
             <a:r>
@@ -15673,9 +15937,18 @@
   <p:clrMapOvr>
     <a:masterClrMapping/>
   </p:clrMapOvr>
-  <p:transition xmlns:p14="http://schemas.microsoft.com/office/powerpoint/2010/main" spd="slow" p14:dur="1500">
-    <p:split orient="vert"/>
-  </p:transition>
+  <mc:AlternateContent xmlns:mc="http://schemas.openxmlformats.org/markup-compatibility/2006">
+    <mc:Choice xmlns:p159="http://schemas.microsoft.com/office/powerpoint/2015/09/main" Requires="p159">
+      <p:transition xmlns:p14="http://schemas.microsoft.com/office/powerpoint/2010/main" spd="slow" p14:dur="2000">
+        <p159:morph option="byObject"/>
+      </p:transition>
+    </mc:Choice>
+    <mc:Fallback>
+      <p:transition spd="slow">
+        <p:fade/>
+      </p:transition>
+    </mc:Fallback>
+  </mc:AlternateContent>
 </p:sld>
 </file>
 
@@ -15687,6 +15960,7 @@
         <a:solidFill>
           <a:srgbClr val="1E295C"/>
         </a:solidFill>
+        <a:effectLst/>
       </p:bgPr>
     </p:bg>
     <p:spTree>
@@ -15724,7 +15998,7 @@
           <a:bodyPr wrap="square" rtlCol="0" anchor="ctr"/>
           <a:lstStyle/>
           <a:p>
-            <a:pPr algn="ctr" indent="0" marL="0">
+            <a:pPr marL="0" indent="0" algn="ctr">
               <a:buNone/>
             </a:pPr>
             <a:r>
@@ -15768,6 +16042,13 @@
             <a:prstDash val="solid"/>
           </a:ln>
         </p:spPr>
+        <p:txBody>
+          <a:bodyPr/>
+          <a:lstStyle/>
+          <a:p>
+            <a:endParaRPr lang="en-VN"/>
+          </a:p>
+        </p:txBody>
       </p:sp>
       <p:sp>
         <p:nvSpPr>
@@ -15790,7 +16071,7 @@
           <a:bodyPr wrap="square" rtlCol="0" anchor="ctr"/>
           <a:lstStyle/>
           <a:p>
-            <a:pPr algn="ctr" indent="0" marL="0">
+            <a:pPr marL="0" indent="0" algn="ctr">
               <a:buNone/>
             </a:pPr>
             <a:r>
@@ -15831,7 +16112,7 @@
           </a:bodyPr>
           <a:lstStyle/>
           <a:p>
-            <a:pPr algn="ctr" indent="0" marL="0">
+            <a:pPr marL="0" indent="0" algn="ctr">
               <a:buNone/>
             </a:pPr>
             <a:r>
@@ -15871,6 +16152,13 @@
             <a:prstDash val="solid"/>
           </a:ln>
         </p:spPr>
+        <p:txBody>
+          <a:bodyPr/>
+          <a:lstStyle/>
+          <a:p>
+            <a:endParaRPr lang="en-VN"/>
+          </a:p>
+        </p:txBody>
       </p:sp>
       <p:sp>
         <p:nvSpPr>
@@ -15898,6 +16186,13 @@
             <a:prstDash val="solid"/>
           </a:ln>
         </p:spPr>
+        <p:txBody>
+          <a:bodyPr/>
+          <a:lstStyle/>
+          <a:p>
+            <a:endParaRPr lang="en-VN"/>
+          </a:p>
+        </p:txBody>
       </p:sp>
       <p:sp>
         <p:nvSpPr>
@@ -16000,9 +16295,18 @@
   <p:clrMapOvr>
     <a:masterClrMapping/>
   </p:clrMapOvr>
-  <p:transition xmlns:p14="http://schemas.microsoft.com/office/powerpoint/2010/main" spd="slow" p14:dur="1500">
-    <p:split orient="vert"/>
-  </p:transition>
+  <mc:AlternateContent xmlns:mc="http://schemas.openxmlformats.org/markup-compatibility/2006">
+    <mc:Choice xmlns:p14="http://schemas.microsoft.com/office/powerpoint/2010/main" Requires="p14">
+      <p:transition spd="slow" p14:dur="1200">
+        <p14:prism/>
+      </p:transition>
+    </mc:Choice>
+    <mc:Fallback>
+      <p:transition spd="slow">
+        <p:fade/>
+      </p:transition>
+    </mc:Fallback>
+  </mc:AlternateContent>
 </p:sld>
 </file>
 
@@ -16014,6 +16318,7 @@
         <a:solidFill>
           <a:srgbClr val="FFFFFF"/>
         </a:solidFill>
+        <a:effectLst/>
       </p:bgPr>
     </p:bg>
     <p:spTree>
@@ -16051,7 +16356,7 @@
           <a:bodyPr wrap="square" rtlCol="0" anchor="ctr"/>
           <a:lstStyle/>
           <a:p>
-            <a:pPr algn="ctr" indent="0" marL="0">
+            <a:pPr marL="0" indent="0" algn="ctr">
               <a:buNone/>
             </a:pPr>
             <a:r>
@@ -16092,7 +16397,7 @@
           </a:bodyPr>
           <a:lstStyle/>
           <a:p>
-            <a:pPr indent="0" marL="0">
+            <a:pPr marL="0" indent="0">
               <a:buNone/>
             </a:pPr>
             <a:r>
@@ -16132,6 +16437,13 @@
             <a:prstDash val="solid"/>
           </a:ln>
         </p:spPr>
+        <p:txBody>
+          <a:bodyPr/>
+          <a:lstStyle/>
+          <a:p>
+            <a:endParaRPr lang="en-VN"/>
+          </a:p>
+        </p:txBody>
       </p:sp>
       <p:sp>
         <p:nvSpPr>
@@ -16154,7 +16466,7 @@
           <a:bodyPr wrap="square" rtlCol="0" anchor="ctr"/>
           <a:lstStyle/>
           <a:p>
-            <a:pPr indent="0" marL="0">
+            <a:pPr marL="0" indent="0">
               <a:buNone/>
             </a:pPr>
             <a:r>
@@ -16193,7 +16505,7 @@
           <a:bodyPr wrap="square" rtlCol="0" anchor="ctr"/>
           <a:lstStyle/>
           <a:p>
-            <a:pPr algn="r" indent="0" marL="0">
+            <a:pPr marL="0" indent="0" algn="r">
               <a:buNone/>
             </a:pPr>
             <a:r>
@@ -16230,6 +16542,13 @@
           </a:solidFill>
           <a:ln/>
         </p:spPr>
+        <p:txBody>
+          <a:bodyPr/>
+          <a:lstStyle/>
+          <a:p>
+            <a:endParaRPr lang="en-VN"/>
+          </a:p>
+        </p:txBody>
       </p:sp>
       <p:sp>
         <p:nvSpPr>
@@ -16252,7 +16571,7 @@
           <a:bodyPr wrap="square" rtlCol="0" anchor="ctr"/>
           <a:lstStyle/>
           <a:p>
-            <a:pPr algn="ctr" indent="0" marL="0">
+            <a:pPr marL="0" indent="0" algn="ctr">
               <a:buNone/>
             </a:pPr>
             <a:r>
@@ -16293,7 +16612,7 @@
           </a:bodyPr>
           <a:lstStyle/>
           <a:p>
-            <a:pPr indent="0" marL="0">
+            <a:pPr marL="0" indent="0">
               <a:buNone/>
             </a:pPr>
             <a:r>
@@ -16305,12 +16624,6 @@
               <a:t>Giới thiệu &amp; Phát biểu Bài toán
 </a:t>
             </a:r>
-            <a:pPr indent="0" marL="0">
-              <a:lnSpc>
-                <a:spcPct val="115000"/>
-              </a:lnSpc>
-              <a:buNone/>
-            </a:pPr>
             <a:r>
               <a:rPr lang="en-US" sz="1000" dirty="0">
                 <a:solidFill>
@@ -16342,6 +16655,13 @@
           </a:solidFill>
           <a:ln/>
         </p:spPr>
+        <p:txBody>
+          <a:bodyPr/>
+          <a:lstStyle/>
+          <a:p>
+            <a:endParaRPr lang="en-VN"/>
+          </a:p>
+        </p:txBody>
       </p:sp>
       <p:sp>
         <p:nvSpPr>
@@ -16364,7 +16684,7 @@
           <a:bodyPr wrap="square" rtlCol="0" anchor="ctr"/>
           <a:lstStyle/>
           <a:p>
-            <a:pPr algn="ctr" indent="0" marL="0">
+            <a:pPr marL="0" indent="0" algn="ctr">
               <a:buNone/>
             </a:pPr>
             <a:r>
@@ -16405,7 +16725,7 @@
           </a:bodyPr>
           <a:lstStyle/>
           <a:p>
-            <a:pPr indent="0" marL="0">
+            <a:pPr marL="0" indent="0">
               <a:buNone/>
             </a:pPr>
             <a:r>
@@ -16417,12 +16737,6 @@
               <a:t>Phân tích Khám phá Dữ liệu &amp; Kỹ thuật Đặc trưng
 </a:t>
             </a:r>
-            <a:pPr indent="0" marL="0">
-              <a:lnSpc>
-                <a:spcPct val="115000"/>
-              </a:lnSpc>
-              <a:buNone/>
-            </a:pPr>
             <a:r>
               <a:rPr lang="en-US" sz="1000" dirty="0">
                 <a:solidFill>
@@ -16454,6 +16768,13 @@
           </a:solidFill>
           <a:ln/>
         </p:spPr>
+        <p:txBody>
+          <a:bodyPr/>
+          <a:lstStyle/>
+          <a:p>
+            <a:endParaRPr lang="en-VN"/>
+          </a:p>
+        </p:txBody>
       </p:sp>
       <p:sp>
         <p:nvSpPr>
@@ -16476,7 +16797,7 @@
           <a:bodyPr wrap="square" rtlCol="0" anchor="ctr"/>
           <a:lstStyle/>
           <a:p>
-            <a:pPr algn="ctr" indent="0" marL="0">
+            <a:pPr marL="0" indent="0" algn="ctr">
               <a:buNone/>
             </a:pPr>
             <a:r>
@@ -16517,7 +16838,7 @@
           </a:bodyPr>
           <a:lstStyle/>
           <a:p>
-            <a:pPr indent="0" marL="0">
+            <a:pPr marL="0" indent="0">
               <a:buNone/>
             </a:pPr>
             <a:r>
@@ -16529,12 +16850,6 @@
               <a:t>Phương pháp Đề xuất &amp; Kiến trúc Pipeline
 </a:t>
             </a:r>
-            <a:pPr indent="0" marL="0">
-              <a:lnSpc>
-                <a:spcPct val="115000"/>
-              </a:lnSpc>
-              <a:buNone/>
-            </a:pPr>
             <a:r>
               <a:rPr lang="en-US" sz="1000" dirty="0">
                 <a:solidFill>
@@ -16566,6 +16881,13 @@
           </a:solidFill>
           <a:ln/>
         </p:spPr>
+        <p:txBody>
+          <a:bodyPr/>
+          <a:lstStyle/>
+          <a:p>
+            <a:endParaRPr lang="en-VN"/>
+          </a:p>
+        </p:txBody>
       </p:sp>
       <p:sp>
         <p:nvSpPr>
@@ -16588,7 +16910,7 @@
           <a:bodyPr wrap="square" rtlCol="0" anchor="ctr"/>
           <a:lstStyle/>
           <a:p>
-            <a:pPr algn="ctr" indent="0" marL="0">
+            <a:pPr marL="0" indent="0" algn="ctr">
               <a:buNone/>
             </a:pPr>
             <a:r>
@@ -16629,7 +16951,7 @@
           </a:bodyPr>
           <a:lstStyle/>
           <a:p>
-            <a:pPr indent="0" marL="0">
+            <a:pPr marL="0" indent="0">
               <a:buNone/>
             </a:pPr>
             <a:r>
@@ -16641,12 +16963,6 @@
               <a:t>Kết quả Thực nghiệm &amp; Đánh giá So sánh
 </a:t>
             </a:r>
-            <a:pPr indent="0" marL="0">
-              <a:lnSpc>
-                <a:spcPct val="115000"/>
-              </a:lnSpc>
-              <a:buNone/>
-            </a:pPr>
             <a:r>
               <a:rPr lang="en-US" sz="1000" dirty="0">
                 <a:solidFill>
@@ -16678,6 +16994,13 @@
           </a:solidFill>
           <a:ln/>
         </p:spPr>
+        <p:txBody>
+          <a:bodyPr/>
+          <a:lstStyle/>
+          <a:p>
+            <a:endParaRPr lang="en-VN"/>
+          </a:p>
+        </p:txBody>
       </p:sp>
       <p:sp>
         <p:nvSpPr>
@@ -16700,7 +17023,7 @@
           <a:bodyPr wrap="square" rtlCol="0" anchor="ctr"/>
           <a:lstStyle/>
           <a:p>
-            <a:pPr algn="ctr" indent="0" marL="0">
+            <a:pPr marL="0" indent="0" algn="ctr">
               <a:buNone/>
             </a:pPr>
             <a:r>
@@ -16741,7 +17064,7 @@
           </a:bodyPr>
           <a:lstStyle/>
           <a:p>
-            <a:pPr indent="0" marL="0">
+            <a:pPr marL="0" indent="0">
               <a:buNone/>
             </a:pPr>
             <a:r>
@@ -16753,12 +17076,6 @@
               <a:t>Hệ thống Demo &amp; Định hướng Tương lai
 </a:t>
             </a:r>
-            <a:pPr indent="0" marL="0">
-              <a:lnSpc>
-                <a:spcPct val="115000"/>
-              </a:lnSpc>
-              <a:buNone/>
-            </a:pPr>
             <a:r>
               <a:rPr lang="en-US" sz="1000" dirty="0">
                 <a:solidFill>
@@ -16777,7 +17094,7 @@
     <a:masterClrMapping/>
   </p:clrMapOvr>
   <p:transition spd="slow">
-    <p:cover/>
+    <p:push dir="u"/>
   </p:transition>
 </p:sld>
 </file>
@@ -16790,6 +17107,7 @@
         <a:solidFill>
           <a:srgbClr val="FFFFFF"/>
         </a:solidFill>
+        <a:effectLst/>
       </p:bgPr>
     </p:bg>
     <p:spTree>
@@ -16827,7 +17145,7 @@
           <a:bodyPr wrap="square" rtlCol="0" anchor="ctr"/>
           <a:lstStyle/>
           <a:p>
-            <a:pPr algn="ctr" indent="0" marL="0">
+            <a:pPr marL="0" indent="0" algn="ctr">
               <a:buNone/>
             </a:pPr>
             <a:r>
@@ -16868,7 +17186,7 @@
           </a:bodyPr>
           <a:lstStyle/>
           <a:p>
-            <a:pPr indent="0" marL="0">
+            <a:pPr marL="0" indent="0">
               <a:buNone/>
             </a:pPr>
             <a:r>
@@ -16908,6 +17226,13 @@
             <a:prstDash val="solid"/>
           </a:ln>
         </p:spPr>
+        <p:txBody>
+          <a:bodyPr/>
+          <a:lstStyle/>
+          <a:p>
+            <a:endParaRPr lang="en-VN"/>
+          </a:p>
+        </p:txBody>
       </p:sp>
       <p:sp>
         <p:nvSpPr>
@@ -16930,7 +17255,7 @@
           <a:bodyPr wrap="square" rtlCol="0" anchor="ctr"/>
           <a:lstStyle/>
           <a:p>
-            <a:pPr indent="0" marL="0">
+            <a:pPr marL="0" indent="0">
               <a:buNone/>
             </a:pPr>
             <a:r>
@@ -16969,7 +17294,7 @@
           <a:bodyPr wrap="square" rtlCol="0" anchor="ctr"/>
           <a:lstStyle/>
           <a:p>
-            <a:pPr algn="r" indent="0" marL="0">
+            <a:pPr marL="0" indent="0" algn="r">
               <a:buNone/>
             </a:pPr>
             <a:r>
@@ -17013,6 +17338,13 @@
             <a:prstDash val="solid"/>
           </a:ln>
         </p:spPr>
+        <p:txBody>
+          <a:bodyPr/>
+          <a:lstStyle/>
+          <a:p>
+            <a:endParaRPr lang="en-VN"/>
+          </a:p>
+        </p:txBody>
       </p:sp>
       <p:sp>
         <p:nvSpPr>
@@ -17033,6 +17365,13 @@
           </a:solidFill>
           <a:ln/>
         </p:spPr>
+        <p:txBody>
+          <a:bodyPr/>
+          <a:lstStyle/>
+          <a:p>
+            <a:endParaRPr lang="en-VN"/>
+          </a:p>
+        </p:txBody>
       </p:sp>
       <p:sp>
         <p:nvSpPr>
@@ -17055,7 +17394,7 @@
           <a:bodyPr wrap="square" rtlCol="0" anchor="ctr"/>
           <a:lstStyle/>
           <a:p>
-            <a:pPr indent="0" marL="0">
+            <a:pPr marL="0" indent="0">
               <a:buNone/>
             </a:pPr>
             <a:r>
@@ -17097,6 +17436,13 @@
             <a:prstDash val="solid"/>
           </a:ln>
         </p:spPr>
+        <p:txBody>
+          <a:bodyPr/>
+          <a:lstStyle/>
+          <a:p>
+            <a:endParaRPr lang="en-VN"/>
+          </a:p>
+        </p:txBody>
       </p:sp>
       <p:sp>
         <p:nvSpPr>
@@ -17119,7 +17465,7 @@
           <a:bodyPr wrap="square" rtlCol="0" anchor="ctr"/>
           <a:lstStyle/>
           <a:p>
-            <a:pPr algn="ctr" indent="0" marL="0">
+            <a:pPr marL="0" indent="0" algn="ctr">
               <a:buNone/>
             </a:pPr>
             <a:r>
@@ -17155,7 +17501,7 @@
           <a:bodyPr wrap="square" rtlCol="0" anchor="ctr"/>
           <a:lstStyle/>
           <a:p>
-            <a:pPr algn="ctr" indent="0" marL="0">
+            <a:pPr marL="0" indent="0" algn="ctr">
               <a:lnSpc>
                 <a:spcPct val="120000"/>
               </a:lnSpc>
@@ -17175,7 +17521,7 @@
             <a:endParaRPr lang="en-US" sz="1000" dirty="0"/>
           </a:p>
           <a:p>
-            <a:pPr algn="ctr" indent="0" marL="0">
+            <a:pPr marL="0" indent="0" algn="ctr">
               <a:lnSpc>
                 <a:spcPct val="120000"/>
               </a:lnSpc>
@@ -17217,7 +17563,7 @@
           <a:bodyPr wrap="square" rtlCol="0" anchor="ctr"/>
           <a:lstStyle/>
           <a:p>
-            <a:pPr algn="ctr" indent="0" marL="0">
+            <a:pPr marL="0" indent="0" algn="ctr">
               <a:buNone/>
             </a:pPr>
             <a:r>
@@ -17261,6 +17607,13 @@
             <a:prstDash val="solid"/>
           </a:ln>
         </p:spPr>
+        <p:txBody>
+          <a:bodyPr/>
+          <a:lstStyle/>
+          <a:p>
+            <a:endParaRPr lang="en-VN"/>
+          </a:p>
+        </p:txBody>
       </p:sp>
       <p:sp>
         <p:nvSpPr>
@@ -17283,7 +17636,7 @@
           <a:bodyPr wrap="square" rtlCol="0" anchor="ctr"/>
           <a:lstStyle/>
           <a:p>
-            <a:pPr algn="ctr" indent="0" marL="0">
+            <a:pPr marL="0" indent="0" algn="ctr">
               <a:buNone/>
             </a:pPr>
             <a:r>
@@ -17325,6 +17678,13 @@
             <a:prstDash val="solid"/>
           </a:ln>
         </p:spPr>
+        <p:txBody>
+          <a:bodyPr/>
+          <a:lstStyle/>
+          <a:p>
+            <a:endParaRPr lang="en-VN"/>
+          </a:p>
+        </p:txBody>
       </p:sp>
       <p:sp>
         <p:nvSpPr>
@@ -17347,7 +17707,7 @@
           <a:bodyPr wrap="square" rtlCol="0" anchor="ctr"/>
           <a:lstStyle/>
           <a:p>
-            <a:pPr algn="ctr" indent="0" marL="0">
+            <a:pPr marL="0" indent="0" algn="ctr">
               <a:buNone/>
             </a:pPr>
             <a:r>
@@ -17389,6 +17749,13 @@
             <a:prstDash val="solid"/>
           </a:ln>
         </p:spPr>
+        <p:txBody>
+          <a:bodyPr/>
+          <a:lstStyle/>
+          <a:p>
+            <a:endParaRPr lang="en-VN"/>
+          </a:p>
+        </p:txBody>
       </p:sp>
       <p:sp>
         <p:nvSpPr>
@@ -17411,7 +17778,7 @@
           <a:bodyPr wrap="square" rtlCol="0" anchor="ctr"/>
           <a:lstStyle/>
           <a:p>
-            <a:pPr indent="0" marL="0">
+            <a:pPr marL="0" indent="0">
               <a:buNone/>
             </a:pPr>
             <a:r>
@@ -17573,6 +17940,13 @@
             <a:prstDash val="solid"/>
           </a:ln>
         </p:spPr>
+        <p:txBody>
+          <a:bodyPr/>
+          <a:lstStyle/>
+          <a:p>
+            <a:endParaRPr lang="en-VN"/>
+          </a:p>
+        </p:txBody>
       </p:sp>
       <p:sp>
         <p:nvSpPr>
@@ -17595,7 +17969,7 @@
           <a:bodyPr wrap="square" rtlCol="0" anchor="ctr"/>
           <a:lstStyle/>
           <a:p>
-            <a:pPr indent="0" marL="0">
+            <a:pPr marL="0" indent="0">
               <a:buNone/>
             </a:pPr>
             <a:r>
@@ -17714,9 +18088,18 @@
   <p:clrMapOvr>
     <a:masterClrMapping/>
   </p:clrMapOvr>
-  <p:transition spd="slow">
-    <p:wipe/>
-  </p:transition>
+  <mc:AlternateContent xmlns:mc="http://schemas.openxmlformats.org/markup-compatibility/2006">
+    <mc:Choice xmlns:p14="http://schemas.microsoft.com/office/powerpoint/2010/main" Requires="p14">
+      <p:transition spd="slow" p14:dur="1300">
+        <p14:pan dir="u"/>
+      </p:transition>
+    </mc:Choice>
+    <mc:Fallback>
+      <p:transition spd="slow">
+        <p:fade/>
+      </p:transition>
+    </mc:Fallback>
+  </mc:AlternateContent>
 </p:sld>
 </file>
 
@@ -17728,6 +18111,7 @@
         <a:solidFill>
           <a:srgbClr val="1E295C"/>
         </a:solidFill>
+        <a:effectLst/>
       </p:bgPr>
     </p:bg>
     <p:spTree>
@@ -17765,7 +18149,7 @@
           <a:bodyPr wrap="square" rtlCol="0" anchor="ctr"/>
           <a:lstStyle/>
           <a:p>
-            <a:pPr algn="ctr" indent="0" marL="0">
+            <a:pPr marL="0" indent="0" algn="ctr">
               <a:lnSpc>
                 <a:spcPct val="125000"/>
               </a:lnSpc>
@@ -17785,7 +18169,7 @@
             <a:endParaRPr lang="en-US" sz="2200" dirty="0"/>
           </a:p>
           <a:p>
-            <a:pPr algn="ctr" indent="0" marL="0">
+            <a:pPr marL="0" indent="0" algn="ctr">
               <a:lnSpc>
                 <a:spcPct val="125000"/>
               </a:lnSpc>
@@ -17814,7 +18198,7 @@
         </p:nvSpPr>
         <p:spPr>
           <a:xfrm>
-            <a:off x="502920" y="1325880"/>
+            <a:off x="502920" y="1389888"/>
             <a:ext cx="8138160" cy="256032"/>
           </a:xfrm>
           <a:prstGeom prst="rect">
@@ -17827,7 +18211,7 @@
           <a:bodyPr wrap="square" rtlCol="0" anchor="ctr"/>
           <a:lstStyle/>
           <a:p>
-            <a:pPr algn="ctr" indent="0" marL="0">
+            <a:pPr marL="0" indent="0" algn="ctr">
               <a:buNone/>
             </a:pPr>
             <a:r>
@@ -17869,6 +18253,13 @@
             <a:prstDash val="solid"/>
           </a:ln>
         </p:spPr>
+        <p:txBody>
+          <a:bodyPr/>
+          <a:lstStyle/>
+          <a:p>
+            <a:endParaRPr lang="en-VN"/>
+          </a:p>
+        </p:txBody>
       </p:sp>
       <p:sp>
         <p:nvSpPr>
@@ -17891,7 +18282,7 @@
           <a:bodyPr wrap="square" rtlCol="0" anchor="ctr"/>
           <a:lstStyle/>
           <a:p>
-            <a:pPr algn="ctr" indent="0" marL="0">
+            <a:pPr marL="0" indent="0" algn="ctr">
               <a:buNone/>
             </a:pPr>
             <a:r>
@@ -17932,162 +18323,166 @@
           </a:bodyPr>
           <a:lstStyle/>
           <a:p>
-            <a:pPr algn="l" indent="0" marL="0">
+            <a:pPr marL="0" indent="0" algn="l">
+              <a:lnSpc>
+                <a:spcPct val="150000"/>
+              </a:lnSpc>
+              <a:buNone/>
+            </a:pPr>
+            <a:r>
+              <a:rPr lang="en-US" sz="930" b="1" dirty="0">
+                <a:solidFill>
+                  <a:srgbClr val="60A5FA"/>
+                </a:solidFill>
+                <a:latin typeface="Segoe UI" pitchFamily="34" charset="0"/>
+                <a:ea typeface="Segoe UI" pitchFamily="34" charset="-122"/>
+                <a:cs typeface="Segoe UI" pitchFamily="34" charset="-120"/>
+              </a:rPr>
+              <a:t>• Mã nguồn Dự </a:t>
+            </a:r>
+            <a:r>
+              <a:rPr lang="en-US" sz="930" b="1" dirty="0" err="1">
+                <a:solidFill>
+                  <a:srgbClr val="60A5FA"/>
+                </a:solidFill>
+                <a:latin typeface="Segoe UI" pitchFamily="34" charset="0"/>
+                <a:ea typeface="Segoe UI" pitchFamily="34" charset="-122"/>
+                <a:cs typeface="Segoe UI" pitchFamily="34" charset="-120"/>
+              </a:rPr>
+              <a:t>án</a:t>
+            </a:r>
+            <a:r>
+              <a:rPr lang="en-US" sz="930" b="1" dirty="0">
+                <a:solidFill>
+                  <a:srgbClr val="60A5FA"/>
+                </a:solidFill>
+                <a:latin typeface="Segoe UI" pitchFamily="34" charset="0"/>
+                <a:ea typeface="Segoe UI" pitchFamily="34" charset="-122"/>
+                <a:cs typeface="Segoe UI" pitchFamily="34" charset="-120"/>
+              </a:rPr>
+              <a:t> (Public Repo): </a:t>
+            </a:r>
+            <a:r>
+              <a:rPr lang="en-US" sz="930" dirty="0">
+                <a:solidFill>
+                  <a:schemeClr val="bg1"/>
+                </a:solidFill>
+                <a:latin typeface="Segoe UI" pitchFamily="34" charset="0"/>
+                <a:ea typeface="Segoe UI" pitchFamily="34" charset="-122"/>
+                <a:cs typeface="Segoe UI" pitchFamily="34" charset="-120"/>
+              </a:rPr>
+              <a:t>https://github.com/uit-25730067-chithanh/CS106-Team09-Fraud-Detection</a:t>
+            </a:r>
+            <a:r>
+              <a:rPr lang="en-US" sz="930" b="1" dirty="0">
+                <a:solidFill>
+                  <a:srgbClr val="38BDF8"/>
+                </a:solidFill>
+                <a:latin typeface="Segoe UI" pitchFamily="34" charset="0"/>
+                <a:ea typeface="Segoe UI" pitchFamily="34" charset="-122"/>
+                <a:cs typeface="Segoe UI" pitchFamily="34" charset="-120"/>
+              </a:rPr>
+              <a:t>
+</a:t>
+            </a:r>
+            <a:r>
+              <a:rPr lang="en-US" sz="930" b="1" dirty="0">
+                <a:solidFill>
+                  <a:srgbClr val="60A5FA"/>
+                </a:solidFill>
+                <a:latin typeface="Segoe UI" pitchFamily="34" charset="0"/>
+                <a:ea typeface="Segoe UI" pitchFamily="34" charset="-122"/>
+                <a:cs typeface="Segoe UI" pitchFamily="34" charset="-120"/>
+              </a:rPr>
+              <a:t>• PaySim Simulator: </a:t>
+            </a:r>
+            <a:r>
+              <a:rPr lang="en-US" sz="930" dirty="0">
+                <a:solidFill>
+                  <a:srgbClr val="E2E8F0"/>
+                </a:solidFill>
+                <a:latin typeface="Segoe UI" pitchFamily="34" charset="0"/>
+                <a:ea typeface="Segoe UI" pitchFamily="34" charset="-122"/>
+                <a:cs typeface="Segoe UI" pitchFamily="34" charset="-120"/>
+              </a:rPr>
+              <a:t>E. A. Lopez-Rojas, A. Elmir, and S. Axelsson, "PaySim: A financial mobile money simulator for fraud detection," in Proc. 28th Eur. Model. Simul. Symp., 2016, pp. 249-255.
+</a:t>
+            </a:r>
+            <a:r>
+              <a:rPr lang="en-US" sz="930" b="1" dirty="0">
+                <a:solidFill>
+                  <a:srgbClr val="60A5FA"/>
+                </a:solidFill>
+                <a:latin typeface="Segoe UI" pitchFamily="34" charset="0"/>
+                <a:ea typeface="Segoe UI" pitchFamily="34" charset="-122"/>
+                <a:cs typeface="Segoe UI" pitchFamily="34" charset="-120"/>
+              </a:rPr>
+              <a:t>• XGBoost GBDT: </a:t>
+            </a:r>
+            <a:r>
+              <a:rPr lang="en-US" sz="930" dirty="0">
+                <a:solidFill>
+                  <a:srgbClr val="E2E8F0"/>
+                </a:solidFill>
+                <a:latin typeface="Segoe UI" pitchFamily="34" charset="0"/>
+                <a:ea typeface="Segoe UI" pitchFamily="34" charset="-122"/>
+                <a:cs typeface="Segoe UI" pitchFamily="34" charset="-120"/>
+              </a:rPr>
+              <a:t>T. Chen and C. Guestrin, "XGBoost: A scalable tree boosting system," in Proc. 22nd ACM SIGKDD, 2016, pp. 785-794.
+</a:t>
+            </a:r>
+            <a:r>
+              <a:rPr lang="en-US" sz="930" b="1" dirty="0">
+                <a:solidFill>
+                  <a:srgbClr val="60A5FA"/>
+                </a:solidFill>
+                <a:latin typeface="Segoe UI" pitchFamily="34" charset="0"/>
+                <a:ea typeface="Segoe UI" pitchFamily="34" charset="-122"/>
+                <a:cs typeface="Segoe UI" pitchFamily="34" charset="-120"/>
+              </a:rPr>
+              <a:t>• SMOTE Resampling: </a:t>
+            </a:r>
+            <a:r>
+              <a:rPr lang="en-US" sz="930" dirty="0">
+                <a:solidFill>
+                  <a:srgbClr val="E2E8F0"/>
+                </a:solidFill>
+                <a:latin typeface="Segoe UI" pitchFamily="34" charset="0"/>
+                <a:ea typeface="Segoe UI" pitchFamily="34" charset="-122"/>
+                <a:cs typeface="Segoe UI" pitchFamily="34" charset="-120"/>
+              </a:rPr>
+              <a:t>N. V. Chawla et al., "SMOTE: Synthetic minority over-sampling technique," J. Artif. Intell. Res., vol. 16, pp. 321-357, 2002.
+</a:t>
+            </a:r>
+          </a:p>
+          <a:p>
+            <a:pPr marL="0" indent="0" algn="ctr">
               <a:lnSpc>
                 <a:spcPct val="125000"/>
               </a:lnSpc>
               <a:buNone/>
             </a:pPr>
             <a:r>
-              <a:rPr lang="en-US" sz="930" b="1" dirty="0">
-                <a:solidFill>
-                  <a:srgbClr val="60A5FA"/>
+              <a:rPr lang="en-US" sz="930" i="1" dirty="0" err="1">
+                <a:solidFill>
+                  <a:srgbClr val="FCD34D"/>
                 </a:solidFill>
                 <a:latin typeface="Segoe UI" pitchFamily="34" charset="0"/>
                 <a:ea typeface="Segoe UI" pitchFamily="34" charset="-122"/>
                 <a:cs typeface="Segoe UI" pitchFamily="34" charset="-120"/>
               </a:rPr>
-              <a:t>• Mã nguồn Dự án (Official Repo): </a:t>
-            </a:r>
-            <a:pPr algn="l" indent="0" marL="0">
-              <a:lnSpc>
-                <a:spcPct val="125000"/>
-              </a:lnSpc>
-              <a:buNone/>
-            </a:pPr>
-            <a:r>
-              <a:rPr lang="en-US" sz="930" b="1" dirty="0">
-                <a:solidFill>
-                  <a:srgbClr val="38BDF8"/>
+              <a:t>Nhóm</a:t>
+            </a:r>
+            <a:r>
+              <a:rPr lang="en-US" sz="930" i="1" dirty="0">
+                <a:solidFill>
+                  <a:srgbClr val="FCD34D"/>
                 </a:solidFill>
                 <a:latin typeface="Segoe UI" pitchFamily="34" charset="0"/>
                 <a:ea typeface="Segoe UI" pitchFamily="34" charset="-122"/>
                 <a:cs typeface="Segoe UI" pitchFamily="34" charset="-120"/>
               </a:rPr>
-              <a:t>https://github.com/uit-25730067-chithanh/CS106-Team09-Fraud-Detection
-</a:t>
-            </a:r>
-            <a:pPr algn="l" indent="0" marL="0">
-              <a:lnSpc>
-                <a:spcPct val="125000"/>
-              </a:lnSpc>
-              <a:buNone/>
-            </a:pPr>
-            <a:r>
-              <a:rPr lang="en-US" sz="930" b="1" dirty="0">
-                <a:solidFill>
-                  <a:srgbClr val="60A5FA"/>
-                </a:solidFill>
-                <a:latin typeface="Segoe UI" pitchFamily="34" charset="0"/>
-                <a:ea typeface="Segoe UI" pitchFamily="34" charset="-122"/>
-                <a:cs typeface="Segoe UI" pitchFamily="34" charset="-120"/>
-              </a:rPr>
-              <a:t>• PaySim Simulator: </a:t>
-            </a:r>
-            <a:pPr algn="l" indent="0" marL="0">
-              <a:lnSpc>
-                <a:spcPct val="125000"/>
-              </a:lnSpc>
-              <a:buNone/>
-            </a:pPr>
-            <a:r>
-              <a:rPr lang="en-US" sz="930" dirty="0">
-                <a:solidFill>
-                  <a:srgbClr val="E2E8F0"/>
-                </a:solidFill>
-                <a:latin typeface="Segoe UI" pitchFamily="34" charset="0"/>
-                <a:ea typeface="Segoe UI" pitchFamily="34" charset="-122"/>
-                <a:cs typeface="Segoe UI" pitchFamily="34" charset="-120"/>
-              </a:rPr>
-              <a:t>E. A. Lopez-Rojas, A. Elmir, and S. Axelsson, "PaySim: A financial mobile money simulator for fraud detection," in Proc. 28th Eur. Model. Simul. Symp., 2016, pp. 249-255.
-</a:t>
-            </a:r>
-            <a:pPr algn="l" indent="0" marL="0">
-              <a:lnSpc>
-                <a:spcPct val="125000"/>
-              </a:lnSpc>
-              <a:buNone/>
-            </a:pPr>
-            <a:r>
-              <a:rPr lang="en-US" sz="930" b="1" dirty="0">
-                <a:solidFill>
-                  <a:srgbClr val="60A5FA"/>
-                </a:solidFill>
-                <a:latin typeface="Segoe UI" pitchFamily="34" charset="0"/>
-                <a:ea typeface="Segoe UI" pitchFamily="34" charset="-122"/>
-                <a:cs typeface="Segoe UI" pitchFamily="34" charset="-120"/>
-              </a:rPr>
-              <a:t>• XGBoost GBDT: </a:t>
-            </a:r>
-            <a:pPr algn="l" indent="0" marL="0">
-              <a:lnSpc>
-                <a:spcPct val="125000"/>
-              </a:lnSpc>
-              <a:buNone/>
-            </a:pPr>
-            <a:r>
-              <a:rPr lang="en-US" sz="930" dirty="0">
-                <a:solidFill>
-                  <a:srgbClr val="E2E8F0"/>
-                </a:solidFill>
-                <a:latin typeface="Segoe UI" pitchFamily="34" charset="0"/>
-                <a:ea typeface="Segoe UI" pitchFamily="34" charset="-122"/>
-                <a:cs typeface="Segoe UI" pitchFamily="34" charset="-120"/>
-              </a:rPr>
-              <a:t>T. Chen and C. Guestrin, "XGBoost: A scalable tree boosting system," in Proc. 22nd ACM SIGKDD, 2016, pp. 785-794.
-</a:t>
-            </a:r>
-            <a:pPr algn="l" indent="0" marL="0">
-              <a:lnSpc>
-                <a:spcPct val="125000"/>
-              </a:lnSpc>
-              <a:buNone/>
-            </a:pPr>
-            <a:r>
-              <a:rPr lang="en-US" sz="930" b="1" dirty="0">
-                <a:solidFill>
-                  <a:srgbClr val="60A5FA"/>
-                </a:solidFill>
-                <a:latin typeface="Segoe UI" pitchFamily="34" charset="0"/>
-                <a:ea typeface="Segoe UI" pitchFamily="34" charset="-122"/>
-                <a:cs typeface="Segoe UI" pitchFamily="34" charset="-120"/>
-              </a:rPr>
-              <a:t>• SMOTE Resampling: </a:t>
-            </a:r>
-            <a:pPr algn="l" indent="0" marL="0">
-              <a:lnSpc>
-                <a:spcPct val="125000"/>
-              </a:lnSpc>
-              <a:buNone/>
-            </a:pPr>
-            <a:r>
-              <a:rPr lang="en-US" sz="930" dirty="0">
-                <a:solidFill>
-                  <a:srgbClr val="E2E8F0"/>
-                </a:solidFill>
-                <a:latin typeface="Segoe UI" pitchFamily="34" charset="0"/>
-                <a:ea typeface="Segoe UI" pitchFamily="34" charset="-122"/>
-                <a:cs typeface="Segoe UI" pitchFamily="34" charset="-120"/>
-              </a:rPr>
-              <a:t>N. V. Chawla et al., "SMOTE: Synthetic minority over-sampling technique," J. Artif. Intell. Res., vol. 16, pp. 321-357, 2002.
-</a:t>
-            </a:r>
-            <a:pPr algn="l" indent="0" marL="0">
-              <a:lnSpc>
-                <a:spcPct val="125000"/>
-              </a:lnSpc>
-              <a:buNone/>
-            </a:pPr>
-            <a:r>
-              <a:rPr lang="en-US" sz="930" i="1" dirty="0">
-                <a:solidFill>
-                  <a:srgbClr val="FCD34D"/>
-                </a:solidFill>
-                <a:latin typeface="Segoe UI" pitchFamily="34" charset="0"/>
-                <a:ea typeface="Segoe UI" pitchFamily="34" charset="-122"/>
-                <a:cs typeface="Segoe UI" pitchFamily="34" charset="-120"/>
-              </a:rPr>
-              <a:t>Nhóm 09 rất mong nhận được những câu hỏi và góp ý quý báu từ Hội đồng!</a:t>
+              <a:t> 09 rất mong nhận được những câu hỏi và góp ý quý báu từ Hội đồng!</a:t>
             </a:r>
             <a:endParaRPr lang="en-US" sz="930" dirty="0"/>
           </a:p>
@@ -18098,9 +18493,18 @@
   <p:clrMapOvr>
     <a:masterClrMapping/>
   </p:clrMapOvr>
-  <p:transition spd="slow">
-    <p:wipe/>
-  </p:transition>
+  <mc:AlternateContent xmlns:mc="http://schemas.openxmlformats.org/markup-compatibility/2006">
+    <mc:Choice xmlns:p15="http://schemas.microsoft.com/office/powerpoint/2012/main" Requires="p15">
+      <p:transition xmlns:p14="http://schemas.microsoft.com/office/powerpoint/2010/main" spd="slow" p14:dur="1250">
+        <p15:prstTrans prst="airplane"/>
+      </p:transition>
+    </mc:Choice>
+    <mc:Fallback>
+      <p:transition spd="slow">
+        <p:fade/>
+      </p:transition>
+    </mc:Fallback>
+  </mc:AlternateContent>
 </p:sld>
 </file>
 
@@ -18112,6 +18516,7 @@
         <a:solidFill>
           <a:srgbClr val="1E295C"/>
         </a:solidFill>
+        <a:effectLst/>
       </p:bgPr>
     </p:bg>
     <p:spTree>
@@ -18149,7 +18554,7 @@
           <a:bodyPr wrap="square" rtlCol="0" anchor="ctr"/>
           <a:lstStyle/>
           <a:p>
-            <a:pPr algn="ctr" indent="0" marL="0">
+            <a:pPr marL="0" indent="0" algn="ctr">
               <a:buNone/>
             </a:pPr>
             <a:r>
@@ -18193,6 +18598,13 @@
             <a:prstDash val="solid"/>
           </a:ln>
         </p:spPr>
+        <p:txBody>
+          <a:bodyPr/>
+          <a:lstStyle/>
+          <a:p>
+            <a:endParaRPr lang="en-VN"/>
+          </a:p>
+        </p:txBody>
       </p:sp>
       <p:sp>
         <p:nvSpPr>
@@ -18215,7 +18627,7 @@
           <a:bodyPr wrap="square" rtlCol="0" anchor="ctr"/>
           <a:lstStyle/>
           <a:p>
-            <a:pPr algn="ctr" indent="0" marL="0">
+            <a:pPr marL="0" indent="0" algn="ctr">
               <a:buNone/>
             </a:pPr>
             <a:r>
@@ -18256,7 +18668,7 @@
           </a:bodyPr>
           <a:lstStyle/>
           <a:p>
-            <a:pPr algn="ctr" indent="0" marL="0">
+            <a:pPr marL="0" indent="0" algn="ctr">
               <a:buNone/>
             </a:pPr>
             <a:r>
@@ -18296,6 +18708,13 @@
             <a:prstDash val="solid"/>
           </a:ln>
         </p:spPr>
+        <p:txBody>
+          <a:bodyPr/>
+          <a:lstStyle/>
+          <a:p>
+            <a:endParaRPr lang="en-VN"/>
+          </a:p>
+        </p:txBody>
       </p:sp>
       <p:sp>
         <p:nvSpPr>
@@ -18323,6 +18742,13 @@
             <a:prstDash val="solid"/>
           </a:ln>
         </p:spPr>
+        <p:txBody>
+          <a:bodyPr/>
+          <a:lstStyle/>
+          <a:p>
+            <a:endParaRPr lang="en-VN"/>
+          </a:p>
+        </p:txBody>
       </p:sp>
       <p:sp>
         <p:nvSpPr>
@@ -18425,9 +18851,18 @@
   <p:clrMapOvr>
     <a:masterClrMapping/>
   </p:clrMapOvr>
-  <p:transition xmlns:p14="http://schemas.microsoft.com/office/powerpoint/2010/main" xmlns:p15="http://schemas.microsoft.com/office/powerpoint/2012/main" spd="slow" p14:dur="1250">
-    <p15:prstTrans prst="pageCurlDouble"/>
-  </p:transition>
+  <mc:AlternateContent xmlns:mc="http://schemas.openxmlformats.org/markup-compatibility/2006">
+    <mc:Choice xmlns:p14="http://schemas.microsoft.com/office/powerpoint/2010/main" Requires="p14">
+      <p:transition spd="slow" p14:dur="1200">
+        <p14:prism/>
+      </p:transition>
+    </mc:Choice>
+    <mc:Fallback>
+      <p:transition spd="slow">
+        <p:fade/>
+      </p:transition>
+    </mc:Fallback>
+  </mc:AlternateContent>
 </p:sld>
 </file>
 
@@ -18439,6 +18874,7 @@
         <a:solidFill>
           <a:srgbClr val="FFFFFF"/>
         </a:solidFill>
+        <a:effectLst/>
       </p:bgPr>
     </p:bg>
     <p:spTree>
@@ -18476,7 +18912,7 @@
           <a:bodyPr wrap="square" rtlCol="0" anchor="ctr"/>
           <a:lstStyle/>
           <a:p>
-            <a:pPr algn="ctr" indent="0" marL="0">
+            <a:pPr marL="0" indent="0" algn="ctr">
               <a:buNone/>
             </a:pPr>
             <a:r>
@@ -18517,7 +18953,7 @@
           </a:bodyPr>
           <a:lstStyle/>
           <a:p>
-            <a:pPr indent="0" marL="0">
+            <a:pPr marL="0" indent="0">
               <a:buNone/>
             </a:pPr>
             <a:r>
@@ -18557,6 +18993,13 @@
             <a:prstDash val="solid"/>
           </a:ln>
         </p:spPr>
+        <p:txBody>
+          <a:bodyPr/>
+          <a:lstStyle/>
+          <a:p>
+            <a:endParaRPr lang="en-VN"/>
+          </a:p>
+        </p:txBody>
       </p:sp>
       <p:sp>
         <p:nvSpPr>
@@ -18579,7 +19022,7 @@
           <a:bodyPr wrap="square" rtlCol="0" anchor="ctr"/>
           <a:lstStyle/>
           <a:p>
-            <a:pPr indent="0" marL="0">
+            <a:pPr marL="0" indent="0">
               <a:buNone/>
             </a:pPr>
             <a:r>
@@ -18618,7 +19061,7 @@
           <a:bodyPr wrap="square" rtlCol="0" anchor="ctr"/>
           <a:lstStyle/>
           <a:p>
-            <a:pPr algn="r" indent="0" marL="0">
+            <a:pPr marL="0" indent="0" algn="r">
               <a:buNone/>
             </a:pPr>
             <a:r>
@@ -18659,7 +19102,7 @@
           </a:bodyPr>
           <a:lstStyle/>
           <a:p>
-            <a:pPr indent="0" marL="0">
+            <a:pPr marL="0" indent="0">
               <a:buNone/>
             </a:pPr>
             <a:r>
@@ -18671,12 +19114,6 @@
               <a:t>1. Bối cảnh Thực tiễn &amp; Quy mô
 </a:t>
             </a:r>
-            <a:pPr indent="0" marL="0">
-              <a:lnSpc>
-                <a:spcPct val="120000"/>
-              </a:lnSpc>
-              <a:buNone/>
-            </a:pPr>
             <a:r>
               <a:rPr lang="en-US" sz="1050" dirty="0">
                 <a:solidFill>
@@ -18684,26 +19121,9 @@
                 </a:solidFill>
               </a:rPr>
               <a:t>• Giao dịch Mobile Money tăng trưởng bùng nổ, kéo theo các thủ đoạn gian lận tinh vi.
+• Hệ thống phòng thủ đòi hỏi độ trễ suy luận real-time (&lt; 100ms) trước khi tiền bị tẩu tán.
 </a:t>
             </a:r>
-            <a:pPr indent="0" marL="0">
-              <a:lnSpc>
-                <a:spcPct val="120000"/>
-              </a:lnSpc>
-              <a:buNone/>
-            </a:pPr>
-            <a:r>
-              <a:rPr lang="en-US" sz="1050" dirty="0">
-                <a:solidFill>
-                  <a:srgbClr val="1F2937"/>
-                </a:solidFill>
-              </a:rPr>
-              <a:t>• Hệ thống phòng thủ đòi hỏi độ trễ suy luận real-time (&lt; 100ms) trước khi tiền bị tẩu tán.
-</a:t>
-            </a:r>
-            <a:pPr indent="0" marL="0">
-              <a:buNone/>
-            </a:pPr>
             <a:r>
               <a:rPr lang="en-US" sz="1200" b="1" dirty="0">
                 <a:solidFill>
@@ -18713,12 +19133,6 @@
               <a:t>2. Thách thức Extreme Class Imbalance (~0.13%)
 </a:t>
             </a:r>
-            <a:pPr indent="0" marL="0">
-              <a:lnSpc>
-                <a:spcPct val="120000"/>
-              </a:lnSpc>
-              <a:buNone/>
-            </a:pPr>
             <a:r>
               <a:rPr lang="en-US" sz="1050" dirty="0">
                 <a:solidFill>
@@ -18726,26 +19140,9 @@
                 </a:solidFill>
               </a:rPr>
               <a:t>• Gian lận chỉ chiếm ~1 trên 800 giao dịch (8,213 ca trên 6.36M sự kiện trong PaySim).
+• Cost Asymmetry: Bỏ sót gian lận (FN) gây mất vốn trực tiếp, trong khi Báo động nhầm (FP) chỉ gây gián đoạn trải nghiệm người dùng.
 </a:t>
             </a:r>
-            <a:pPr indent="0" marL="0">
-              <a:lnSpc>
-                <a:spcPct val="120000"/>
-              </a:lnSpc>
-              <a:buNone/>
-            </a:pPr>
-            <a:r>
-              <a:rPr lang="en-US" sz="1050" dirty="0">
-                <a:solidFill>
-                  <a:srgbClr val="1F2937"/>
-                </a:solidFill>
-              </a:rPr>
-              <a:t>• Cost Asymmetry: Bỏ sót gian lận (FN) gây mất vốn trực tiếp, trong khi Báo động nhầm (FP) chỉ gây gián đoạn trải nghiệm người dùng.
-</a:t>
-            </a:r>
-            <a:pPr indent="0" marL="0">
-              <a:buNone/>
-            </a:pPr>
             <a:r>
               <a:rPr lang="en-US" sz="1200" b="1" dirty="0">
                 <a:solidFill>
@@ -18755,12 +19152,6 @@
               <a:t>3. Hành vi Gian lận Phi tĩnh (Non-Stationary)
 </a:t>
             </a:r>
-            <a:pPr indent="0" marL="0">
-              <a:lnSpc>
-                <a:spcPct val="120000"/>
-              </a:lnSpc>
-              <a:buNone/>
-            </a:pPr>
             <a:r>
               <a:rPr lang="en-US" sz="1050" dirty="0">
                 <a:solidFill>
@@ -18797,6 +19188,13 @@
             <a:prstDash val="solid"/>
           </a:ln>
         </p:spPr>
+        <p:txBody>
+          <a:bodyPr/>
+          <a:lstStyle/>
+          <a:p>
+            <a:endParaRPr lang="en-VN"/>
+          </a:p>
+        </p:txBody>
       </p:sp>
       <p:sp>
         <p:nvSpPr>
@@ -18819,7 +19217,7 @@
           <a:bodyPr wrap="square" rtlCol="0" anchor="ctr"/>
           <a:lstStyle/>
           <a:p>
-            <a:pPr indent="0" marL="0">
+            <a:pPr marL="0" indent="0">
               <a:buNone/>
             </a:pPr>
             <a:r>
@@ -18839,38 +19237,56 @@
       </p:sp>
       <p:graphicFrame>
         <p:nvGraphicFramePr>
-          <p:cNvPr id="5" name="Table 0"/>
+          <p:cNvPr id="10" name="Table 0"/>
           <p:cNvGraphicFramePr>
             <a:graphicFrameLocks noGrp="1"/>
           </p:cNvGraphicFramePr>
           <p:nvPr>
             <p:extLst>
               <p:ext uri="{D42A27DB-BD31-4B8C-83A1-F6EECF244321}">
-                <p14:modId xmlns:p14="http://schemas.microsoft.com/office/powerpoint/2010/main" val="1579011935"/>
+                <p14:modId xmlns:p14="http://schemas.microsoft.com/office/powerpoint/2010/main" val="775084553"/>
               </p:ext>
             </p:extLst>
           </p:nvPr>
         </p:nvGraphicFramePr>
         <p:xfrm>
-          <a:off x="5074920" y="1243584"/>
-          <a:ext cx="3566160" cy="914400"/>
+          <a:off x="5074920" y="1243583"/>
+          <a:ext cx="3566160" cy="1432052"/>
         </p:xfrm>
         <a:graphic>
           <a:graphicData uri="http://schemas.openxmlformats.org/drawingml/2006/table">
             <a:tbl>
               <a:tblPr/>
               <a:tblGrid>
-                <a:gridCol w="1141171"/>
-                <a:gridCol w="998525"/>
-                <a:gridCol w="1426464"/>
+                <a:gridCol w="1141171">
+                  <a:extLst>
+                    <a:ext uri="{9D8B030D-6E8A-4147-A177-3AD203B41FA5}">
+                      <a16:colId xmlns:a16="http://schemas.microsoft.com/office/drawing/2014/main" val="20000"/>
+                    </a:ext>
+                  </a:extLst>
+                </a:gridCol>
+                <a:gridCol w="998525">
+                  <a:extLst>
+                    <a:ext uri="{9D8B030D-6E8A-4147-A177-3AD203B41FA5}">
+                      <a16:colId xmlns:a16="http://schemas.microsoft.com/office/drawing/2014/main" val="20001"/>
+                    </a:ext>
+                  </a:extLst>
+                </a:gridCol>
+                <a:gridCol w="1426464">
+                  <a:extLst>
+                    <a:ext uri="{9D8B030D-6E8A-4147-A177-3AD203B41FA5}">
+                      <a16:colId xmlns:a16="http://schemas.microsoft.com/office/drawing/2014/main" val="20002"/>
+                    </a:ext>
+                  </a:extLst>
+                </a:gridCol>
               </a:tblGrid>
-              <a:tr h="0">
+              <a:tr h="190048">
                 <a:tc>
                   <a:txBody>
                     <a:bodyPr/>
                     <a:lstStyle/>
                     <a:p>
-                      <a:pPr algn="ctr" indent="0" marL="0">
+                      <a:pPr marL="0" indent="0" algn="ctr">
                         <a:buNone/>
                       </a:pPr>
                       <a:r>
@@ -18938,7 +19354,7 @@
                     <a:bodyPr/>
                     <a:lstStyle/>
                     <a:p>
-                      <a:pPr algn="ctr" indent="0" marL="0">
+                      <a:pPr marL="0" indent="0" algn="ctr">
                         <a:buNone/>
                       </a:pPr>
                       <a:r>
@@ -19006,7 +19422,7 @@
                     <a:bodyPr/>
                     <a:lstStyle/>
                     <a:p>
-                      <a:pPr algn="ctr" indent="0" marL="0">
+                      <a:pPr marL="0" indent="0" algn="ctr">
                         <a:buNone/>
                       </a:pPr>
                       <a:r>
@@ -19069,14 +19485,19 @@
                     </a:solidFill>
                   </a:tcPr>
                 </a:tc>
+                <a:extLst>
+                  <a:ext uri="{0D108BD9-81ED-4DB2-BD59-A6C34878D82A}">
+                    <a16:rowId xmlns:a16="http://schemas.microsoft.com/office/drawing/2014/main" val="10000"/>
+                  </a:ext>
+                </a:extLst>
               </a:tr>
-              <a:tr h="0">
+              <a:tr h="310501">
                 <a:tc>
                   <a:txBody>
                     <a:bodyPr/>
                     <a:lstStyle/>
                     <a:p>
-                      <a:pPr indent="0" marL="0">
+                      <a:pPr marL="0" indent="0">
                         <a:buNone/>
                       </a:pPr>
                       <a:r>
@@ -19144,7 +19565,7 @@
                     <a:bodyPr/>
                     <a:lstStyle/>
                     <a:p>
-                      <a:pPr indent="0" marL="0">
+                      <a:pPr marL="0" indent="0">
                         <a:buNone/>
                       </a:pPr>
                       <a:r>
@@ -19212,7 +19633,7 @@
                     <a:bodyPr/>
                     <a:lstStyle/>
                     <a:p>
-                      <a:pPr indent="0" marL="0">
+                      <a:pPr marL="0" indent="0">
                         <a:buNone/>
                       </a:pPr>
                       <a:r>
@@ -19275,14 +19696,19 @@
                     </a:solidFill>
                   </a:tcPr>
                 </a:tc>
+                <a:extLst>
+                  <a:ext uri="{0D108BD9-81ED-4DB2-BD59-A6C34878D82A}">
+                    <a16:rowId xmlns:a16="http://schemas.microsoft.com/office/drawing/2014/main" val="10001"/>
+                  </a:ext>
+                </a:extLst>
               </a:tr>
-              <a:tr h="0">
+              <a:tr h="310501">
                 <a:tc>
                   <a:txBody>
                     <a:bodyPr/>
                     <a:lstStyle/>
                     <a:p>
-                      <a:pPr indent="0" marL="0">
+                      <a:pPr marL="0" indent="0">
                         <a:buNone/>
                       </a:pPr>
                       <a:r>
@@ -19350,7 +19776,7 @@
                     <a:bodyPr/>
                     <a:lstStyle/>
                     <a:p>
-                      <a:pPr indent="0" marL="0">
+                      <a:pPr marL="0" indent="0">
                         <a:buNone/>
                       </a:pPr>
                       <a:r>
@@ -19418,7 +19844,7 @@
                     <a:bodyPr/>
                     <a:lstStyle/>
                     <a:p>
-                      <a:pPr indent="0" marL="0">
+                      <a:pPr marL="0" indent="0">
                         <a:buNone/>
                       </a:pPr>
                       <a:r>
@@ -19481,14 +19907,19 @@
                     </a:solidFill>
                   </a:tcPr>
                 </a:tc>
+                <a:extLst>
+                  <a:ext uri="{0D108BD9-81ED-4DB2-BD59-A6C34878D82A}">
+                    <a16:rowId xmlns:a16="http://schemas.microsoft.com/office/drawing/2014/main" val="10002"/>
+                  </a:ext>
+                </a:extLst>
               </a:tr>
-              <a:tr h="0">
+              <a:tr h="310501">
                 <a:tc>
                   <a:txBody>
                     <a:bodyPr/>
                     <a:lstStyle/>
                     <a:p>
-                      <a:pPr indent="0" marL="0">
+                      <a:pPr marL="0" indent="0">
                         <a:buNone/>
                       </a:pPr>
                       <a:r>
@@ -19556,7 +19987,7 @@
                     <a:bodyPr/>
                     <a:lstStyle/>
                     <a:p>
-                      <a:pPr indent="0" marL="0">
+                      <a:pPr marL="0" indent="0">
                         <a:buNone/>
                       </a:pPr>
                       <a:r>
@@ -19624,7 +20055,7 @@
                     <a:bodyPr/>
                     <a:lstStyle/>
                     <a:p>
-                      <a:pPr indent="0" marL="0">
+                      <a:pPr marL="0" indent="0">
                         <a:buNone/>
                       </a:pPr>
                       <a:r>
@@ -19687,14 +20118,19 @@
                     </a:solidFill>
                   </a:tcPr>
                 </a:tc>
+                <a:extLst>
+                  <a:ext uri="{0D108BD9-81ED-4DB2-BD59-A6C34878D82A}">
+                    <a16:rowId xmlns:a16="http://schemas.microsoft.com/office/drawing/2014/main" val="10003"/>
+                  </a:ext>
+                </a:extLst>
               </a:tr>
-              <a:tr h="0">
+              <a:tr h="310501">
                 <a:tc>
                   <a:txBody>
                     <a:bodyPr/>
                     <a:lstStyle/>
                     <a:p>
-                      <a:pPr indent="0" marL="0">
+                      <a:pPr marL="0" indent="0">
                         <a:buNone/>
                       </a:pPr>
                       <a:r>
@@ -19762,7 +20198,7 @@
                     <a:bodyPr/>
                     <a:lstStyle/>
                     <a:p>
-                      <a:pPr indent="0" marL="0">
+                      <a:pPr marL="0" indent="0">
                         <a:buNone/>
                       </a:pPr>
                       <a:r>
@@ -19830,7 +20266,7 @@
                     <a:bodyPr/>
                     <a:lstStyle/>
                     <a:p>
-                      <a:pPr indent="0" marL="0">
+                      <a:pPr marL="0" indent="0">
                         <a:buNone/>
                       </a:pPr>
                       <a:r>
@@ -19893,6 +20329,11 @@
                     </a:solidFill>
                   </a:tcPr>
                 </a:tc>
+                <a:extLst>
+                  <a:ext uri="{0D108BD9-81ED-4DB2-BD59-A6C34878D82A}">
+                    <a16:rowId xmlns:a16="http://schemas.microsoft.com/office/drawing/2014/main" val="10004"/>
+                  </a:ext>
+                </a:extLst>
               </a:tr>
             </a:tbl>
           </a:graphicData>
@@ -19906,8 +20347,8 @@
         </p:nvSpPr>
         <p:spPr>
           <a:xfrm>
-            <a:off x="5074920" y="2606040"/>
-            <a:ext cx="3566160" cy="2011680"/>
+            <a:off x="5074920" y="2881376"/>
+            <a:ext cx="3566160" cy="1736343"/>
           </a:xfrm>
           <a:prstGeom prst="rect">
             <a:avLst/>
@@ -19922,6 +20363,13 @@
             <a:prstDash val="solid"/>
           </a:ln>
         </p:spPr>
+        <p:txBody>
+          <a:bodyPr/>
+          <a:lstStyle/>
+          <a:p>
+            <a:endParaRPr lang="en-VN"/>
+          </a:p>
+        </p:txBody>
       </p:sp>
       <p:sp>
         <p:nvSpPr>
@@ -19931,7 +20379,7 @@
         </p:nvSpPr>
         <p:spPr>
           <a:xfrm>
-            <a:off x="5212080" y="2679192"/>
+            <a:off x="5212080" y="2969892"/>
             <a:ext cx="3291840" cy="219456"/>
           </a:xfrm>
           <a:prstGeom prst="rect">
@@ -19944,7 +20392,7 @@
           <a:bodyPr wrap="square" rtlCol="0" anchor="ctr"/>
           <a:lstStyle/>
           <a:p>
-            <a:pPr indent="0" marL="0">
+            <a:pPr marL="0" indent="0">
               <a:buNone/>
             </a:pPr>
             <a:r>
@@ -19970,8 +20418,8 @@
         </p:nvSpPr>
         <p:spPr>
           <a:xfrm>
-            <a:off x="5212080" y="2898648"/>
-            <a:ext cx="3291840" cy="1645920"/>
+            <a:off x="5212080" y="3192904"/>
+            <a:ext cx="3291840" cy="1351663"/>
           </a:xfrm>
           <a:prstGeom prst="rect">
             <a:avLst/>
@@ -19981,7 +20429,7 @@
         </p:spPr>
         <p:txBody>
           <a:bodyPr wrap="square" lIns="25400" tIns="50800" rIns="50800" bIns="25400" rtlCol="0" anchor="ctr">
-            <a:normAutofit/>
+            <a:normAutofit fontScale="92500" lnSpcReduction="20000"/>
           </a:bodyPr>
           <a:lstStyle/>
           <a:p>
@@ -20087,9 +20535,18 @@
   <p:clrMapOvr>
     <a:masterClrMapping/>
   </p:clrMapOvr>
-  <p:transition xmlns:p14="http://schemas.microsoft.com/office/powerpoint/2010/main" xmlns:p15="http://schemas.microsoft.com/office/powerpoint/2012/main" spd="slow" p14:dur="1250">
-    <p15:prstTrans prst="pageCurlDouble"/>
-  </p:transition>
+  <mc:AlternateContent xmlns:mc="http://schemas.openxmlformats.org/markup-compatibility/2006">
+    <mc:Choice xmlns:p14="http://schemas.microsoft.com/office/powerpoint/2010/main" Requires="p14">
+      <p:transition spd="slow" p14:dur="1300">
+        <p14:pan dir="u"/>
+      </p:transition>
+    </mc:Choice>
+    <mc:Fallback>
+      <p:transition spd="slow">
+        <p:fade/>
+      </p:transition>
+    </mc:Fallback>
+  </mc:AlternateContent>
 </p:sld>
 </file>
 
@@ -20101,6 +20558,7 @@
         <a:solidFill>
           <a:srgbClr val="FFFFFF"/>
         </a:solidFill>
+        <a:effectLst/>
       </p:bgPr>
     </p:bg>
     <p:spTree>
@@ -20138,7 +20596,7 @@
           <a:bodyPr wrap="square" rtlCol="0" anchor="ctr"/>
           <a:lstStyle/>
           <a:p>
-            <a:pPr algn="ctr" indent="0" marL="0">
+            <a:pPr marL="0" indent="0" algn="ctr">
               <a:buNone/>
             </a:pPr>
             <a:r>
@@ -20179,7 +20637,7 @@
           </a:bodyPr>
           <a:lstStyle/>
           <a:p>
-            <a:pPr indent="0" marL="0">
+            <a:pPr marL="0" indent="0">
               <a:buNone/>
             </a:pPr>
             <a:r>
@@ -20219,6 +20677,13 @@
             <a:prstDash val="solid"/>
           </a:ln>
         </p:spPr>
+        <p:txBody>
+          <a:bodyPr/>
+          <a:lstStyle/>
+          <a:p>
+            <a:endParaRPr lang="en-VN"/>
+          </a:p>
+        </p:txBody>
       </p:sp>
       <p:sp>
         <p:nvSpPr>
@@ -20241,7 +20706,7 @@
           <a:bodyPr wrap="square" rtlCol="0" anchor="ctr"/>
           <a:lstStyle/>
           <a:p>
-            <a:pPr indent="0" marL="0">
+            <a:pPr marL="0" indent="0">
               <a:buNone/>
             </a:pPr>
             <a:r>
@@ -20280,7 +20745,7 @@
           <a:bodyPr wrap="square" rtlCol="0" anchor="ctr"/>
           <a:lstStyle/>
           <a:p>
-            <a:pPr algn="r" indent="0" marL="0">
+            <a:pPr marL="0" indent="0" algn="r">
               <a:buNone/>
             </a:pPr>
             <a:r>
@@ -20322,6 +20787,13 @@
             <a:prstDash val="solid"/>
           </a:ln>
         </p:spPr>
+        <p:txBody>
+          <a:bodyPr/>
+          <a:lstStyle/>
+          <a:p>
+            <a:endParaRPr lang="en-VN"/>
+          </a:p>
+        </p:txBody>
       </p:sp>
       <p:sp>
         <p:nvSpPr>
@@ -20344,7 +20816,7 @@
           <a:bodyPr wrap="square" rtlCol="0" anchor="ctr"/>
           <a:lstStyle/>
           <a:p>
-            <a:pPr indent="0" marL="0">
+            <a:pPr marL="0" indent="0">
               <a:buNone/>
             </a:pPr>
             <a:r>
@@ -20380,7 +20852,7 @@
           <a:bodyPr wrap="square" rtlCol="0" anchor="ctr"/>
           <a:lstStyle/>
           <a:p>
-            <a:pPr indent="0" marL="0">
+            <a:pPr marL="0" indent="0">
               <a:buNone/>
             </a:pPr>
             <a:r>
@@ -20416,7 +20888,7 @@
           <a:bodyPr wrap="square" rtlCol="0" anchor="ctr"/>
           <a:lstStyle/>
           <a:p>
-            <a:pPr indent="0" marL="0">
+            <a:pPr marL="0" indent="0">
               <a:buNone/>
             </a:pPr>
             <a:r>
@@ -20455,6 +20927,13 @@
             <a:prstDash val="solid"/>
           </a:ln>
         </p:spPr>
+        <p:txBody>
+          <a:bodyPr/>
+          <a:lstStyle/>
+          <a:p>
+            <a:endParaRPr lang="en-VN"/>
+          </a:p>
+        </p:txBody>
       </p:sp>
       <p:sp>
         <p:nvSpPr>
@@ -20477,7 +20956,7 @@
           <a:bodyPr wrap="square" rtlCol="0" anchor="ctr"/>
           <a:lstStyle/>
           <a:p>
-            <a:pPr indent="0" marL="0">
+            <a:pPr marL="0" indent="0">
               <a:buNone/>
             </a:pPr>
             <a:r>
@@ -20513,7 +20992,7 @@
           <a:bodyPr wrap="square" rtlCol="0" anchor="ctr"/>
           <a:lstStyle/>
           <a:p>
-            <a:pPr indent="0" marL="0">
+            <a:pPr marL="0" indent="0">
               <a:buNone/>
             </a:pPr>
             <a:r>
@@ -20549,7 +21028,7 @@
           <a:bodyPr wrap="square" rtlCol="0" anchor="ctr"/>
           <a:lstStyle/>
           <a:p>
-            <a:pPr indent="0" marL="0">
+            <a:pPr marL="0" indent="0">
               <a:buNone/>
             </a:pPr>
             <a:r>
@@ -20588,6 +21067,13 @@
             <a:prstDash val="solid"/>
           </a:ln>
         </p:spPr>
+        <p:txBody>
+          <a:bodyPr/>
+          <a:lstStyle/>
+          <a:p>
+            <a:endParaRPr lang="en-VN"/>
+          </a:p>
+        </p:txBody>
       </p:sp>
       <p:sp>
         <p:nvSpPr>
@@ -20610,7 +21096,7 @@
           <a:bodyPr wrap="square" rtlCol="0" anchor="ctr"/>
           <a:lstStyle/>
           <a:p>
-            <a:pPr indent="0" marL="0">
+            <a:pPr marL="0" indent="0">
               <a:buNone/>
             </a:pPr>
             <a:r>
@@ -20646,7 +21132,7 @@
           <a:bodyPr wrap="square" rtlCol="0" anchor="ctr"/>
           <a:lstStyle/>
           <a:p>
-            <a:pPr indent="0" marL="0">
+            <a:pPr marL="0" indent="0">
               <a:buNone/>
             </a:pPr>
             <a:r>
@@ -20682,7 +21168,7 @@
           <a:bodyPr wrap="square" rtlCol="0" anchor="ctr"/>
           <a:lstStyle/>
           <a:p>
-            <a:pPr indent="0" marL="0">
+            <a:pPr marL="0" indent="0">
               <a:buNone/>
             </a:pPr>
             <a:r>
@@ -20699,38 +21185,56 @@
       </p:sp>
       <p:graphicFrame>
         <p:nvGraphicFramePr>
-          <p:cNvPr id="6" name="Table 0"/>
+          <p:cNvPr id="19" name="Table 0"/>
           <p:cNvGraphicFramePr>
             <a:graphicFrameLocks noGrp="1"/>
           </p:cNvGraphicFramePr>
           <p:nvPr>
             <p:extLst>
               <p:ext uri="{D42A27DB-BD31-4B8C-83A1-F6EECF244321}">
-                <p14:modId xmlns:p14="http://schemas.microsoft.com/office/powerpoint/2010/main" val="1579011935"/>
+                <p14:modId xmlns:p14="http://schemas.microsoft.com/office/powerpoint/2010/main" val="3930063737"/>
               </p:ext>
             </p:extLst>
           </p:nvPr>
         </p:nvGraphicFramePr>
         <p:xfrm>
-          <a:off x="502920" y="1847088"/>
-          <a:ext cx="8138160" cy="914400"/>
+          <a:off x="502920" y="2029968"/>
+          <a:ext cx="8138160" cy="1353301"/>
         </p:xfrm>
         <a:graphic>
           <a:graphicData uri="http://schemas.openxmlformats.org/drawingml/2006/table">
             <a:tbl>
               <a:tblPr/>
               <a:tblGrid>
-                <a:gridCol w="2604211"/>
-                <a:gridCol w="1871777"/>
-                <a:gridCol w="3662172"/>
+                <a:gridCol w="2604211">
+                  <a:extLst>
+                    <a:ext uri="{9D8B030D-6E8A-4147-A177-3AD203B41FA5}">
+                      <a16:colId xmlns:a16="http://schemas.microsoft.com/office/drawing/2014/main" val="20000"/>
+                    </a:ext>
+                  </a:extLst>
+                </a:gridCol>
+                <a:gridCol w="1871777">
+                  <a:extLst>
+                    <a:ext uri="{9D8B030D-6E8A-4147-A177-3AD203B41FA5}">
+                      <a16:colId xmlns:a16="http://schemas.microsoft.com/office/drawing/2014/main" val="20001"/>
+                    </a:ext>
+                  </a:extLst>
+                </a:gridCol>
+                <a:gridCol w="3662172">
+                  <a:extLst>
+                    <a:ext uri="{9D8B030D-6E8A-4147-A177-3AD203B41FA5}">
+                      <a16:colId xmlns:a16="http://schemas.microsoft.com/office/drawing/2014/main" val="20002"/>
+                    </a:ext>
+                  </a:extLst>
+                </a:gridCol>
               </a:tblGrid>
-              <a:tr h="0">
+              <a:tr h="236291">
                 <a:tc>
                   <a:txBody>
                     <a:bodyPr/>
                     <a:lstStyle/>
                     <a:p>
-                      <a:pPr algn="ctr" indent="0" marL="0">
+                      <a:pPr marL="0" indent="0" algn="ctr">
                         <a:buNone/>
                       </a:pPr>
                       <a:r>
@@ -20798,7 +21302,7 @@
                     <a:bodyPr/>
                     <a:lstStyle/>
                     <a:p>
-                      <a:pPr algn="ctr" indent="0" marL="0">
+                      <a:pPr marL="0" indent="0" algn="ctr">
                         <a:buNone/>
                       </a:pPr>
                       <a:r>
@@ -20866,7 +21370,7 @@
                     <a:bodyPr/>
                     <a:lstStyle/>
                     <a:p>
-                      <a:pPr algn="ctr" indent="0" marL="0">
+                      <a:pPr marL="0" indent="0" algn="ctr">
                         <a:buNone/>
                       </a:pPr>
                       <a:r>
@@ -20929,14 +21433,19 @@
                     </a:solidFill>
                   </a:tcPr>
                 </a:tc>
+                <a:extLst>
+                  <a:ext uri="{0D108BD9-81ED-4DB2-BD59-A6C34878D82A}">
+                    <a16:rowId xmlns:a16="http://schemas.microsoft.com/office/drawing/2014/main" val="10000"/>
+                  </a:ext>
+                </a:extLst>
               </a:tr>
-              <a:tr h="0">
+              <a:tr h="223402">
                 <a:tc>
                   <a:txBody>
                     <a:bodyPr/>
                     <a:lstStyle/>
                     <a:p>
-                      <a:pPr indent="0" marL="0">
+                      <a:pPr marL="0" indent="0">
                         <a:buNone/>
                       </a:pPr>
                       <a:r>
@@ -21004,7 +21513,7 @@
                     <a:bodyPr/>
                     <a:lstStyle/>
                     <a:p>
-                      <a:pPr indent="0" marL="0">
+                      <a:pPr marL="0" indent="0">
                         <a:buNone/>
                       </a:pPr>
                       <a:r>
@@ -21072,7 +21581,7 @@
                     <a:bodyPr/>
                     <a:lstStyle/>
                     <a:p>
-                      <a:pPr indent="0" marL="0">
+                      <a:pPr marL="0" indent="0">
                         <a:buNone/>
                       </a:pPr>
                       <a:r>
@@ -21135,14 +21644,19 @@
                     </a:solidFill>
                   </a:tcPr>
                 </a:tc>
+                <a:extLst>
+                  <a:ext uri="{0D108BD9-81ED-4DB2-BD59-A6C34878D82A}">
+                    <a16:rowId xmlns:a16="http://schemas.microsoft.com/office/drawing/2014/main" val="10001"/>
+                  </a:ext>
+                </a:extLst>
               </a:tr>
-              <a:tr h="0">
+              <a:tr h="223402">
                 <a:tc>
                   <a:txBody>
                     <a:bodyPr/>
                     <a:lstStyle/>
                     <a:p>
-                      <a:pPr indent="0" marL="0">
+                      <a:pPr marL="0" indent="0">
                         <a:buNone/>
                       </a:pPr>
                       <a:r>
@@ -21210,7 +21724,7 @@
                     <a:bodyPr/>
                     <a:lstStyle/>
                     <a:p>
-                      <a:pPr indent="0" marL="0">
+                      <a:pPr marL="0" indent="0">
                         <a:buNone/>
                       </a:pPr>
                       <a:r>
@@ -21278,7 +21792,7 @@
                     <a:bodyPr/>
                     <a:lstStyle/>
                     <a:p>
-                      <a:pPr indent="0" marL="0">
+                      <a:pPr marL="0" indent="0">
                         <a:buNone/>
                       </a:pPr>
                       <a:r>
@@ -21341,14 +21855,19 @@
                     </a:solidFill>
                   </a:tcPr>
                 </a:tc>
+                <a:extLst>
+                  <a:ext uri="{0D108BD9-81ED-4DB2-BD59-A6C34878D82A}">
+                    <a16:rowId xmlns:a16="http://schemas.microsoft.com/office/drawing/2014/main" val="10002"/>
+                  </a:ext>
+                </a:extLst>
               </a:tr>
-              <a:tr h="0">
+              <a:tr h="223402">
                 <a:tc>
                   <a:txBody>
                     <a:bodyPr/>
                     <a:lstStyle/>
                     <a:p>
-                      <a:pPr indent="0" marL="0">
+                      <a:pPr marL="0" indent="0">
                         <a:buNone/>
                       </a:pPr>
                       <a:r>
@@ -21416,7 +21935,7 @@
                     <a:bodyPr/>
                     <a:lstStyle/>
                     <a:p>
-                      <a:pPr indent="0" marL="0">
+                      <a:pPr marL="0" indent="0">
                         <a:buNone/>
                       </a:pPr>
                       <a:r>
@@ -21484,7 +22003,7 @@
                     <a:bodyPr/>
                     <a:lstStyle/>
                     <a:p>
-                      <a:pPr indent="0" marL="0">
+                      <a:pPr marL="0" indent="0">
                         <a:buNone/>
                       </a:pPr>
                       <a:r>
@@ -21547,14 +22066,19 @@
                     </a:solidFill>
                   </a:tcPr>
                 </a:tc>
+                <a:extLst>
+                  <a:ext uri="{0D108BD9-81ED-4DB2-BD59-A6C34878D82A}">
+                    <a16:rowId xmlns:a16="http://schemas.microsoft.com/office/drawing/2014/main" val="10003"/>
+                  </a:ext>
+                </a:extLst>
               </a:tr>
-              <a:tr h="0">
+              <a:tr h="223402">
                 <a:tc>
                   <a:txBody>
                     <a:bodyPr/>
                     <a:lstStyle/>
                     <a:p>
-                      <a:pPr indent="0" marL="0">
+                      <a:pPr marL="0" indent="0">
                         <a:buNone/>
                       </a:pPr>
                       <a:r>
@@ -21622,7 +22146,7 @@
                     <a:bodyPr/>
                     <a:lstStyle/>
                     <a:p>
-                      <a:pPr indent="0" marL="0">
+                      <a:pPr marL="0" indent="0">
                         <a:buNone/>
                       </a:pPr>
                       <a:r>
@@ -21690,7 +22214,7 @@
                     <a:bodyPr/>
                     <a:lstStyle/>
                     <a:p>
-                      <a:pPr indent="0" marL="0">
+                      <a:pPr marL="0" indent="0">
                         <a:buNone/>
                       </a:pPr>
                       <a:r>
@@ -21753,14 +22277,19 @@
                     </a:solidFill>
                   </a:tcPr>
                 </a:tc>
+                <a:extLst>
+                  <a:ext uri="{0D108BD9-81ED-4DB2-BD59-A6C34878D82A}">
+                    <a16:rowId xmlns:a16="http://schemas.microsoft.com/office/drawing/2014/main" val="10004"/>
+                  </a:ext>
+                </a:extLst>
               </a:tr>
-              <a:tr h="0">
+              <a:tr h="223402">
                 <a:tc>
                   <a:txBody>
                     <a:bodyPr/>
                     <a:lstStyle/>
                     <a:p>
-                      <a:pPr indent="0" marL="0">
+                      <a:pPr marL="0" indent="0">
                         <a:buNone/>
                       </a:pPr>
                       <a:r>
@@ -21828,7 +22357,7 @@
                     <a:bodyPr/>
                     <a:lstStyle/>
                     <a:p>
-                      <a:pPr indent="0" marL="0">
+                      <a:pPr marL="0" indent="0">
                         <a:buNone/>
                       </a:pPr>
                       <a:r>
@@ -21896,7 +22425,7 @@
                     <a:bodyPr/>
                     <a:lstStyle/>
                     <a:p>
-                      <a:pPr indent="0" marL="0">
+                      <a:pPr marL="0" indent="0">
                         <a:buNone/>
                       </a:pPr>
                       <a:r>
@@ -21959,6 +22488,11 @@
                     </a:solidFill>
                   </a:tcPr>
                 </a:tc>
+                <a:extLst>
+                  <a:ext uri="{0D108BD9-81ED-4DB2-BD59-A6C34878D82A}">
+                    <a16:rowId xmlns:a16="http://schemas.microsoft.com/office/drawing/2014/main" val="10005"/>
+                  </a:ext>
+                </a:extLst>
               </a:tr>
             </a:tbl>
           </a:graphicData>
@@ -21988,6 +22522,13 @@
             <a:prstDash val="solid"/>
           </a:ln>
         </p:spPr>
+        <p:txBody>
+          <a:bodyPr/>
+          <a:lstStyle/>
+          <a:p>
+            <a:endParaRPr lang="en-VN"/>
+          </a:p>
+        </p:txBody>
       </p:sp>
       <p:sp>
         <p:nvSpPr>
@@ -22010,7 +22551,7 @@
           <a:bodyPr wrap="square" rtlCol="0" anchor="ctr"/>
           <a:lstStyle/>
           <a:p>
-            <a:pPr indent="0" marL="0">
+            <a:pPr marL="0" indent="0">
               <a:buNone/>
             </a:pPr>
             <a:r>
@@ -22051,7 +22592,7 @@
           </a:bodyPr>
           <a:lstStyle/>
           <a:p>
-            <a:pPr indent="0" marL="0">
+            <a:pPr marL="0" indent="0">
               <a:lnSpc>
                 <a:spcPct val="120000"/>
               </a:lnSpc>
@@ -22077,9 +22618,18 @@
   <p:clrMapOvr>
     <a:masterClrMapping/>
   </p:clrMapOvr>
-  <p:transition xmlns:p14="http://schemas.microsoft.com/office/powerpoint/2010/main" xmlns:p15="http://schemas.microsoft.com/office/powerpoint/2012/main" spd="slow" p14:dur="1250">
-    <p15:prstTrans prst="pageCurlDouble"/>
-  </p:transition>
+  <mc:AlternateContent xmlns:mc="http://schemas.openxmlformats.org/markup-compatibility/2006">
+    <mc:Choice xmlns:p159="http://schemas.microsoft.com/office/powerpoint/2015/09/main" Requires="p159">
+      <p:transition xmlns:p14="http://schemas.microsoft.com/office/powerpoint/2010/main" spd="slow" p14:dur="2000">
+        <p159:morph option="byObject"/>
+      </p:transition>
+    </mc:Choice>
+    <mc:Fallback>
+      <p:transition spd="slow">
+        <p:fade/>
+      </p:transition>
+    </mc:Fallback>
+  </mc:AlternateContent>
 </p:sld>
 </file>
 
@@ -22091,6 +22641,7 @@
         <a:solidFill>
           <a:srgbClr val="1E295C"/>
         </a:solidFill>
+        <a:effectLst/>
       </p:bgPr>
     </p:bg>
     <p:spTree>
@@ -22128,7 +22679,7 @@
           <a:bodyPr wrap="square" rtlCol="0" anchor="ctr"/>
           <a:lstStyle/>
           <a:p>
-            <a:pPr algn="ctr" indent="0" marL="0">
+            <a:pPr marL="0" indent="0" algn="ctr">
               <a:buNone/>
             </a:pPr>
             <a:r>
@@ -22172,6 +22723,13 @@
             <a:prstDash val="solid"/>
           </a:ln>
         </p:spPr>
+        <p:txBody>
+          <a:bodyPr/>
+          <a:lstStyle/>
+          <a:p>
+            <a:endParaRPr lang="en-VN"/>
+          </a:p>
+        </p:txBody>
       </p:sp>
       <p:sp>
         <p:nvSpPr>
@@ -22194,7 +22752,7 @@
           <a:bodyPr wrap="square" rtlCol="0" anchor="ctr"/>
           <a:lstStyle/>
           <a:p>
-            <a:pPr algn="ctr" indent="0" marL="0">
+            <a:pPr marL="0" indent="0" algn="ctr">
               <a:buNone/>
             </a:pPr>
             <a:r>
@@ -22235,7 +22793,7 @@
           </a:bodyPr>
           <a:lstStyle/>
           <a:p>
-            <a:pPr algn="ctr" indent="0" marL="0">
+            <a:pPr marL="0" indent="0" algn="ctr">
               <a:buNone/>
             </a:pPr>
             <a:r>
@@ -22275,6 +22833,13 @@
             <a:prstDash val="solid"/>
           </a:ln>
         </p:spPr>
+        <p:txBody>
+          <a:bodyPr/>
+          <a:lstStyle/>
+          <a:p>
+            <a:endParaRPr lang="en-VN"/>
+          </a:p>
+        </p:txBody>
       </p:sp>
       <p:sp>
         <p:nvSpPr>
@@ -22302,6 +22867,13 @@
             <a:prstDash val="solid"/>
           </a:ln>
         </p:spPr>
+        <p:txBody>
+          <a:bodyPr/>
+          <a:lstStyle/>
+          <a:p>
+            <a:endParaRPr lang="en-VN"/>
+          </a:p>
+        </p:txBody>
       </p:sp>
       <p:sp>
         <p:nvSpPr>
@@ -22404,9 +22976,18 @@
   <p:clrMapOvr>
     <a:masterClrMapping/>
   </p:clrMapOvr>
-  <p:transition xmlns:p14="http://schemas.microsoft.com/office/powerpoint/2010/main" xmlns:p15="http://schemas.microsoft.com/office/powerpoint/2012/main" spd="slow" p14:dur="1250">
-    <p15:prstTrans prst="airplane"/>
-  </p:transition>
+  <mc:AlternateContent xmlns:mc="http://schemas.openxmlformats.org/markup-compatibility/2006">
+    <mc:Choice xmlns:p14="http://schemas.microsoft.com/office/powerpoint/2010/main" Requires="p14">
+      <p:transition spd="slow" p14:dur="1200">
+        <p14:prism/>
+      </p:transition>
+    </mc:Choice>
+    <mc:Fallback>
+      <p:transition spd="slow">
+        <p:fade/>
+      </p:transition>
+    </mc:Fallback>
+  </mc:AlternateContent>
 </p:sld>
 </file>
 
@@ -22418,6 +22999,7 @@
         <a:solidFill>
           <a:srgbClr val="FFFFFF"/>
         </a:solidFill>
+        <a:effectLst/>
       </p:bgPr>
     </p:bg>
     <p:spTree>
@@ -22455,7 +23037,7 @@
           <a:bodyPr wrap="square" rtlCol="0" anchor="ctr"/>
           <a:lstStyle/>
           <a:p>
-            <a:pPr algn="ctr" indent="0" marL="0">
+            <a:pPr marL="0" indent="0" algn="ctr">
               <a:buNone/>
             </a:pPr>
             <a:r>
@@ -22496,7 +23078,7 @@
           </a:bodyPr>
           <a:lstStyle/>
           <a:p>
-            <a:pPr indent="0" marL="0">
+            <a:pPr marL="0" indent="0">
               <a:buNone/>
             </a:pPr>
             <a:r>
@@ -22536,6 +23118,13 @@
             <a:prstDash val="solid"/>
           </a:ln>
         </p:spPr>
+        <p:txBody>
+          <a:bodyPr/>
+          <a:lstStyle/>
+          <a:p>
+            <a:endParaRPr lang="en-VN"/>
+          </a:p>
+        </p:txBody>
       </p:sp>
       <p:sp>
         <p:nvSpPr>
@@ -22558,7 +23147,7 @@
           <a:bodyPr wrap="square" rtlCol="0" anchor="ctr"/>
           <a:lstStyle/>
           <a:p>
-            <a:pPr indent="0" marL="0">
+            <a:pPr marL="0" indent="0">
               <a:buNone/>
             </a:pPr>
             <a:r>
@@ -22597,7 +23186,7 @@
           <a:bodyPr wrap="square" rtlCol="0" anchor="ctr"/>
           <a:lstStyle/>
           <a:p>
-            <a:pPr algn="r" indent="0" marL="0">
+            <a:pPr marL="0" indent="0" algn="r">
               <a:buNone/>
             </a:pPr>
             <a:r>
@@ -22639,6 +23228,13 @@
             <a:prstDash val="solid"/>
           </a:ln>
         </p:spPr>
+        <p:txBody>
+          <a:bodyPr/>
+          <a:lstStyle/>
+          <a:p>
+            <a:endParaRPr lang="en-VN"/>
+          </a:p>
+        </p:txBody>
       </p:sp>
       <p:sp>
         <p:nvSpPr>
@@ -22659,6 +23255,13 @@
           </a:solidFill>
           <a:ln/>
         </p:spPr>
+        <p:txBody>
+          <a:bodyPr/>
+          <a:lstStyle/>
+          <a:p>
+            <a:endParaRPr lang="en-VN"/>
+          </a:p>
+        </p:txBody>
       </p:sp>
       <p:sp>
         <p:nvSpPr>
@@ -22681,7 +23284,7 @@
           <a:bodyPr wrap="square" rtlCol="0" anchor="ctr"/>
           <a:lstStyle/>
           <a:p>
-            <a:pPr algn="ctr" indent="0" marL="0">
+            <a:pPr marL="0" indent="0" algn="ctr">
               <a:buNone/>
             </a:pPr>
             <a:r>
@@ -22717,7 +23320,7 @@
           <a:bodyPr wrap="square" rtlCol="0" anchor="ctr"/>
           <a:lstStyle/>
           <a:p>
-            <a:pPr indent="0" marL="0">
+            <a:pPr marL="0" indent="0">
               <a:buNone/>
             </a:pPr>
             <a:r>
@@ -22755,7 +23358,7 @@
           </a:bodyPr>
           <a:lstStyle/>
           <a:p>
-            <a:pPr indent="0" marL="0">
+            <a:pPr marL="0" indent="0">
               <a:lnSpc>
                 <a:spcPct val="122000"/>
               </a:lnSpc>
@@ -22769,12 +23372,6 @@
               </a:rPr>
               <a:t>• 100% gian lận xảy ra duy nhất ở 2 loại giao dịch: </a:t>
             </a:r>
-            <a:pPr indent="0" marL="0">
-              <a:lnSpc>
-                <a:spcPct val="122000"/>
-              </a:lnSpc>
-              <a:buNone/>
-            </a:pPr>
             <a:r>
               <a:rPr lang="en-US" sz="980" b="1" dirty="0">
                 <a:solidFill>
@@ -22784,12 +23381,6 @@
               <a:t>TRANSFER và CASH_OUT.
 </a:t>
             </a:r>
-            <a:pPr indent="0" marL="0">
-              <a:lnSpc>
-                <a:spcPct val="122000"/>
-              </a:lnSpc>
-              <a:buNone/>
-            </a:pPr>
             <a:r>
               <a:rPr lang="en-US" sz="980" dirty="0">
                 <a:solidFill>
@@ -22799,12 +23390,6 @@
               <a:t>• Các loại PAYMENT, CASH_IN, DEBIT hoàn toàn không có gian lận (0%).
 </a:t>
             </a:r>
-            <a:pPr indent="0" marL="0">
-              <a:lnSpc>
-                <a:spcPct val="122000"/>
-              </a:lnSpc>
-              <a:buNone/>
-            </a:pPr>
             <a:r>
               <a:rPr lang="en-US" sz="980" b="1" dirty="0">
                 <a:solidFill>
@@ -22813,12 +23398,6 @@
               </a:rPr>
               <a:t>• Hành động Pipeline: </a:t>
             </a:r>
-            <a:pPr indent="0" marL="0">
-              <a:lnSpc>
-                <a:spcPct val="122000"/>
-              </a:lnSpc>
-              <a:buNone/>
-            </a:pPr>
             <a:r>
               <a:rPr lang="en-US" sz="980" dirty="0">
                 <a:solidFill>
@@ -22855,6 +23434,13 @@
             <a:prstDash val="solid"/>
           </a:ln>
         </p:spPr>
+        <p:txBody>
+          <a:bodyPr/>
+          <a:lstStyle/>
+          <a:p>
+            <a:endParaRPr lang="en-VN"/>
+          </a:p>
+        </p:txBody>
       </p:sp>
       <p:sp>
         <p:nvSpPr>
@@ -22875,6 +23461,13 @@
           </a:solidFill>
           <a:ln/>
         </p:spPr>
+        <p:txBody>
+          <a:bodyPr/>
+          <a:lstStyle/>
+          <a:p>
+            <a:endParaRPr lang="en-VN"/>
+          </a:p>
+        </p:txBody>
       </p:sp>
       <p:sp>
         <p:nvSpPr>
@@ -22897,7 +23490,7 @@
           <a:bodyPr wrap="square" rtlCol="0" anchor="ctr"/>
           <a:lstStyle/>
           <a:p>
-            <a:pPr algn="ctr" indent="0" marL="0">
+            <a:pPr marL="0" indent="0" algn="ctr">
               <a:buNone/>
             </a:pPr>
             <a:r>
@@ -22933,7 +23526,7 @@
           <a:bodyPr wrap="square" rtlCol="0" anchor="ctr"/>
           <a:lstStyle/>
           <a:p>
-            <a:pPr indent="0" marL="0">
+            <a:pPr marL="0" indent="0">
               <a:buNone/>
             </a:pPr>
             <a:r>
@@ -22971,7 +23564,7 @@
           </a:bodyPr>
           <a:lstStyle/>
           <a:p>
-            <a:pPr indent="0" marL="0">
+            <a:pPr marL="0" indent="0">
               <a:lnSpc>
                 <a:spcPct val="122000"/>
               </a:lnSpc>
@@ -22985,12 +23578,6 @@
               </a:rPr>
               <a:t>• Trong 97.56% giao dịch gian lận, tài khoản nạn nhân bị rút cạn sạch về 0: </a:t>
             </a:r>
-            <a:pPr indent="0" marL="0">
-              <a:lnSpc>
-                <a:spcPct val="122000"/>
-              </a:lnSpc>
-              <a:buNone/>
-            </a:pPr>
             <a:r>
               <a:rPr lang="en-US" sz="980" b="1" dirty="0">
                 <a:solidFill>
@@ -23000,12 +23587,6 @@
               <a:t>newbalanceOrig == 0.
 </a:t>
             </a:r>
-            <a:pPr indent="0" marL="0">
-              <a:lnSpc>
-                <a:spcPct val="122000"/>
-              </a:lnSpc>
-              <a:buNone/>
-            </a:pPr>
             <a:r>
               <a:rPr lang="en-US" sz="980" dirty="0">
                 <a:solidFill>
@@ -23015,12 +23596,6 @@
               <a:t>• Kẻ gian tối đa hóa số tiền lấy cắp trong 1 lần duy nhất trước khi bị khóa thẻ.
 </a:t>
             </a:r>
-            <a:pPr indent="0" marL="0">
-              <a:lnSpc>
-                <a:spcPct val="122000"/>
-              </a:lnSpc>
-              <a:buNone/>
-            </a:pPr>
             <a:r>
               <a:rPr lang="en-US" sz="980" b="1" dirty="0">
                 <a:solidFill>
@@ -23029,12 +23604,6 @@
               </a:rPr>
               <a:t>• Tín hiệu Cốt lõi: </a:t>
             </a:r>
-            <a:pPr indent="0" marL="0">
-              <a:lnSpc>
-                <a:spcPct val="122000"/>
-              </a:lnSpc>
-              <a:buNone/>
-            </a:pPr>
             <a:r>
               <a:rPr lang="en-US" sz="980" dirty="0">
                 <a:solidFill>
@@ -23071,6 +23640,13 @@
             <a:prstDash val="solid"/>
           </a:ln>
         </p:spPr>
+        <p:txBody>
+          <a:bodyPr/>
+          <a:lstStyle/>
+          <a:p>
+            <a:endParaRPr lang="en-VN"/>
+          </a:p>
+        </p:txBody>
       </p:sp>
       <p:sp>
         <p:nvSpPr>
@@ -23091,6 +23667,13 @@
           </a:solidFill>
           <a:ln/>
         </p:spPr>
+        <p:txBody>
+          <a:bodyPr/>
+          <a:lstStyle/>
+          <a:p>
+            <a:endParaRPr lang="en-VN"/>
+          </a:p>
+        </p:txBody>
       </p:sp>
       <p:sp>
         <p:nvSpPr>
@@ -23113,7 +23696,7 @@
           <a:bodyPr wrap="square" rtlCol="0" anchor="ctr"/>
           <a:lstStyle/>
           <a:p>
-            <a:pPr algn="ctr" indent="0" marL="0">
+            <a:pPr marL="0" indent="0" algn="ctr">
               <a:buNone/>
             </a:pPr>
             <a:r>
@@ -23149,7 +23732,7 @@
           <a:bodyPr wrap="square" rtlCol="0" anchor="ctr"/>
           <a:lstStyle/>
           <a:p>
-            <a:pPr indent="0" marL="0">
+            <a:pPr marL="0" indent="0">
               <a:buNone/>
             </a:pPr>
             <a:r>
@@ -23187,7 +23770,7 @@
           </a:bodyPr>
           <a:lstStyle/>
           <a:p>
-            <a:pPr indent="0" marL="0">
+            <a:pPr marL="0" indent="0">
               <a:lnSpc>
                 <a:spcPct val="122000"/>
               </a:lnSpc>
@@ -23201,12 +23784,6 @@
               </a:rPr>
               <a:t>• Tỷ lệ lớn giao dịch gian lận không làm tăng số dư tài khoản đích theo sổ sách: </a:t>
             </a:r>
-            <a:pPr indent="0" marL="0">
-              <a:lnSpc>
-                <a:spcPct val="122000"/>
-              </a:lnSpc>
-              <a:buNone/>
-            </a:pPr>
             <a:r>
               <a:rPr lang="en-US" sz="980" b="1" dirty="0">
                 <a:solidFill>
@@ -23216,12 +23793,6 @@
               <a:t>newbalanceDest ≈ 0.
 </a:t>
             </a:r>
-            <a:pPr indent="0" marL="0">
-              <a:lnSpc>
-                <a:spcPct val="122000"/>
-              </a:lnSpc>
-              <a:buNone/>
-            </a:pPr>
             <a:r>
               <a:rPr lang="en-US" sz="980" dirty="0">
                 <a:solidFill>
@@ -23231,12 +23802,6 @@
               <a:t>• Phản ánh tài khoản rác (mule account) hoặc luân chuyển rửa tiền đa tầng tức thì.
 </a:t>
             </a:r>
-            <a:pPr indent="0" marL="0">
-              <a:lnSpc>
-                <a:spcPct val="122000"/>
-              </a:lnSpc>
-              <a:buNone/>
-            </a:pPr>
             <a:r>
               <a:rPr lang="en-US" sz="980" b="1" dirty="0">
                 <a:solidFill>
@@ -23245,12 +23810,6 @@
               </a:rPr>
               <a:t>• Tín hiệu Cốt lõi: </a:t>
             </a:r>
-            <a:pPr indent="0" marL="0">
-              <a:lnSpc>
-                <a:spcPct val="122000"/>
-              </a:lnSpc>
-              <a:buNone/>
-            </a:pPr>
             <a:r>
               <a:rPr lang="en-US" sz="980" dirty="0">
                 <a:solidFill>
@@ -23268,9 +23827,18 @@
   <p:clrMapOvr>
     <a:masterClrMapping/>
   </p:clrMapOvr>
-  <p:transition xmlns:p14="http://schemas.microsoft.com/office/powerpoint/2010/main" spd="slow" p14:dur="1500">
-    <p:split orient="vert"/>
-  </p:transition>
+  <mc:AlternateContent xmlns:mc="http://schemas.openxmlformats.org/markup-compatibility/2006">
+    <mc:Choice xmlns:p14="http://schemas.microsoft.com/office/powerpoint/2010/main" Requires="p14">
+      <p:transition spd="slow" p14:dur="1300">
+        <p14:pan dir="u"/>
+      </p:transition>
+    </mc:Choice>
+    <mc:Fallback>
+      <p:transition spd="slow">
+        <p:fade/>
+      </p:transition>
+    </mc:Fallback>
+  </mc:AlternateContent>
 </p:sld>
 </file>
 
@@ -23282,6 +23850,7 @@
         <a:solidFill>
           <a:srgbClr val="FFFFFF"/>
         </a:solidFill>
+        <a:effectLst/>
       </p:bgPr>
     </p:bg>
     <p:spTree>
@@ -23319,7 +23888,7 @@
           <a:bodyPr wrap="square" rtlCol="0" anchor="ctr"/>
           <a:lstStyle/>
           <a:p>
-            <a:pPr algn="ctr" indent="0" marL="0">
+            <a:pPr marL="0" indent="0" algn="ctr">
               <a:buNone/>
             </a:pPr>
             <a:r>
@@ -23360,7 +23929,7 @@
           </a:bodyPr>
           <a:lstStyle/>
           <a:p>
-            <a:pPr indent="0" marL="0">
+            <a:pPr marL="0" indent="0">
               <a:buNone/>
             </a:pPr>
             <a:r>
@@ -23400,6 +23969,13 @@
             <a:prstDash val="solid"/>
           </a:ln>
         </p:spPr>
+        <p:txBody>
+          <a:bodyPr/>
+          <a:lstStyle/>
+          <a:p>
+            <a:endParaRPr lang="en-VN"/>
+          </a:p>
+        </p:txBody>
       </p:sp>
       <p:sp>
         <p:nvSpPr>
@@ -23422,7 +23998,7 @@
           <a:bodyPr wrap="square" rtlCol="0" anchor="ctr"/>
           <a:lstStyle/>
           <a:p>
-            <a:pPr indent="0" marL="0">
+            <a:pPr marL="0" indent="0">
               <a:buNone/>
             </a:pPr>
             <a:r>
@@ -23461,7 +24037,7 @@
           <a:bodyPr wrap="square" rtlCol="0" anchor="ctr"/>
           <a:lstStyle/>
           <a:p>
-            <a:pPr algn="r" indent="0" marL="0">
+            <a:pPr marL="0" indent="0" algn="r">
               <a:buNone/>
             </a:pPr>
             <a:r>
@@ -23503,6 +24079,13 @@
             <a:prstDash val="solid"/>
           </a:ln>
         </p:spPr>
+        <p:txBody>
+          <a:bodyPr/>
+          <a:lstStyle/>
+          <a:p>
+            <a:endParaRPr lang="en-VN"/>
+          </a:p>
+        </p:txBody>
       </p:sp>
       <p:sp>
         <p:nvSpPr>
@@ -23525,7 +24108,7 @@
           <a:bodyPr wrap="square" rtlCol="0" anchor="ctr"/>
           <a:lstStyle/>
           <a:p>
-            <a:pPr indent="0" marL="0">
+            <a:pPr marL="0" indent="0">
               <a:buNone/>
             </a:pPr>
             <a:r>
@@ -23561,7 +24144,7 @@
           <a:bodyPr wrap="square" rtlCol="0" anchor="ctr"/>
           <a:lstStyle/>
           <a:p>
-            <a:pPr indent="0" marL="0">
+            <a:pPr marL="0" indent="0">
               <a:buNone/>
             </a:pPr>
             <a:r>
@@ -23600,7 +24183,7 @@
           <a:bodyPr wrap="square" rtlCol="0" anchor="ctr"/>
           <a:lstStyle/>
           <a:p>
-            <a:pPr indent="0" marL="0">
+            <a:pPr marL="0" indent="0">
               <a:lnSpc>
                 <a:spcPct val="120000"/>
               </a:lnSpc>
@@ -23642,6 +24225,13 @@
             <a:prstDash val="solid"/>
           </a:ln>
         </p:spPr>
+        <p:txBody>
+          <a:bodyPr/>
+          <a:lstStyle/>
+          <a:p>
+            <a:endParaRPr lang="en-VN"/>
+          </a:p>
+        </p:txBody>
       </p:sp>
       <p:sp>
         <p:nvSpPr>
@@ -23664,7 +24254,7 @@
           <a:bodyPr wrap="square" rtlCol="0" anchor="ctr"/>
           <a:lstStyle/>
           <a:p>
-            <a:pPr indent="0" marL="0">
+            <a:pPr marL="0" indent="0">
               <a:buNone/>
             </a:pPr>
             <a:r>
@@ -23700,7 +24290,7 @@
           <a:bodyPr wrap="square" rtlCol="0" anchor="ctr"/>
           <a:lstStyle/>
           <a:p>
-            <a:pPr indent="0" marL="0">
+            <a:pPr marL="0" indent="0">
               <a:buNone/>
             </a:pPr>
             <a:r>
@@ -23739,7 +24329,7 @@
           <a:bodyPr wrap="square" rtlCol="0" anchor="ctr"/>
           <a:lstStyle/>
           <a:p>
-            <a:pPr indent="0" marL="0">
+            <a:pPr marL="0" indent="0">
               <a:lnSpc>
                 <a:spcPct val="120000"/>
               </a:lnSpc>
@@ -23781,6 +24371,13 @@
             <a:prstDash val="solid"/>
           </a:ln>
         </p:spPr>
+        <p:txBody>
+          <a:bodyPr/>
+          <a:lstStyle/>
+          <a:p>
+            <a:endParaRPr lang="en-VN"/>
+          </a:p>
+        </p:txBody>
       </p:sp>
       <p:sp>
         <p:nvSpPr>
@@ -23803,7 +24400,7 @@
           <a:bodyPr wrap="square" rtlCol="0" anchor="ctr"/>
           <a:lstStyle/>
           <a:p>
-            <a:pPr indent="0" marL="0">
+            <a:pPr marL="0" indent="0">
               <a:buNone/>
             </a:pPr>
             <a:r>
@@ -23839,7 +24436,7 @@
           <a:bodyPr wrap="square" rtlCol="0" anchor="ctr"/>
           <a:lstStyle/>
           <a:p>
-            <a:pPr indent="0" marL="0">
+            <a:pPr marL="0" indent="0">
               <a:buNone/>
             </a:pPr>
             <a:r>
@@ -23856,7 +24453,7 @@
             <a:endParaRPr lang="en-US" sz="850" dirty="0"/>
           </a:p>
           <a:p>
-            <a:pPr indent="0" marL="0">
+            <a:pPr marL="0" indent="0">
               <a:buNone/>
             </a:pPr>
             <a:r>
@@ -23895,7 +24492,7 @@
           <a:bodyPr wrap="square" rtlCol="0" anchor="ctr"/>
           <a:lstStyle/>
           <a:p>
-            <a:pPr indent="0" marL="0">
+            <a:pPr marL="0" indent="0">
               <a:lnSpc>
                 <a:spcPct val="120000"/>
               </a:lnSpc>
@@ -23937,6 +24534,13 @@
             <a:prstDash val="solid"/>
           </a:ln>
         </p:spPr>
+        <p:txBody>
+          <a:bodyPr/>
+          <a:lstStyle/>
+          <a:p>
+            <a:endParaRPr lang="en-VN"/>
+          </a:p>
+        </p:txBody>
       </p:sp>
       <p:sp>
         <p:nvSpPr>
@@ -23959,7 +24563,7 @@
           <a:bodyPr wrap="square" rtlCol="0" anchor="ctr"/>
           <a:lstStyle/>
           <a:p>
-            <a:pPr indent="0" marL="0">
+            <a:pPr marL="0" indent="0">
               <a:buNone/>
             </a:pPr>
             <a:r>
@@ -23979,38 +24583,56 @@
       </p:sp>
       <p:graphicFrame>
         <p:nvGraphicFramePr>
-          <p:cNvPr id="9" name="Table 0"/>
+          <p:cNvPr id="21" name="Table 0"/>
           <p:cNvGraphicFramePr>
             <a:graphicFrameLocks noGrp="1"/>
           </p:cNvGraphicFramePr>
           <p:nvPr>
             <p:extLst>
               <p:ext uri="{D42A27DB-BD31-4B8C-83A1-F6EECF244321}">
-                <p14:modId xmlns:p14="http://schemas.microsoft.com/office/powerpoint/2010/main" val="1579011935"/>
+                <p14:modId xmlns:p14="http://schemas.microsoft.com/office/powerpoint/2010/main" val="1015034861"/>
               </p:ext>
             </p:extLst>
           </p:nvPr>
         </p:nvGraphicFramePr>
         <p:xfrm>
           <a:off x="4983480" y="1243584"/>
-          <a:ext cx="3657600" cy="914400"/>
+          <a:ext cx="3657600" cy="1745489"/>
         </p:xfrm>
         <a:graphic>
           <a:graphicData uri="http://schemas.openxmlformats.org/drawingml/2006/table">
             <a:tbl>
               <a:tblPr/>
               <a:tblGrid>
-                <a:gridCol w="1536192"/>
-                <a:gridCol w="914400"/>
-                <a:gridCol w="1207008"/>
+                <a:gridCol w="1536192">
+                  <a:extLst>
+                    <a:ext uri="{9D8B030D-6E8A-4147-A177-3AD203B41FA5}">
+                      <a16:colId xmlns:a16="http://schemas.microsoft.com/office/drawing/2014/main" val="20000"/>
+                    </a:ext>
+                  </a:extLst>
+                </a:gridCol>
+                <a:gridCol w="914400">
+                  <a:extLst>
+                    <a:ext uri="{9D8B030D-6E8A-4147-A177-3AD203B41FA5}">
+                      <a16:colId xmlns:a16="http://schemas.microsoft.com/office/drawing/2014/main" val="20001"/>
+                    </a:ext>
+                  </a:extLst>
+                </a:gridCol>
+                <a:gridCol w="1207008">
+                  <a:extLst>
+                    <a:ext uri="{9D8B030D-6E8A-4147-A177-3AD203B41FA5}">
+                      <a16:colId xmlns:a16="http://schemas.microsoft.com/office/drawing/2014/main" val="20002"/>
+                    </a:ext>
+                  </a:extLst>
+                </a:gridCol>
               </a:tblGrid>
-              <a:tr h="0">
+              <a:tr h="182518">
                 <a:tc>
                   <a:txBody>
                     <a:bodyPr/>
                     <a:lstStyle/>
                     <a:p>
-                      <a:pPr algn="ctr" indent="0" marL="0">
+                      <a:pPr marL="0" indent="0" algn="ctr">
                         <a:buNone/>
                       </a:pPr>
                       <a:r>
@@ -24078,7 +24700,7 @@
                     <a:bodyPr/>
                     <a:lstStyle/>
                     <a:p>
-                      <a:pPr algn="ctr" indent="0" marL="0">
+                      <a:pPr marL="0" indent="0" algn="ctr">
                         <a:buNone/>
                       </a:pPr>
                       <a:r>
@@ -24146,7 +24768,7 @@
                     <a:bodyPr/>
                     <a:lstStyle/>
                     <a:p>
-                      <a:pPr algn="ctr" indent="0" marL="0">
+                      <a:pPr marL="0" indent="0" algn="ctr">
                         <a:buNone/>
                       </a:pPr>
                       <a:r>
@@ -24209,14 +24831,19 @@
                     </a:solidFill>
                   </a:tcPr>
                 </a:tc>
+                <a:extLst>
+                  <a:ext uri="{0D108BD9-81ED-4DB2-BD59-A6C34878D82A}">
+                    <a16:rowId xmlns:a16="http://schemas.microsoft.com/office/drawing/2014/main" val="10000"/>
+                  </a:ext>
+                </a:extLst>
               </a:tr>
-              <a:tr h="0">
+              <a:tr h="421591">
                 <a:tc>
                   <a:txBody>
                     <a:bodyPr/>
                     <a:lstStyle/>
                     <a:p>
-                      <a:pPr indent="0" marL="0">
+                      <a:pPr marL="0" indent="0">
                         <a:buNone/>
                       </a:pPr>
                       <a:r>
@@ -24284,7 +24911,7 @@
                     <a:bodyPr/>
                     <a:lstStyle/>
                     <a:p>
-                      <a:pPr indent="0" marL="0">
+                      <a:pPr marL="0" indent="0">
                         <a:buNone/>
                       </a:pPr>
                       <a:r>
@@ -24352,7 +24979,7 @@
                     <a:bodyPr/>
                     <a:lstStyle/>
                     <a:p>
-                      <a:pPr indent="0" marL="0">
+                      <a:pPr marL="0" indent="0">
                         <a:buNone/>
                       </a:pPr>
                       <a:r>
@@ -24415,14 +25042,19 @@
                     </a:solidFill>
                   </a:tcPr>
                 </a:tc>
+                <a:extLst>
+                  <a:ext uri="{0D108BD9-81ED-4DB2-BD59-A6C34878D82A}">
+                    <a16:rowId xmlns:a16="http://schemas.microsoft.com/office/drawing/2014/main" val="10001"/>
+                  </a:ext>
+                </a:extLst>
               </a:tr>
-              <a:tr h="0">
+              <a:tr h="298198">
                 <a:tc>
                   <a:txBody>
                     <a:bodyPr/>
                     <a:lstStyle/>
                     <a:p>
-                      <a:pPr indent="0" marL="0">
+                      <a:pPr marL="0" indent="0">
                         <a:buNone/>
                       </a:pPr>
                       <a:r>
@@ -24490,7 +25122,7 @@
                     <a:bodyPr/>
                     <a:lstStyle/>
                     <a:p>
-                      <a:pPr indent="0" marL="0">
+                      <a:pPr marL="0" indent="0">
                         <a:buNone/>
                       </a:pPr>
                       <a:r>
@@ -24558,7 +25190,7 @@
                     <a:bodyPr/>
                     <a:lstStyle/>
                     <a:p>
-                      <a:pPr indent="0" marL="0">
+                      <a:pPr marL="0" indent="0">
                         <a:buNone/>
                       </a:pPr>
                       <a:r>
@@ -24621,14 +25253,19 @@
                     </a:solidFill>
                   </a:tcPr>
                 </a:tc>
+                <a:extLst>
+                  <a:ext uri="{0D108BD9-81ED-4DB2-BD59-A6C34878D82A}">
+                    <a16:rowId xmlns:a16="http://schemas.microsoft.com/office/drawing/2014/main" val="10002"/>
+                  </a:ext>
+                </a:extLst>
               </a:tr>
-              <a:tr h="0">
+              <a:tr h="421591">
                 <a:tc>
                   <a:txBody>
                     <a:bodyPr/>
                     <a:lstStyle/>
                     <a:p>
-                      <a:pPr indent="0" marL="0">
+                      <a:pPr marL="0" indent="0">
                         <a:buNone/>
                       </a:pPr>
                       <a:r>
@@ -24696,7 +25333,7 @@
                     <a:bodyPr/>
                     <a:lstStyle/>
                     <a:p>
-                      <a:pPr indent="0" marL="0">
+                      <a:pPr marL="0" indent="0">
                         <a:buNone/>
                       </a:pPr>
                       <a:r>
@@ -24764,7 +25401,7 @@
                     <a:bodyPr/>
                     <a:lstStyle/>
                     <a:p>
-                      <a:pPr indent="0" marL="0">
+                      <a:pPr marL="0" indent="0">
                         <a:buNone/>
                       </a:pPr>
                       <a:r>
@@ -24827,14 +25464,19 @@
                     </a:solidFill>
                   </a:tcPr>
                 </a:tc>
+                <a:extLst>
+                  <a:ext uri="{0D108BD9-81ED-4DB2-BD59-A6C34878D82A}">
+                    <a16:rowId xmlns:a16="http://schemas.microsoft.com/office/drawing/2014/main" val="10003"/>
+                  </a:ext>
+                </a:extLst>
               </a:tr>
-              <a:tr h="0">
+              <a:tr h="421591">
                 <a:tc>
                   <a:txBody>
                     <a:bodyPr/>
                     <a:lstStyle/>
                     <a:p>
-                      <a:pPr indent="0" marL="0">
+                      <a:pPr marL="0" indent="0">
                         <a:buNone/>
                       </a:pPr>
                       <a:r>
@@ -24902,7 +25544,7 @@
                     <a:bodyPr/>
                     <a:lstStyle/>
                     <a:p>
-                      <a:pPr indent="0" marL="0">
+                      <a:pPr marL="0" indent="0">
                         <a:buNone/>
                       </a:pPr>
                       <a:r>
@@ -24970,7 +25612,7 @@
                     <a:bodyPr/>
                     <a:lstStyle/>
                     <a:p>
-                      <a:pPr indent="0" marL="0">
+                      <a:pPr marL="0" indent="0">
                         <a:buNone/>
                       </a:pPr>
                       <a:r>
@@ -25033,6 +25675,11 @@
                     </a:solidFill>
                   </a:tcPr>
                 </a:tc>
+                <a:extLst>
+                  <a:ext uri="{0D108BD9-81ED-4DB2-BD59-A6C34878D82A}">
+                    <a16:rowId xmlns:a16="http://schemas.microsoft.com/office/drawing/2014/main" val="10004"/>
+                  </a:ext>
+                </a:extLst>
               </a:tr>
             </a:tbl>
           </a:graphicData>
@@ -25046,8 +25693,8 @@
         </p:nvSpPr>
         <p:spPr>
           <a:xfrm>
-            <a:off x="4983480" y="2697480"/>
-            <a:ext cx="3657600" cy="1874520"/>
+            <a:off x="4983480" y="3062224"/>
+            <a:ext cx="3657600" cy="1509776"/>
           </a:xfrm>
           <a:prstGeom prst="rect">
             <a:avLst/>
@@ -25062,6 +25709,13 @@
             <a:prstDash val="solid"/>
           </a:ln>
         </p:spPr>
+        <p:txBody>
+          <a:bodyPr/>
+          <a:lstStyle/>
+          <a:p>
+            <a:endParaRPr lang="en-VN"/>
+          </a:p>
+        </p:txBody>
       </p:sp>
       <p:sp>
         <p:nvSpPr>
@@ -25071,7 +25725,7 @@
         </p:nvSpPr>
         <p:spPr>
           <a:xfrm>
-            <a:off x="5120640" y="2770632"/>
+            <a:off x="5120640" y="3108960"/>
             <a:ext cx="3383280" cy="219456"/>
           </a:xfrm>
           <a:prstGeom prst="rect">
@@ -25084,7 +25738,7 @@
           <a:bodyPr wrap="square" rtlCol="0" anchor="ctr"/>
           <a:lstStyle/>
           <a:p>
-            <a:pPr indent="0" marL="0">
+            <a:pPr marL="0" indent="0">
               <a:buNone/>
             </a:pPr>
             <a:r>
@@ -25110,8 +25764,8 @@
         </p:nvSpPr>
         <p:spPr>
           <a:xfrm>
-            <a:off x="5120640" y="2990088"/>
-            <a:ext cx="3383280" cy="1508760"/>
+            <a:off x="5120640" y="3328416"/>
+            <a:ext cx="3383280" cy="1170432"/>
           </a:xfrm>
           <a:prstGeom prst="rect">
             <a:avLst/>
@@ -25203,9 +25857,18 @@
   <p:clrMapOvr>
     <a:masterClrMapping/>
   </p:clrMapOvr>
-  <p:transition xmlns:p14="http://schemas.microsoft.com/office/powerpoint/2010/main" xmlns:p159="http://schemas.microsoft.com/office/powerpoint/2015/09/main" spd="slow" p14:dur="2000">
-    <p159:morph option="byObject"/>
-  </p:transition>
+  <mc:AlternateContent xmlns:mc="http://schemas.openxmlformats.org/markup-compatibility/2006" xmlns:p159="http://schemas.microsoft.com/office/powerpoint/2015/09/main">
+    <mc:Choice Requires="p159">
+      <p:transition xmlns:p14="http://schemas.microsoft.com/office/powerpoint/2010/main" spd="slow" p14:dur="2000">
+        <p159:morph option="byObject"/>
+      </p:transition>
+    </mc:Choice>
+    <mc:Fallback xmlns="">
+      <p:transition spd="slow">
+        <p:fade/>
+      </p:transition>
+    </mc:Fallback>
+  </mc:AlternateContent>
 </p:sld>
 </file>
 
@@ -25217,6 +25880,7 @@
         <a:solidFill>
           <a:srgbClr val="FFFFFF"/>
         </a:solidFill>
+        <a:effectLst/>
       </p:bgPr>
     </p:bg>
     <p:spTree>
@@ -25254,7 +25918,7 @@
           <a:bodyPr wrap="square" rtlCol="0" anchor="ctr"/>
           <a:lstStyle/>
           <a:p>
-            <a:pPr algn="ctr" indent="0" marL="0">
+            <a:pPr marL="0" indent="0" algn="ctr">
               <a:buNone/>
             </a:pPr>
             <a:r>
@@ -25295,7 +25959,7 @@
           </a:bodyPr>
           <a:lstStyle/>
           <a:p>
-            <a:pPr indent="0" marL="0">
+            <a:pPr marL="0" indent="0">
               <a:buNone/>
             </a:pPr>
             <a:r>
@@ -25335,6 +25999,13 @@
             <a:prstDash val="solid"/>
           </a:ln>
         </p:spPr>
+        <p:txBody>
+          <a:bodyPr/>
+          <a:lstStyle/>
+          <a:p>
+            <a:endParaRPr lang="en-VN"/>
+          </a:p>
+        </p:txBody>
       </p:sp>
       <p:sp>
         <p:nvSpPr>
@@ -25357,7 +26028,7 @@
           <a:bodyPr wrap="square" rtlCol="0" anchor="ctr"/>
           <a:lstStyle/>
           <a:p>
-            <a:pPr indent="0" marL="0">
+            <a:pPr marL="0" indent="0">
               <a:buNone/>
             </a:pPr>
             <a:r>
@@ -25396,7 +26067,7 @@
           <a:bodyPr wrap="square" rtlCol="0" anchor="ctr"/>
           <a:lstStyle/>
           <a:p>
-            <a:pPr algn="r" indent="0" marL="0">
+            <a:pPr marL="0" indent="0" algn="r">
               <a:buNone/>
             </a:pPr>
             <a:r>
@@ -25438,6 +26109,13 @@
             <a:prstDash val="solid"/>
           </a:ln>
         </p:spPr>
+        <p:txBody>
+          <a:bodyPr/>
+          <a:lstStyle/>
+          <a:p>
+            <a:endParaRPr lang="en-VN"/>
+          </a:p>
+        </p:txBody>
       </p:sp>
       <p:sp>
         <p:nvSpPr>
@@ -25460,7 +26138,7 @@
           <a:bodyPr wrap="square" rtlCol="0" anchor="ctr"/>
           <a:lstStyle/>
           <a:p>
-            <a:pPr indent="0" marL="0">
+            <a:pPr marL="0" indent="0">
               <a:buNone/>
             </a:pPr>
             <a:r>
@@ -25496,7 +26174,7 @@
           <a:bodyPr wrap="square" rtlCol="0" anchor="ctr"/>
           <a:lstStyle/>
           <a:p>
-            <a:pPr indent="0" marL="0">
+            <a:pPr marL="0" indent="0">
               <a:lnSpc>
                 <a:spcPct val="120000"/>
               </a:lnSpc>
@@ -25538,6 +26216,13 @@
             <a:prstDash val="solid"/>
           </a:ln>
         </p:spPr>
+        <p:txBody>
+          <a:bodyPr/>
+          <a:lstStyle/>
+          <a:p>
+            <a:endParaRPr lang="en-VN"/>
+          </a:p>
+        </p:txBody>
       </p:sp>
       <p:sp>
         <p:nvSpPr>
@@ -25560,7 +26245,7 @@
           <a:bodyPr wrap="square" rtlCol="0" anchor="ctr"/>
           <a:lstStyle/>
           <a:p>
-            <a:pPr indent="0" marL="0">
+            <a:pPr marL="0" indent="0">
               <a:buNone/>
             </a:pPr>
             <a:r>
@@ -25599,6 +26284,13 @@
             <a:prstDash val="solid"/>
           </a:ln>
         </p:spPr>
+        <p:txBody>
+          <a:bodyPr/>
+          <a:lstStyle/>
+          <a:p>
+            <a:endParaRPr lang="en-VN"/>
+          </a:p>
+        </p:txBody>
       </p:sp>
       <p:sp>
         <p:nvSpPr>
@@ -25621,7 +26313,7 @@
           <a:bodyPr wrap="square" rtlCol="0" anchor="ctr"/>
           <a:lstStyle/>
           <a:p>
-            <a:pPr indent="0" marL="0">
+            <a:pPr marL="0" indent="0">
               <a:buNone/>
             </a:pPr>
             <a:r>
@@ -25662,7 +26354,7 @@
           </a:bodyPr>
           <a:lstStyle/>
           <a:p>
-            <a:pPr indent="0" marL="0">
+            <a:pPr marL="0" indent="0">
               <a:lnSpc>
                 <a:spcPct val="120000"/>
               </a:lnSpc>
@@ -25676,12 +26368,6 @@
               </a:rPr>
               <a:t>• Cơ chế: </a:t>
             </a:r>
-            <a:pPr indent="0" marL="0">
-              <a:lnSpc>
-                <a:spcPct val="120000"/>
-              </a:lnSpc>
-              <a:buNone/>
-            </a:pPr>
             <a:r>
               <a:rPr lang="en-US" sz="920" dirty="0">
                 <a:solidFill>
@@ -25691,12 +26377,6 @@
               <a:t>Nội suy mẫu nhân tạo thiểu số dọc theo đoạn thẳng nối các láng giềng k-NN trong Latent Space.
 </a:t>
             </a:r>
-            <a:pPr indent="0" marL="0">
-              <a:lnSpc>
-                <a:spcPct val="120000"/>
-              </a:lnSpc>
-              <a:buNone/>
-            </a:pPr>
             <a:r>
               <a:rPr lang="en-US" sz="920" b="1" dirty="0">
                 <a:solidFill>
@@ -25705,12 +26385,6 @@
               </a:rPr>
               <a:t>• Ưu điểm: </a:t>
             </a:r>
-            <a:pPr indent="0" marL="0">
-              <a:lnSpc>
-                <a:spcPct val="120000"/>
-              </a:lnSpc>
-              <a:buNone/>
-            </a:pPr>
             <a:r>
               <a:rPr lang="en-US" sz="920" dirty="0">
                 <a:solidFill>
@@ -25720,12 +26394,6 @@
               <a:t>Tạo Decision Boundary rõ nét, phân tách tốt giữa Fraud và Legitimate.
 </a:t>
             </a:r>
-            <a:pPr indent="0" marL="0">
-              <a:lnSpc>
-                <a:spcPct val="120000"/>
-              </a:lnSpc>
-              <a:buNone/>
-            </a:pPr>
             <a:r>
               <a:rPr lang="en-US" sz="920" b="1" dirty="0">
                 <a:solidFill>
@@ -25734,12 +26402,6 @@
               </a:rPr>
               <a:t>• Kết quả Thực nghiệm: </a:t>
             </a:r>
-            <a:pPr indent="0" marL="0">
-              <a:lnSpc>
-                <a:spcPct val="120000"/>
-              </a:lnSpc>
-              <a:buNone/>
-            </a:pPr>
             <a:r>
               <a:rPr lang="en-US" sz="920" dirty="0">
                 <a:solidFill>
@@ -25776,6 +26438,13 @@
             <a:prstDash val="solid"/>
           </a:ln>
         </p:spPr>
+        <p:txBody>
+          <a:bodyPr/>
+          <a:lstStyle/>
+          <a:p>
+            <a:endParaRPr lang="en-VN"/>
+          </a:p>
+        </p:txBody>
       </p:sp>
       <p:sp>
         <p:nvSpPr>
@@ -25798,7 +26467,7 @@
           <a:bodyPr wrap="square" rtlCol="0" anchor="ctr"/>
           <a:lstStyle/>
           <a:p>
-            <a:pPr indent="0" marL="0">
+            <a:pPr marL="0" indent="0">
               <a:buNone/>
             </a:pPr>
             <a:r>
@@ -25818,38 +26487,56 @@
       </p:sp>
       <p:graphicFrame>
         <p:nvGraphicFramePr>
-          <p:cNvPr id="10" name="Table 0"/>
+          <p:cNvPr id="17" name="Table 0"/>
           <p:cNvGraphicFramePr>
             <a:graphicFrameLocks noGrp="1"/>
           </p:cNvGraphicFramePr>
           <p:nvPr>
             <p:extLst>
               <p:ext uri="{D42A27DB-BD31-4B8C-83A1-F6EECF244321}">
-                <p14:modId xmlns:p14="http://schemas.microsoft.com/office/powerpoint/2010/main" val="1579011935"/>
+                <p14:modId xmlns:p14="http://schemas.microsoft.com/office/powerpoint/2010/main" val="4284460072"/>
               </p:ext>
             </p:extLst>
           </p:nvPr>
         </p:nvGraphicFramePr>
         <p:xfrm>
           <a:off x="4686300" y="1993392"/>
-          <a:ext cx="3954780" cy="914400"/>
+          <a:ext cx="3954780" cy="1451944"/>
         </p:xfrm>
         <a:graphic>
           <a:graphicData uri="http://schemas.openxmlformats.org/drawingml/2006/table">
             <a:tbl>
               <a:tblPr/>
               <a:tblGrid>
-                <a:gridCol w="1423721"/>
-                <a:gridCol w="1107338"/>
-                <a:gridCol w="1423721"/>
+                <a:gridCol w="1423721">
+                  <a:extLst>
+                    <a:ext uri="{9D8B030D-6E8A-4147-A177-3AD203B41FA5}">
+                      <a16:colId xmlns:a16="http://schemas.microsoft.com/office/drawing/2014/main" val="20000"/>
+                    </a:ext>
+                  </a:extLst>
+                </a:gridCol>
+                <a:gridCol w="1107338">
+                  <a:extLst>
+                    <a:ext uri="{9D8B030D-6E8A-4147-A177-3AD203B41FA5}">
+                      <a16:colId xmlns:a16="http://schemas.microsoft.com/office/drawing/2014/main" val="20001"/>
+                    </a:ext>
+                  </a:extLst>
+                </a:gridCol>
+                <a:gridCol w="1423721">
+                  <a:extLst>
+                    <a:ext uri="{9D8B030D-6E8A-4147-A177-3AD203B41FA5}">
+                      <a16:colId xmlns:a16="http://schemas.microsoft.com/office/drawing/2014/main" val="20002"/>
+                    </a:ext>
+                  </a:extLst>
+                </a:gridCol>
               </a:tblGrid>
-              <a:tr h="0">
+              <a:tr h="192688">
                 <a:tc>
                   <a:txBody>
                     <a:bodyPr/>
                     <a:lstStyle/>
                     <a:p>
-                      <a:pPr algn="ctr" indent="0" marL="0">
+                      <a:pPr marL="0" indent="0" algn="ctr">
                         <a:buNone/>
                       </a:pPr>
                       <a:r>
@@ -25917,7 +26604,7 @@
                     <a:bodyPr/>
                     <a:lstStyle/>
                     <a:p>
-                      <a:pPr algn="ctr" indent="0" marL="0">
+                      <a:pPr marL="0" indent="0" algn="ctr">
                         <a:buNone/>
                       </a:pPr>
                       <a:r>
@@ -25985,7 +26672,7 @@
                     <a:bodyPr/>
                     <a:lstStyle/>
                     <a:p>
-                      <a:pPr algn="ctr" indent="0" marL="0">
+                      <a:pPr marL="0" indent="0" algn="ctr">
                         <a:buNone/>
                       </a:pPr>
                       <a:r>
@@ -26048,14 +26735,19 @@
                     </a:solidFill>
                   </a:tcPr>
                 </a:tc>
+                <a:extLst>
+                  <a:ext uri="{0D108BD9-81ED-4DB2-BD59-A6C34878D82A}">
+                    <a16:rowId xmlns:a16="http://schemas.microsoft.com/office/drawing/2014/main" val="10000"/>
+                  </a:ext>
+                </a:extLst>
               </a:tr>
-              <a:tr h="0">
+              <a:tr h="314814">
                 <a:tc>
                   <a:txBody>
                     <a:bodyPr/>
                     <a:lstStyle/>
                     <a:p>
-                      <a:pPr indent="0" marL="0">
+                      <a:pPr marL="0" indent="0">
                         <a:buNone/>
                       </a:pPr>
                       <a:r>
@@ -26123,7 +26815,7 @@
                     <a:bodyPr/>
                     <a:lstStyle/>
                     <a:p>
-                      <a:pPr indent="0" marL="0">
+                      <a:pPr marL="0" indent="0">
                         <a:buNone/>
                       </a:pPr>
                       <a:r>
@@ -26191,7 +26883,7 @@
                     <a:bodyPr/>
                     <a:lstStyle/>
                     <a:p>
-                      <a:pPr indent="0" marL="0">
+                      <a:pPr marL="0" indent="0">
                         <a:buNone/>
                       </a:pPr>
                       <a:r>
@@ -26254,14 +26946,19 @@
                     </a:solidFill>
                   </a:tcPr>
                 </a:tc>
+                <a:extLst>
+                  <a:ext uri="{0D108BD9-81ED-4DB2-BD59-A6C34878D82A}">
+                    <a16:rowId xmlns:a16="http://schemas.microsoft.com/office/drawing/2014/main" val="10001"/>
+                  </a:ext>
+                </a:extLst>
               </a:tr>
-              <a:tr h="0">
+              <a:tr h="314814">
                 <a:tc>
                   <a:txBody>
                     <a:bodyPr/>
                     <a:lstStyle/>
                     <a:p>
-                      <a:pPr indent="0" marL="0">
+                      <a:pPr marL="0" indent="0">
                         <a:buNone/>
                       </a:pPr>
                       <a:r>
@@ -26329,7 +27026,7 @@
                     <a:bodyPr/>
                     <a:lstStyle/>
                     <a:p>
-                      <a:pPr indent="0" marL="0">
+                      <a:pPr marL="0" indent="0">
                         <a:buNone/>
                       </a:pPr>
                       <a:r>
@@ -26397,7 +27094,7 @@
                     <a:bodyPr/>
                     <a:lstStyle/>
                     <a:p>
-                      <a:pPr indent="0" marL="0">
+                      <a:pPr marL="0" indent="0">
                         <a:buNone/>
                       </a:pPr>
                       <a:r>
@@ -26460,14 +27157,19 @@
                     </a:solidFill>
                   </a:tcPr>
                 </a:tc>
+                <a:extLst>
+                  <a:ext uri="{0D108BD9-81ED-4DB2-BD59-A6C34878D82A}">
+                    <a16:rowId xmlns:a16="http://schemas.microsoft.com/office/drawing/2014/main" val="10002"/>
+                  </a:ext>
+                </a:extLst>
               </a:tr>
-              <a:tr h="0">
+              <a:tr h="314814">
                 <a:tc>
                   <a:txBody>
                     <a:bodyPr/>
                     <a:lstStyle/>
                     <a:p>
-                      <a:pPr indent="0" marL="0">
+                      <a:pPr marL="0" indent="0">
                         <a:buNone/>
                       </a:pPr>
                       <a:r>
@@ -26535,7 +27237,7 @@
                     <a:bodyPr/>
                     <a:lstStyle/>
                     <a:p>
-                      <a:pPr indent="0" marL="0">
+                      <a:pPr marL="0" indent="0">
                         <a:buNone/>
                       </a:pPr>
                       <a:r>
@@ -26603,7 +27305,7 @@
                     <a:bodyPr/>
                     <a:lstStyle/>
                     <a:p>
-                      <a:pPr indent="0" marL="0">
+                      <a:pPr marL="0" indent="0">
                         <a:buNone/>
                       </a:pPr>
                       <a:r>
@@ -26666,14 +27368,19 @@
                     </a:solidFill>
                   </a:tcPr>
                 </a:tc>
+                <a:extLst>
+                  <a:ext uri="{0D108BD9-81ED-4DB2-BD59-A6C34878D82A}">
+                    <a16:rowId xmlns:a16="http://schemas.microsoft.com/office/drawing/2014/main" val="10003"/>
+                  </a:ext>
+                </a:extLst>
               </a:tr>
-              <a:tr h="0">
+              <a:tr h="314814">
                 <a:tc>
                   <a:txBody>
                     <a:bodyPr/>
                     <a:lstStyle/>
                     <a:p>
-                      <a:pPr indent="0" marL="0">
+                      <a:pPr marL="0" indent="0">
                         <a:buNone/>
                       </a:pPr>
                       <a:r>
@@ -26741,7 +27448,7 @@
                     <a:bodyPr/>
                     <a:lstStyle/>
                     <a:p>
-                      <a:pPr indent="0" marL="0">
+                      <a:pPr marL="0" indent="0">
                         <a:buNone/>
                       </a:pPr>
                       <a:r>
@@ -26809,7 +27516,7 @@
                     <a:bodyPr/>
                     <a:lstStyle/>
                     <a:p>
-                      <a:pPr indent="0" marL="0">
+                      <a:pPr marL="0" indent="0">
                         <a:buNone/>
                       </a:pPr>
                       <a:r>
@@ -26872,6 +27579,11 @@
                     </a:solidFill>
                   </a:tcPr>
                 </a:tc>
+                <a:extLst>
+                  <a:ext uri="{0D108BD9-81ED-4DB2-BD59-A6C34878D82A}">
+                    <a16:rowId xmlns:a16="http://schemas.microsoft.com/office/drawing/2014/main" val="10004"/>
+                  </a:ext>
+                </a:extLst>
               </a:tr>
             </a:tbl>
           </a:graphicData>
@@ -26885,8 +27597,8 @@
         </p:nvSpPr>
         <p:spPr>
           <a:xfrm>
-            <a:off x="4686300" y="3337560"/>
-            <a:ext cx="3954780" cy="1234440"/>
+            <a:off x="4686300" y="3500202"/>
+            <a:ext cx="3954780" cy="1071797"/>
           </a:xfrm>
           <a:prstGeom prst="rect">
             <a:avLst/>
@@ -26901,6 +27613,13 @@
             <a:prstDash val="solid"/>
           </a:ln>
         </p:spPr>
+        <p:txBody>
+          <a:bodyPr/>
+          <a:lstStyle/>
+          <a:p>
+            <a:endParaRPr lang="en-VN"/>
+          </a:p>
+        </p:txBody>
       </p:sp>
       <p:sp>
         <p:nvSpPr>
@@ -26910,7 +27629,7 @@
         </p:nvSpPr>
         <p:spPr>
           <a:xfrm>
-            <a:off x="4777740" y="3383280"/>
+            <a:off x="4777740" y="3560772"/>
             <a:ext cx="3771900" cy="201168"/>
           </a:xfrm>
           <a:prstGeom prst="rect">
@@ -26923,7 +27642,7 @@
           <a:bodyPr wrap="square" rtlCol="0" anchor="ctr"/>
           <a:lstStyle/>
           <a:p>
-            <a:pPr indent="0" marL="0">
+            <a:pPr marL="0" indent="0">
               <a:buNone/>
             </a:pPr>
             <a:r>
@@ -26946,8 +27665,8 @@
         </p:nvSpPr>
         <p:spPr>
           <a:xfrm>
-            <a:off x="4777740" y="3602736"/>
-            <a:ext cx="3771900" cy="914400"/>
+            <a:off x="4777740" y="3762530"/>
+            <a:ext cx="3771900" cy="754605"/>
           </a:xfrm>
           <a:prstGeom prst="rect">
             <a:avLst/>
@@ -26961,7 +27680,7 @@
           </a:bodyPr>
           <a:lstStyle/>
           <a:p>
-            <a:pPr indent="0" marL="0">
+            <a:pPr marL="0" indent="0">
               <a:lnSpc>
                 <a:spcPct val="118000"/>
               </a:lnSpc>
@@ -26976,12 +27695,6 @@
               <a:t>• ADASYN sinh mẫu tỷ lệ thuận theo mật độ vùng biên khó, tuy nhiên dễ over-synthesize ở vùng chồng lấn nhiễu gây tăng nhẹ False Alarm.
 </a:t>
             </a:r>
-            <a:pPr indent="0" marL="0">
-              <a:lnSpc>
-                <a:spcPct val="118000"/>
-              </a:lnSpc>
-              <a:buNone/>
-            </a:pPr>
             <a:r>
               <a:rPr lang="en-US" sz="880" b="1" dirty="0">
                 <a:solidFill>
@@ -26999,9 +27712,18 @@
   <p:clrMapOvr>
     <a:masterClrMapping/>
   </p:clrMapOvr>
-  <p:transition xmlns:p14="http://schemas.microsoft.com/office/powerpoint/2010/main" xmlns:p159="http://schemas.microsoft.com/office/powerpoint/2015/09/main" spd="slow" p14:dur="2000">
-    <p159:morph option="byObject"/>
-  </p:transition>
+  <mc:AlternateContent xmlns:mc="http://schemas.openxmlformats.org/markup-compatibility/2006" xmlns:p159="http://schemas.microsoft.com/office/powerpoint/2015/09/main">
+    <mc:Choice Requires="p159">
+      <p:transition xmlns:p14="http://schemas.microsoft.com/office/powerpoint/2010/main" spd="slow" p14:dur="2000">
+        <p159:morph option="byObject"/>
+      </p:transition>
+    </mc:Choice>
+    <mc:Fallback xmlns="">
+      <p:transition spd="slow">
+        <p:fade/>
+      </p:transition>
+    </mc:Fallback>
+  </mc:AlternateContent>
 </p:sld>
 </file>
 
@@ -27298,4 +28020,319 @@
     </a:ext>
   </a:extLst>
 </a:theme>
+</file>
+
+<file path=ppt/theme/theme2.xml><?xml version="1.0" encoding="utf-8"?>
+<a:theme xmlns:a="http://schemas.openxmlformats.org/drawingml/2006/main" name="Office Theme">
+  <a:themeElements>
+    <a:clrScheme name="Office">
+      <a:dk1>
+        <a:sysClr val="windowText" lastClr="000000"/>
+      </a:dk1>
+      <a:lt1>
+        <a:sysClr val="window" lastClr="FFFFFF"/>
+      </a:lt1>
+      <a:dk2>
+        <a:srgbClr val="0E2841"/>
+      </a:dk2>
+      <a:lt2>
+        <a:srgbClr val="E8E8E8"/>
+      </a:lt2>
+      <a:accent1>
+        <a:srgbClr val="156082"/>
+      </a:accent1>
+      <a:accent2>
+        <a:srgbClr val="E97132"/>
+      </a:accent2>
+      <a:accent3>
+        <a:srgbClr val="196B24"/>
+      </a:accent3>
+      <a:accent4>
+        <a:srgbClr val="0F9ED5"/>
+      </a:accent4>
+      <a:accent5>
+        <a:srgbClr val="A02B93"/>
+      </a:accent5>
+      <a:accent6>
+        <a:srgbClr val="4EA72E"/>
+      </a:accent6>
+      <a:hlink>
+        <a:srgbClr val="467886"/>
+      </a:hlink>
+      <a:folHlink>
+        <a:srgbClr val="96607D"/>
+      </a:folHlink>
+    </a:clrScheme>
+    <a:fontScheme name="Office">
+      <a:majorFont>
+        <a:latin typeface="Aptos Display" panose="02110004020202020204"/>
+        <a:ea typeface=""/>
+        <a:cs typeface=""/>
+        <a:font script="Jpan" typeface="游ゴシック Light"/>
+        <a:font script="Hang" typeface="맑은 고딕"/>
+        <a:font script="Hans" typeface="等线 Light"/>
+        <a:font script="Hant" typeface="新細明體"/>
+        <a:font script="Arab" typeface="Times New Roman"/>
+        <a:font script="Hebr" typeface="Times New Roman"/>
+        <a:font script="Thai" typeface="Angsana New"/>
+        <a:font script="Ethi" typeface="Nyala"/>
+        <a:font script="Beng" typeface="Vrinda"/>
+        <a:font script="Gujr" typeface="Shruti"/>
+        <a:font script="Khmr" typeface="MoolBoran"/>
+        <a:font script="Knda" typeface="Tunga"/>
+        <a:font script="Guru" typeface="Raavi"/>
+        <a:font script="Cans" typeface="Euphemia"/>
+        <a:font script="Cher" typeface="Plantagenet Cherokee"/>
+        <a:font script="Yiii" typeface="Microsoft Yi Baiti"/>
+        <a:font script="Tibt" typeface="Microsoft Himalaya"/>
+        <a:font script="Thaa" typeface="MV Boli"/>
+        <a:font script="Deva" typeface="Mangal"/>
+        <a:font script="Telu" typeface="Gautami"/>
+        <a:font script="Taml" typeface="Latha"/>
+        <a:font script="Syrc" typeface="Estrangelo Edessa"/>
+        <a:font script="Orya" typeface="Kalinga"/>
+        <a:font script="Mlym" typeface="Kartika"/>
+        <a:font script="Laoo" typeface="DokChampa"/>
+        <a:font script="Sinh" typeface="Iskoola Pota"/>
+        <a:font script="Mong" typeface="Mongolian Baiti"/>
+        <a:font script="Viet" typeface="Times New Roman"/>
+        <a:font script="Uigh" typeface="Microsoft Uighur"/>
+        <a:font script="Geor" typeface="Sylfaen"/>
+        <a:font script="Armn" typeface="Arial"/>
+        <a:font script="Bugi" typeface="Leelawadee UI"/>
+        <a:font script="Bopo" typeface="Microsoft JhengHei"/>
+        <a:font script="Java" typeface="Javanese Text"/>
+        <a:font script="Lisu" typeface="Segoe UI"/>
+        <a:font script="Mymr" typeface="Myanmar Text"/>
+        <a:font script="Nkoo" typeface="Ebrima"/>
+        <a:font script="Olck" typeface="Nirmala UI"/>
+        <a:font script="Osma" typeface="Ebrima"/>
+        <a:font script="Phag" typeface="Phagspa"/>
+        <a:font script="Syrn" typeface="Estrangelo Edessa"/>
+        <a:font script="Syrj" typeface="Estrangelo Edessa"/>
+        <a:font script="Syre" typeface="Estrangelo Edessa"/>
+        <a:font script="Sora" typeface="Nirmala UI"/>
+        <a:font script="Tale" typeface="Microsoft Tai Le"/>
+        <a:font script="Talu" typeface="Microsoft New Tai Lue"/>
+        <a:font script="Tfng" typeface="Ebrima"/>
+      </a:majorFont>
+      <a:minorFont>
+        <a:latin typeface="Aptos" panose="02110004020202020204"/>
+        <a:ea typeface=""/>
+        <a:cs typeface=""/>
+        <a:font script="Jpan" typeface="游ゴシック"/>
+        <a:font script="Hang" typeface="맑은 고딕"/>
+        <a:font script="Hans" typeface="等线"/>
+        <a:font script="Hant" typeface="新細明體"/>
+        <a:font script="Arab" typeface="Arial"/>
+        <a:font script="Hebr" typeface="Arial"/>
+        <a:font script="Thai" typeface="Cordia New"/>
+        <a:font script="Ethi" typeface="Nyala"/>
+        <a:font script="Beng" typeface="Vrinda"/>
+        <a:font script="Gujr" typeface="Shruti"/>
+        <a:font script="Khmr" typeface="DaunPenh"/>
+        <a:font script="Knda" typeface="Tunga"/>
+        <a:font script="Guru" typeface="Raavi"/>
+        <a:font script="Cans" typeface="Euphemia"/>
+        <a:font script="Cher" typeface="Plantagenet Cherokee"/>
+        <a:font script="Yiii" typeface="Microsoft Yi Baiti"/>
+        <a:font script="Tibt" typeface="Microsoft Himalaya"/>
+        <a:font script="Thaa" typeface="MV Boli"/>
+        <a:font script="Deva" typeface="Mangal"/>
+        <a:font script="Telu" typeface="Gautami"/>
+        <a:font script="Taml" typeface="Latha"/>
+        <a:font script="Syrc" typeface="Estrangelo Edessa"/>
+        <a:font script="Orya" typeface="Kalinga"/>
+        <a:font script="Mlym" typeface="Kartika"/>
+        <a:font script="Laoo" typeface="DokChampa"/>
+        <a:font script="Sinh" typeface="Iskoola Pota"/>
+        <a:font script="Mong" typeface="Mongolian Baiti"/>
+        <a:font script="Viet" typeface="Arial"/>
+        <a:font script="Uigh" typeface="Microsoft Uighur"/>
+        <a:font script="Geor" typeface="Sylfaen"/>
+        <a:font script="Armn" typeface="Arial"/>
+        <a:font script="Bugi" typeface="Leelawadee UI"/>
+        <a:font script="Bopo" typeface="Microsoft JhengHei"/>
+        <a:font script="Java" typeface="Javanese Text"/>
+        <a:font script="Lisu" typeface="Segoe UI"/>
+        <a:font script="Mymr" typeface="Myanmar Text"/>
+        <a:font script="Nkoo" typeface="Ebrima"/>
+        <a:font script="Olck" typeface="Nirmala UI"/>
+        <a:font script="Osma" typeface="Ebrima"/>
+        <a:font script="Phag" typeface="Phagspa"/>
+        <a:font script="Syrn" typeface="Estrangelo Edessa"/>
+        <a:font script="Syrj" typeface="Estrangelo Edessa"/>
+        <a:font script="Syre" typeface="Estrangelo Edessa"/>
+        <a:font script="Sora" typeface="Nirmala UI"/>
+        <a:font script="Tale" typeface="Microsoft Tai Le"/>
+        <a:font script="Talu" typeface="Microsoft New Tai Lue"/>
+        <a:font script="Tfng" typeface="Ebrima"/>
+      </a:minorFont>
+    </a:fontScheme>
+    <a:fmtScheme name="Office">
+      <a:fillStyleLst>
+        <a:solidFill>
+          <a:schemeClr val="phClr"/>
+        </a:solidFill>
+        <a:gradFill rotWithShape="1">
+          <a:gsLst>
+            <a:gs pos="0">
+              <a:schemeClr val="phClr">
+                <a:lumMod val="110000"/>
+                <a:satMod val="105000"/>
+                <a:tint val="67000"/>
+              </a:schemeClr>
+            </a:gs>
+            <a:gs pos="50000">
+              <a:schemeClr val="phClr">
+                <a:lumMod val="105000"/>
+                <a:satMod val="103000"/>
+                <a:tint val="73000"/>
+              </a:schemeClr>
+            </a:gs>
+            <a:gs pos="100000">
+              <a:schemeClr val="phClr">
+                <a:lumMod val="105000"/>
+                <a:satMod val="109000"/>
+                <a:tint val="81000"/>
+              </a:schemeClr>
+            </a:gs>
+          </a:gsLst>
+          <a:lin ang="5400000" scaled="0"/>
+        </a:gradFill>
+        <a:gradFill rotWithShape="1">
+          <a:gsLst>
+            <a:gs pos="0">
+              <a:schemeClr val="phClr">
+                <a:satMod val="103000"/>
+                <a:lumMod val="102000"/>
+                <a:tint val="94000"/>
+              </a:schemeClr>
+            </a:gs>
+            <a:gs pos="50000">
+              <a:schemeClr val="phClr">
+                <a:satMod val="110000"/>
+                <a:lumMod val="100000"/>
+                <a:shade val="100000"/>
+              </a:schemeClr>
+            </a:gs>
+            <a:gs pos="100000">
+              <a:schemeClr val="phClr">
+                <a:lumMod val="99000"/>
+                <a:satMod val="120000"/>
+                <a:shade val="78000"/>
+              </a:schemeClr>
+            </a:gs>
+          </a:gsLst>
+          <a:lin ang="5400000" scaled="0"/>
+        </a:gradFill>
+      </a:fillStyleLst>
+      <a:lnStyleLst>
+        <a:ln w="12700" cap="flat" cmpd="sng" algn="ctr">
+          <a:solidFill>
+            <a:schemeClr val="phClr"/>
+          </a:solidFill>
+          <a:prstDash val="solid"/>
+          <a:miter lim="800000"/>
+        </a:ln>
+        <a:ln w="19050" cap="flat" cmpd="sng" algn="ctr">
+          <a:solidFill>
+            <a:schemeClr val="phClr"/>
+          </a:solidFill>
+          <a:prstDash val="solid"/>
+          <a:miter lim="800000"/>
+        </a:ln>
+        <a:ln w="25400" cap="flat" cmpd="sng" algn="ctr">
+          <a:solidFill>
+            <a:schemeClr val="phClr"/>
+          </a:solidFill>
+          <a:prstDash val="solid"/>
+          <a:miter lim="800000"/>
+        </a:ln>
+      </a:lnStyleLst>
+      <a:effectStyleLst>
+        <a:effectStyle>
+          <a:effectLst/>
+        </a:effectStyle>
+        <a:effectStyle>
+          <a:effectLst/>
+        </a:effectStyle>
+        <a:effectStyle>
+          <a:effectLst>
+            <a:outerShdw blurRad="57150" dist="19050" dir="5400000" algn="ctr" rotWithShape="0">
+              <a:srgbClr val="000000">
+                <a:alpha val="63000"/>
+              </a:srgbClr>
+            </a:outerShdw>
+          </a:effectLst>
+        </a:effectStyle>
+      </a:effectStyleLst>
+      <a:bgFillStyleLst>
+        <a:solidFill>
+          <a:schemeClr val="phClr"/>
+        </a:solidFill>
+        <a:solidFill>
+          <a:schemeClr val="phClr">
+            <a:tint val="95000"/>
+            <a:satMod val="170000"/>
+          </a:schemeClr>
+        </a:solidFill>
+        <a:gradFill rotWithShape="1">
+          <a:gsLst>
+            <a:gs pos="0">
+              <a:schemeClr val="phClr">
+                <a:tint val="93000"/>
+                <a:satMod val="150000"/>
+                <a:shade val="98000"/>
+                <a:lumMod val="102000"/>
+              </a:schemeClr>
+            </a:gs>
+            <a:gs pos="50000">
+              <a:schemeClr val="phClr">
+                <a:tint val="98000"/>
+                <a:satMod val="130000"/>
+                <a:shade val="90000"/>
+                <a:lumMod val="103000"/>
+              </a:schemeClr>
+            </a:gs>
+            <a:gs pos="100000">
+              <a:schemeClr val="phClr">
+                <a:shade val="63000"/>
+                <a:satMod val="120000"/>
+              </a:schemeClr>
+            </a:gs>
+          </a:gsLst>
+          <a:lin ang="5400000" scaled="0"/>
+        </a:gradFill>
+      </a:bgFillStyleLst>
+    </a:fmtScheme>
+  </a:themeElements>
+  <a:objectDefaults>
+    <a:lnDef>
+      <a:spPr/>
+      <a:bodyPr/>
+      <a:lstStyle/>
+      <a:style>
+        <a:lnRef idx="2">
+          <a:schemeClr val="accent1"/>
+        </a:lnRef>
+        <a:fillRef idx="0">
+          <a:schemeClr val="accent1"/>
+        </a:fillRef>
+        <a:effectRef idx="1">
+          <a:schemeClr val="accent1"/>
+        </a:effectRef>
+        <a:fontRef idx="minor">
+          <a:schemeClr val="tx1"/>
+        </a:fontRef>
+      </a:style>
+    </a:lnDef>
+  </a:objectDefaults>
+  <a:extraClrSchemeLst/>
+  <a:extLst>
+    <a:ext uri="{05A4C25C-085E-4340-85A3-A5531E510DB2}">
+      <thm15:themeFamily xmlns:thm15="http://schemas.microsoft.com/office/thememl/2012/main" name="Office Theme" id="{2E142A2C-CD16-42D6-873A-C26D2A0506FA}" vid="{1BDDFF52-6CD6-40A5-AB3C-68EB2F1E4D0A}"/>
+    </a:ext>
+  </a:extLst>
+</a:theme>
 </file>
--- a/draft/fraud-detection/slide/[Nhom9]_Slide_FraudDetection_Academic_VN.pptx
+++ b/draft/fraud-detection/slide/[Nhom9]_Slide_FraudDetection_Academic_VN.pptx
@@ -2644,8 +2644,8 @@
         </p:nvSpPr>
         <p:spPr>
           <a:xfrm>
-            <a:off x="502920" y="3337560"/>
-            <a:ext cx="8138160" cy="502920"/>
+            <a:off x="502920" y="3172968"/>
+            <a:ext cx="8138160" cy="1581912"/>
           </a:xfrm>
           <a:prstGeom prst="rect">
             <a:avLst/>
@@ -2672,9 +2672,19 @@
                 <a:ea typeface="Segoe UI" pitchFamily="34" charset="-122"/>
                 <a:cs typeface="Segoe UI" pitchFamily="34" charset="-120"/>
               </a:rPr>
-              <a:t>Trần Hoàng Hôn (26410046)  •  Đặng Chí Thanh (25730067)  •  Nguyễn Duy Khang (26410055)</a:t>
-            </a:r>
-            <a:endParaRPr lang="en-US" sz="1000" dirty="0"/>
+              <a:t>Trần Hoàng Hôn (</a:t>
+            </a:r>
+            <a:r>
+              <a:rPr lang="en-US" sz="1000" dirty="0" smtClean="0">
+                <a:solidFill>
+                  <a:srgbClr val="CBD5E1"/>
+                </a:solidFill>
+                <a:latin typeface="Segoe UI" pitchFamily="34" charset="0"/>
+                <a:ea typeface="Segoe UI" pitchFamily="34" charset="-122"/>
+                <a:cs typeface="Segoe UI" pitchFamily="34" charset="-120"/>
+              </a:rPr>
+              <a:t>26410046)</a:t>
+            </a:r>
           </a:p>
           <a:p>
             <a:pPr marL="0" indent="0" algn="ctr">
@@ -2684,7 +2694,7 @@
               <a:buNone/>
             </a:pPr>
             <a:r>
-              <a:rPr lang="en-US" sz="1000" dirty="0">
+              <a:rPr lang="en-US" sz="1000" dirty="0" err="1" smtClean="0">
                 <a:solidFill>
                   <a:srgbClr val="CBD5E1"/>
                 </a:solidFill>
@@ -2692,10 +2702,260 @@
                 <a:ea typeface="Segoe UI" pitchFamily="34" charset="-122"/>
                 <a:cs typeface="Segoe UI" pitchFamily="34" charset="-120"/>
               </a:rPr>
-              <a:t>Hoàng Cao Sơn (25730061)  •  Vũ Văn Duy (26410031)  •  Bùi Thị Mỷ Cẩm (25730013)  •  Phạm Thanh Trung (26410141)</a:t>
+              <a:t>Đặng</a:t>
+            </a:r>
+            <a:r>
+              <a:rPr lang="en-US" sz="1000" dirty="0" smtClean="0">
+                <a:solidFill>
+                  <a:srgbClr val="CBD5E1"/>
+                </a:solidFill>
+                <a:latin typeface="Segoe UI" pitchFamily="34" charset="0"/>
+                <a:ea typeface="Segoe UI" pitchFamily="34" charset="-122"/>
+                <a:cs typeface="Segoe UI" pitchFamily="34" charset="-120"/>
+              </a:rPr>
+              <a:t> </a:t>
+            </a:r>
+            <a:r>
+              <a:rPr lang="en-US" sz="1000" dirty="0">
+                <a:solidFill>
+                  <a:srgbClr val="CBD5E1"/>
+                </a:solidFill>
+                <a:latin typeface="Segoe UI" pitchFamily="34" charset="0"/>
+                <a:ea typeface="Segoe UI" pitchFamily="34" charset="-122"/>
+                <a:cs typeface="Segoe UI" pitchFamily="34" charset="-120"/>
+              </a:rPr>
+              <a:t>Chí Thanh (25730067</a:t>
+            </a:r>
+            <a:r>
+              <a:rPr lang="en-US" sz="1000" dirty="0" smtClean="0">
+                <a:solidFill>
+                  <a:srgbClr val="CBD5E1"/>
+                </a:solidFill>
+                <a:latin typeface="Segoe UI" pitchFamily="34" charset="0"/>
+                <a:ea typeface="Segoe UI" pitchFamily="34" charset="-122"/>
+                <a:cs typeface="Segoe UI" pitchFamily="34" charset="-120"/>
+              </a:rPr>
+              <a:t>)</a:t>
+            </a:r>
+          </a:p>
+          <a:p>
+            <a:pPr marL="0" indent="0" algn="ctr">
+              <a:lnSpc>
+                <a:spcPct val="130000"/>
+              </a:lnSpc>
+              <a:buNone/>
+            </a:pPr>
+            <a:r>
+              <a:rPr lang="en-US" sz="1000" dirty="0" err="1" smtClean="0">
+                <a:solidFill>
+                  <a:srgbClr val="CBD5E1"/>
+                </a:solidFill>
+                <a:latin typeface="Segoe UI" pitchFamily="34" charset="0"/>
+                <a:ea typeface="Segoe UI" pitchFamily="34" charset="-122"/>
+                <a:cs typeface="Segoe UI" pitchFamily="34" charset="-120"/>
+              </a:rPr>
+              <a:t>Nguyễn</a:t>
+            </a:r>
+            <a:r>
+              <a:rPr lang="en-US" sz="1000" dirty="0" smtClean="0">
+                <a:solidFill>
+                  <a:srgbClr val="CBD5E1"/>
+                </a:solidFill>
+                <a:latin typeface="Segoe UI" pitchFamily="34" charset="0"/>
+                <a:ea typeface="Segoe UI" pitchFamily="34" charset="-122"/>
+                <a:cs typeface="Segoe UI" pitchFamily="34" charset="-120"/>
+              </a:rPr>
+              <a:t> </a:t>
+            </a:r>
+            <a:r>
+              <a:rPr lang="en-US" sz="1000" dirty="0">
+                <a:solidFill>
+                  <a:srgbClr val="CBD5E1"/>
+                </a:solidFill>
+                <a:latin typeface="Segoe UI" pitchFamily="34" charset="0"/>
+                <a:ea typeface="Segoe UI" pitchFamily="34" charset="-122"/>
+                <a:cs typeface="Segoe UI" pitchFamily="34" charset="-120"/>
+              </a:rPr>
+              <a:t>Duy Khang (26410055)</a:t>
             </a:r>
             <a:endParaRPr lang="en-US" sz="1000" dirty="0"/>
           </a:p>
+          <a:p>
+            <a:pPr marL="0" indent="0" algn="ctr">
+              <a:lnSpc>
+                <a:spcPct val="130000"/>
+              </a:lnSpc>
+              <a:buNone/>
+            </a:pPr>
+            <a:r>
+              <a:rPr lang="en-US" sz="1000" dirty="0">
+                <a:solidFill>
+                  <a:srgbClr val="CBD5E1"/>
+                </a:solidFill>
+                <a:latin typeface="Segoe UI" pitchFamily="34" charset="0"/>
+                <a:ea typeface="Segoe UI" pitchFamily="34" charset="-122"/>
+                <a:cs typeface="Segoe UI" pitchFamily="34" charset="-120"/>
+              </a:rPr>
+              <a:t>Hoàng Cao Sơn (</a:t>
+            </a:r>
+            <a:r>
+              <a:rPr lang="en-US" sz="1000" dirty="0" smtClean="0">
+                <a:solidFill>
+                  <a:srgbClr val="CBD5E1"/>
+                </a:solidFill>
+                <a:latin typeface="Segoe UI" pitchFamily="34" charset="0"/>
+                <a:ea typeface="Segoe UI" pitchFamily="34" charset="-122"/>
+                <a:cs typeface="Segoe UI" pitchFamily="34" charset="-120"/>
+              </a:rPr>
+              <a:t>25730061)</a:t>
+            </a:r>
+          </a:p>
+          <a:p>
+            <a:pPr marL="0" indent="0" algn="ctr">
+              <a:lnSpc>
+                <a:spcPct val="130000"/>
+              </a:lnSpc>
+              <a:buNone/>
+            </a:pPr>
+            <a:r>
+              <a:rPr lang="en-US" sz="1000" dirty="0" err="1" smtClean="0">
+                <a:solidFill>
+                  <a:srgbClr val="CBD5E1"/>
+                </a:solidFill>
+                <a:latin typeface="Segoe UI" pitchFamily="34" charset="0"/>
+                <a:ea typeface="Segoe UI" pitchFamily="34" charset="-122"/>
+                <a:cs typeface="Segoe UI" pitchFamily="34" charset="-120"/>
+              </a:rPr>
+              <a:t>Vũ</a:t>
+            </a:r>
+            <a:r>
+              <a:rPr lang="en-US" sz="1000" dirty="0" smtClean="0">
+                <a:solidFill>
+                  <a:srgbClr val="CBD5E1"/>
+                </a:solidFill>
+                <a:latin typeface="Segoe UI" pitchFamily="34" charset="0"/>
+                <a:ea typeface="Segoe UI" pitchFamily="34" charset="-122"/>
+                <a:cs typeface="Segoe UI" pitchFamily="34" charset="-120"/>
+              </a:rPr>
+              <a:t> </a:t>
+            </a:r>
+            <a:r>
+              <a:rPr lang="en-US" sz="1000" dirty="0">
+                <a:solidFill>
+                  <a:srgbClr val="CBD5E1"/>
+                </a:solidFill>
+                <a:latin typeface="Segoe UI" pitchFamily="34" charset="0"/>
+                <a:ea typeface="Segoe UI" pitchFamily="34" charset="-122"/>
+                <a:cs typeface="Segoe UI" pitchFamily="34" charset="-120"/>
+              </a:rPr>
+              <a:t>Văn Duy (</a:t>
+            </a:r>
+            <a:r>
+              <a:rPr lang="en-US" sz="1000" dirty="0" smtClean="0">
+                <a:solidFill>
+                  <a:srgbClr val="CBD5E1"/>
+                </a:solidFill>
+                <a:latin typeface="Segoe UI" pitchFamily="34" charset="0"/>
+                <a:ea typeface="Segoe UI" pitchFamily="34" charset="-122"/>
+                <a:cs typeface="Segoe UI" pitchFamily="34" charset="-120"/>
+              </a:rPr>
+              <a:t>26410031)</a:t>
+            </a:r>
+          </a:p>
+          <a:p>
+            <a:pPr marL="0" indent="0" algn="ctr">
+              <a:lnSpc>
+                <a:spcPct val="130000"/>
+              </a:lnSpc>
+              <a:buNone/>
+            </a:pPr>
+            <a:r>
+              <a:rPr lang="en-US" sz="1000" dirty="0" err="1" smtClean="0">
+                <a:solidFill>
+                  <a:srgbClr val="CBD5E1"/>
+                </a:solidFill>
+                <a:latin typeface="Segoe UI" pitchFamily="34" charset="0"/>
+                <a:ea typeface="Segoe UI" pitchFamily="34" charset="-122"/>
+                <a:cs typeface="Segoe UI" pitchFamily="34" charset="-120"/>
+              </a:rPr>
+              <a:t>Bùi</a:t>
+            </a:r>
+            <a:r>
+              <a:rPr lang="en-US" sz="1000" dirty="0" smtClean="0">
+                <a:solidFill>
+                  <a:srgbClr val="CBD5E1"/>
+                </a:solidFill>
+                <a:latin typeface="Segoe UI" pitchFamily="34" charset="0"/>
+                <a:ea typeface="Segoe UI" pitchFamily="34" charset="-122"/>
+                <a:cs typeface="Segoe UI" pitchFamily="34" charset="-120"/>
+              </a:rPr>
+              <a:t> </a:t>
+            </a:r>
+            <a:r>
+              <a:rPr lang="en-US" sz="1000" dirty="0">
+                <a:solidFill>
+                  <a:srgbClr val="CBD5E1"/>
+                </a:solidFill>
+                <a:latin typeface="Segoe UI" pitchFamily="34" charset="0"/>
+                <a:ea typeface="Segoe UI" pitchFamily="34" charset="-122"/>
+                <a:cs typeface="Segoe UI" pitchFamily="34" charset="-120"/>
+              </a:rPr>
+              <a:t>Thị Mỷ Cẩm (</a:t>
+            </a:r>
+            <a:r>
+              <a:rPr lang="en-US" sz="1000" dirty="0" smtClean="0">
+                <a:solidFill>
+                  <a:srgbClr val="CBD5E1"/>
+                </a:solidFill>
+                <a:latin typeface="Segoe UI" pitchFamily="34" charset="0"/>
+                <a:ea typeface="Segoe UI" pitchFamily="34" charset="-122"/>
+                <a:cs typeface="Segoe UI" pitchFamily="34" charset="-120"/>
+              </a:rPr>
+              <a:t>25730013)</a:t>
+            </a:r>
+          </a:p>
+          <a:p>
+            <a:pPr marL="0" indent="0" algn="ctr">
+              <a:lnSpc>
+                <a:spcPct val="130000"/>
+              </a:lnSpc>
+              <a:buNone/>
+            </a:pPr>
+            <a:r>
+              <a:rPr lang="en-US" sz="1000" dirty="0" err="1" smtClean="0">
+                <a:solidFill>
+                  <a:srgbClr val="CBD5E1"/>
+                </a:solidFill>
+                <a:latin typeface="Segoe UI" pitchFamily="34" charset="0"/>
+                <a:ea typeface="Segoe UI" pitchFamily="34" charset="-122"/>
+                <a:cs typeface="Segoe UI" pitchFamily="34" charset="-120"/>
+              </a:rPr>
+              <a:t>Phạm</a:t>
+            </a:r>
+            <a:r>
+              <a:rPr lang="en-US" sz="1000" dirty="0" smtClean="0">
+                <a:solidFill>
+                  <a:srgbClr val="CBD5E1"/>
+                </a:solidFill>
+                <a:latin typeface="Segoe UI" pitchFamily="34" charset="0"/>
+                <a:ea typeface="Segoe UI" pitchFamily="34" charset="-122"/>
+                <a:cs typeface="Segoe UI" pitchFamily="34" charset="-120"/>
+              </a:rPr>
+              <a:t> </a:t>
+            </a:r>
+            <a:r>
+              <a:rPr lang="en-US" sz="1000" dirty="0">
+                <a:solidFill>
+                  <a:srgbClr val="CBD5E1"/>
+                </a:solidFill>
+                <a:latin typeface="Segoe UI" pitchFamily="34" charset="0"/>
+                <a:ea typeface="Segoe UI" pitchFamily="34" charset="-122"/>
+                <a:cs typeface="Segoe UI" pitchFamily="34" charset="-120"/>
+              </a:rPr>
+              <a:t>Thanh Trung (26410141)</a:t>
+            </a:r>
+            <a:endParaRPr lang="en-US" sz="1000" dirty="0"/>
+          </a:p>
         </p:txBody>
       </p:sp>
       <p:sp>
@@ -2706,7 +2966,7 @@
         </p:nvSpPr>
         <p:spPr>
           <a:xfrm>
-            <a:off x="502920" y="4434840"/>
+            <a:off x="502920" y="4754880"/>
             <a:ext cx="8138160" cy="228600"/>
           </a:xfrm>
           <a:prstGeom prst="rect">
@@ -2742,13 +3002,13 @@
   <p:clrMapOvr>
     <a:masterClrMapping/>
   </p:clrMapOvr>
-  <mc:AlternateContent xmlns:mc="http://schemas.openxmlformats.org/markup-compatibility/2006">
-    <mc:Choice xmlns:p14="http://schemas.microsoft.com/office/powerpoint/2010/main" Requires="p14">
+  <mc:AlternateContent xmlns:mc="http://schemas.openxmlformats.org/markup-compatibility/2006" xmlns:p14="http://schemas.microsoft.com/office/powerpoint/2010/main">
+    <mc:Choice Requires="p14">
       <p:transition spd="slow" p14:dur="800">
         <p14:flythrough/>
       </p:transition>
     </mc:Choice>
-    <mc:Fallback>
+    <mc:Fallback xmlns="">
       <p:transition spd="slow">
         <p:fade/>
       </p:transition>
@@ -3100,13 +3360,13 @@
   <p:clrMapOvr>
     <a:masterClrMapping/>
   </p:clrMapOvr>
-  <mc:AlternateContent xmlns:mc="http://schemas.openxmlformats.org/markup-compatibility/2006">
-    <mc:Choice xmlns:p14="http://schemas.microsoft.com/office/powerpoint/2010/main" Requires="p14">
+  <mc:AlternateContent xmlns:mc="http://schemas.openxmlformats.org/markup-compatibility/2006" xmlns:p14="http://schemas.microsoft.com/office/powerpoint/2010/main">
+    <mc:Choice Requires="p14">
       <p:transition spd="slow" p14:dur="1200">
         <p14:prism/>
       </p:transition>
     </mc:Choice>
-    <mc:Fallback>
+    <mc:Fallback xmlns="">
       <p:transition spd="slow">
         <p:fade/>
       </p:transition>
@@ -3676,29 +3936,24 @@
               <a:buNone/>
             </a:pPr>
             <a:r>
-              <a:rPr lang="en-US" sz="880" dirty="0">
+              <a:rPr lang="en-US" sz="880" dirty="0" smtClean="0">
                 <a:solidFill>
                   <a:srgbClr val="1F2937"/>
                 </a:solidFill>
               </a:rPr>
               <a:t>engineered</a:t>
             </a:r>
-            <a:endParaRPr lang="en-US" sz="880" dirty="0"/>
-          </a:p>
-          <a:p>
-            <a:pPr marL="0" indent="0" algn="ctr">
-              <a:lnSpc>
-                <a:spcPct val="115000"/>
-              </a:lnSpc>
-              <a:buNone/>
-            </a:pPr>
-            <a:r>
-              <a:rPr lang="en-US" sz="880" dirty="0">
+            <a:r>
+              <a:rPr lang="en-US" sz="880" dirty="0"/>
+              <a:t> </a:t>
+            </a:r>
+            <a:r>
+              <a:rPr lang="en-US" sz="880" dirty="0" smtClean="0">
                 <a:solidFill>
                   <a:srgbClr val="1F2937"/>
                 </a:solidFill>
               </a:rPr>
-              <a:t>domain features</a:t>
+              <a:t>features</a:t>
             </a:r>
             <a:endParaRPr lang="en-US" sz="880" dirty="0"/>
           </a:p>
@@ -4585,7 +4840,7 @@
               <a:buNone/>
             </a:pPr>
             <a:r>
-              <a:rPr lang="en-US" sz="1010" b="1" dirty="0">
+              <a:rPr lang="en-US" sz="1010" b="1" dirty="0" err="1" smtClean="0">
                 <a:solidFill>
                   <a:srgbClr val="21295C"/>
                 </a:solidFill>
@@ -4593,7 +4848,117 @@
                 <a:ea typeface="Segoe UI" pitchFamily="34" charset="-122"/>
                 <a:cs typeface="Segoe UI" pitchFamily="34" charset="-120"/>
               </a:rPr>
-              <a:t>Quy chuẩn Khắt khe Chống Rò rỉ Dữ liệu (Strict Protocol Against Data Leakage)</a:t>
+              <a:t>Nguyên</a:t>
+            </a:r>
+            <a:r>
+              <a:rPr lang="en-US" sz="1010" b="1" dirty="0" smtClean="0">
+                <a:solidFill>
+                  <a:srgbClr val="21295C"/>
+                </a:solidFill>
+                <a:latin typeface="Segoe UI" pitchFamily="34" charset="0"/>
+                <a:ea typeface="Segoe UI" pitchFamily="34" charset="-122"/>
+                <a:cs typeface="Segoe UI" pitchFamily="34" charset="-120"/>
+              </a:rPr>
+              <a:t> </a:t>
+            </a:r>
+            <a:r>
+              <a:rPr lang="en-US" sz="1010" b="1" dirty="0" err="1" smtClean="0">
+                <a:solidFill>
+                  <a:srgbClr val="21295C"/>
+                </a:solidFill>
+                <a:latin typeface="Segoe UI" pitchFamily="34" charset="0"/>
+                <a:ea typeface="Segoe UI" pitchFamily="34" charset="-122"/>
+                <a:cs typeface="Segoe UI" pitchFamily="34" charset="-120"/>
+              </a:rPr>
+              <a:t>tắc</a:t>
+            </a:r>
+            <a:r>
+              <a:rPr lang="en-US" sz="1010" b="1" dirty="0" smtClean="0">
+                <a:solidFill>
+                  <a:srgbClr val="21295C"/>
+                </a:solidFill>
+                <a:latin typeface="Segoe UI" pitchFamily="34" charset="0"/>
+                <a:ea typeface="Segoe UI" pitchFamily="34" charset="-122"/>
+                <a:cs typeface="Segoe UI" pitchFamily="34" charset="-120"/>
+              </a:rPr>
+              <a:t> </a:t>
+            </a:r>
+            <a:r>
+              <a:rPr lang="en-US" sz="1010" b="1" dirty="0" err="1" smtClean="0">
+                <a:solidFill>
+                  <a:srgbClr val="21295C"/>
+                </a:solidFill>
+                <a:latin typeface="Segoe UI" pitchFamily="34" charset="0"/>
+                <a:ea typeface="Segoe UI" pitchFamily="34" charset="-122"/>
+                <a:cs typeface="Segoe UI" pitchFamily="34" charset="-120"/>
+              </a:rPr>
+              <a:t>Chống</a:t>
+            </a:r>
+            <a:r>
+              <a:rPr lang="en-US" sz="1010" b="1" dirty="0" smtClean="0">
+                <a:solidFill>
+                  <a:srgbClr val="21295C"/>
+                </a:solidFill>
+                <a:latin typeface="Segoe UI" pitchFamily="34" charset="0"/>
+                <a:ea typeface="Segoe UI" pitchFamily="34" charset="-122"/>
+                <a:cs typeface="Segoe UI" pitchFamily="34" charset="-120"/>
+              </a:rPr>
+              <a:t> </a:t>
+            </a:r>
+            <a:r>
+              <a:rPr lang="en-US" sz="1010" b="1" dirty="0">
+                <a:solidFill>
+                  <a:srgbClr val="21295C"/>
+                </a:solidFill>
+                <a:latin typeface="Segoe UI" pitchFamily="34" charset="0"/>
+                <a:ea typeface="Segoe UI" pitchFamily="34" charset="-122"/>
+                <a:cs typeface="Segoe UI" pitchFamily="34" charset="-120"/>
+              </a:rPr>
+              <a:t>Rò rỉ Dữ </a:t>
+            </a:r>
+            <a:r>
+              <a:rPr lang="en-US" sz="1010" b="1" dirty="0" err="1">
+                <a:solidFill>
+                  <a:srgbClr val="21295C"/>
+                </a:solidFill>
+                <a:latin typeface="Segoe UI" pitchFamily="34" charset="0"/>
+                <a:ea typeface="Segoe UI" pitchFamily="34" charset="-122"/>
+                <a:cs typeface="Segoe UI" pitchFamily="34" charset="-120"/>
+              </a:rPr>
+              <a:t>liệu</a:t>
+            </a:r>
+            <a:r>
+              <a:rPr lang="en-US" sz="1010" b="1" dirty="0">
+                <a:solidFill>
+                  <a:srgbClr val="21295C"/>
+                </a:solidFill>
+                <a:latin typeface="Segoe UI" pitchFamily="34" charset="0"/>
+                <a:ea typeface="Segoe UI" pitchFamily="34" charset="-122"/>
+                <a:cs typeface="Segoe UI" pitchFamily="34" charset="-120"/>
+              </a:rPr>
+              <a:t> </a:t>
+            </a:r>
+            <a:r>
+              <a:rPr lang="en-US" sz="1010" b="1" dirty="0" smtClean="0">
+                <a:solidFill>
+                  <a:srgbClr val="21295C"/>
+                </a:solidFill>
+                <a:latin typeface="Segoe UI" pitchFamily="34" charset="0"/>
+                <a:ea typeface="Segoe UI" pitchFamily="34" charset="-122"/>
+                <a:cs typeface="Segoe UI" pitchFamily="34" charset="-120"/>
+              </a:rPr>
+              <a:t>(Data </a:t>
+            </a:r>
+            <a:r>
+              <a:rPr lang="en-US" sz="1010" b="1" dirty="0">
+                <a:solidFill>
+                  <a:srgbClr val="21295C"/>
+                </a:solidFill>
+                <a:latin typeface="Segoe UI" pitchFamily="34" charset="0"/>
+                <a:ea typeface="Segoe UI" pitchFamily="34" charset="-122"/>
+                <a:cs typeface="Segoe UI" pitchFamily="34" charset="-120"/>
+              </a:rPr>
+              <a:t>Leakage)</a:t>
             </a:r>
             <a:endParaRPr lang="en-US" sz="1010" dirty="0"/>
           </a:p>
@@ -4724,13 +5089,13 @@
   <p:clrMapOvr>
     <a:masterClrMapping/>
   </p:clrMapOvr>
-  <mc:AlternateContent xmlns:mc="http://schemas.openxmlformats.org/markup-compatibility/2006">
-    <mc:Choice xmlns:p14="http://schemas.microsoft.com/office/powerpoint/2010/main" Requires="p14">
+  <mc:AlternateContent xmlns:mc="http://schemas.openxmlformats.org/markup-compatibility/2006" xmlns:p14="http://schemas.microsoft.com/office/powerpoint/2010/main">
+    <mc:Choice Requires="p14">
       <p:transition spd="slow" p14:dur="1300">
         <p14:pan dir="u"/>
       </p:transition>
     </mc:Choice>
-    <mc:Fallback>
+    <mc:Fallback xmlns="">
       <p:transition spd="slow">
         <p:fade/>
       </p:transition>
@@ -5103,17 +5468,6 @@
             <a:pPr marL="0" indent="0">
               <a:buNone/>
             </a:pPr>
-            <a:r>
-              <a:rPr lang="en-US" sz="950" b="1" dirty="0">
-                <a:solidFill>
-                  <a:srgbClr val="2563EB"/>
-                </a:solidFill>
-                <a:latin typeface="Consolas" pitchFamily="34" charset="0"/>
-                <a:ea typeface="Consolas" pitchFamily="34" charset="-122"/>
-                <a:cs typeface="Consolas" pitchFamily="34" charset="-120"/>
-              </a:rPr>
-              <a:t>Gini(D) = 1 - ∑ (p_i)²</a:t>
-            </a:r>
             <a:endParaRPr lang="en-US" sz="950" dirty="0"/>
           </a:p>
         </p:txBody>
@@ -5289,7 +5643,55 @@
                   <a:srgbClr val="1F2937"/>
                 </a:solidFill>
               </a:rPr>
-              <a:t>Thời gian huấn luyện lâu (~1187s), chi phí tính toán cao khi dữ liệu phình to.</a:t>
+              <a:t>Thời gian huấn luyện </a:t>
+            </a:r>
+            <a:r>
+              <a:rPr lang="en-US" sz="900" dirty="0" err="1">
+                <a:solidFill>
+                  <a:srgbClr val="1F2937"/>
+                </a:solidFill>
+              </a:rPr>
+              <a:t>lâu</a:t>
+            </a:r>
+            <a:r>
+              <a:rPr lang="en-US" sz="900" dirty="0">
+                <a:solidFill>
+                  <a:srgbClr val="1F2937"/>
+                </a:solidFill>
+              </a:rPr>
+              <a:t> </a:t>
+            </a:r>
+            <a:r>
+              <a:rPr lang="en-US" sz="900" dirty="0" smtClean="0">
+                <a:solidFill>
+                  <a:srgbClr val="1F2937"/>
+                </a:solidFill>
+              </a:rPr>
+              <a:t>(~20 </a:t>
+            </a:r>
+            <a:r>
+              <a:rPr lang="en-US" sz="900" dirty="0" err="1" smtClean="0">
+                <a:solidFill>
+                  <a:srgbClr val="1F2937"/>
+                </a:solidFill>
+              </a:rPr>
+              <a:t>phút</a:t>
+            </a:r>
+            <a:r>
+              <a:rPr lang="en-US" sz="900" dirty="0" smtClean="0">
+                <a:solidFill>
+                  <a:srgbClr val="1F2937"/>
+                </a:solidFill>
+              </a:rPr>
+              <a:t>), </a:t>
+            </a:r>
+            <a:r>
+              <a:rPr lang="en-US" sz="900" dirty="0">
+                <a:solidFill>
+                  <a:srgbClr val="1F2937"/>
+                </a:solidFill>
+              </a:rPr>
+              <a:t>chi phí tính toán cao khi dữ liệu phình to.</a:t>
             </a:r>
             <a:endParaRPr lang="en-US" sz="900" dirty="0"/>
           </a:p>
@@ -5446,17 +5848,6 @@
             <a:pPr marL="0" indent="0">
               <a:buNone/>
             </a:pPr>
-            <a:r>
-              <a:rPr lang="en-US" sz="900" b="1" dirty="0">
-                <a:solidFill>
-                  <a:srgbClr val="2563EB"/>
-                </a:solidFill>
-                <a:latin typeface="Consolas" pitchFamily="34" charset="0"/>
-                <a:ea typeface="Consolas" pitchFamily="34" charset="-122"/>
-                <a:cs typeface="Consolas" pitchFamily="34" charset="-120"/>
-              </a:rPr>
-              <a:t>Obj^(t) ≈ ∑ [ g_i · f_t + ½ h_i · f_t² ] + Ω(f_t)</a:t>
-            </a:r>
             <a:endParaRPr lang="en-US" sz="900" dirty="0"/>
           </a:p>
         </p:txBody>
@@ -5615,7 +6006,63 @@
                   <a:srgbClr val="1F2937"/>
                 </a:solidFill>
               </a:rPr>
-              <a:t>F1-Score đạt 99.63% tương đương RF, nhưng tốc độ huấn luyện nhanh gấp 28.5 lần (~41.7s).
+              <a:t>F1-Score đạt 99.63% tương đương RF, nhưng tốc độ huấn luyện nhanh </a:t>
+            </a:r>
+            <a:r>
+              <a:rPr lang="en-US" sz="900" dirty="0" err="1">
+                <a:solidFill>
+                  <a:srgbClr val="1F2937"/>
+                </a:solidFill>
+              </a:rPr>
+              <a:t>gấp</a:t>
+            </a:r>
+            <a:r>
+              <a:rPr lang="en-US" sz="900" dirty="0">
+                <a:solidFill>
+                  <a:srgbClr val="1F2937"/>
+                </a:solidFill>
+              </a:rPr>
+              <a:t> </a:t>
+            </a:r>
+            <a:r>
+              <a:rPr lang="en-US" sz="900" dirty="0" err="1" smtClean="0">
+                <a:solidFill>
+                  <a:srgbClr val="1F2937"/>
+                </a:solidFill>
+              </a:rPr>
+              <a:t>khoảng</a:t>
+            </a:r>
+            <a:r>
+              <a:rPr lang="en-US" sz="900" dirty="0" smtClean="0">
+                <a:solidFill>
+                  <a:srgbClr val="1F2937"/>
+                </a:solidFill>
+              </a:rPr>
+              <a:t> 28 </a:t>
+            </a:r>
+            <a:r>
+              <a:rPr lang="en-US" sz="900" dirty="0">
+                <a:solidFill>
+                  <a:srgbClr val="1F2937"/>
+                </a:solidFill>
+              </a:rPr>
+              <a:t>lần (~</a:t>
+            </a:r>
+            <a:r>
+              <a:rPr lang="en-US" sz="900" dirty="0" smtClean="0">
+                <a:solidFill>
+                  <a:srgbClr val="1F2937"/>
+                </a:solidFill>
+              </a:rPr>
+              <a:t>42s</a:t>
+            </a:r>
+            <a:r>
+              <a:rPr lang="en-US" sz="900" dirty="0">
+                <a:solidFill>
+                  <a:srgbClr val="1F2937"/>
+                </a:solidFill>
+              </a:rPr>
+              <a:t>).
 </a:t>
             </a:r>
             <a:r>
@@ -5638,6 +6085,54 @@
           </a:p>
         </p:txBody>
       </p:sp>
+      <p:pic>
+        <p:nvPicPr>
+          <p:cNvPr id="24" name="Picture 23"/>
+          <p:cNvPicPr>
+            <a:picLocks noChangeAspect="1"/>
+          </p:cNvPicPr>
+          <p:nvPr/>
+        </p:nvPicPr>
+        <p:blipFill>
+          <a:blip r:embed="rId3"/>
+          <a:stretch>
+            <a:fillRect/>
+          </a:stretch>
+        </p:blipFill>
+        <p:spPr>
+          <a:xfrm>
+            <a:off x="4850131" y="1463040"/>
+            <a:ext cx="3281934" cy="274320"/>
+          </a:xfrm>
+          <a:prstGeom prst="rect">
+            <a:avLst/>
+          </a:prstGeom>
+        </p:spPr>
+      </p:pic>
+      <p:pic>
+        <p:nvPicPr>
+          <p:cNvPr id="25" name="Picture 24"/>
+          <p:cNvPicPr>
+            <a:picLocks noChangeAspect="1"/>
+          </p:cNvPicPr>
+          <p:nvPr/>
+        </p:nvPicPr>
+        <p:blipFill>
+          <a:blip r:embed="rId4"/>
+          <a:stretch>
+            <a:fillRect/>
+          </a:stretch>
+        </p:blipFill>
+        <p:spPr>
+          <a:xfrm>
+            <a:off x="905115" y="1463040"/>
+            <a:ext cx="2770773" cy="301752"/>
+          </a:xfrm>
+          <a:prstGeom prst="rect">
+            <a:avLst/>
+          </a:prstGeom>
+        </p:spPr>
+      </p:pic>
     </p:spTree>
   </p:cSld>
   <p:clrMapOvr>
@@ -6018,8 +6513,8 @@
         </p:nvSpPr>
         <p:spPr>
           <a:xfrm>
-            <a:off x="640080" y="1763442"/>
-            <a:ext cx="4114800" cy="310896"/>
+            <a:off x="640080" y="1763441"/>
+            <a:ext cx="4114800" cy="461326"/>
           </a:xfrm>
           <a:prstGeom prst="rect">
             <a:avLst/>
@@ -6066,17 +6561,6 @@
             <a:pPr marL="0" indent="0">
               <a:buNone/>
             </a:pPr>
-            <a:r>
-              <a:rPr lang="en-US" sz="900" b="1" dirty="0">
-                <a:solidFill>
-                  <a:srgbClr val="DC2626"/>
-                </a:solidFill>
-                <a:latin typeface="Consolas" pitchFamily="34" charset="0"/>
-                <a:ea typeface="Consolas" pitchFamily="34" charset="-122"/>
-                <a:cs typeface="Consolas" pitchFamily="34" charset="-120"/>
-              </a:rPr>
-              <a:t>L_rec(x, x_recon) = (1 / d) · ∑ (x_j - x_recon_j)²</a:t>
-            </a:r>
             <a:endParaRPr lang="en-US" sz="900" dirty="0"/>
           </a:p>
         </p:txBody>
@@ -7720,6 +8204,30 @@
           </a:p>
         </p:txBody>
       </p:sp>
+      <p:pic>
+        <p:nvPicPr>
+          <p:cNvPr id="21" name="Picture 20"/>
+          <p:cNvPicPr>
+            <a:picLocks noChangeAspect="1"/>
+          </p:cNvPicPr>
+          <p:nvPr/>
+        </p:nvPicPr>
+        <p:blipFill>
+          <a:blip r:embed="rId3"/>
+          <a:stretch>
+            <a:fillRect/>
+          </a:stretch>
+        </p:blipFill>
+        <p:spPr>
+          <a:xfrm>
+            <a:off x="1028381" y="1778508"/>
+            <a:ext cx="2251267" cy="391668"/>
+          </a:xfrm>
+          <a:prstGeom prst="rect">
+            <a:avLst/>
+          </a:prstGeom>
+        </p:spPr>
+      </p:pic>
     </p:spTree>
   </p:cSld>
   <p:clrMapOvr>
@@ -8024,7 +8532,117 @@
                 <a:ea typeface="Segoe UI" pitchFamily="34" charset="-122"/>
                 <a:cs typeface="Segoe UI" pitchFamily="34" charset="-120"/>
               </a:rPr>
-              <a:t>Benchmark Hiệu năng Toàn diện &amp; Đối chuẩn Đa Chỉ số (Precision, Recall, F1, PR-AUC)</a:t>
+              <a:t>Benchmark Hiệu năng Toàn diện &amp; </a:t>
+            </a:r>
+            <a:r>
+              <a:rPr lang="en-US" sz="1100" dirty="0" err="1" smtClean="0">
+                <a:solidFill>
+                  <a:srgbClr val="E2E8F0"/>
+                </a:solidFill>
+                <a:latin typeface="Segoe UI" pitchFamily="34" charset="0"/>
+                <a:ea typeface="Segoe UI" pitchFamily="34" charset="-122"/>
+                <a:cs typeface="Segoe UI" pitchFamily="34" charset="-120"/>
+              </a:rPr>
+              <a:t>Bảng</a:t>
+            </a:r>
+            <a:r>
+              <a:rPr lang="en-US" sz="1100" dirty="0" smtClean="0">
+                <a:solidFill>
+                  <a:srgbClr val="E2E8F0"/>
+                </a:solidFill>
+                <a:latin typeface="Segoe UI" pitchFamily="34" charset="0"/>
+                <a:ea typeface="Segoe UI" pitchFamily="34" charset="-122"/>
+                <a:cs typeface="Segoe UI" pitchFamily="34" charset="-120"/>
+              </a:rPr>
+              <a:t> so </a:t>
+            </a:r>
+            <a:r>
+              <a:rPr lang="en-US" sz="1100" dirty="0" err="1" smtClean="0">
+                <a:solidFill>
+                  <a:srgbClr val="E2E8F0"/>
+                </a:solidFill>
+                <a:latin typeface="Segoe UI" pitchFamily="34" charset="0"/>
+                <a:ea typeface="Segoe UI" pitchFamily="34" charset="-122"/>
+                <a:cs typeface="Segoe UI" pitchFamily="34" charset="-120"/>
+              </a:rPr>
+              <a:t>sánh</a:t>
+            </a:r>
+            <a:r>
+              <a:rPr lang="en-US" sz="1100" dirty="0" smtClean="0">
+                <a:solidFill>
+                  <a:srgbClr val="E2E8F0"/>
+                </a:solidFill>
+                <a:latin typeface="Segoe UI" pitchFamily="34" charset="0"/>
+                <a:ea typeface="Segoe UI" pitchFamily="34" charset="-122"/>
+                <a:cs typeface="Segoe UI" pitchFamily="34" charset="-120"/>
+              </a:rPr>
+              <a:t> </a:t>
+            </a:r>
+            <a:r>
+              <a:rPr lang="en-US" sz="1100" dirty="0" err="1" smtClean="0">
+                <a:solidFill>
+                  <a:srgbClr val="E2E8F0"/>
+                </a:solidFill>
+                <a:latin typeface="Segoe UI" pitchFamily="34" charset="0"/>
+                <a:ea typeface="Segoe UI" pitchFamily="34" charset="-122"/>
+                <a:cs typeface="Segoe UI" pitchFamily="34" charset="-120"/>
+              </a:rPr>
+              <a:t>đa</a:t>
+            </a:r>
+            <a:r>
+              <a:rPr lang="en-US" sz="1100" dirty="0" smtClean="0">
+                <a:solidFill>
+                  <a:srgbClr val="E2E8F0"/>
+                </a:solidFill>
+                <a:latin typeface="Segoe UI" pitchFamily="34" charset="0"/>
+                <a:ea typeface="Segoe UI" pitchFamily="34" charset="-122"/>
+                <a:cs typeface="Segoe UI" pitchFamily="34" charset="-120"/>
+              </a:rPr>
+              <a:t> </a:t>
+            </a:r>
+            <a:r>
+              <a:rPr lang="en-US" sz="1100" dirty="0" err="1">
+                <a:solidFill>
+                  <a:srgbClr val="E2E8F0"/>
+                </a:solidFill>
+                <a:latin typeface="Segoe UI" pitchFamily="34" charset="0"/>
+                <a:ea typeface="Segoe UI" pitchFamily="34" charset="-122"/>
+                <a:cs typeface="Segoe UI" pitchFamily="34" charset="-120"/>
+              </a:rPr>
+              <a:t>c</a:t>
+            </a:r>
+            <a:r>
+              <a:rPr lang="en-US" sz="1100" dirty="0" err="1" smtClean="0">
+                <a:solidFill>
+                  <a:srgbClr val="E2E8F0"/>
+                </a:solidFill>
+                <a:latin typeface="Segoe UI" pitchFamily="34" charset="0"/>
+                <a:ea typeface="Segoe UI" pitchFamily="34" charset="-122"/>
+                <a:cs typeface="Segoe UI" pitchFamily="34" charset="-120"/>
+              </a:rPr>
+              <a:t>hỉ</a:t>
+            </a:r>
+            <a:r>
+              <a:rPr lang="en-US" sz="1100" dirty="0" smtClean="0">
+                <a:solidFill>
+                  <a:srgbClr val="E2E8F0"/>
+                </a:solidFill>
+                <a:latin typeface="Segoe UI" pitchFamily="34" charset="0"/>
+                <a:ea typeface="Segoe UI" pitchFamily="34" charset="-122"/>
+                <a:cs typeface="Segoe UI" pitchFamily="34" charset="-120"/>
+              </a:rPr>
+              <a:t> </a:t>
+            </a:r>
+            <a:r>
+              <a:rPr lang="en-US" sz="1100" dirty="0">
+                <a:solidFill>
+                  <a:srgbClr val="E2E8F0"/>
+                </a:solidFill>
+                <a:latin typeface="Segoe UI" pitchFamily="34" charset="0"/>
+                <a:ea typeface="Segoe UI" pitchFamily="34" charset="-122"/>
+                <a:cs typeface="Segoe UI" pitchFamily="34" charset="-120"/>
+              </a:rPr>
+              <a:t>số (Precision, Recall, F1, PR-AUC)</a:t>
             </a:r>
             <a:endParaRPr lang="en-US" sz="1100" dirty="0"/>
           </a:p>
@@ -8072,7 +8690,62 @@
                 <a:ea typeface="Segoe UI" pitchFamily="34" charset="-122"/>
                 <a:cs typeface="Segoe UI" pitchFamily="34" charset="-120"/>
               </a:rPr>
-              <a:t>Feature Importance Attribution &amp; Đóng góp Vượt bậc của Domain Engineering</a:t>
+              <a:t>Feature Importance Attribution &amp; Đóng góp Vượt </a:t>
+            </a:r>
+            <a:r>
+              <a:rPr lang="en-US" sz="1100" dirty="0" err="1">
+                <a:solidFill>
+                  <a:srgbClr val="E2E8F0"/>
+                </a:solidFill>
+                <a:latin typeface="Segoe UI" pitchFamily="34" charset="0"/>
+                <a:ea typeface="Segoe UI" pitchFamily="34" charset="-122"/>
+                <a:cs typeface="Segoe UI" pitchFamily="34" charset="-120"/>
+              </a:rPr>
+              <a:t>bậc</a:t>
+            </a:r>
+            <a:r>
+              <a:rPr lang="en-US" sz="1100" dirty="0">
+                <a:solidFill>
+                  <a:srgbClr val="E2E8F0"/>
+                </a:solidFill>
+                <a:latin typeface="Segoe UI" pitchFamily="34" charset="0"/>
+                <a:ea typeface="Segoe UI" pitchFamily="34" charset="-122"/>
+                <a:cs typeface="Segoe UI" pitchFamily="34" charset="-120"/>
+              </a:rPr>
+              <a:t> </a:t>
+            </a:r>
+            <a:r>
+              <a:rPr lang="en-US" sz="1100" dirty="0" err="1" smtClean="0">
+                <a:solidFill>
+                  <a:srgbClr val="E2E8F0"/>
+                </a:solidFill>
+                <a:latin typeface="Segoe UI" pitchFamily="34" charset="0"/>
+                <a:ea typeface="Segoe UI" pitchFamily="34" charset="-122"/>
+                <a:cs typeface="Segoe UI" pitchFamily="34" charset="-120"/>
+              </a:rPr>
+              <a:t>của</a:t>
+            </a:r>
+            <a:r>
+              <a:rPr lang="en-US" sz="1100" dirty="0" smtClean="0">
+                <a:solidFill>
+                  <a:srgbClr val="E2E8F0"/>
+                </a:solidFill>
+                <a:latin typeface="Segoe UI" pitchFamily="34" charset="0"/>
+                <a:ea typeface="Segoe UI" pitchFamily="34" charset="-122"/>
+                <a:cs typeface="Segoe UI" pitchFamily="34" charset="-120"/>
+              </a:rPr>
+              <a:t> </a:t>
+            </a:r>
+            <a:r>
+              <a:rPr lang="en-US" sz="1100" dirty="0">
+                <a:solidFill>
+                  <a:srgbClr val="E2E8F0"/>
+                </a:solidFill>
+                <a:latin typeface="Segoe UI" pitchFamily="34" charset="0"/>
+                <a:ea typeface="Segoe UI" pitchFamily="34" charset="-122"/>
+                <a:cs typeface="Segoe UI" pitchFamily="34" charset="-120"/>
+              </a:rPr>
+              <a:t>Engineering</a:t>
             </a:r>
             <a:endParaRPr lang="en-US" sz="1100" dirty="0"/>
           </a:p>
@@ -8107,13 +8780,13 @@
   <p:clrMapOvr>
     <a:masterClrMapping/>
   </p:clrMapOvr>
-  <mc:AlternateContent xmlns:mc="http://schemas.openxmlformats.org/markup-compatibility/2006">
-    <mc:Choice xmlns:p14="http://schemas.microsoft.com/office/powerpoint/2010/main" Requires="p14">
+  <mc:AlternateContent xmlns:mc="http://schemas.openxmlformats.org/markup-compatibility/2006" xmlns:p14="http://schemas.microsoft.com/office/powerpoint/2010/main">
+    <mc:Choice Requires="p14">
       <p:transition spd="slow" p14:dur="1200">
         <p14:prism/>
       </p:transition>
     </mc:Choice>
-    <mc:Fallback>
+    <mc:Fallback xmlns="">
       <p:transition spd="slow">
         <p:fade/>
       </p:transition>
@@ -8221,7 +8894,117 @@
                 <a:ea typeface="Segoe UI" pitchFamily="34" charset="-122"/>
                 <a:cs typeface="Segoe UI" pitchFamily="34" charset="-120"/>
               </a:rPr>
-              <a:t>Kết quả Thực nghiệm: Đối chuẩn Đa Chỉ số Toàn diện</a:t>
+              <a:t>Kết quả Thực nghiệm: </a:t>
+            </a:r>
+            <a:r>
+              <a:rPr lang="en-US" sz="1900" b="1" dirty="0" smtClean="0">
+                <a:solidFill>
+                  <a:srgbClr val="21295C"/>
+                </a:solidFill>
+                <a:latin typeface="Segoe UI" pitchFamily="34" charset="0"/>
+                <a:ea typeface="Segoe UI" pitchFamily="34" charset="-122"/>
+                <a:cs typeface="Segoe UI" pitchFamily="34" charset="-120"/>
+              </a:rPr>
+              <a:t>So </a:t>
+            </a:r>
+            <a:r>
+              <a:rPr lang="en-US" sz="1900" b="1" dirty="0" err="1" smtClean="0">
+                <a:solidFill>
+                  <a:srgbClr val="21295C"/>
+                </a:solidFill>
+                <a:latin typeface="Segoe UI" pitchFamily="34" charset="0"/>
+                <a:ea typeface="Segoe UI" pitchFamily="34" charset="-122"/>
+                <a:cs typeface="Segoe UI" pitchFamily="34" charset="-120"/>
+              </a:rPr>
+              <a:t>sánh</a:t>
+            </a:r>
+            <a:r>
+              <a:rPr lang="en-US" sz="1900" b="1" dirty="0" smtClean="0">
+                <a:solidFill>
+                  <a:srgbClr val="21295C"/>
+                </a:solidFill>
+                <a:latin typeface="Segoe UI" pitchFamily="34" charset="0"/>
+                <a:ea typeface="Segoe UI" pitchFamily="34" charset="-122"/>
+                <a:cs typeface="Segoe UI" pitchFamily="34" charset="-120"/>
+              </a:rPr>
+              <a:t> </a:t>
+            </a:r>
+            <a:r>
+              <a:rPr lang="en-US" sz="1900" b="1" dirty="0" err="1" smtClean="0">
+                <a:solidFill>
+                  <a:srgbClr val="21295C"/>
+                </a:solidFill>
+                <a:latin typeface="Segoe UI" pitchFamily="34" charset="0"/>
+                <a:ea typeface="Segoe UI" pitchFamily="34" charset="-122"/>
+                <a:cs typeface="Segoe UI" pitchFamily="34" charset="-120"/>
+              </a:rPr>
+              <a:t>đ</a:t>
+            </a:r>
+            <a:r>
+              <a:rPr lang="en-US" sz="1900" b="1" dirty="0" err="1" smtClean="0">
+                <a:solidFill>
+                  <a:srgbClr val="21295C"/>
+                </a:solidFill>
+                <a:latin typeface="Segoe UI" pitchFamily="34" charset="0"/>
+                <a:ea typeface="Segoe UI" pitchFamily="34" charset="-122"/>
+                <a:cs typeface="Segoe UI" pitchFamily="34" charset="-120"/>
+              </a:rPr>
+              <a:t>a</a:t>
+            </a:r>
+            <a:r>
+              <a:rPr lang="en-US" sz="1900" b="1" dirty="0" smtClean="0">
+                <a:solidFill>
+                  <a:srgbClr val="21295C"/>
+                </a:solidFill>
+                <a:latin typeface="Segoe UI" pitchFamily="34" charset="0"/>
+                <a:ea typeface="Segoe UI" pitchFamily="34" charset="-122"/>
+                <a:cs typeface="Segoe UI" pitchFamily="34" charset="-120"/>
+              </a:rPr>
+              <a:t> </a:t>
+            </a:r>
+            <a:r>
+              <a:rPr lang="en-US" sz="1900" b="1" dirty="0" err="1" smtClean="0">
+                <a:solidFill>
+                  <a:srgbClr val="21295C"/>
+                </a:solidFill>
+                <a:latin typeface="Segoe UI" pitchFamily="34" charset="0"/>
+                <a:ea typeface="Segoe UI" pitchFamily="34" charset="-122"/>
+                <a:cs typeface="Segoe UI" pitchFamily="34" charset="-120"/>
+              </a:rPr>
+              <a:t>c</a:t>
+            </a:r>
+            <a:r>
+              <a:rPr lang="en-US" sz="1900" b="1" dirty="0" err="1" smtClean="0">
+                <a:solidFill>
+                  <a:srgbClr val="21295C"/>
+                </a:solidFill>
+                <a:latin typeface="Segoe UI" pitchFamily="34" charset="0"/>
+                <a:ea typeface="Segoe UI" pitchFamily="34" charset="-122"/>
+                <a:cs typeface="Segoe UI" pitchFamily="34" charset="-120"/>
+              </a:rPr>
+              <a:t>hỉ</a:t>
+            </a:r>
+            <a:r>
+              <a:rPr lang="en-US" sz="1900" b="1" dirty="0" smtClean="0">
+                <a:solidFill>
+                  <a:srgbClr val="21295C"/>
+                </a:solidFill>
+                <a:latin typeface="Segoe UI" pitchFamily="34" charset="0"/>
+                <a:ea typeface="Segoe UI" pitchFamily="34" charset="-122"/>
+                <a:cs typeface="Segoe UI" pitchFamily="34" charset="-120"/>
+              </a:rPr>
+              <a:t> </a:t>
+            </a:r>
+            <a:r>
+              <a:rPr lang="en-US" sz="1900" b="1" dirty="0" err="1" smtClean="0">
+                <a:solidFill>
+                  <a:srgbClr val="21295C"/>
+                </a:solidFill>
+                <a:latin typeface="Segoe UI" pitchFamily="34" charset="0"/>
+                <a:ea typeface="Segoe UI" pitchFamily="34" charset="-122"/>
+                <a:cs typeface="Segoe UI" pitchFamily="34" charset="-120"/>
+              </a:rPr>
+              <a:t>số</a:t>
             </a:r>
             <a:endParaRPr lang="en-US" sz="1900" dirty="0"/>
           </a:p>
@@ -10960,7 +11743,62 @@
                 <a:ea typeface="Segoe UI" pitchFamily="34" charset="-122"/>
                 <a:cs typeface="Segoe UI" pitchFamily="34" charset="-120"/>
               </a:rPr>
-              <a:t>Đúc kết Thực nghiệm Định lượng</a:t>
+              <a:t>Đúc </a:t>
+            </a:r>
+            <a:r>
+              <a:rPr lang="en-US" sz="940" b="1" dirty="0" err="1">
+                <a:solidFill>
+                  <a:srgbClr val="21295C"/>
+                </a:solidFill>
+                <a:latin typeface="Segoe UI" pitchFamily="34" charset="0"/>
+                <a:ea typeface="Segoe UI" pitchFamily="34" charset="-122"/>
+                <a:cs typeface="Segoe UI" pitchFamily="34" charset="-120"/>
+              </a:rPr>
+              <a:t>kết</a:t>
+            </a:r>
+            <a:r>
+              <a:rPr lang="en-US" sz="940" b="1" dirty="0">
+                <a:solidFill>
+                  <a:srgbClr val="21295C"/>
+                </a:solidFill>
+                <a:latin typeface="Segoe UI" pitchFamily="34" charset="0"/>
+                <a:ea typeface="Segoe UI" pitchFamily="34" charset="-122"/>
+                <a:cs typeface="Segoe UI" pitchFamily="34" charset="-120"/>
+              </a:rPr>
+              <a:t> </a:t>
+            </a:r>
+            <a:r>
+              <a:rPr lang="en-US" sz="940" b="1" dirty="0" err="1" smtClean="0">
+                <a:solidFill>
+                  <a:srgbClr val="21295C"/>
+                </a:solidFill>
+                <a:latin typeface="Segoe UI" pitchFamily="34" charset="0"/>
+                <a:ea typeface="Segoe UI" pitchFamily="34" charset="-122"/>
+                <a:cs typeface="Segoe UI" pitchFamily="34" charset="-120"/>
+              </a:rPr>
+              <a:t>bảng</a:t>
+            </a:r>
+            <a:r>
+              <a:rPr lang="en-US" sz="940" b="1" dirty="0" smtClean="0">
+                <a:solidFill>
+                  <a:srgbClr val="21295C"/>
+                </a:solidFill>
+                <a:latin typeface="Segoe UI" pitchFamily="34" charset="0"/>
+                <a:ea typeface="Segoe UI" pitchFamily="34" charset="-122"/>
+                <a:cs typeface="Segoe UI" pitchFamily="34" charset="-120"/>
+              </a:rPr>
+              <a:t> so </a:t>
+            </a:r>
+            <a:r>
+              <a:rPr lang="en-US" sz="940" b="1" dirty="0" err="1" smtClean="0">
+                <a:solidFill>
+                  <a:srgbClr val="21295C"/>
+                </a:solidFill>
+                <a:latin typeface="Segoe UI" pitchFamily="34" charset="0"/>
+                <a:ea typeface="Segoe UI" pitchFamily="34" charset="-122"/>
+                <a:cs typeface="Segoe UI" pitchFamily="34" charset="-120"/>
+              </a:rPr>
+              <a:t>sánh</a:t>
             </a:r>
             <a:endParaRPr lang="en-US" sz="940" dirty="0"/>
           </a:p>
@@ -11151,7 +11989,40 @@
                 <a:ea typeface="Segoe UI" pitchFamily="34" charset="-122"/>
                 <a:cs typeface="Segoe UI" pitchFamily="34" charset="-120"/>
               </a:rPr>
-              <a:t>Phân tích Biểu đồ Đa Chỉ số</a:t>
+              <a:t>Phân tích </a:t>
+            </a:r>
+            <a:r>
+              <a:rPr lang="en-US" sz="920" b="1" dirty="0" err="1">
+                <a:solidFill>
+                  <a:srgbClr val="21295C"/>
+                </a:solidFill>
+                <a:latin typeface="Segoe UI" pitchFamily="34" charset="0"/>
+                <a:ea typeface="Segoe UI" pitchFamily="34" charset="-122"/>
+                <a:cs typeface="Segoe UI" pitchFamily="34" charset="-120"/>
+              </a:rPr>
+              <a:t>Biểu</a:t>
+            </a:r>
+            <a:r>
+              <a:rPr lang="en-US" sz="920" b="1" dirty="0">
+                <a:solidFill>
+                  <a:srgbClr val="21295C"/>
+                </a:solidFill>
+                <a:latin typeface="Segoe UI" pitchFamily="34" charset="0"/>
+                <a:ea typeface="Segoe UI" pitchFamily="34" charset="-122"/>
+                <a:cs typeface="Segoe UI" pitchFamily="34" charset="-120"/>
+              </a:rPr>
+              <a:t> </a:t>
+            </a:r>
+            <a:r>
+              <a:rPr lang="en-US" sz="920" b="1" dirty="0" err="1" smtClean="0">
+                <a:solidFill>
+                  <a:srgbClr val="21295C"/>
+                </a:solidFill>
+                <a:latin typeface="Segoe UI" pitchFamily="34" charset="0"/>
+                <a:ea typeface="Segoe UI" pitchFamily="34" charset="-122"/>
+                <a:cs typeface="Segoe UI" pitchFamily="34" charset="-120"/>
+              </a:rPr>
+              <a:t>đồ</a:t>
             </a:r>
             <a:endParaRPr lang="en-US" sz="920" dirty="0"/>
           </a:p>
@@ -11234,13 +12105,13 @@
   <p:clrMapOvr>
     <a:masterClrMapping/>
   </p:clrMapOvr>
-  <mc:AlternateContent xmlns:mc="http://schemas.openxmlformats.org/markup-compatibility/2006">
-    <mc:Choice xmlns:p14="http://schemas.microsoft.com/office/powerpoint/2010/main" Requires="p14">
+  <mc:AlternateContent xmlns:mc="http://schemas.openxmlformats.org/markup-compatibility/2006" xmlns:p14="http://schemas.microsoft.com/office/powerpoint/2010/main">
+    <mc:Choice Requires="p14">
       <p:transition spd="slow" p14:dur="1300">
         <p14:pan dir="u"/>
       </p:transition>
     </mc:Choice>
-    <mc:Fallback>
+    <mc:Fallback xmlns="">
       <p:transition spd="slow">
         <p:fade/>
       </p:transition>
@@ -12037,13 +12908,13 @@
   <p:clrMapOvr>
     <a:masterClrMapping/>
   </p:clrMapOvr>
-  <mc:AlternateContent xmlns:mc="http://schemas.openxmlformats.org/markup-compatibility/2006">
-    <mc:Choice xmlns:p159="http://schemas.microsoft.com/office/powerpoint/2015/09/main" Requires="p159">
+  <mc:AlternateContent xmlns:mc="http://schemas.openxmlformats.org/markup-compatibility/2006" xmlns:p159="http://schemas.microsoft.com/office/powerpoint/2015/09/main">
+    <mc:Choice Requires="p159">
       <p:transition xmlns:p14="http://schemas.microsoft.com/office/powerpoint/2010/main" spd="slow" p14:dur="2000">
         <p159:morph option="byObject"/>
       </p:transition>
     </mc:Choice>
-    <mc:Fallback>
+    <mc:Fallback xmlns="">
       <p:transition spd="slow">
         <p:fade/>
       </p:transition>
@@ -13908,7 +14779,62 @@
                 <a:ea typeface="Segoe UI" pitchFamily="34" charset="-122"/>
                 <a:cs typeface="Segoe UI" pitchFamily="34" charset="-120"/>
               </a:rPr>
-              <a:t>Triệt tiêu nhiễu: Kỹ thuật đặc trưng miền biến bài toán phân lớp phi tuyến phức tạp thành ranh giới quyết định tuyến tính rõ rệt.</a:t>
+              <a:t>Triệt tiêu nhiễu: Kỹ thuật đặc </a:t>
+            </a:r>
+            <a:r>
+              <a:rPr lang="en-US" sz="830" dirty="0" err="1">
+                <a:solidFill>
+                  <a:srgbClr val="1F2937"/>
+                </a:solidFill>
+                <a:latin typeface="Segoe UI" pitchFamily="34" charset="0"/>
+                <a:ea typeface="Segoe UI" pitchFamily="34" charset="-122"/>
+                <a:cs typeface="Segoe UI" pitchFamily="34" charset="-120"/>
+              </a:rPr>
+              <a:t>trưng</a:t>
+            </a:r>
+            <a:r>
+              <a:rPr lang="en-US" sz="830" dirty="0">
+                <a:solidFill>
+                  <a:srgbClr val="1F2937"/>
+                </a:solidFill>
+                <a:latin typeface="Segoe UI" pitchFamily="34" charset="0"/>
+                <a:ea typeface="Segoe UI" pitchFamily="34" charset="-122"/>
+                <a:cs typeface="Segoe UI" pitchFamily="34" charset="-120"/>
+              </a:rPr>
+              <a:t> </a:t>
+            </a:r>
+            <a:r>
+              <a:rPr lang="en-US" sz="830" dirty="0" err="1" smtClean="0">
+                <a:solidFill>
+                  <a:srgbClr val="1F2937"/>
+                </a:solidFill>
+                <a:latin typeface="Segoe UI" pitchFamily="34" charset="0"/>
+                <a:ea typeface="Segoe UI" pitchFamily="34" charset="-122"/>
+                <a:cs typeface="Segoe UI" pitchFamily="34" charset="-120"/>
+              </a:rPr>
+              <a:t>biến</a:t>
+            </a:r>
+            <a:r>
+              <a:rPr lang="en-US" sz="830" dirty="0" smtClean="0">
+                <a:solidFill>
+                  <a:srgbClr val="1F2937"/>
+                </a:solidFill>
+                <a:latin typeface="Segoe UI" pitchFamily="34" charset="0"/>
+                <a:ea typeface="Segoe UI" pitchFamily="34" charset="-122"/>
+                <a:cs typeface="Segoe UI" pitchFamily="34" charset="-120"/>
+              </a:rPr>
+              <a:t> </a:t>
+            </a:r>
+            <a:r>
+              <a:rPr lang="en-US" sz="830" dirty="0">
+                <a:solidFill>
+                  <a:srgbClr val="1F2937"/>
+                </a:solidFill>
+                <a:latin typeface="Segoe UI" pitchFamily="34" charset="0"/>
+                <a:ea typeface="Segoe UI" pitchFamily="34" charset="-122"/>
+                <a:cs typeface="Segoe UI" pitchFamily="34" charset="-120"/>
+              </a:rPr>
+              <a:t>bài toán phân lớp phi tuyến phức tạp thành ranh giới quyết định tuyến tính rõ rệt.</a:t>
             </a:r>
             <a:endParaRPr lang="en-US" sz="830" dirty="0"/>
           </a:p>
@@ -13919,13 +14845,13 @@
   <p:clrMapOvr>
     <a:masterClrMapping/>
   </p:clrMapOvr>
-  <mc:AlternateContent xmlns:mc="http://schemas.openxmlformats.org/markup-compatibility/2006">
-    <mc:Choice xmlns:p159="http://schemas.microsoft.com/office/powerpoint/2015/09/main" Requires="p159">
+  <mc:AlternateContent xmlns:mc="http://schemas.openxmlformats.org/markup-compatibility/2006" xmlns:p159="http://schemas.microsoft.com/office/powerpoint/2015/09/main">
+    <mc:Choice Requires="p159">
       <p:transition xmlns:p14="http://schemas.microsoft.com/office/powerpoint/2010/main" spd="slow" p14:dur="2000">
         <p159:morph option="byObject"/>
       </p:transition>
     </mc:Choice>
-    <mc:Fallback>
+    <mc:Fallback xmlns="">
       <p:transition spd="slow">
         <p:fade/>
       </p:transition>
@@ -15937,13 +16863,13 @@
   <p:clrMapOvr>
     <a:masterClrMapping/>
   </p:clrMapOvr>
-  <mc:AlternateContent xmlns:mc="http://schemas.openxmlformats.org/markup-compatibility/2006">
-    <mc:Choice xmlns:p159="http://schemas.microsoft.com/office/powerpoint/2015/09/main" Requires="p159">
+  <mc:AlternateContent xmlns:mc="http://schemas.openxmlformats.org/markup-compatibility/2006" xmlns:p159="http://schemas.microsoft.com/office/powerpoint/2015/09/main">
+    <mc:Choice Requires="p159">
       <p:transition xmlns:p14="http://schemas.microsoft.com/office/powerpoint/2010/main" spd="slow" p14:dur="2000">
         <p159:morph option="byObject"/>
       </p:transition>
     </mc:Choice>
-    <mc:Fallback>
+    <mc:Fallback xmlns="">
       <p:transition spd="slow">
         <p:fade/>
       </p:transition>
@@ -16295,13 +17221,13 @@
   <p:clrMapOvr>
     <a:masterClrMapping/>
   </p:clrMapOvr>
-  <mc:AlternateContent xmlns:mc="http://schemas.openxmlformats.org/markup-compatibility/2006">
-    <mc:Choice xmlns:p14="http://schemas.microsoft.com/office/powerpoint/2010/main" Requires="p14">
+  <mc:AlternateContent xmlns:mc="http://schemas.openxmlformats.org/markup-compatibility/2006" xmlns:p14="http://schemas.microsoft.com/office/powerpoint/2010/main">
+    <mc:Choice Requires="p14">
       <p:transition spd="slow" p14:dur="1200">
         <p14:prism/>
       </p:transition>
     </mc:Choice>
-    <mc:Fallback>
+    <mc:Fallback xmlns="">
       <p:transition spd="slow">
         <p:fade/>
       </p:transition>
@@ -16738,12 +17664,28 @@
 </a:t>
             </a:r>
             <a:r>
+              <a:rPr lang="en-US" sz="1000" dirty="0" err="1" smtClean="0">
+                <a:solidFill>
+                  <a:srgbClr val="4B5563"/>
+                </a:solidFill>
+              </a:rPr>
+              <a:t>Phân</a:t>
+            </a:r>
+            <a:r>
+              <a:rPr lang="en-US" sz="1000" dirty="0" smtClean="0">
+                <a:solidFill>
+                  <a:srgbClr val="4B5563"/>
+                </a:solidFill>
+              </a:rPr>
+              <a:t> </a:t>
+            </a:r>
+            <a:r>
               <a:rPr lang="en-US" sz="1000" dirty="0">
                 <a:solidFill>
                   <a:srgbClr val="4B5563"/>
                 </a:solidFill>
               </a:rPr>
-              <a:t>Khu biệt loại giao dịch, dấu vết rút cạn số dư và 14 engineered features.</a:t>
+              <a:t>biệt loại giao dịch, dấu vết rút cạn số dư và 14 engineered features.</a:t>
             </a:r>
             <a:endParaRPr lang="en-US" sz="1250" dirty="0"/>
           </a:p>
@@ -16856,7 +17798,23 @@
                   <a:srgbClr val="4B5563"/>
                 </a:solidFill>
               </a:rPr>
-              <a:t>Quy chuẩn Leak-Free, Random Forest vs. XGBoost và Deep Autoencoder.</a:t>
+              <a:t>Quy chuẩn Leak-Free, Random </a:t>
+            </a:r>
+            <a:r>
+              <a:rPr lang="en-US" sz="1000" dirty="0" smtClean="0">
+                <a:solidFill>
+                  <a:srgbClr val="4B5563"/>
+                </a:solidFill>
+              </a:rPr>
+              <a:t>Forest, </a:t>
+            </a:r>
+            <a:r>
+              <a:rPr lang="en-US" sz="1000" dirty="0">
+                <a:solidFill>
+                  <a:srgbClr val="4B5563"/>
+                </a:solidFill>
+              </a:rPr>
+              <a:t>XGBoost và Deep Autoencoder.</a:t>
             </a:r>
             <a:endParaRPr lang="en-US" sz="1250" dirty="0"/>
           </a:p>
@@ -17073,7 +18031,63 @@
                   <a:srgbClr val="21295C"/>
                 </a:solidFill>
               </a:rPr>
-              <a:t>Hệ thống Demo &amp; Định hướng Tương lai
+              <a:t>Hệ thống Demo &amp; Định </a:t>
+            </a:r>
+            <a:r>
+              <a:rPr lang="en-US" sz="1250" b="1" dirty="0" err="1">
+                <a:solidFill>
+                  <a:srgbClr val="21295C"/>
+                </a:solidFill>
+              </a:rPr>
+              <a:t>hướng</a:t>
+            </a:r>
+            <a:r>
+              <a:rPr lang="en-US" sz="1250" b="1" dirty="0">
+                <a:solidFill>
+                  <a:srgbClr val="21295C"/>
+                </a:solidFill>
+              </a:rPr>
+              <a:t> </a:t>
+            </a:r>
+            <a:r>
+              <a:rPr lang="en-US" sz="1250" b="1" dirty="0" err="1">
+                <a:solidFill>
+                  <a:srgbClr val="21295C"/>
+                </a:solidFill>
+              </a:rPr>
+              <a:t>p</a:t>
+            </a:r>
+            <a:r>
+              <a:rPr lang="en-US" sz="1250" b="1" dirty="0" err="1" smtClean="0">
+                <a:solidFill>
+                  <a:srgbClr val="21295C"/>
+                </a:solidFill>
+              </a:rPr>
+              <a:t>hát</a:t>
+            </a:r>
+            <a:r>
+              <a:rPr lang="en-US" sz="1250" b="1" dirty="0" smtClean="0">
+                <a:solidFill>
+                  <a:srgbClr val="21295C"/>
+                </a:solidFill>
+              </a:rPr>
+              <a:t> </a:t>
+            </a:r>
+            <a:r>
+              <a:rPr lang="en-US" sz="1250" b="1" dirty="0" err="1" smtClean="0">
+                <a:solidFill>
+                  <a:srgbClr val="21295C"/>
+                </a:solidFill>
+              </a:rPr>
+              <a:t>triển</a:t>
+            </a:r>
+            <a:r>
+              <a:rPr lang="en-US" sz="1250" b="1" dirty="0">
+                <a:solidFill>
+                  <a:srgbClr val="21295C"/>
+                </a:solidFill>
+              </a:rPr>
+              <a:t>
 </a:t>
             </a:r>
             <a:r>
@@ -17198,7 +18212,62 @@
                 <a:ea typeface="Segoe UI" pitchFamily="34" charset="-122"/>
                 <a:cs typeface="Segoe UI" pitchFamily="34" charset="-120"/>
               </a:rPr>
-              <a:t>Hệ thống Demo Streamlit &amp; Lộ trình Nghiên cứu Tương lai</a:t>
+              <a:t>Hệ thống Demo Streamlit &amp; </a:t>
+            </a:r>
+            <a:r>
+              <a:rPr lang="en-US" sz="1900" b="1" dirty="0" err="1" smtClean="0">
+                <a:solidFill>
+                  <a:srgbClr val="21295C"/>
+                </a:solidFill>
+                <a:latin typeface="Segoe UI" pitchFamily="34" charset="0"/>
+                <a:ea typeface="Segoe UI" pitchFamily="34" charset="-122"/>
+                <a:cs typeface="Segoe UI" pitchFamily="34" charset="-120"/>
+              </a:rPr>
+              <a:t>Hướng</a:t>
+            </a:r>
+            <a:r>
+              <a:rPr lang="en-US" sz="1900" b="1" dirty="0" smtClean="0">
+                <a:solidFill>
+                  <a:srgbClr val="21295C"/>
+                </a:solidFill>
+                <a:latin typeface="Segoe UI" pitchFamily="34" charset="0"/>
+                <a:ea typeface="Segoe UI" pitchFamily="34" charset="-122"/>
+                <a:cs typeface="Segoe UI" pitchFamily="34" charset="-120"/>
+              </a:rPr>
+              <a:t> </a:t>
+            </a:r>
+            <a:r>
+              <a:rPr lang="en-US" sz="1900" b="1" dirty="0" err="1" smtClean="0">
+                <a:solidFill>
+                  <a:srgbClr val="21295C"/>
+                </a:solidFill>
+                <a:latin typeface="Segoe UI" pitchFamily="34" charset="0"/>
+                <a:ea typeface="Segoe UI" pitchFamily="34" charset="-122"/>
+                <a:cs typeface="Segoe UI" pitchFamily="34" charset="-120"/>
+              </a:rPr>
+              <a:t>phát</a:t>
+            </a:r>
+            <a:r>
+              <a:rPr lang="en-US" sz="1900" b="1" dirty="0" smtClean="0">
+                <a:solidFill>
+                  <a:srgbClr val="21295C"/>
+                </a:solidFill>
+                <a:latin typeface="Segoe UI" pitchFamily="34" charset="0"/>
+                <a:ea typeface="Segoe UI" pitchFamily="34" charset="-122"/>
+                <a:cs typeface="Segoe UI" pitchFamily="34" charset="-120"/>
+              </a:rPr>
+              <a:t> </a:t>
+            </a:r>
+            <a:r>
+              <a:rPr lang="en-US" sz="1900" b="1" dirty="0" err="1" smtClean="0">
+                <a:solidFill>
+                  <a:srgbClr val="21295C"/>
+                </a:solidFill>
+                <a:latin typeface="Segoe UI" pitchFamily="34" charset="0"/>
+                <a:ea typeface="Segoe UI" pitchFamily="34" charset="-122"/>
+                <a:cs typeface="Segoe UI" pitchFamily="34" charset="-120"/>
+              </a:rPr>
+              <a:t>triển</a:t>
             </a:r>
             <a:endParaRPr lang="en-US" sz="1900" dirty="0"/>
           </a:p>
@@ -17815,7 +18884,7 @@
         </p:spPr>
         <p:txBody>
           <a:bodyPr wrap="square" lIns="25400" tIns="50800" rIns="50800" bIns="25400" rtlCol="0" anchor="ctr">
-            <a:normAutofit/>
+            <a:normAutofit lnSpcReduction="10000"/>
           </a:bodyPr>
           <a:lstStyle/>
           <a:p>
@@ -17973,15 +19042,54 @@
               <a:buNone/>
             </a:pPr>
             <a:r>
-              <a:rPr lang="en-US" sz="920" b="1" dirty="0">
+              <a:rPr lang="en-US" sz="920" b="1" dirty="0" err="1" smtClean="0">
                 <a:solidFill>
                   <a:srgbClr val="21295C"/>
                 </a:solidFill>
                 <a:latin typeface="Segoe UI" pitchFamily="34" charset="0"/>
-                <a:ea typeface="Segoe UI" pitchFamily="34" charset="-122"/>
                 <a:cs typeface="Segoe UI" pitchFamily="34" charset="-120"/>
               </a:rPr>
-              <a:t>Lộ trình Nghiên cứu Tương lai</a:t>
+              <a:t>Hướng</a:t>
+            </a:r>
+            <a:r>
+              <a:rPr lang="en-US" sz="920" b="1" dirty="0" smtClean="0">
+                <a:solidFill>
+                  <a:srgbClr val="21295C"/>
+                </a:solidFill>
+                <a:latin typeface="Segoe UI" pitchFamily="34" charset="0"/>
+                <a:cs typeface="Segoe UI" pitchFamily="34" charset="-120"/>
+              </a:rPr>
+              <a:t> </a:t>
+            </a:r>
+            <a:r>
+              <a:rPr lang="en-US" sz="920" b="1" dirty="0" err="1" smtClean="0">
+                <a:solidFill>
+                  <a:srgbClr val="21295C"/>
+                </a:solidFill>
+                <a:latin typeface="Segoe UI" pitchFamily="34" charset="0"/>
+                <a:cs typeface="Segoe UI" pitchFamily="34" charset="-120"/>
+              </a:rPr>
+              <a:t>phát</a:t>
+            </a:r>
+            <a:r>
+              <a:rPr lang="en-US" sz="920" b="1" dirty="0" smtClean="0">
+                <a:solidFill>
+                  <a:srgbClr val="21295C"/>
+                </a:solidFill>
+                <a:latin typeface="Segoe UI" pitchFamily="34" charset="0"/>
+                <a:cs typeface="Segoe UI" pitchFamily="34" charset="-120"/>
+              </a:rPr>
+              <a:t> </a:t>
+            </a:r>
+            <a:r>
+              <a:rPr lang="en-US" sz="920" b="1" dirty="0" err="1" smtClean="0">
+                <a:solidFill>
+                  <a:srgbClr val="21295C"/>
+                </a:solidFill>
+                <a:latin typeface="Segoe UI" pitchFamily="34" charset="0"/>
+                <a:cs typeface="Segoe UI" pitchFamily="34" charset="-120"/>
+              </a:rPr>
+              <a:t>triển</a:t>
             </a:r>
             <a:endParaRPr lang="en-US" sz="920" dirty="0"/>
           </a:p>
@@ -18088,13 +19196,13 @@
   <p:clrMapOvr>
     <a:masterClrMapping/>
   </p:clrMapOvr>
-  <mc:AlternateContent xmlns:mc="http://schemas.openxmlformats.org/markup-compatibility/2006">
-    <mc:Choice xmlns:p14="http://schemas.microsoft.com/office/powerpoint/2010/main" Requires="p14">
+  <mc:AlternateContent xmlns:mc="http://schemas.openxmlformats.org/markup-compatibility/2006" xmlns:p14="http://schemas.microsoft.com/office/powerpoint/2010/main">
+    <mc:Choice Requires="p14">
       <p:transition spd="slow" p14:dur="1300">
         <p14:pan dir="u"/>
       </p:transition>
     </mc:Choice>
-    <mc:Fallback>
+    <mc:Fallback xmlns="">
       <p:transition spd="slow">
         <p:fade/>
       </p:transition>
@@ -18482,7 +19590,139 @@
                 <a:ea typeface="Segoe UI" pitchFamily="34" charset="-122"/>
                 <a:cs typeface="Segoe UI" pitchFamily="34" charset="-120"/>
               </a:rPr>
-              <a:t> 09 rất mong nhận được những câu hỏi và góp ý quý báu từ Hội đồng!</a:t>
+              <a:t> 09 rất mong nhận được những câu hỏi và góp ý quý </a:t>
+            </a:r>
+            <a:r>
+              <a:rPr lang="en-US" sz="930" i="1" dirty="0" err="1">
+                <a:solidFill>
+                  <a:srgbClr val="FCD34D"/>
+                </a:solidFill>
+                <a:latin typeface="Segoe UI" pitchFamily="34" charset="0"/>
+                <a:ea typeface="Segoe UI" pitchFamily="34" charset="-122"/>
+                <a:cs typeface="Segoe UI" pitchFamily="34" charset="-120"/>
+              </a:rPr>
+              <a:t>báu</a:t>
+            </a:r>
+            <a:r>
+              <a:rPr lang="en-US" sz="930" i="1" dirty="0">
+                <a:solidFill>
+                  <a:srgbClr val="FCD34D"/>
+                </a:solidFill>
+                <a:latin typeface="Segoe UI" pitchFamily="34" charset="0"/>
+                <a:ea typeface="Segoe UI" pitchFamily="34" charset="-122"/>
+                <a:cs typeface="Segoe UI" pitchFamily="34" charset="-120"/>
+              </a:rPr>
+              <a:t> </a:t>
+            </a:r>
+            <a:r>
+              <a:rPr lang="en-US" sz="930" i="1" dirty="0" err="1" smtClean="0">
+                <a:solidFill>
+                  <a:srgbClr val="FCD34D"/>
+                </a:solidFill>
+                <a:latin typeface="Segoe UI" pitchFamily="34" charset="0"/>
+                <a:ea typeface="Segoe UI" pitchFamily="34" charset="-122"/>
+                <a:cs typeface="Segoe UI" pitchFamily="34" charset="-120"/>
+              </a:rPr>
+              <a:t>từ</a:t>
+            </a:r>
+            <a:r>
+              <a:rPr lang="en-US" sz="930" i="1" dirty="0">
+                <a:solidFill>
+                  <a:srgbClr val="FCD34D"/>
+                </a:solidFill>
+                <a:latin typeface="Segoe UI" pitchFamily="34" charset="0"/>
+                <a:ea typeface="Segoe UI" pitchFamily="34" charset="-122"/>
+                <a:cs typeface="Segoe UI" pitchFamily="34" charset="-120"/>
+              </a:rPr>
+              <a:t> </a:t>
+            </a:r>
+            <a:r>
+              <a:rPr lang="en-US" sz="930" i="1" dirty="0" err="1" smtClean="0">
+                <a:solidFill>
+                  <a:srgbClr val="FCD34D"/>
+                </a:solidFill>
+                <a:latin typeface="Segoe UI" pitchFamily="34" charset="0"/>
+                <a:ea typeface="Segoe UI" pitchFamily="34" charset="-122"/>
+                <a:cs typeface="Segoe UI" pitchFamily="34" charset="-120"/>
+              </a:rPr>
+              <a:t>Thầy</a:t>
+            </a:r>
+            <a:r>
+              <a:rPr lang="en-US" sz="930" i="1" dirty="0" smtClean="0">
+                <a:solidFill>
+                  <a:srgbClr val="FCD34D"/>
+                </a:solidFill>
+                <a:latin typeface="Segoe UI" pitchFamily="34" charset="0"/>
+                <a:ea typeface="Segoe UI" pitchFamily="34" charset="-122"/>
+                <a:cs typeface="Segoe UI" pitchFamily="34" charset="-120"/>
+              </a:rPr>
+              <a:t> </a:t>
+            </a:r>
+            <a:r>
+              <a:rPr lang="en-US" sz="930" i="1" dirty="0" err="1" smtClean="0">
+                <a:solidFill>
+                  <a:srgbClr val="FCD34D"/>
+                </a:solidFill>
+                <a:latin typeface="Segoe UI" pitchFamily="34" charset="0"/>
+                <a:ea typeface="Segoe UI" pitchFamily="34" charset="-122"/>
+                <a:cs typeface="Segoe UI" pitchFamily="34" charset="-120"/>
+              </a:rPr>
+              <a:t>và</a:t>
+            </a:r>
+            <a:r>
+              <a:rPr lang="en-US" sz="930" i="1" dirty="0" smtClean="0">
+                <a:solidFill>
+                  <a:srgbClr val="FCD34D"/>
+                </a:solidFill>
+                <a:latin typeface="Segoe UI" pitchFamily="34" charset="0"/>
+                <a:ea typeface="Segoe UI" pitchFamily="34" charset="-122"/>
+                <a:cs typeface="Segoe UI" pitchFamily="34" charset="-120"/>
+              </a:rPr>
+              <a:t> </a:t>
+            </a:r>
+            <a:r>
+              <a:rPr lang="en-US" sz="930" i="1" dirty="0" err="1" smtClean="0">
+                <a:solidFill>
+                  <a:srgbClr val="FCD34D"/>
+                </a:solidFill>
+                <a:latin typeface="Segoe UI" pitchFamily="34" charset="0"/>
+                <a:ea typeface="Segoe UI" pitchFamily="34" charset="-122"/>
+                <a:cs typeface="Segoe UI" pitchFamily="34" charset="-120"/>
+              </a:rPr>
+              <a:t>các</a:t>
+            </a:r>
+            <a:r>
+              <a:rPr lang="en-US" sz="930" i="1" dirty="0" smtClean="0">
+                <a:solidFill>
+                  <a:srgbClr val="FCD34D"/>
+                </a:solidFill>
+                <a:latin typeface="Segoe UI" pitchFamily="34" charset="0"/>
+                <a:ea typeface="Segoe UI" pitchFamily="34" charset="-122"/>
+                <a:cs typeface="Segoe UI" pitchFamily="34" charset="-120"/>
+              </a:rPr>
+              <a:t> </a:t>
+            </a:r>
+            <a:r>
+              <a:rPr lang="en-US" sz="930" i="1" smtClean="0">
+                <a:solidFill>
+                  <a:srgbClr val="FCD34D"/>
+                </a:solidFill>
+                <a:latin typeface="Segoe UI" pitchFamily="34" charset="0"/>
+                <a:ea typeface="Segoe UI" pitchFamily="34" charset="-122"/>
+                <a:cs typeface="Segoe UI" pitchFamily="34" charset="-120"/>
+              </a:rPr>
+              <a:t>bạn</a:t>
+            </a:r>
+            <a:r>
+              <a:rPr lang="en-US" sz="930" i="1" smtClean="0">
+                <a:solidFill>
+                  <a:srgbClr val="FCD34D"/>
+                </a:solidFill>
+                <a:latin typeface="Segoe UI" pitchFamily="34" charset="0"/>
+                <a:ea typeface="Segoe UI" pitchFamily="34" charset="-122"/>
+                <a:cs typeface="Segoe UI" pitchFamily="34" charset="-120"/>
+              </a:rPr>
+              <a:t>!</a:t>
             </a:r>
             <a:endParaRPr lang="en-US" sz="930" dirty="0"/>
           </a:p>
@@ -18493,13 +19733,13 @@
   <p:clrMapOvr>
     <a:masterClrMapping/>
   </p:clrMapOvr>
-  <mc:AlternateContent xmlns:mc="http://schemas.openxmlformats.org/markup-compatibility/2006">
-    <mc:Choice xmlns:p15="http://schemas.microsoft.com/office/powerpoint/2012/main" Requires="p15">
+  <mc:AlternateContent xmlns:mc="http://schemas.openxmlformats.org/markup-compatibility/2006" xmlns:p15="http://schemas.microsoft.com/office/powerpoint/2012/main">
+    <mc:Choice Requires="p15">
       <p:transition xmlns:p14="http://schemas.microsoft.com/office/powerpoint/2010/main" spd="slow" p14:dur="1250">
         <p15:prstTrans prst="airplane"/>
       </p:transition>
     </mc:Choice>
-    <mc:Fallback>
+    <mc:Fallback xmlns="">
       <p:transition spd="slow">
         <p:fade/>
       </p:transition>
@@ -18851,13 +20091,13 @@
   <p:clrMapOvr>
     <a:masterClrMapping/>
   </p:clrMapOvr>
-  <mc:AlternateContent xmlns:mc="http://schemas.openxmlformats.org/markup-compatibility/2006">
-    <mc:Choice xmlns:p14="http://schemas.microsoft.com/office/powerpoint/2010/main" Requires="p14">
+  <mc:AlternateContent xmlns:mc="http://schemas.openxmlformats.org/markup-compatibility/2006" xmlns:p14="http://schemas.microsoft.com/office/powerpoint/2010/main">
+    <mc:Choice Requires="p14">
       <p:transition spd="slow" p14:dur="1200">
         <p14:prism/>
       </p:transition>
     </mc:Choice>
-    <mc:Fallback>
+    <mc:Fallback xmlns="">
       <p:transition spd="slow">
         <p:fade/>
       </p:transition>
@@ -20429,7 +21669,7 @@
         </p:spPr>
         <p:txBody>
           <a:bodyPr wrap="square" lIns="25400" tIns="50800" rIns="50800" bIns="25400" rtlCol="0" anchor="ctr">
-            <a:normAutofit fontScale="92500" lnSpcReduction="20000"/>
+            <a:normAutofit fontScale="92500" lnSpcReduction="10000"/>
           </a:bodyPr>
           <a:lstStyle/>
           <a:p>
@@ -20476,7 +21716,95 @@
                 <a:ea typeface="Segoe UI" pitchFamily="34" charset="-122"/>
                 <a:cs typeface="Segoe UI" pitchFamily="34" charset="-120"/>
               </a:rPr>
-              <a:t>Thiết kế 14 domain features bắt trọn sai lệch số dư sổ cái.</a:t>
+              <a:t>Thiết kế 14 </a:t>
+            </a:r>
+            <a:r>
+              <a:rPr lang="en-US" sz="950" dirty="0" smtClean="0">
+                <a:solidFill>
+                  <a:srgbClr val="1F2937"/>
+                </a:solidFill>
+                <a:latin typeface="Segoe UI" pitchFamily="34" charset="0"/>
+                <a:ea typeface="Segoe UI" pitchFamily="34" charset="-122"/>
+                <a:cs typeface="Segoe UI" pitchFamily="34" charset="-120"/>
+              </a:rPr>
+              <a:t>features </a:t>
+            </a:r>
+            <a:r>
+              <a:rPr lang="en-US" sz="950" dirty="0">
+                <a:solidFill>
+                  <a:srgbClr val="1F2937"/>
+                </a:solidFill>
+                <a:latin typeface="Segoe UI" pitchFamily="34" charset="0"/>
+                <a:ea typeface="Segoe UI" pitchFamily="34" charset="-122"/>
+                <a:cs typeface="Segoe UI" pitchFamily="34" charset="-120"/>
+              </a:rPr>
+              <a:t>bắt trọn sai lệch số </a:t>
+            </a:r>
+            <a:r>
+              <a:rPr lang="en-US" sz="950" dirty="0" err="1">
+                <a:solidFill>
+                  <a:srgbClr val="1F2937"/>
+                </a:solidFill>
+                <a:latin typeface="Segoe UI" pitchFamily="34" charset="0"/>
+                <a:ea typeface="Segoe UI" pitchFamily="34" charset="-122"/>
+                <a:cs typeface="Segoe UI" pitchFamily="34" charset="-120"/>
+              </a:rPr>
+              <a:t>dư</a:t>
+            </a:r>
+            <a:r>
+              <a:rPr lang="en-US" sz="950" dirty="0">
+                <a:solidFill>
+                  <a:srgbClr val="1F2937"/>
+                </a:solidFill>
+                <a:latin typeface="Segoe UI" pitchFamily="34" charset="0"/>
+                <a:ea typeface="Segoe UI" pitchFamily="34" charset="-122"/>
+                <a:cs typeface="Segoe UI" pitchFamily="34" charset="-120"/>
+              </a:rPr>
+              <a:t> </a:t>
+            </a:r>
+            <a:r>
+              <a:rPr lang="en-US" sz="950" dirty="0" err="1" smtClean="0">
+                <a:solidFill>
+                  <a:srgbClr val="1F2937"/>
+                </a:solidFill>
+                <a:latin typeface="Segoe UI" pitchFamily="34" charset="0"/>
+                <a:ea typeface="Segoe UI" pitchFamily="34" charset="-122"/>
+                <a:cs typeface="Segoe UI" pitchFamily="34" charset="-120"/>
+              </a:rPr>
+              <a:t>tài</a:t>
+            </a:r>
+            <a:r>
+              <a:rPr lang="en-US" sz="950" dirty="0" smtClean="0">
+                <a:solidFill>
+                  <a:srgbClr val="1F2937"/>
+                </a:solidFill>
+                <a:latin typeface="Segoe UI" pitchFamily="34" charset="0"/>
+                <a:ea typeface="Segoe UI" pitchFamily="34" charset="-122"/>
+                <a:cs typeface="Segoe UI" pitchFamily="34" charset="-120"/>
+              </a:rPr>
+              <a:t> </a:t>
+            </a:r>
+            <a:r>
+              <a:rPr lang="en-US" sz="950" dirty="0" err="1" smtClean="0">
+                <a:solidFill>
+                  <a:srgbClr val="1F2937"/>
+                </a:solidFill>
+                <a:latin typeface="Segoe UI" pitchFamily="34" charset="0"/>
+                <a:ea typeface="Segoe UI" pitchFamily="34" charset="-122"/>
+                <a:cs typeface="Segoe UI" pitchFamily="34" charset="-120"/>
+              </a:rPr>
+              <a:t>khoản</a:t>
+            </a:r>
+            <a:r>
+              <a:rPr lang="en-US" sz="950" dirty="0" smtClean="0">
+                <a:solidFill>
+                  <a:srgbClr val="1F2937"/>
+                </a:solidFill>
+                <a:latin typeface="Segoe UI" pitchFamily="34" charset="0"/>
+                <a:ea typeface="Segoe UI" pitchFamily="34" charset="-122"/>
+                <a:cs typeface="Segoe UI" pitchFamily="34" charset="-120"/>
+              </a:rPr>
+              <a:t>.</a:t>
             </a:r>
             <a:endParaRPr lang="en-US" sz="950" dirty="0"/>
           </a:p>
@@ -20492,7 +21820,7 @@
               <a:buChar char="•"/>
             </a:pPr>
             <a:r>
-              <a:rPr lang="en-US" sz="950" dirty="0">
+              <a:rPr lang="en-US" sz="950" dirty="0" smtClean="0">
                 <a:solidFill>
                   <a:srgbClr val="1F2937"/>
                 </a:solidFill>
@@ -20500,7 +21828,40 @@
                 <a:ea typeface="Segoe UI" pitchFamily="34" charset="-122"/>
                 <a:cs typeface="Segoe UI" pitchFamily="34" charset="-120"/>
               </a:rPr>
-              <a:t>Đối chuẩn Ensemble Trees với Unsupervised Deep Autoencoder bắt Zero-Day.</a:t>
+              <a:t>So </a:t>
+            </a:r>
+            <a:r>
+              <a:rPr lang="en-US" sz="950" dirty="0" err="1" smtClean="0">
+                <a:solidFill>
+                  <a:srgbClr val="1F2937"/>
+                </a:solidFill>
+                <a:latin typeface="Segoe UI" pitchFamily="34" charset="0"/>
+                <a:ea typeface="Segoe UI" pitchFamily="34" charset="-122"/>
+                <a:cs typeface="Segoe UI" pitchFamily="34" charset="-120"/>
+              </a:rPr>
+              <a:t>sánh</a:t>
+            </a:r>
+            <a:r>
+              <a:rPr lang="en-US" sz="950" dirty="0" smtClean="0">
+                <a:solidFill>
+                  <a:srgbClr val="1F2937"/>
+                </a:solidFill>
+                <a:latin typeface="Segoe UI" pitchFamily="34" charset="0"/>
+                <a:ea typeface="Segoe UI" pitchFamily="34" charset="-122"/>
+                <a:cs typeface="Segoe UI" pitchFamily="34" charset="-120"/>
+              </a:rPr>
+              <a:t> </a:t>
+            </a:r>
+            <a:r>
+              <a:rPr lang="en-US" sz="950" dirty="0">
+                <a:solidFill>
+                  <a:srgbClr val="1F2937"/>
+                </a:solidFill>
+                <a:latin typeface="Segoe UI" pitchFamily="34" charset="0"/>
+                <a:ea typeface="Segoe UI" pitchFamily="34" charset="-122"/>
+                <a:cs typeface="Segoe UI" pitchFamily="34" charset="-120"/>
+              </a:rPr>
+              <a:t>Ensemble Trees với Unsupervised Deep Autoencoder bắt Zero-Day.</a:t>
             </a:r>
             <a:endParaRPr lang="en-US" sz="950" dirty="0"/>
           </a:p>
@@ -20535,13 +21896,13 @@
   <p:clrMapOvr>
     <a:masterClrMapping/>
   </p:clrMapOvr>
-  <mc:AlternateContent xmlns:mc="http://schemas.openxmlformats.org/markup-compatibility/2006">
-    <mc:Choice xmlns:p14="http://schemas.microsoft.com/office/powerpoint/2010/main" Requires="p14">
+  <mc:AlternateContent xmlns:mc="http://schemas.openxmlformats.org/markup-compatibility/2006" xmlns:p14="http://schemas.microsoft.com/office/powerpoint/2010/main">
+    <mc:Choice Requires="p14">
       <p:transition spd="slow" p14:dur="1300">
         <p14:pan dir="u"/>
       </p:transition>
     </mc:Choice>
-    <mc:Fallback>
+    <mc:Fallback xmlns="">
       <p:transition spd="slow">
         <p:fade/>
       </p:transition>
@@ -21141,7 +22502,31 @@
                   <a:srgbClr val="2563EB"/>
                 </a:solidFill>
               </a:rPr>
-              <a:t>11 → 14 Đặc trưng Miền</a:t>
+              <a:t>11 → 14 </a:t>
+            </a:r>
+            <a:r>
+              <a:rPr lang="en-US" sz="1350" b="1" dirty="0" err="1">
+                <a:solidFill>
+                  <a:srgbClr val="2563EB"/>
+                </a:solidFill>
+              </a:rPr>
+              <a:t>Đặc</a:t>
+            </a:r>
+            <a:r>
+              <a:rPr lang="en-US" sz="1350" b="1" dirty="0">
+                <a:solidFill>
+                  <a:srgbClr val="2563EB"/>
+                </a:solidFill>
+              </a:rPr>
+              <a:t> </a:t>
+            </a:r>
+            <a:r>
+              <a:rPr lang="en-US" sz="1350" b="1" dirty="0" err="1" smtClean="0">
+                <a:solidFill>
+                  <a:srgbClr val="2563EB"/>
+                </a:solidFill>
+              </a:rPr>
+              <a:t>trưng</a:t>
             </a:r>
             <a:endParaRPr lang="en-US" sz="1350" dirty="0"/>
           </a:p>
@@ -22618,13 +24003,13 @@
   <p:clrMapOvr>
     <a:masterClrMapping/>
   </p:clrMapOvr>
-  <mc:AlternateContent xmlns:mc="http://schemas.openxmlformats.org/markup-compatibility/2006">
-    <mc:Choice xmlns:p159="http://schemas.microsoft.com/office/powerpoint/2015/09/main" Requires="p159">
+  <mc:AlternateContent xmlns:mc="http://schemas.openxmlformats.org/markup-compatibility/2006" xmlns:p159="http://schemas.microsoft.com/office/powerpoint/2015/09/main">
+    <mc:Choice Requires="p159">
       <p:transition xmlns:p14="http://schemas.microsoft.com/office/powerpoint/2010/main" spd="slow" p14:dur="2000">
         <p159:morph option="byObject"/>
       </p:transition>
     </mc:Choice>
-    <mc:Fallback>
+    <mc:Fallback xmlns="">
       <p:transition spd="slow">
         <p:fade/>
       </p:transition>
@@ -22941,7 +24326,18 @@
                 <a:ea typeface="Segoe UI" pitchFamily="34" charset="-122"/>
                 <a:cs typeface="Segoe UI" pitchFamily="34" charset="-120"/>
               </a:rPr>
-              <a:t>Công thức Toán học của 14 Engineered Domain Features</a:t>
+              <a:t>Công thức Toán học của 14 Engineered </a:t>
+            </a:r>
+            <a:r>
+              <a:rPr lang="en-US" sz="1100" dirty="0" smtClean="0">
+                <a:solidFill>
+                  <a:srgbClr val="E2E8F0"/>
+                </a:solidFill>
+                <a:latin typeface="Segoe UI" pitchFamily="34" charset="0"/>
+                <a:ea typeface="Segoe UI" pitchFamily="34" charset="-122"/>
+                <a:cs typeface="Segoe UI" pitchFamily="34" charset="-120"/>
+              </a:rPr>
+              <a:t>Features</a:t>
             </a:r>
             <a:endParaRPr lang="en-US" sz="1100" dirty="0"/>
           </a:p>
@@ -22976,13 +24372,13 @@
   <p:clrMapOvr>
     <a:masterClrMapping/>
   </p:clrMapOvr>
-  <mc:AlternateContent xmlns:mc="http://schemas.openxmlformats.org/markup-compatibility/2006">
-    <mc:Choice xmlns:p14="http://schemas.microsoft.com/office/powerpoint/2010/main" Requires="p14">
+  <mc:AlternateContent xmlns:mc="http://schemas.openxmlformats.org/markup-compatibility/2006" xmlns:p14="http://schemas.microsoft.com/office/powerpoint/2010/main">
+    <mc:Choice Requires="p14">
       <p:transition spd="slow" p14:dur="1200">
         <p14:prism/>
       </p:transition>
     </mc:Choice>
-    <mc:Fallback>
+    <mc:Fallback xmlns="">
       <p:transition spd="slow">
         <p:fade/>
       </p:transition>
@@ -23329,7 +24725,63 @@
                   <a:srgbClr val="21295C"/>
                 </a:solidFill>
               </a:rPr>
-              <a:t>Phát hiện 1: Khu biệt Loại Giao dịch</a:t>
+              <a:t>Phát hiện 1: </a:t>
+            </a:r>
+            <a:r>
+              <a:rPr lang="en-US" sz="1100" b="1" dirty="0" err="1" smtClean="0">
+                <a:solidFill>
+                  <a:srgbClr val="21295C"/>
+                </a:solidFill>
+              </a:rPr>
+              <a:t>Khoanh</a:t>
+            </a:r>
+            <a:r>
+              <a:rPr lang="en-US" sz="1100" b="1" dirty="0" smtClean="0">
+                <a:solidFill>
+                  <a:srgbClr val="21295C"/>
+                </a:solidFill>
+              </a:rPr>
+              <a:t> </a:t>
+            </a:r>
+            <a:r>
+              <a:rPr lang="en-US" sz="1100" b="1" dirty="0" err="1" smtClean="0">
+                <a:solidFill>
+                  <a:srgbClr val="21295C"/>
+                </a:solidFill>
+              </a:rPr>
+              <a:t>vùng</a:t>
+            </a:r>
+            <a:r>
+              <a:rPr lang="en-US" sz="1100" b="1" dirty="0" smtClean="0">
+                <a:solidFill>
+                  <a:srgbClr val="21295C"/>
+                </a:solidFill>
+              </a:rPr>
+              <a:t> </a:t>
+            </a:r>
+            <a:r>
+              <a:rPr lang="en-US" sz="1100" b="1" dirty="0" err="1" smtClean="0">
+                <a:solidFill>
+                  <a:srgbClr val="21295C"/>
+                </a:solidFill>
+              </a:rPr>
+              <a:t>Loại</a:t>
+            </a:r>
+            <a:r>
+              <a:rPr lang="en-US" sz="1100" b="1" dirty="0" smtClean="0">
+                <a:solidFill>
+                  <a:srgbClr val="21295C"/>
+                </a:solidFill>
+              </a:rPr>
+              <a:t> </a:t>
+            </a:r>
+            <a:r>
+              <a:rPr lang="en-US" sz="1100" b="1" dirty="0">
+                <a:solidFill>
+                  <a:srgbClr val="21295C"/>
+                </a:solidFill>
+              </a:rPr>
+              <a:t>Giao dịch</a:t>
             </a:r>
             <a:endParaRPr lang="en-US" sz="1100" dirty="0"/>
           </a:p>
@@ -23741,7 +25193,63 @@
                   <a:srgbClr val="21295C"/>
                 </a:solidFill>
               </a:rPr>
-              <a:t>Phát hiện 3: Sai Lệch Sổ Cái Đích</a:t>
+              <a:t>Phát hiện 3: Sai </a:t>
+            </a:r>
+            <a:r>
+              <a:rPr lang="en-US" sz="1100" b="1" dirty="0" err="1">
+                <a:solidFill>
+                  <a:srgbClr val="21295C"/>
+                </a:solidFill>
+              </a:rPr>
+              <a:t>Lệch</a:t>
+            </a:r>
+            <a:r>
+              <a:rPr lang="en-US" sz="1100" b="1" dirty="0">
+                <a:solidFill>
+                  <a:srgbClr val="21295C"/>
+                </a:solidFill>
+              </a:rPr>
+              <a:t> </a:t>
+            </a:r>
+            <a:r>
+              <a:rPr lang="en-US" sz="1100" b="1" dirty="0" err="1" smtClean="0">
+                <a:solidFill>
+                  <a:srgbClr val="21295C"/>
+                </a:solidFill>
+              </a:rPr>
+              <a:t>số</a:t>
+            </a:r>
+            <a:r>
+              <a:rPr lang="en-US" sz="1100" b="1" dirty="0" smtClean="0">
+                <a:solidFill>
+                  <a:srgbClr val="21295C"/>
+                </a:solidFill>
+              </a:rPr>
+              <a:t> </a:t>
+            </a:r>
+            <a:r>
+              <a:rPr lang="en-US" sz="1100" b="1" dirty="0" err="1" smtClean="0">
+                <a:solidFill>
+                  <a:srgbClr val="21295C"/>
+                </a:solidFill>
+              </a:rPr>
+              <a:t>dư</a:t>
+            </a:r>
+            <a:r>
+              <a:rPr lang="en-US" sz="1100" b="1" dirty="0" smtClean="0">
+                <a:solidFill>
+                  <a:srgbClr val="21295C"/>
+                </a:solidFill>
+              </a:rPr>
+              <a:t> </a:t>
+            </a:r>
+            <a:r>
+              <a:rPr lang="en-US" sz="1100" b="1" dirty="0" err="1" smtClean="0">
+                <a:solidFill>
+                  <a:srgbClr val="21295C"/>
+                </a:solidFill>
+              </a:rPr>
+              <a:t>đích</a:t>
             </a:r>
             <a:endParaRPr lang="en-US" sz="1100" dirty="0"/>
           </a:p>
@@ -23827,13 +25335,13 @@
   <p:clrMapOvr>
     <a:masterClrMapping/>
   </p:clrMapOvr>
-  <mc:AlternateContent xmlns:mc="http://schemas.openxmlformats.org/markup-compatibility/2006">
-    <mc:Choice xmlns:p14="http://schemas.microsoft.com/office/powerpoint/2010/main" Requires="p14">
+  <mc:AlternateContent xmlns:mc="http://schemas.openxmlformats.org/markup-compatibility/2006" xmlns:p14="http://schemas.microsoft.com/office/powerpoint/2010/main">
+    <mc:Choice Requires="p14">
       <p:transition spd="slow" p14:dur="1300">
         <p14:pan dir="u"/>
       </p:transition>
     </mc:Choice>
-    <mc:Fallback>
+    <mc:Fallback xmlns="">
       <p:transition spd="slow">
         <p:fade/>
       </p:transition>
@@ -23941,7 +25449,62 @@
                 <a:ea typeface="Segoe UI" pitchFamily="34" charset="-122"/>
                 <a:cs typeface="Segoe UI" pitchFamily="34" charset="-120"/>
               </a:rPr>
-              <a:t>Kỹ thuật Đặc trưng: 14 Thuộc tính Miền Cốt lõi</a:t>
+              <a:t>Kỹ thuật Đặc trưng: 14 Thuộc </a:t>
+            </a:r>
+            <a:r>
+              <a:rPr lang="en-US" sz="1900" b="1" dirty="0" err="1">
+                <a:solidFill>
+                  <a:srgbClr val="21295C"/>
+                </a:solidFill>
+                <a:latin typeface="Segoe UI" pitchFamily="34" charset="0"/>
+                <a:ea typeface="Segoe UI" pitchFamily="34" charset="-122"/>
+                <a:cs typeface="Segoe UI" pitchFamily="34" charset="-120"/>
+              </a:rPr>
+              <a:t>tính</a:t>
+            </a:r>
+            <a:r>
+              <a:rPr lang="en-US" sz="1900" b="1" dirty="0">
+                <a:solidFill>
+                  <a:srgbClr val="21295C"/>
+                </a:solidFill>
+                <a:latin typeface="Segoe UI" pitchFamily="34" charset="0"/>
+                <a:ea typeface="Segoe UI" pitchFamily="34" charset="-122"/>
+                <a:cs typeface="Segoe UI" pitchFamily="34" charset="-120"/>
+              </a:rPr>
+              <a:t> </a:t>
+            </a:r>
+            <a:r>
+              <a:rPr lang="en-US" sz="1900" b="1" dirty="0" err="1" smtClean="0">
+                <a:solidFill>
+                  <a:srgbClr val="21295C"/>
+                </a:solidFill>
+                <a:latin typeface="Segoe UI" pitchFamily="34" charset="0"/>
+                <a:ea typeface="Segoe UI" pitchFamily="34" charset="-122"/>
+                <a:cs typeface="Segoe UI" pitchFamily="34" charset="-120"/>
+              </a:rPr>
+              <a:t>Cốt</a:t>
+            </a:r>
+            <a:r>
+              <a:rPr lang="en-US" sz="1900" b="1" dirty="0" smtClean="0">
+                <a:solidFill>
+                  <a:srgbClr val="21295C"/>
+                </a:solidFill>
+                <a:latin typeface="Segoe UI" pitchFamily="34" charset="0"/>
+                <a:ea typeface="Segoe UI" pitchFamily="34" charset="-122"/>
+                <a:cs typeface="Segoe UI" pitchFamily="34" charset="-120"/>
+              </a:rPr>
+              <a:t> </a:t>
+            </a:r>
+            <a:r>
+              <a:rPr lang="en-US" sz="1900" b="1" dirty="0">
+                <a:solidFill>
+                  <a:srgbClr val="21295C"/>
+                </a:solidFill>
+                <a:latin typeface="Segoe UI" pitchFamily="34" charset="0"/>
+                <a:ea typeface="Segoe UI" pitchFamily="34" charset="-122"/>
+                <a:cs typeface="Segoe UI" pitchFamily="34" charset="-120"/>
+              </a:rPr>
+              <a:t>lõi</a:t>
             </a:r>
             <a:endParaRPr lang="en-US" sz="1900" dirty="0"/>
           </a:p>
@@ -24590,7 +26153,7 @@
           <p:nvPr>
             <p:extLst>
               <p:ext uri="{D42A27DB-BD31-4B8C-83A1-F6EECF244321}">
-                <p14:modId xmlns:p14="http://schemas.microsoft.com/office/powerpoint/2010/main" val="1015034861"/>
+                <p14:modId xmlns:p14="http://schemas.microsoft.com/office/powerpoint/2010/main" val="689580509"/>
               </p:ext>
             </p:extLst>
           </p:nvPr>
@@ -25624,7 +27187,29 @@
                           <a:ea typeface="Segoe UI" pitchFamily="34" charset="-122"/>
                           <a:cs typeface="Segoe UI" pitchFamily="34" charset="-120"/>
                         </a:rPr>
-                        <a:t>Giờ trong ngày (0..23); 1 nếu giao dịch từ 0h - 5h sáng</a:t>
+                        <a:t>Giờ trong ngày (0..23</a:t>
+                      </a:r>
+                      <a:r>
+                        <a:rPr lang="en-US" sz="800" dirty="0" smtClean="0">
+                          <a:solidFill>
+                            <a:srgbClr val="1F2937"/>
+                          </a:solidFill>
+                          <a:latin typeface="Segoe UI" pitchFamily="34" charset="0"/>
+                          <a:ea typeface="Segoe UI" pitchFamily="34" charset="-122"/>
+                          <a:cs typeface="Segoe UI" pitchFamily="34" charset="-120"/>
+                        </a:rPr>
+                        <a:t>)/ </a:t>
+                      </a:r>
+                      <a:r>
+                        <a:rPr lang="en-US" sz="800" dirty="0">
+                          <a:solidFill>
+                            <a:srgbClr val="1F2937"/>
+                          </a:solidFill>
+                          <a:latin typeface="Segoe UI" pitchFamily="34" charset="0"/>
+                          <a:ea typeface="Segoe UI" pitchFamily="34" charset="-122"/>
+                          <a:cs typeface="Segoe UI" pitchFamily="34" charset="-120"/>
+                        </a:rPr>
+                        <a:t>1 nếu giao dịch từ 0h - 5h sáng</a:t>
                       </a:r>
                       <a:endParaRPr lang="en-US" sz="800" dirty="0">
                         <a:latin typeface="Segoe UI" charset="0"/>
@@ -25814,7 +27399,7 @@
               <a:buChar char="•"/>
             </a:pPr>
             <a:r>
-              <a:rPr lang="en-US" sz="900" dirty="0">
+              <a:rPr lang="en-US" sz="900" dirty="0" smtClean="0">
                 <a:solidFill>
                   <a:srgbClr val="1F2937"/>
                 </a:solidFill>
@@ -25822,7 +27407,18 @@
                 <a:ea typeface="Segoe UI" pitchFamily="34" charset="-122"/>
                 <a:cs typeface="Segoe UI" pitchFamily="34" charset="-120"/>
               </a:rPr>
-              <a:t>Domain Engineering tạo bước nhảy vọt so với chỉ dùng các trường số tiền gốc.</a:t>
+              <a:t>Engineering </a:t>
+            </a:r>
+            <a:r>
+              <a:rPr lang="en-US" sz="900" dirty="0">
+                <a:solidFill>
+                  <a:srgbClr val="1F2937"/>
+                </a:solidFill>
+                <a:latin typeface="Segoe UI" pitchFamily="34" charset="0"/>
+                <a:ea typeface="Segoe UI" pitchFamily="34" charset="-122"/>
+                <a:cs typeface="Segoe UI" pitchFamily="34" charset="-120"/>
+              </a:rPr>
+              <a:t>tạo bước nhảy vọt so với chỉ dùng các trường số tiền gốc.</a:t>
             </a:r>
             <a:endParaRPr lang="en-US" sz="900" dirty="0"/>
           </a:p>

--- a/draft/fraud-detection/slide/[Nhom9]_Slide_FraudDetection_Academic_VN.pptx
+++ b/draft/fraud-detection/slide/[Nhom9]_Slide_FraudDetection_Academic_VN.pptx
@@ -8938,10 +8938,10 @@
                 <a:ea typeface="Segoe UI" pitchFamily="34" charset="-122"/>
                 <a:cs typeface="Segoe UI" pitchFamily="34" charset="-120"/>
               </a:rPr>
-              <a:t>đ</a:t>
-            </a:r>
-            <a:r>
-              <a:rPr lang="en-US" sz="1900" b="1" dirty="0" err="1" smtClean="0">
+              <a:t>đa</a:t>
+            </a:r>
+            <a:r>
+              <a:rPr lang="en-US" sz="1900" b="1" dirty="0" smtClean="0">
                 <a:solidFill>
                   <a:srgbClr val="21295C"/>
                 </a:solidFill>
@@ -8949,10 +8949,10 @@
                 <a:ea typeface="Segoe UI" pitchFamily="34" charset="-122"/>
                 <a:cs typeface="Segoe UI" pitchFamily="34" charset="-120"/>
               </a:rPr>
-              <a:t>a</a:t>
-            </a:r>
-            <a:r>
-              <a:rPr lang="en-US" sz="1900" b="1" dirty="0" smtClean="0">
+              <a:t> </a:t>
+            </a:r>
+            <a:r>
+              <a:rPr lang="en-US" sz="1900" b="1" dirty="0" err="1" smtClean="0">
                 <a:solidFill>
                   <a:srgbClr val="21295C"/>
                 </a:solidFill>
@@ -8960,29 +8960,7 @@
                 <a:ea typeface="Segoe UI" pitchFamily="34" charset="-122"/>
                 <a:cs typeface="Segoe UI" pitchFamily="34" charset="-120"/>
               </a:rPr>
-              <a:t> </a:t>
-            </a:r>
-            <a:r>
-              <a:rPr lang="en-US" sz="1900" b="1" dirty="0" err="1" smtClean="0">
-                <a:solidFill>
-                  <a:srgbClr val="21295C"/>
-                </a:solidFill>
-                <a:latin typeface="Segoe UI" pitchFamily="34" charset="0"/>
-                <a:ea typeface="Segoe UI" pitchFamily="34" charset="-122"/>
-                <a:cs typeface="Segoe UI" pitchFamily="34" charset="-120"/>
-              </a:rPr>
-              <a:t>c</a:t>
-            </a:r>
-            <a:r>
-              <a:rPr lang="en-US" sz="1900" b="1" dirty="0" err="1" smtClean="0">
-                <a:solidFill>
-                  <a:srgbClr val="21295C"/>
-                </a:solidFill>
-                <a:latin typeface="Segoe UI" pitchFamily="34" charset="0"/>
-                <a:ea typeface="Segoe UI" pitchFamily="34" charset="-122"/>
-                <a:cs typeface="Segoe UI" pitchFamily="34" charset="-120"/>
-              </a:rPr>
-              <a:t>hỉ</a:t>
+              <a:t>chỉ</a:t>
             </a:r>
             <a:r>
               <a:rPr lang="en-US" sz="1900" b="1" dirty="0" smtClean="0">
@@ -18383,419 +18361,6 @@
       </p:sp>
       <p:sp>
         <p:nvSpPr>
-          <p:cNvPr id="7" name="Shape 5"/>
-          <p:cNvSpPr/>
-          <p:nvPr/>
-        </p:nvSpPr>
-        <p:spPr>
-          <a:xfrm>
-            <a:off x="502920" y="987552"/>
-            <a:ext cx="5029200" cy="3584448"/>
-          </a:xfrm>
-          <a:prstGeom prst="roundRect">
-            <a:avLst>
-              <a:gd name="adj" fmla="val 3061"/>
-            </a:avLst>
-          </a:prstGeom>
-          <a:solidFill>
-            <a:srgbClr val="0F172A"/>
-          </a:solidFill>
-          <a:ln w="19050">
-            <a:solidFill>
-              <a:srgbClr val="3B82F6"/>
-            </a:solidFill>
-            <a:prstDash val="solid"/>
-          </a:ln>
-        </p:spPr>
-        <p:txBody>
-          <a:bodyPr/>
-          <a:lstStyle/>
-          <a:p>
-            <a:endParaRPr lang="en-VN"/>
-          </a:p>
-        </p:txBody>
-      </p:sp>
-      <p:sp>
-        <p:nvSpPr>
-          <p:cNvPr id="8" name="Shape 6"/>
-          <p:cNvSpPr/>
-          <p:nvPr/>
-        </p:nvSpPr>
-        <p:spPr>
-          <a:xfrm>
-            <a:off x="502920" y="987552"/>
-            <a:ext cx="5029200" cy="274320"/>
-          </a:xfrm>
-          <a:prstGeom prst="rect">
-            <a:avLst/>
-          </a:prstGeom>
-          <a:solidFill>
-            <a:srgbClr val="1E293B"/>
-          </a:solidFill>
-          <a:ln/>
-        </p:spPr>
-        <p:txBody>
-          <a:bodyPr/>
-          <a:lstStyle/>
-          <a:p>
-            <a:endParaRPr lang="en-VN"/>
-          </a:p>
-        </p:txBody>
-      </p:sp>
-      <p:sp>
-        <p:nvSpPr>
-          <p:cNvPr id="9" name="Text 7"/>
-          <p:cNvSpPr/>
-          <p:nvPr/>
-        </p:nvSpPr>
-        <p:spPr>
-          <a:xfrm>
-            <a:off x="640080" y="987552"/>
-            <a:ext cx="4754880" cy="274320"/>
-          </a:xfrm>
-          <a:prstGeom prst="rect">
-            <a:avLst/>
-          </a:prstGeom>
-          <a:noFill/>
-          <a:ln/>
-        </p:spPr>
-        <p:txBody>
-          <a:bodyPr wrap="square" rtlCol="0" anchor="ctr"/>
-          <a:lstStyle/>
-          <a:p>
-            <a:pPr marL="0" indent="0">
-              <a:buNone/>
-            </a:pPr>
-            <a:r>
-              <a:rPr lang="en-US" sz="880" b="1" dirty="0">
-                <a:solidFill>
-                  <a:srgbClr val="60A5FA"/>
-                </a:solidFill>
-                <a:latin typeface="Consolas" pitchFamily="34" charset="0"/>
-                <a:ea typeface="Consolas" pitchFamily="34" charset="-122"/>
-                <a:cs typeface="Consolas" pitchFamily="34" charset="-120"/>
-              </a:rPr>
-              <a:t>🔴 LIVE DEMO  •  Streamlit Real-Time Fraud Shield  |  Latency &lt; 0.5ms</a:t>
-            </a:r>
-            <a:endParaRPr lang="en-US" sz="880" dirty="0"/>
-          </a:p>
-        </p:txBody>
-      </p:sp>
-      <p:sp>
-        <p:nvSpPr>
-          <p:cNvPr id="10" name="Shape 8"/>
-          <p:cNvSpPr/>
-          <p:nvPr/>
-        </p:nvSpPr>
-        <p:spPr>
-          <a:xfrm>
-            <a:off x="676656" y="1325880"/>
-            <a:ext cx="4681728" cy="2633472"/>
-          </a:xfrm>
-          <a:prstGeom prst="rect">
-            <a:avLst/>
-          </a:prstGeom>
-          <a:solidFill>
-            <a:srgbClr val="0B1120"/>
-          </a:solidFill>
-          <a:ln w="19050">
-            <a:solidFill>
-              <a:srgbClr val="38BDF8"/>
-            </a:solidFill>
-            <a:prstDash val="solid"/>
-          </a:ln>
-        </p:spPr>
-        <p:txBody>
-          <a:bodyPr/>
-          <a:lstStyle/>
-          <a:p>
-            <a:endParaRPr lang="en-VN"/>
-          </a:p>
-        </p:txBody>
-      </p:sp>
-      <p:sp>
-        <p:nvSpPr>
-          <p:cNvPr id="11" name="Text 9"/>
-          <p:cNvSpPr/>
-          <p:nvPr/>
-        </p:nvSpPr>
-        <p:spPr>
-          <a:xfrm>
-            <a:off x="676656" y="1645920"/>
-            <a:ext cx="4681728" cy="594360"/>
-          </a:xfrm>
-          <a:prstGeom prst="rect">
-            <a:avLst/>
-          </a:prstGeom>
-          <a:noFill/>
-          <a:ln/>
-        </p:spPr>
-        <p:txBody>
-          <a:bodyPr wrap="square" rtlCol="0" anchor="ctr"/>
-          <a:lstStyle/>
-          <a:p>
-            <a:pPr marL="0" indent="0" algn="ctr">
-              <a:buNone/>
-            </a:pPr>
-            <a:r>
-              <a:rPr lang="en-US" sz="3600" b="1" dirty="0">
-                <a:solidFill>
-                  <a:srgbClr val="38BDF8"/>
-                </a:solidFill>
-              </a:rPr>
-              <a:t>▶</a:t>
-            </a:r>
-            <a:endParaRPr lang="en-US" sz="3600" dirty="0"/>
-          </a:p>
-        </p:txBody>
-      </p:sp>
-      <p:sp>
-        <p:nvSpPr>
-          <p:cNvPr id="12" name="Text 10"/>
-          <p:cNvSpPr/>
-          <p:nvPr/>
-        </p:nvSpPr>
-        <p:spPr>
-          <a:xfrm>
-            <a:off x="813816" y="2286000"/>
-            <a:ext cx="4407408" cy="502920"/>
-          </a:xfrm>
-          <a:prstGeom prst="rect">
-            <a:avLst/>
-          </a:prstGeom>
-          <a:noFill/>
-          <a:ln/>
-        </p:spPr>
-        <p:txBody>
-          <a:bodyPr wrap="square" rtlCol="0" anchor="ctr"/>
-          <a:lstStyle/>
-          <a:p>
-            <a:pPr marL="0" indent="0" algn="ctr">
-              <a:lnSpc>
-                <a:spcPct val="120000"/>
-              </a:lnSpc>
-              <a:buNone/>
-            </a:pPr>
-            <a:r>
-              <a:rPr lang="en-US" sz="1000" b="1" dirty="0">
-                <a:solidFill>
-                  <a:srgbClr val="E2E8F0"/>
-                </a:solidFill>
-                <a:latin typeface="Segoe UI" pitchFamily="34" charset="0"/>
-                <a:ea typeface="Segoe UI" pitchFamily="34" charset="-122"/>
-                <a:cs typeface="Segoe UI" pitchFamily="34" charset="-120"/>
-              </a:rPr>
-              <a:t>[ KHUNG CHÈN VIDEO DEMO STREAMLIT ]</a:t>
-            </a:r>
-            <a:endParaRPr lang="en-US" sz="1000" dirty="0"/>
-          </a:p>
-          <a:p>
-            <a:pPr marL="0" indent="0" algn="ctr">
-              <a:lnSpc>
-                <a:spcPct val="120000"/>
-              </a:lnSpc>
-              <a:buNone/>
-            </a:pPr>
-            <a:r>
-              <a:rPr lang="en-US" sz="1000" b="1" dirty="0">
-                <a:solidFill>
-                  <a:srgbClr val="E2E8F0"/>
-                </a:solidFill>
-                <a:latin typeface="Segoe UI" pitchFamily="34" charset="0"/>
-                <a:ea typeface="Segoe UI" pitchFamily="34" charset="-122"/>
-                <a:cs typeface="Segoe UI" pitchFamily="34" charset="-120"/>
-              </a:rPr>
-              <a:t>(Tỷ lệ Chuẩn 16:9 — 1920×1080 / 1280×720 MP4/GIF)</a:t>
-            </a:r>
-            <a:endParaRPr lang="en-US" sz="1000" dirty="0"/>
-          </a:p>
-        </p:txBody>
-      </p:sp>
-      <p:sp>
-        <p:nvSpPr>
-          <p:cNvPr id="13" name="Text 11"/>
-          <p:cNvSpPr/>
-          <p:nvPr/>
-        </p:nvSpPr>
-        <p:spPr>
-          <a:xfrm>
-            <a:off x="813816" y="2862072"/>
-            <a:ext cx="4407408" cy="228600"/>
-          </a:xfrm>
-          <a:prstGeom prst="rect">
-            <a:avLst/>
-          </a:prstGeom>
-          <a:noFill/>
-          <a:ln/>
-        </p:spPr>
-        <p:txBody>
-          <a:bodyPr wrap="square" rtlCol="0" anchor="ctr"/>
-          <a:lstStyle/>
-          <a:p>
-            <a:pPr marL="0" indent="0" algn="ctr">
-              <a:buNone/>
-            </a:pPr>
-            <a:r>
-              <a:rPr lang="en-US" sz="850" i="1" dirty="0">
-                <a:solidFill>
-                  <a:srgbClr val="94A3B8"/>
-                </a:solidFill>
-                <a:latin typeface="Segoe UI" pitchFamily="34" charset="0"/>
-                <a:ea typeface="Segoe UI" pitchFamily="34" charset="-122"/>
-                <a:cs typeface="Segoe UI" pitchFamily="34" charset="-120"/>
-              </a:rPr>
-              <a:t>Giao diện phân tích rủi ro thời gian thực &amp; Chấm điểm Batch CSV</a:t>
-            </a:r>
-            <a:endParaRPr lang="en-US" sz="850" dirty="0"/>
-          </a:p>
-        </p:txBody>
-      </p:sp>
-      <p:sp>
-        <p:nvSpPr>
-          <p:cNvPr id="14" name="Shape 12"/>
-          <p:cNvSpPr/>
-          <p:nvPr/>
-        </p:nvSpPr>
-        <p:spPr>
-          <a:xfrm>
-            <a:off x="2011680" y="3291840"/>
-            <a:ext cx="2011680" cy="292608"/>
-          </a:xfrm>
-          <a:prstGeom prst="roundRect">
-            <a:avLst>
-              <a:gd name="adj" fmla="val 25000"/>
-            </a:avLst>
-          </a:prstGeom>
-          <a:solidFill>
-            <a:srgbClr val="1E293B"/>
-          </a:solidFill>
-          <a:ln w="10160">
-            <a:solidFill>
-              <a:srgbClr val="64748B"/>
-            </a:solidFill>
-            <a:prstDash val="solid"/>
-          </a:ln>
-        </p:spPr>
-        <p:txBody>
-          <a:bodyPr/>
-          <a:lstStyle/>
-          <a:p>
-            <a:endParaRPr lang="en-VN"/>
-          </a:p>
-        </p:txBody>
-      </p:sp>
-      <p:sp>
-        <p:nvSpPr>
-          <p:cNvPr id="15" name="Text 13"/>
-          <p:cNvSpPr/>
-          <p:nvPr/>
-        </p:nvSpPr>
-        <p:spPr>
-          <a:xfrm>
-            <a:off x="2011680" y="3291840"/>
-            <a:ext cx="2011680" cy="292608"/>
-          </a:xfrm>
-          <a:prstGeom prst="rect">
-            <a:avLst/>
-          </a:prstGeom>
-          <a:noFill/>
-          <a:ln/>
-        </p:spPr>
-        <p:txBody>
-          <a:bodyPr wrap="square" rtlCol="0" anchor="ctr"/>
-          <a:lstStyle/>
-          <a:p>
-            <a:pPr marL="0" indent="0" algn="ctr">
-              <a:buNone/>
-            </a:pPr>
-            <a:r>
-              <a:rPr lang="en-US" sz="820" b="1" dirty="0">
-                <a:solidFill>
-                  <a:srgbClr val="38BDF8"/>
-                </a:solidFill>
-                <a:latin typeface="Consolas" pitchFamily="34" charset="0"/>
-                <a:ea typeface="Consolas" pitchFamily="34" charset="-122"/>
-                <a:cs typeface="Consolas" pitchFamily="34" charset="-120"/>
-              </a:rPr>
-              <a:t>HD 1080p  •  TỶ LỆ 16:9</a:t>
-            </a:r>
-            <a:endParaRPr lang="en-US" sz="820" dirty="0"/>
-          </a:p>
-        </p:txBody>
-      </p:sp>
-      <p:sp>
-        <p:nvSpPr>
-          <p:cNvPr id="16" name="Shape 14"/>
-          <p:cNvSpPr/>
-          <p:nvPr/>
-        </p:nvSpPr>
-        <p:spPr>
-          <a:xfrm>
-            <a:off x="640080" y="4023360"/>
-            <a:ext cx="4754880" cy="457200"/>
-          </a:xfrm>
-          <a:prstGeom prst="rect">
-            <a:avLst/>
-          </a:prstGeom>
-          <a:solidFill>
-            <a:srgbClr val="131C31"/>
-          </a:solidFill>
-          <a:ln w="12700">
-            <a:solidFill>
-              <a:srgbClr val="1E293B"/>
-            </a:solidFill>
-            <a:prstDash val="solid"/>
-          </a:ln>
-        </p:spPr>
-        <p:txBody>
-          <a:bodyPr/>
-          <a:lstStyle/>
-          <a:p>
-            <a:endParaRPr lang="en-VN"/>
-          </a:p>
-        </p:txBody>
-      </p:sp>
-      <p:sp>
-        <p:nvSpPr>
-          <p:cNvPr id="17" name="Text 15"/>
-          <p:cNvSpPr/>
-          <p:nvPr/>
-        </p:nvSpPr>
-        <p:spPr>
-          <a:xfrm>
-            <a:off x="685800" y="4023360"/>
-            <a:ext cx="4663440" cy="457200"/>
-          </a:xfrm>
-          <a:prstGeom prst="rect">
-            <a:avLst/>
-          </a:prstGeom>
-          <a:noFill/>
-          <a:ln/>
-        </p:spPr>
-        <p:txBody>
-          <a:bodyPr wrap="square" rtlCol="0" anchor="ctr"/>
-          <a:lstStyle/>
-          <a:p>
-            <a:pPr marL="0" indent="0" algn="ctr">
-              <a:buNone/>
-            </a:pPr>
-            <a:r>
-              <a:rPr lang="en-US" sz="780" dirty="0">
-                <a:solidFill>
-                  <a:srgbClr val="CBD5E1"/>
-                </a:solidFill>
-                <a:latin typeface="Consolas" pitchFamily="34" charset="0"/>
-                <a:ea typeface="Consolas" pitchFamily="34" charset="-122"/>
-                <a:cs typeface="Consolas" pitchFamily="34" charset="-120"/>
-              </a:rPr>
-              <a:t>3 Kịch bản: 1. Bình thường (Safe &lt; 0.1%)  |  2. Rút cạn số dư (Fraud &gt; 99.8%)  |  3. Batch Audit CSV</a:t>
-            </a:r>
-            <a:endParaRPr lang="en-US" sz="780" dirty="0"/>
-          </a:p>
-        </p:txBody>
-      </p:sp>
-      <p:sp>
-        <p:nvSpPr>
           <p:cNvPr id="18" name="Shape 16"/>
           <p:cNvSpPr/>
           <p:nvPr/>
@@ -19191,6 +18756,30 @@
           </a:p>
         </p:txBody>
       </p:sp>
+      <p:pic>
+        <p:nvPicPr>
+          <p:cNvPr id="24" name="Picture 23"/>
+          <p:cNvPicPr>
+            <a:picLocks noChangeAspect="1"/>
+          </p:cNvPicPr>
+          <p:nvPr/>
+        </p:nvPicPr>
+        <p:blipFill>
+          <a:blip r:embed="rId3"/>
+          <a:stretch>
+            <a:fillRect/>
+          </a:stretch>
+        </p:blipFill>
+        <p:spPr>
+          <a:xfrm>
+            <a:off x="502920" y="1563840"/>
+            <a:ext cx="5257800" cy="2354363"/>
+          </a:xfrm>
+          <a:prstGeom prst="rect">
+            <a:avLst/>
+          </a:prstGeom>
+        </p:spPr>
+      </p:pic>
     </p:spTree>
   </p:cSld>
   <p:clrMapOvr>
@@ -19703,7 +19292,7 @@
               <a:t> </a:t>
             </a:r>
             <a:r>
-              <a:rPr lang="en-US" sz="930" i="1" smtClean="0">
+              <a:rPr lang="en-US" sz="930" i="1" dirty="0" err="1" smtClean="0">
                 <a:solidFill>
                   <a:srgbClr val="FCD34D"/>
                 </a:solidFill>
@@ -19714,7 +19303,7 @@
               <a:t>bạn</a:t>
             </a:r>
             <a:r>
-              <a:rPr lang="en-US" sz="930" i="1" smtClean="0">
+              <a:rPr lang="en-US" sz="930" i="1" dirty="0" smtClean="0">
                 <a:solidFill>
                   <a:srgbClr val="FCD34D"/>
                 </a:solidFill>

--- a/draft/fraud-detection/slide/[Nhom9]_Slide_FraudDetection_Academic_VN.pptx
+++ b/draft/fraud-detection/slide/[Nhom9]_Slide_FraudDetection_Academic_VN.pptx
@@ -3824,7 +3824,7 @@
                   <a:srgbClr val="FFFFFF"/>
                 </a:solidFill>
               </a:rPr>
-              <a:t>B.2: Feature Eng.</a:t>
+              <a:t>B.2: Stratified Split</a:t>
             </a:r>
             <a:endParaRPr lang="en-US" sz="850" dirty="0"/>
           </a:p>
@@ -3865,7 +3865,7 @@
                   <a:srgbClr val="1F2937"/>
                 </a:solidFill>
               </a:rPr>
-              <a:t>Tính toán 14</a:t>
+              <a:t>Phân chia chuẩn</a:t>
             </a:r>
             <a:endParaRPr lang="en-US" sz="880" dirty="0"/>
           </a:p>
@@ -3882,7 +3882,7 @@
                   <a:srgbClr val="1F2937"/>
                 </a:solidFill>
               </a:rPr>
-              <a:t>engineered</a:t>
+              <a:t>80% Train /</a:t>
             </a:r>
             <a:endParaRPr lang="en-US" sz="880" dirty="0"/>
           </a:p>
@@ -3899,7 +3899,7 @@
                   <a:srgbClr val="1F2937"/>
                 </a:solidFill>
               </a:rPr>
-              <a:t>domain features</a:t>
+              <a:t>20% Test</a:t>
             </a:r>
             <a:endParaRPr lang="en-US" sz="880" dirty="0"/>
           </a:p>
@@ -4016,7 +4016,7 @@
                   <a:srgbClr val="FFFFFF"/>
                 </a:solidFill>
               </a:rPr>
-              <a:t>B.3: Stratified Split</a:t>
+              <a:t>B.3: Feature Eng.</a:t>
             </a:r>
             <a:endParaRPr lang="en-US" sz="850" dirty="0"/>
           </a:p>
@@ -4057,7 +4057,7 @@
                   <a:srgbClr val="1F2937"/>
                 </a:solidFill>
               </a:rPr>
-              <a:t>Phân chia chuẩn</a:t>
+              <a:t>7 đặc trưng dẫn xuất</a:t>
             </a:r>
             <a:endParaRPr lang="en-US" sz="880" dirty="0"/>
           </a:p>
@@ -4074,7 +4074,7 @@
                   <a:srgbClr val="1F2937"/>
                 </a:solidFill>
               </a:rPr>
-              <a:t>80% Train /</a:t>
+              <a:t>→ 14 đặc trưng</a:t>
             </a:r>
             <a:endParaRPr lang="en-US" sz="880" dirty="0"/>
           </a:p>
@@ -4091,7 +4091,7 @@
                   <a:srgbClr val="1F2937"/>
                 </a:solidFill>
               </a:rPr>
-              <a:t>20% Test</a:t>
+              <a:t>Scaler fit Train</a:t>
             </a:r>
             <a:endParaRPr lang="en-US" sz="880" dirty="0"/>
           </a:p>
@@ -4249,7 +4249,7 @@
                   <a:srgbClr val="1F2937"/>
                 </a:solidFill>
               </a:rPr>
-              <a:t>SMOTE / ADASYN</a:t>
+              <a:t>SMOTENC / ADASYN</a:t>
             </a:r>
             <a:endParaRPr lang="en-US" sz="880" dirty="0"/>
           </a:p>
@@ -4779,7 +4779,7 @@
                 <a:ea typeface="Segoe UI" pitchFamily="34" charset="-122"/>
                 <a:cs typeface="Segoe UI" pitchFamily="34" charset="-120"/>
               </a:rPr>
-              <a:t>Phân tách Tập Dữ liệu Tuyệt đối: Phân chia Stratified Train/Test (80/20) được thực hiện TRƯỚC BẤT KỲ bước resampling hay chuẩn hóa nào.</a:t>
+              <a:t>Không rò rỉ sang tập Test: Stratified Split 80/20 thực hiện TRƯỚC resampling và chuẩn hóa; scaler chỉ fit trên Train.</a:t>
             </a:r>
             <a:endParaRPr lang="en-US" sz="930" dirty="0"/>
           </a:p>
@@ -4803,7 +4803,7 @@
                 <a:ea typeface="Segoe UI" pitchFamily="34" charset="-122"/>
                 <a:cs typeface="Segoe UI" pitchFamily="34" charset="-120"/>
               </a:rPr>
-              <a:t>Resampling Phân lập: SMOTE / ADASYN tuyệt đối CHỈ áp dụng trên tập huấn luyện (Train fold). Tập Test hoàn toàn giữ nguyên phân bố tự nhiên (0.13% fraud).</a:t>
+              <a:t>Resampling chỉ trên Train (SMOTENC / ADASYN). Tập Test giữ nguyên phân bố sau downsample (4.11% fraud, 1,643 ca), không chứa mẫu nhân tạo.</a:t>
             </a:r>
             <a:endParaRPr lang="en-US" sz="930" dirty="0"/>
           </a:p>
@@ -4827,7 +4827,7 @@
                 <a:ea typeface="Segoe UI" pitchFamily="34" charset="-122"/>
                 <a:cs typeface="Segoe UI" pitchFamily="34" charset="-120"/>
               </a:rPr>
-              <a:t>Chuẩn hóa StandardScaler: Bộ biến đổi tỷ lệ chỉ được fit trên tập Train và transform mù trên tập Test, không rò rỉ bất kỳ thông tin trung bình/độ lệch chuẩn nào.</a:t>
+              <a:t>Giới hạn: oversampling chưa nằm trong từng fold CV nên điểm CV có thể lạc quan (báo cáo mục 4.8).</a:t>
             </a:r>
             <a:endParaRPr lang="en-US" sz="930" dirty="0"/>
           </a:p>
@@ -4851,7 +4851,7 @@
                 <a:ea typeface="Segoe UI" pitchFamily="34" charset="-122"/>
                 <a:cs typeface="Segoe UI" pitchFamily="34" charset="-120"/>
               </a:rPr>
-              <a:t>Không tối ưu Hyperparameter trên Test Set: Toàn bộ quá trình chọn ngưỡng và tune tham số đều tuân thủ Cross-Validation nội bộ trên tập Train.</a:t>
+              <a:t>Không tối ưu hyperparameter trên Test: chọn ngưỡng và tune tham số bằng Cross-Validation nội bộ trên tập Train.</a:t>
             </a:r>
             <a:endParaRPr lang="en-US" sz="930" dirty="0"/>
           </a:p>
@@ -5176,48 +5176,33 @@
           </a:ln>
         </p:spPr>
       </p:sp>
-      <p:sp>
-        <p:nvSpPr>
-          <p:cNvPr id="11" name="Text 9"/>
-          <p:cNvSpPr/>
-          <p:nvPr/>
-        </p:nvSpPr>
-        <p:spPr>
-          <a:xfrm>
-            <a:off x="685800" y="1463040"/>
-            <a:ext cx="3589020" cy="274320"/>
-          </a:xfrm>
-          <a:prstGeom prst="rect">
-            <a:avLst/>
-          </a:prstGeom>
-          <a:noFill/>
-          <a:ln/>
-        </p:spPr>
-        <p:txBody>
-          <a:bodyPr wrap="square" rtlCol="0" anchor="ctr"/>
-          <a:lstStyle/>
-          <a:p>
-            <a:pPr indent="0" marL="0">
-              <a:buNone/>
-            </a:pPr>
-            <a:r>
-              <a:rPr lang="en-US" sz="950" b="1" dirty="0">
-                <a:solidFill>
-                  <a:srgbClr val="2563EB"/>
-                </a:solidFill>
-                <a:latin typeface="Consolas" pitchFamily="34" charset="0"/>
-                <a:ea typeface="Consolas" pitchFamily="34" charset="-122"/>
-                <a:cs typeface="Consolas" pitchFamily="34" charset="-120"/>
-              </a:rPr>
-              <a:t>Gini(D) = 1 - ∑ (p_i)²</a:t>
-            </a:r>
-            <a:endParaRPr lang="en-US" sz="950" dirty="0"/>
-          </a:p>
-        </p:txBody>
-      </p:sp>
-      <p:sp>
-        <p:nvSpPr>
-          <p:cNvPr id="12" name="Shape 10"/>
+      <p:pic>
+        <p:nvPicPr>
+          <p:cNvPr id="11" name="Image 0" descr="D:\Trí tuệ nhân tạo\HK2\Trí tuệ nhân tạo\CS106-Team09-Fraud-Detection\draft\fraud-detection\slide\slide_assets\formula_rf_gini.png">    </p:cNvPr>
+          <p:cNvPicPr>
+            <a:picLocks noChangeAspect="1"/>
+          </p:cNvPicPr>
+          <p:nvPr/>
+        </p:nvPicPr>
+        <p:blipFill>
+          <a:blip r:embed="rId1"/>
+          <a:stretch>
+            <a:fillRect/>
+          </a:stretch>
+        </p:blipFill>
+        <p:spPr>
+          <a:xfrm>
+            <a:off x="905256" y="1463040"/>
+            <a:ext cx="2770632" cy="301752"/>
+          </a:xfrm>
+          <a:prstGeom prst="rect">
+            <a:avLst/>
+          </a:prstGeom>
+        </p:spPr>
+      </p:pic>
+      <p:sp>
+        <p:nvSpPr>
+          <p:cNvPr id="12" name="Shape 9"/>
           <p:cNvSpPr/>
           <p:nvPr/>
         </p:nvSpPr>
@@ -5242,7 +5227,7 @@
       </p:sp>
       <p:sp>
         <p:nvSpPr>
-          <p:cNvPr id="13" name="Text 11"/>
+          <p:cNvPr id="13" name="Text 10"/>
           <p:cNvSpPr/>
           <p:nvPr/>
         </p:nvSpPr>
@@ -5304,7 +5289,7 @@
       </p:sp>
       <p:sp>
         <p:nvSpPr>
-          <p:cNvPr id="14" name="Text 12"/>
+          <p:cNvPr id="14" name="Text 11"/>
           <p:cNvSpPr/>
           <p:nvPr/>
         </p:nvSpPr>
@@ -5417,7 +5402,7 @@
       </p:sp>
       <p:sp>
         <p:nvSpPr>
-          <p:cNvPr id="15" name="Shape 13"/>
+          <p:cNvPr id="15" name="Shape 12"/>
           <p:cNvSpPr/>
           <p:nvPr/>
         </p:nvSpPr>
@@ -5442,7 +5427,7 @@
       </p:sp>
       <p:sp>
         <p:nvSpPr>
-          <p:cNvPr id="16" name="Shape 14"/>
+          <p:cNvPr id="16" name="Shape 13"/>
           <p:cNvSpPr/>
           <p:nvPr/>
         </p:nvSpPr>
@@ -5462,7 +5447,7 @@
       </p:sp>
       <p:sp>
         <p:nvSpPr>
-          <p:cNvPr id="17" name="Text 15"/>
+          <p:cNvPr id="17" name="Text 14"/>
           <p:cNvSpPr/>
           <p:nvPr/>
         </p:nvSpPr>
@@ -5498,7 +5483,7 @@
       </p:sp>
       <p:sp>
         <p:nvSpPr>
-          <p:cNvPr id="18" name="Shape 16"/>
+          <p:cNvPr id="18" name="Shape 15"/>
           <p:cNvSpPr/>
           <p:nvPr/>
         </p:nvSpPr>
@@ -5521,48 +5506,33 @@
           </a:ln>
         </p:spPr>
       </p:sp>
-      <p:sp>
-        <p:nvSpPr>
-          <p:cNvPr id="19" name="Text 17"/>
-          <p:cNvSpPr/>
-          <p:nvPr/>
-        </p:nvSpPr>
-        <p:spPr>
-          <a:xfrm>
-            <a:off x="4869180" y="1463040"/>
-            <a:ext cx="3589020" cy="274320"/>
-          </a:xfrm>
-          <a:prstGeom prst="rect">
-            <a:avLst/>
-          </a:prstGeom>
-          <a:noFill/>
-          <a:ln/>
-        </p:spPr>
-        <p:txBody>
-          <a:bodyPr wrap="square" rtlCol="0" anchor="ctr"/>
-          <a:lstStyle/>
-          <a:p>
-            <a:pPr indent="0" marL="0">
-              <a:buNone/>
-            </a:pPr>
-            <a:r>
-              <a:rPr lang="en-US" sz="900" b="1" dirty="0">
-                <a:solidFill>
-                  <a:srgbClr val="2563EB"/>
-                </a:solidFill>
-                <a:latin typeface="Consolas" pitchFamily="34" charset="0"/>
-                <a:ea typeface="Consolas" pitchFamily="34" charset="-122"/>
-                <a:cs typeface="Consolas" pitchFamily="34" charset="-120"/>
-              </a:rPr>
-              <a:t>Obj^(t) ≈ ∑ [ g_i · f_t + ½ h_i · f_t² ] + Ω(f_t)</a:t>
-            </a:r>
-            <a:endParaRPr lang="en-US" sz="900" dirty="0"/>
-          </a:p>
-        </p:txBody>
-      </p:sp>
-      <p:sp>
-        <p:nvSpPr>
-          <p:cNvPr id="20" name="Shape 18"/>
+      <p:pic>
+        <p:nvPicPr>
+          <p:cNvPr id="19" name="Image 1" descr="D:\Trí tuệ nhân tạo\HK2\Trí tuệ nhân tạo\CS106-Team09-Fraud-Detection\draft\fraud-detection\slide\slide_assets\formula_xgb_objective.png">    </p:cNvPr>
+          <p:cNvPicPr>
+            <a:picLocks noChangeAspect="1"/>
+          </p:cNvPicPr>
+          <p:nvPr/>
+        </p:nvPicPr>
+        <p:blipFill>
+          <a:blip r:embed="rId2"/>
+          <a:stretch>
+            <a:fillRect/>
+          </a:stretch>
+        </p:blipFill>
+        <p:spPr>
+          <a:xfrm>
+            <a:off x="4849978" y="1463040"/>
+            <a:ext cx="3281782" cy="274320"/>
+          </a:xfrm>
+          <a:prstGeom prst="rect">
+            <a:avLst/>
+          </a:prstGeom>
+        </p:spPr>
+      </p:pic>
+      <p:sp>
+        <p:nvSpPr>
+          <p:cNvPr id="20" name="Shape 16"/>
           <p:cNvSpPr/>
           <p:nvPr/>
         </p:nvSpPr>
@@ -5587,7 +5557,7 @@
       </p:sp>
       <p:sp>
         <p:nvSpPr>
-          <p:cNvPr id="21" name="Text 19"/>
+          <p:cNvPr id="21" name="Text 17"/>
           <p:cNvSpPr/>
           <p:nvPr/>
         </p:nvSpPr>
@@ -5649,7 +5619,7 @@
       </p:sp>
       <p:sp>
         <p:nvSpPr>
-          <p:cNvPr id="22" name="Text 20"/>
+          <p:cNvPr id="22" name="Text 18"/>
           <p:cNvSpPr/>
           <p:nvPr/>
         </p:nvSpPr>
@@ -5725,7 +5695,7 @@
                   <a:srgbClr val="1F2937"/>
                 </a:solidFill>
               </a:rPr>
-              <a:t>F1-Score đạt 99.63% tương đương RF, nhưng tốc độ huấn luyện nhanh gấp khoảng 28 lần (~42s).
+              <a:t>F1-Score đạt 99.63% tương đương RF, nhưng tốc độ huấn luyện nhanh hơn ~20 lần (57.94s; xgb_smote_summary).
 </a:t>
             </a:r>
             <a:pPr indent="0" marL="0">
@@ -5754,7 +5724,7 @@
                   <a:srgbClr val="1F2937"/>
                 </a:solidFill>
               </a:rPr>
-              <a:t>Độ trễ suy luận &lt; 0.5ms, lý tưởng cho cổng thanh toán real-time.</a:t>
+              <a:t>Độ trễ suy luận cỡ nửa mili-giây (mô hình thuần, 1 giao dịch, CPU).</a:t>
             </a:r>
             <a:endParaRPr lang="en-US" sz="900" dirty="0"/>
           </a:p>
@@ -6106,8 +6076,8 @@
         </p:nvSpPr>
         <p:spPr>
           <a:xfrm>
-            <a:off x="640080" y="1645920"/>
-            <a:ext cx="4114800" cy="310896"/>
+            <a:off x="640080" y="1627632"/>
+            <a:ext cx="4114800" cy="402336"/>
           </a:xfrm>
           <a:prstGeom prst="rect">
             <a:avLst/>
@@ -6123,48 +6093,33 @@
           </a:ln>
         </p:spPr>
       </p:sp>
-      <p:sp>
-        <p:nvSpPr>
-          <p:cNvPr id="12" name="Text 10"/>
-          <p:cNvSpPr/>
-          <p:nvPr/>
-        </p:nvSpPr>
-        <p:spPr>
-          <a:xfrm>
-            <a:off x="685800" y="1673352"/>
-            <a:ext cx="4023360" cy="256032"/>
-          </a:xfrm>
-          <a:prstGeom prst="rect">
-            <a:avLst/>
-          </a:prstGeom>
-          <a:noFill/>
-          <a:ln/>
-        </p:spPr>
-        <p:txBody>
-          <a:bodyPr wrap="square" rtlCol="0" anchor="ctr"/>
-          <a:lstStyle/>
-          <a:p>
-            <a:pPr indent="0" marL="0">
-              <a:buNone/>
-            </a:pPr>
-            <a:r>
-              <a:rPr lang="en-US" sz="900" b="1" dirty="0">
-                <a:solidFill>
-                  <a:srgbClr val="DC2626"/>
-                </a:solidFill>
-                <a:latin typeface="Consolas" pitchFamily="34" charset="0"/>
-                <a:ea typeface="Consolas" pitchFamily="34" charset="-122"/>
-                <a:cs typeface="Consolas" pitchFamily="34" charset="-120"/>
-              </a:rPr>
-              <a:t>L_rec(x, x_recon) = (1 / d) · ∑ (x_j - x_recon_j)²</a:t>
-            </a:r>
-            <a:endParaRPr lang="en-US" sz="900" dirty="0"/>
-          </a:p>
-        </p:txBody>
-      </p:sp>
-      <p:sp>
-        <p:nvSpPr>
-          <p:cNvPr id="13" name="Text 11"/>
+      <p:pic>
+        <p:nvPicPr>
+          <p:cNvPr id="12" name="Image 0" descr="D:\Trí tuệ nhân tạo\HK2\Trí tuệ nhân tạo\CS106-Team09-Fraud-Detection\draft\fraud-detection\slide\slide_assets\formula_ae_reconstruction.png">    </p:cNvPr>
+          <p:cNvPicPr>
+            <a:picLocks noChangeAspect="1"/>
+          </p:cNvPicPr>
+          <p:nvPr/>
+        </p:nvPicPr>
+        <p:blipFill>
+          <a:blip r:embed="rId1"/>
+          <a:stretch>
+            <a:fillRect/>
+          </a:stretch>
+        </p:blipFill>
+        <p:spPr>
+          <a:xfrm>
+            <a:off x="1028700" y="1633118"/>
+            <a:ext cx="2251253" cy="391363"/>
+          </a:xfrm>
+          <a:prstGeom prst="rect">
+            <a:avLst/>
+          </a:prstGeom>
+        </p:spPr>
+      </p:pic>
+      <p:sp>
+        <p:nvSpPr>
+          <p:cNvPr id="13" name="Text 10"/>
           <p:cNvSpPr/>
           <p:nvPr/>
         </p:nvSpPr>
@@ -6280,7 +6235,7 @@
       </p:sp>
       <p:sp>
         <p:nvSpPr>
-          <p:cNvPr id="14" name="Shape 12"/>
+          <p:cNvPr id="14" name="Shape 11"/>
           <p:cNvSpPr/>
           <p:nvPr/>
         </p:nvSpPr>
@@ -6305,7 +6260,7 @@
       </p:sp>
       <p:sp>
         <p:nvSpPr>
-          <p:cNvPr id="15" name="Text 13"/>
+          <p:cNvPr id="15" name="Text 12"/>
           <p:cNvSpPr/>
           <p:nvPr/>
         </p:nvSpPr>
@@ -7611,7 +7566,7 @@
       </p:graphicFrame>
       <p:sp>
         <p:nvSpPr>
-          <p:cNvPr id="17" name="Shape 14"/>
+          <p:cNvPr id="17" name="Shape 13"/>
           <p:cNvSpPr/>
           <p:nvPr/>
         </p:nvSpPr>
@@ -7636,7 +7591,7 @@
       </p:sp>
       <p:sp>
         <p:nvSpPr>
-          <p:cNvPr id="18" name="Text 15"/>
+          <p:cNvPr id="18" name="Text 14"/>
           <p:cNvSpPr/>
           <p:nvPr/>
         </p:nvSpPr>
@@ -7675,7 +7630,7 @@
       </p:sp>
       <p:sp>
         <p:nvSpPr>
-          <p:cNvPr id="19" name="Text 16"/>
+          <p:cNvPr id="19" name="Text 15"/>
           <p:cNvSpPr/>
           <p:nvPr/>
         </p:nvSpPr>
@@ -7739,7 +7694,7 @@
                 <a:ea typeface="Segoe UI" pitchFamily="34" charset="-122"/>
                 <a:cs typeface="Segoe UI" pitchFamily="34" charset="-120"/>
               </a:rPr>
-              <a:t>Không phụ thuộc nhãn: Phát hiện bất thường theo nguyên lý sai số tái tạo (Reconstruction MSE).</a:t>
+              <a:t>Không phụ thuộc nhãn khi train: Phát hiện bất thường theo sai số tái tạo (nhãn chỉ dùng để chọn ngưỡng).</a:t>
             </a:r>
             <a:endParaRPr lang="en-US" sz="880" dirty="0"/>
           </a:p>
@@ -9948,7 +9903,7 @@
                           <a:ea typeface="Segoe UI" pitchFamily="34" charset="-122"/>
                           <a:cs typeface="Segoe UI" pitchFamily="34" charset="-120"/>
                         </a:rPr>
-                        <a:t>41.7s</a:t>
+                        <a:t>57.94s</a:t>
                       </a:r>
                       <a:endParaRPr lang="en-US" sz="820" dirty="0">
                         <a:latin typeface="Segoe UI" charset="0"/>
@@ -10358,7 +10313,7 @@
                           <a:ea typeface="Segoe UI" pitchFamily="34" charset="-122"/>
                           <a:cs typeface="Segoe UI" pitchFamily="34" charset="-120"/>
                         </a:rPr>
-                        <a:t>43.2s</a:t>
+                        <a:t>45.48s</a:t>
                       </a:r>
                       <a:endParaRPr lang="en-US" sz="820" dirty="0">
                         <a:latin typeface="Segoe UI" charset="0"/>
@@ -10428,7 +10383,7 @@
                           <a:ea typeface="Segoe UI" pitchFamily="34" charset="-122"/>
                           <a:cs typeface="Segoe UI" pitchFamily="34" charset="-120"/>
                         </a:rPr>
-                        <a:t>Autoencoder (Zero-Day)</a:t>
+                        <a:t>Autoencoder (Unsupervised)</a:t>
                       </a:r>
                       <a:endParaRPr lang="en-US" sz="820" dirty="0">
                         <a:latin typeface="Segoe UI" charset="0"/>
@@ -10768,7 +10723,7 @@
                           <a:ea typeface="Segoe UI" pitchFamily="34" charset="-122"/>
                           <a:cs typeface="Segoe UI" pitchFamily="34" charset="-120"/>
                         </a:rPr>
-                        <a:t>68.4s</a:t>
+                        <a:t>—</a:t>
                       </a:r>
                       <a:endParaRPr lang="en-US" sz="820" dirty="0">
                         <a:latin typeface="Segoe UI" charset="0"/>
@@ -10954,7 +10909,7 @@
                 <a:ea typeface="Segoe UI" pitchFamily="34" charset="-122"/>
                 <a:cs typeface="Segoe UI" pitchFamily="34" charset="-120"/>
               </a:rPr>
-              <a:t>XGBoost + SMOTE đạt hiệu năng tương đương (F1 = 99.63%) nhưng tốc độ huấn luyện nhanh gấp 28.5 lần.</a:t>
+              <a:t>XGBoost + SMOTE đạt hiệu năng tương đương (F1 = 99.63%) nhưng tốc độ huấn luyện nhanh hơn ~20 lần (57.94s).</a:t>
             </a:r>
             <a:endParaRPr lang="en-US" sz="860" dirty="0"/>
           </a:p>
@@ -10978,7 +10933,7 @@
                 <a:ea typeface="Segoe UI" pitchFamily="34" charset="-122"/>
                 <a:cs typeface="Segoe UI" pitchFamily="34" charset="-120"/>
               </a:rPr>
-              <a:t>Autoencoder bắt được 75.23% gian lận hoàn toàn không cần nhãn giám sát, tạo lớp phòng thủ Zero-Day vững chắc.</a:t>
+              <a:t>Autoencoder bắt được 75.23% gian lận hoàn toàn không cần nhãn giám sát, tạo lớp phòng thủ phát hiện bất thường thứ cấp.</a:t>
             </a:r>
             <a:endParaRPr lang="en-US" sz="860" dirty="0"/>
           </a:p>
@@ -11138,7 +11093,7 @@
                 <a:ea typeface="Segoe UI" pitchFamily="34" charset="-122"/>
                 <a:cs typeface="Segoe UI" pitchFamily="34" charset="-120"/>
               </a:rPr>
-              <a:t>Autoencoder hy sinh Precision (38.2%) để duy trì Recall cao (75.2%) nhằm phòng ngừa triệt để tổn thất tài chính.</a:t>
+              <a:t>Autoencoder hy sinh Precision (38.2%) để duy trì Recall cao (75.2%) nhằm giảm bỏ sót.</a:t>
             </a:r>
             <a:endParaRPr lang="en-US" sz="840" dirty="0"/>
           </a:p>
@@ -11725,7 +11680,7 @@
                   <a:srgbClr val="1F2937"/>
                 </a:solidFill>
               </a:rPr>
-              <a:t>• Độ trễ suy luận &lt; 0.5ms — cấu hình tối ưu nhất cho môi trường thực tế.</a:t>
+              <a:t>• Độ trễ cỡ nửa mili-giây (mô hình thuần, 1 giao dịch, CPU).</a:t>
             </a:r>
             <a:endParaRPr lang="en-US" sz="820" dirty="0"/>
           </a:p>
@@ -11786,7 +11741,7 @@
                   <a:srgbClr val="DC2626"/>
                 </a:solidFill>
               </a:rPr>
-              <a:t>Deep Autoencoder (Zero-Day)</a:t>
+              <a:t>Deep Autoencoder (Unsupervised)</a:t>
             </a:r>
             <a:endParaRPr lang="en-US" sz="950" dirty="0"/>
           </a:p>
@@ -14073,7 +14028,7 @@
                 <a:ea typeface="Segoe UI" pitchFamily="34" charset="-122"/>
                 <a:cs typeface="Segoe UI" pitchFamily="34" charset="-120"/>
               </a:rPr>
-              <a:t>Giao dịch gian lận (Đỏ) có sai số tái tạo trải dài sang phải do cấu trúc dòng tiền dị biệt không thể nén qua bottleneck.</a:t>
+              <a:t>Giao dịch gian lận (Đỏ) có sai số tái tạo trải dài sang phải; trục x cắt ở 0.18 nên 37.6% ca gian lận nằm ngoài hình.</a:t>
             </a:r>
             <a:endParaRPr lang="en-US" sz="830" dirty="0"/>
           </a:p>
@@ -15911,7 +15866,7 @@
                 <a:ea typeface="Segoe UI" pitchFamily="34" charset="-122"/>
                 <a:cs typeface="Segoe UI" pitchFamily="34" charset="-120"/>
               </a:rPr>
-              <a:t>Kiến trúc Dashboard Streamlit Real-Time Inference &amp; Batch CSV Scoring</a:t>
+              <a:t>Dashboard Streamlit suy luận XGBoost &amp; nhập dữ liệu mẫu CSV/JSON (tối đa 50 mẫu)</a:t>
             </a:r>
             <a:endParaRPr lang="en-US" sz="1100" dirty="0"/>
           </a:p>
@@ -16396,7 +16351,7 @@
                   <a:srgbClr val="4B5563"/>
                 </a:solidFill>
               </a:rPr>
-              <a:t>Khu biệt loại giao dịch, dấu vết rút cạn số dư và 14 engineered features.</a:t>
+              <a:t>Khu biệt loại giao dịch, dấu vết rút cạn số dư và 14 đặc trưng (7 dẫn xuất).</a:t>
             </a:r>
             <a:endParaRPr lang="en-US" sz="1250" dirty="0"/>
           </a:p>
@@ -16978,360 +16933,33 @@
           </a:ln>
         </p:spPr>
       </p:sp>
-      <p:sp>
-        <p:nvSpPr>
-          <p:cNvPr id="8" name="Shape 6"/>
-          <p:cNvSpPr/>
-          <p:nvPr/>
-        </p:nvSpPr>
-        <p:spPr>
-          <a:xfrm>
-            <a:off x="502920" y="987552"/>
-            <a:ext cx="5029200" cy="274320"/>
-          </a:xfrm>
-          <a:prstGeom prst="rect">
-            <a:avLst/>
-          </a:prstGeom>
-          <a:solidFill>
-            <a:srgbClr val="1E293B"/>
-          </a:solidFill>
-          <a:ln/>
-        </p:spPr>
-      </p:sp>
-      <p:sp>
-        <p:nvSpPr>
-          <p:cNvPr id="9" name="Text 7"/>
-          <p:cNvSpPr/>
-          <p:nvPr/>
-        </p:nvSpPr>
-        <p:spPr>
-          <a:xfrm>
-            <a:off x="640080" y="987552"/>
-            <a:ext cx="4754880" cy="274320"/>
-          </a:xfrm>
-          <a:prstGeom prst="rect">
-            <a:avLst/>
-          </a:prstGeom>
-          <a:noFill/>
-          <a:ln/>
-        </p:spPr>
-        <p:txBody>
-          <a:bodyPr wrap="square" rtlCol="0" anchor="ctr"/>
-          <a:lstStyle/>
-          <a:p>
-            <a:pPr indent="0" marL="0">
-              <a:buNone/>
-            </a:pPr>
-            <a:r>
-              <a:rPr lang="en-US" sz="880" b="1" dirty="0">
-                <a:solidFill>
-                  <a:srgbClr val="60A5FA"/>
-                </a:solidFill>
-                <a:latin typeface="Consolas" pitchFamily="34" charset="0"/>
-                <a:ea typeface="Consolas" pitchFamily="34" charset="-122"/>
-                <a:cs typeface="Consolas" pitchFamily="34" charset="-120"/>
-              </a:rPr>
-              <a:t>🔴 LIVE DEMO  •  Streamlit Real-Time Fraud Shield  |  XGBoost-SMOTE &amp; Autoencoder</a:t>
-            </a:r>
-            <a:endParaRPr lang="en-US" sz="880" dirty="0"/>
-          </a:p>
-        </p:txBody>
-      </p:sp>
-      <p:sp>
-        <p:nvSpPr>
-          <p:cNvPr id="10" name="Shape 8"/>
-          <p:cNvSpPr/>
-          <p:nvPr/>
-        </p:nvSpPr>
-        <p:spPr>
-          <a:xfrm>
-            <a:off x="676656" y="1325880"/>
-            <a:ext cx="4681728" cy="2633472"/>
-          </a:xfrm>
-          <a:prstGeom prst="rect">
-            <a:avLst/>
-          </a:prstGeom>
-          <a:solidFill>
-            <a:srgbClr val="0B1120"/>
-          </a:solidFill>
-          <a:ln w="19050">
-            <a:solidFill>
-              <a:srgbClr val="38BDF8"/>
-            </a:solidFill>
-            <a:prstDash val="solid"/>
-          </a:ln>
-        </p:spPr>
-      </p:sp>
-      <p:sp>
-        <p:nvSpPr>
-          <p:cNvPr id="11" name="Text 9"/>
-          <p:cNvSpPr/>
-          <p:nvPr/>
-        </p:nvSpPr>
-        <p:spPr>
-          <a:xfrm>
-            <a:off x="676656" y="1645920"/>
-            <a:ext cx="4681728" cy="594360"/>
-          </a:xfrm>
-          <a:prstGeom prst="rect">
-            <a:avLst/>
-          </a:prstGeom>
-          <a:noFill/>
-          <a:ln/>
-        </p:spPr>
-        <p:txBody>
-          <a:bodyPr wrap="square" rtlCol="0" anchor="ctr"/>
-          <a:lstStyle/>
-          <a:p>
-            <a:pPr algn="ctr" indent="0" marL="0">
-              <a:buNone/>
-            </a:pPr>
-            <a:r>
-              <a:rPr lang="en-US" sz="3600" b="1" dirty="0">
-                <a:solidFill>
-                  <a:srgbClr val="38BDF8"/>
-                </a:solidFill>
-              </a:rPr>
-              <a:t>▶</a:t>
-            </a:r>
-            <a:endParaRPr lang="en-US" sz="3600" dirty="0"/>
-          </a:p>
-        </p:txBody>
-      </p:sp>
-      <p:sp>
-        <p:nvSpPr>
-          <p:cNvPr id="12" name="Text 10"/>
-          <p:cNvSpPr/>
-          <p:nvPr/>
-        </p:nvSpPr>
-        <p:spPr>
-          <a:xfrm>
-            <a:off x="813816" y="2286000"/>
-            <a:ext cx="4407408" cy="502920"/>
-          </a:xfrm>
-          <a:prstGeom prst="rect">
-            <a:avLst/>
-          </a:prstGeom>
-          <a:noFill/>
-          <a:ln/>
-        </p:spPr>
-        <p:txBody>
-          <a:bodyPr wrap="square" rtlCol="0" anchor="ctr"/>
-          <a:lstStyle/>
-          <a:p>
-            <a:pPr algn="ctr" indent="0" marL="0">
-              <a:lnSpc>
-                <a:spcPct val="120000"/>
-              </a:lnSpc>
-              <a:buNone/>
-            </a:pPr>
-            <a:r>
-              <a:rPr lang="en-US" sz="1000" b="1" dirty="0">
-                <a:solidFill>
-                  <a:srgbClr val="E2E8F0"/>
-                </a:solidFill>
-                <a:latin typeface="Segoe UI" pitchFamily="34" charset="0"/>
-                <a:ea typeface="Segoe UI" pitchFamily="34" charset="-122"/>
-                <a:cs typeface="Segoe UI" pitchFamily="34" charset="-120"/>
-              </a:rPr>
-              <a:t>[ KHUNG CHÈN VIDEO DEMO STREAMLIT ]</a:t>
-            </a:r>
-            <a:endParaRPr lang="en-US" sz="1000" dirty="0"/>
-          </a:p>
-          <a:p>
-            <a:pPr algn="ctr" indent="0" marL="0">
-              <a:lnSpc>
-                <a:spcPct val="120000"/>
-              </a:lnSpc>
-              <a:buNone/>
-            </a:pPr>
-            <a:r>
-              <a:rPr lang="en-US" sz="1000" b="1" dirty="0">
-                <a:solidFill>
-                  <a:srgbClr val="E2E8F0"/>
-                </a:solidFill>
-                <a:latin typeface="Segoe UI" pitchFamily="34" charset="0"/>
-                <a:ea typeface="Segoe UI" pitchFamily="34" charset="-122"/>
-                <a:cs typeface="Segoe UI" pitchFamily="34" charset="-120"/>
-              </a:rPr>
-              <a:t>(Tỷ lệ Chuẩn 16:9 — 1920×1080 / 1280×720 MP4/GIF)</a:t>
-            </a:r>
-            <a:endParaRPr lang="en-US" sz="1000" dirty="0"/>
-          </a:p>
-        </p:txBody>
-      </p:sp>
-      <p:sp>
-        <p:nvSpPr>
-          <p:cNvPr id="13" name="Text 11"/>
-          <p:cNvSpPr/>
-          <p:nvPr/>
-        </p:nvSpPr>
-        <p:spPr>
-          <a:xfrm>
-            <a:off x="813816" y="2862072"/>
-            <a:ext cx="4407408" cy="228600"/>
-          </a:xfrm>
-          <a:prstGeom prst="rect">
-            <a:avLst/>
-          </a:prstGeom>
-          <a:noFill/>
-          <a:ln/>
-        </p:spPr>
-        <p:txBody>
-          <a:bodyPr wrap="square" rtlCol="0" anchor="ctr"/>
-          <a:lstStyle/>
-          <a:p>
-            <a:pPr algn="ctr" indent="0" marL="0">
-              <a:buNone/>
-            </a:pPr>
-            <a:r>
-              <a:rPr lang="en-US" sz="850" i="1" dirty="0">
-                <a:solidFill>
-                  <a:srgbClr val="94A3B8"/>
-                </a:solidFill>
-                <a:latin typeface="Segoe UI" pitchFamily="34" charset="0"/>
-                <a:ea typeface="Segoe UI" pitchFamily="34" charset="-122"/>
-                <a:cs typeface="Segoe UI" pitchFamily="34" charset="-120"/>
-              </a:rPr>
-              <a:t>Giao diện phân tích rủi ro thời gian thực &amp; Chấm điểm Batch CSV</a:t>
-            </a:r>
-            <a:endParaRPr lang="en-US" sz="850" dirty="0"/>
-          </a:p>
-        </p:txBody>
-      </p:sp>
-      <p:sp>
-        <p:nvSpPr>
-          <p:cNvPr id="14" name="Shape 12"/>
-          <p:cNvSpPr/>
-          <p:nvPr/>
-        </p:nvSpPr>
-        <p:spPr>
-          <a:xfrm>
-            <a:off x="2011680" y="3291840"/>
-            <a:ext cx="2011680" cy="292608"/>
-          </a:xfrm>
-          <a:prstGeom prst="roundRect">
-            <a:avLst>
-              <a:gd name="adj" fmla="val 25000"/>
-            </a:avLst>
-          </a:prstGeom>
-          <a:solidFill>
-            <a:srgbClr val="1E293B"/>
-          </a:solidFill>
-          <a:ln w="10160">
-            <a:solidFill>
-              <a:srgbClr val="64748B"/>
-            </a:solidFill>
-            <a:prstDash val="solid"/>
-          </a:ln>
-        </p:spPr>
-      </p:sp>
-      <p:sp>
-        <p:nvSpPr>
-          <p:cNvPr id="15" name="Text 13"/>
-          <p:cNvSpPr/>
-          <p:nvPr/>
-        </p:nvSpPr>
-        <p:spPr>
-          <a:xfrm>
-            <a:off x="2011680" y="3291840"/>
-            <a:ext cx="2011680" cy="292608"/>
-          </a:xfrm>
-          <a:prstGeom prst="rect">
-            <a:avLst/>
-          </a:prstGeom>
-          <a:noFill/>
-          <a:ln/>
-        </p:spPr>
-        <p:txBody>
-          <a:bodyPr wrap="square" rtlCol="0" anchor="ctr"/>
-          <a:lstStyle/>
-          <a:p>
-            <a:pPr algn="ctr" indent="0" marL="0">
-              <a:buNone/>
-            </a:pPr>
-            <a:r>
-              <a:rPr lang="en-US" sz="820" b="1" dirty="0">
-                <a:solidFill>
-                  <a:srgbClr val="38BDF8"/>
-                </a:solidFill>
-                <a:latin typeface="Consolas" pitchFamily="34" charset="0"/>
-                <a:ea typeface="Consolas" pitchFamily="34" charset="-122"/>
-                <a:cs typeface="Consolas" pitchFamily="34" charset="-120"/>
-              </a:rPr>
-              <a:t>HD 1080p  •  TỶ LỆ 16:9</a:t>
-            </a:r>
-            <a:endParaRPr lang="en-US" sz="820" dirty="0"/>
-          </a:p>
-        </p:txBody>
-      </p:sp>
-      <p:sp>
-        <p:nvSpPr>
-          <p:cNvPr id="16" name="Shape 14"/>
-          <p:cNvSpPr/>
-          <p:nvPr/>
-        </p:nvSpPr>
-        <p:spPr>
-          <a:xfrm>
-            <a:off x="640080" y="4023360"/>
-            <a:ext cx="4754880" cy="457200"/>
-          </a:xfrm>
-          <a:prstGeom prst="rect">
-            <a:avLst/>
-          </a:prstGeom>
-          <a:solidFill>
-            <a:srgbClr val="131C31"/>
-          </a:solidFill>
-          <a:ln w="12700">
-            <a:solidFill>
-              <a:srgbClr val="1E293B"/>
-            </a:solidFill>
-            <a:prstDash val="solid"/>
-          </a:ln>
-        </p:spPr>
-      </p:sp>
-      <p:sp>
-        <p:nvSpPr>
-          <p:cNvPr id="17" name="Text 15"/>
-          <p:cNvSpPr/>
-          <p:nvPr/>
-        </p:nvSpPr>
-        <p:spPr>
-          <a:xfrm>
-            <a:off x="685800" y="4023360"/>
-            <a:ext cx="4663440" cy="457200"/>
-          </a:xfrm>
-          <a:prstGeom prst="rect">
-            <a:avLst/>
-          </a:prstGeom>
-          <a:noFill/>
-          <a:ln/>
-        </p:spPr>
-        <p:txBody>
-          <a:bodyPr wrap="square" rtlCol="0" anchor="ctr"/>
-          <a:lstStyle/>
-          <a:p>
-            <a:pPr algn="ctr" indent="0" marL="0">
-              <a:buNone/>
-            </a:pPr>
-            <a:r>
-              <a:rPr lang="en-US" sz="780" dirty="0">
-                <a:solidFill>
-                  <a:srgbClr val="CBD5E1"/>
-                </a:solidFill>
-                <a:latin typeface="Consolas" pitchFamily="34" charset="0"/>
-                <a:ea typeface="Consolas" pitchFamily="34" charset="-122"/>
-                <a:cs typeface="Consolas" pitchFamily="34" charset="-120"/>
-              </a:rPr>
-              <a:t>3 Kịch bản: 1. Hợp lệ (&lt; 0.1%)  |  2. Vét cạn số dư (88.36%)  |  3. Cận biên ban đêm (~32%)</a:t>
-            </a:r>
-            <a:endParaRPr lang="en-US" sz="780" dirty="0"/>
-          </a:p>
-        </p:txBody>
-      </p:sp>
-      <p:sp>
-        <p:nvSpPr>
-          <p:cNvPr id="18" name="Shape 16"/>
+      <p:pic>
+        <p:nvPicPr>
+          <p:cNvPr id="8" name="Image 0" descr="D:\Trí tuệ nhân tạo\HK2\Trí tuệ nhân tạo\CS106-Team09-Fraud-Detection\draft\fraud-detection\slide\slide_assets\demo_ui_slide20.png">    </p:cNvPr>
+          <p:cNvPicPr>
+            <a:picLocks noChangeAspect="1"/>
+          </p:cNvPicPr>
+          <p:nvPr/>
+        </p:nvPicPr>
+        <p:blipFill>
+          <a:blip r:embed="rId1"/>
+          <a:stretch>
+            <a:fillRect/>
+          </a:stretch>
+        </p:blipFill>
+        <p:spPr>
+          <a:xfrm>
+            <a:off x="557784" y="1042416"/>
+            <a:ext cx="4919472" cy="3474720"/>
+          </a:xfrm>
+          <a:prstGeom prst="rect">
+            <a:avLst/>
+          </a:prstGeom>
+        </p:spPr>
+      </p:pic>
+      <p:sp>
+        <p:nvSpPr>
+          <p:cNvPr id="9" name="Shape 6"/>
           <p:cNvSpPr/>
           <p:nvPr/>
         </p:nvSpPr>
@@ -17356,7 +16984,7 @@
       </p:sp>
       <p:sp>
         <p:nvSpPr>
-          <p:cNvPr id="19" name="Text 17"/>
+          <p:cNvPr id="10" name="Text 7"/>
           <p:cNvSpPr/>
           <p:nvPr/>
         </p:nvSpPr>
@@ -17395,7 +17023,7 @@
       </p:sp>
       <p:sp>
         <p:nvSpPr>
-          <p:cNvPr id="20" name="Text 18"/>
+          <p:cNvPr id="11" name="Text 8"/>
           <p:cNvSpPr/>
           <p:nvPr/>
         </p:nvSpPr>
@@ -17435,7 +17063,7 @@
                 <a:ea typeface="Segoe UI" pitchFamily="34" charset="-122"/>
                 <a:cs typeface="Segoe UI" pitchFamily="34" charset="-120"/>
               </a:rPr>
-              <a:t>Quy chuẩn Leak-Free: 80/20 Stratified Split chống rò rỉ dữ liệu.</a:t>
+              <a:t>Không rò rỉ sang Test: split 80/20 trước, scaler và oversampling chỉ trên Train.</a:t>
             </a:r>
             <a:endParaRPr lang="en-US" sz="840" dirty="0"/>
           </a:p>
@@ -17459,7 +17087,7 @@
                 <a:ea typeface="Segoe UI" pitchFamily="34" charset="-122"/>
                 <a:cs typeface="Segoe UI" pitchFamily="34" charset="-120"/>
               </a:rPr>
-              <a:t>Đặc trưng Số dư: Nhóm số dư chiếm &gt; 97% split gains (ghi nhận rủi ro simulator artifact).</a:t>
+              <a:t>Đặc trưng Số dư: Nhóm số dư chiếm &gt; 97% split gains (rủi ro simulator artifact, Mục 3.6.2).</a:t>
             </a:r>
             <a:endParaRPr lang="en-US" sz="840" dirty="0"/>
           </a:p>
@@ -17507,7 +17135,7 @@
                 <a:ea typeface="Segoe UI" pitchFamily="34" charset="-122"/>
                 <a:cs typeface="Segoe UI" pitchFamily="34" charset="-120"/>
               </a:rPr>
-              <a:t>Phòng thủ Đa tầng: Phối hợp XGBoost phát hiện nhanh và Autoencoder bắt bất thường.</a:t>
+              <a:t>Demo suy luận bằng XGBoost-SMOTE; Autoencoder dùng để so sánh bất thường, không phải model chọn trên UI.</a:t>
             </a:r>
             <a:endParaRPr lang="en-US" sz="840" dirty="0"/>
           </a:p>
@@ -17515,7 +17143,7 @@
       </p:sp>
       <p:sp>
         <p:nvSpPr>
-          <p:cNvPr id="21" name="Shape 19"/>
+          <p:cNvPr id="12" name="Shape 9"/>
           <p:cNvSpPr/>
           <p:nvPr/>
         </p:nvSpPr>
@@ -17540,7 +17168,7 @@
       </p:sp>
       <p:sp>
         <p:nvSpPr>
-          <p:cNvPr id="22" name="Text 20"/>
+          <p:cNvPr id="13" name="Text 10"/>
           <p:cNvSpPr/>
           <p:nvPr/>
         </p:nvSpPr>
@@ -17579,7 +17207,7 @@
       </p:sp>
       <p:sp>
         <p:nvSpPr>
-          <p:cNvPr id="23" name="Text 21"/>
+          <p:cNvPr id="14" name="Text 11"/>
           <p:cNvSpPr/>
           <p:nvPr/>
         </p:nvSpPr>
@@ -18680,7 +18308,7 @@
                   <a:srgbClr val="1F2937"/>
                 </a:solidFill>
               </a:rPr>
-              <a:t>• Gian lận chỉ chiếm ~1 trên 800 giao dịch (8,213 ca trên 6.36M sự kiện trong PaySim).
+              <a:t>• Gian lận chỉ chiếm ~1 trên 775 giao dịch (8,213 ca trên 6.36M sự kiện trong PaySim).
 </a:t>
             </a:r>
             <a:pPr indent="0" marL="0">
@@ -19959,7 +19587,7 @@
                 <a:ea typeface="Segoe UI" pitchFamily="34" charset="-122"/>
                 <a:cs typeface="Segoe UI" pitchFamily="34" charset="-120"/>
               </a:rPr>
-              <a:t>Xây dựng end-to-end ML pipeline chuẩn, đảm bảo Leak-Free tuyệt đối.</a:t>
+              <a:t>Xây dựng end-to-end ML pipeline chuẩn, đảm bảo nguyên tắc phân lập dữ liệu Leak-Free.</a:t>
             </a:r>
             <a:endParaRPr lang="en-US" sz="950" dirty="0"/>
           </a:p>
@@ -19983,7 +19611,7 @@
                 <a:ea typeface="Segoe UI" pitchFamily="34" charset="-122"/>
                 <a:cs typeface="Segoe UI" pitchFamily="34" charset="-120"/>
               </a:rPr>
-              <a:t>Thiết kế 14 features bắt trọn sai lệch số dư tài khoản.</a:t>
+              <a:t>Thiết kế 14 đặc trưng (7 dẫn xuất) bắt trọn sai lệch số dư tài khoản.</a:t>
             </a:r>
             <a:endParaRPr lang="en-US" sz="950" dirty="0"/>
           </a:p>
@@ -20007,7 +19635,7 @@
                 <a:ea typeface="Segoe UI" pitchFamily="34" charset="-122"/>
                 <a:cs typeface="Segoe UI" pitchFamily="34" charset="-120"/>
               </a:rPr>
-              <a:t>So sánh Ensemble Trees với Unsupervised Deep Autoencoder bắt Zero-Day.</a:t>
+              <a:t>So sánh Ensemble Trees với Unsupervised Deep Autoencoder phát hiện bất thường.</a:t>
             </a:r>
             <a:endParaRPr lang="en-US" sz="950" dirty="0"/>
           </a:p>
@@ -21036,7 +20664,7 @@
                           <a:ea typeface="Segoe UI" pitchFamily="34" charset="-122"/>
                           <a:cs typeface="Segoe UI" pitchFamily="34" charset="-120"/>
                         </a:rPr>
-                        <a:t>Bước thời gian theo giờ (1..744, tương ứng 30 ngày mô phỏng)</a:t>
+                        <a:t>Bước thời gian theo giờ (1..743, tương ứng 30 ngày mô phỏng)</a:t>
                       </a:r>
                       <a:endParaRPr lang="en-US" sz="880" dirty="0">
                         <a:latin typeface="Segoe UI" charset="0"/>
@@ -22018,7 +21646,7 @@
                 <a:ea typeface="Segoe UI" pitchFamily="34" charset="-122"/>
                 <a:cs typeface="Segoe UI" pitchFamily="34" charset="-120"/>
               </a:rPr>
-              <a:t>100% tất cả các ca gian lận trong 6.36M giao dịch CHỈ xuất hiện ở 2 loại: TRANSFER và CASH_OUT. Các loại PAYMENT, CASH_IN và DEBIT hoàn toàn an toàn (0% gian lận). Do đó, bước tiền xử lý lọc chỉ giữ lại TRANSFER &amp; CASH_OUT giúp triệt tiêu 70% dữ liệu nhiễu.</a:t>
+              <a:t>100% tất cả các ca gian lận trong 6.36M giao dịch CHỈ xuất hiện ở 2 loại: TRANSFER và CASH_OUT. Các loại PAYMENT, CASH_IN và DEBIT hoàn toàn an toàn (0% gian lận). Do đó, bước tiền xử lý lọc chỉ giữ lại TRANSFER &amp; CASH_OUT giúp loại bỏ ~56.5% giao dịch hoàn toàn không có gian lận.</a:t>
             </a:r>
             <a:endParaRPr lang="en-US" sz="930" dirty="0"/>
           </a:p>
@@ -22318,7 +21946,7 @@
                 <a:ea typeface="Segoe UI" pitchFamily="34" charset="-122"/>
                 <a:cs typeface="Segoe UI" pitchFamily="34" charset="-120"/>
               </a:rPr>
-              <a:t>Công thức Toán học của 14 Engineered Domain Features</a:t>
+              <a:t>Công thức toán học của 14 đặc trưng miền (7 dẫn xuất)</a:t>
             </a:r>
             <a:endParaRPr lang="en-US" sz="1100" dirty="0"/>
           </a:p>
@@ -22771,7 +22399,7 @@
                   <a:srgbClr val="1F2937"/>
                 </a:solidFill>
               </a:rPr>
-              <a:t>Lọc tập dữ liệu chỉ giữ lại TRANSFER &amp; CASH_OUT, triệt tiêu ngay 70% dữ liệu nhiễu vô ích.</a:t>
+              <a:t>Lọc tập dữ liệu chỉ giữ lại TRANSFER &amp; CASH_OUT, loại bỏ ~56% giao dịch không có rủi ro gian lận.</a:t>
             </a:r>
             <a:endParaRPr lang="en-US" sz="980" dirty="0"/>
           </a:p>
@@ -23174,7 +22802,7 @@
                   <a:srgbClr val="1F2937"/>
                 </a:solidFill>
               </a:rPr>
-              <a:t>• Phản ánh tài khoản rác (mule account) hoặc luân chuyển rửa tiền đa tầng tức thì.
+              <a:t>• Phản ánh tài khoản rác hoặc luân chuyển rửa tiền đa tầng tức thì (diễn giải, dữ liệu mô phỏng).
 </a:t>
             </a:r>
             <a:pPr indent="0" marL="0">
@@ -25448,7 +25076,7 @@
                   <a:srgbClr val="1F2937"/>
                 </a:solidFill>
               </a:rPr>
-              <a:t>Một mô hình ngây thơ luôn dự đoán 100% là "Hợp lệ" vẫn đạt Accuracy 99.87% nhưng bỏ sót 100% gian lận! Do đó, đánh giá mô hình phải dẫn dắt bởi Precision, Recall, F1-Score và PR-AUC (Precision-Recall AUC).</a:t>
+              <a:t>Một mô hình ngây thơ luôn dự đoán 100% là "Hợp lệ" vẫn đạt Accuracy 99.87% trên PaySim gốc nhưng bỏ sót 100% gian lận! Do đó, đánh giá mô hình phải dẫn dắt bởi Precision, Recall, F1-Score và PR-AUC (Precision-Recall AUC).</a:t>
             </a:r>
             <a:endParaRPr lang="en-US" sz="930" dirty="0"/>
           </a:p>
@@ -25628,7 +25256,7 @@
                   <a:srgbClr val="1F2937"/>
                 </a:solidFill>
               </a:rPr>
-              <a:t>Nội suy mẫu nhân tạo thiểu số dọc theo đoạn thẳng nối các láng giềng k-NN trong Latent Space.
+              <a:t>Nội suy mẫu nhân tạo thiểu số dọc theo đoạn thẳng nối các láng giềng k-NN trong không gian đặc trưng.
 </a:t>
             </a:r>
             <a:pPr indent="0" marL="0">
@@ -26928,7 +26556,7 @@
                   <a:srgbClr val="2563EB"/>
                 </a:solidFill>
               </a:rPr>
-              <a:t>• Đúc kết: SMOTE ổn định và vượt trội hơn ADASYN trên cả Random Forest và XGBoost.</a:t>
+              <a:t>• Đúc kết: SMOTENC nhỉnh hơn nhẹ so với ADASYN trên RF và XGBoost (ít cảnh báo nhầm hơn).</a:t>
             </a:r>
             <a:endParaRPr lang="en-US" sz="880" dirty="0"/>
           </a:p>

--- a/draft/fraud-detection/slide/[Nhom9]_Slide_FraudDetection_Academic_VN.pptx
+++ b/draft/fraud-detection/slide/[Nhom9]_Slide_FraudDetection_Academic_VN.pptx
@@ -4,6 +4,9 @@
   <p:sldMasterIdLst>
     <p:sldMasterId id="2147483648" r:id="rId1"/>
   </p:sldMasterIdLst>
+  <p:notesMasterIdLst>
+    <p:notesMasterId r:id="rId23"/>
+  </p:notesMasterIdLst>
   <p:sldIdLst>
     <p:sldId id="256" r:id="rId2"/>
     <p:sldId id="257" r:id="rId3"/>
@@ -27,10 +30,7 @@
     <p:sldId id="275" r:id="rId21"/>
     <p:sldId id="276" r:id="rId22"/>
   </p:sldIdLst>
-  <p:notesMasterIdLst>
-    <p:notesMasterId r:id="rId23"/>
-  </p:notesMasterIdLst>
-  <p:sldSz cx="9144000" cy="5143500"/>
+  <p:sldSz cx="9144000" cy="5143500" type="screen16x9"/>
   <p:notesSz cx="5143500" cy="9144000"/>
   <p:defaultTextStyle>
     <a:lvl1pPr marL="0" algn="l" defTabSz="914400" rtl="0" eaLnBrk="1" latinLnBrk="0" hangingPunct="1">
@@ -124,6 +124,11 @@
       </a:defRPr>
     </a:lvl9pPr>
   </p:defaultTextStyle>
+  <p:extLst>
+    <p:ext uri="{EFAFB233-063F-42B5-8137-9DF3F51BA10A}">
+      <p15:sldGuideLst xmlns:p15="http://schemas.microsoft.com/office/powerpoint/2012/main"/>
+    </p:ext>
+  </p:extLst>
 </p:presentation>
 </file>
 
@@ -149,234 +154,10 @@
           <a:chExt cx="0" cy="0"/>
         </a:xfrm>
       </p:grpSpPr>
-      <p:sp>
-        <p:nvSpPr>
-          <p:cNvPr id="2" name="Header Placeholder 1"/>
-          <p:cNvSpPr>
-            <a:spLocks noGrp="1"/>
-          </p:cNvSpPr>
-          <p:nvPr>
-            <p:ph type="hdr" sz="quarter"/>
-          </p:nvPr>
-        </p:nvSpPr>
-        <p:spPr>
-          <a:xfrm>
-            <a:off x="0" y="0"/>
-            <a:ext cx="2971800" cy="458788"/>
-          </a:xfrm>
-          <a:prstGeom prst="rect">
-            <a:avLst/>
-          </a:prstGeom>
-        </p:spPr>
-        <p:txBody>
-          <a:bodyPr vert="horz" lIns="91440" tIns="45720" rIns="91440" bIns="45720" rtlCol="0"/>
-          <a:lstStyle>
-            <a:lvl1pPr algn="l">
-              <a:defRPr sz="1200"/>
-            </a:lvl1pPr>
-          </a:lstStyle>
-          <a:p>
-            <a:endParaRPr lang="en-US"/>
-          </a:p>
-        </p:txBody>
-      </p:sp>
-      <p:sp>
-        <p:nvSpPr>
-          <p:cNvPr id="3" name="Date Placeholder 2"/>
-          <p:cNvSpPr>
-            <a:spLocks noGrp="1"/>
-          </p:cNvSpPr>
-          <p:nvPr>
-            <p:ph type="dt" idx="1"/>
-          </p:nvPr>
-        </p:nvSpPr>
-        <p:spPr>
-          <a:xfrm>
-            <a:off x="3884613" y="0"/>
-            <a:ext cx="2971800" cy="458788"/>
-          </a:xfrm>
-          <a:prstGeom prst="rect">
-            <a:avLst/>
-          </a:prstGeom>
-        </p:spPr>
-        <p:txBody>
-          <a:bodyPr vert="horz" lIns="91440" tIns="45720" rIns="91440" bIns="45720" rtlCol="0"/>
-          <a:lstStyle>
-            <a:lvl1pPr algn="r">
-              <a:defRPr sz="1200"/>
-            </a:lvl1pPr>
-          </a:lstStyle>
-          <a:p>
-            <a:fld id="{5282F153-3F37-0F45-9E97-73ACFA13230C}" type="datetimeFigureOut">
-              <a:rPr lang="en-US"/>
-              <a:t>7/23/19</a:t>
-            </a:fld>
-            <a:endParaRPr lang="en-US"/>
-          </a:p>
-        </p:txBody>
-      </p:sp>
-      <p:sp>
-        <p:nvSpPr>
-          <p:cNvPr id="4" name="Slide Image Placeholder 3"/>
-          <p:cNvSpPr>
-            <a:spLocks noGrp="1" noRot="1" noChangeAspect="1"/>
-          </p:cNvSpPr>
-          <p:nvPr>
-            <p:ph type="sldImg" idx="2"/>
-          </p:nvPr>
-        </p:nvSpPr>
-        <p:spPr>
-          <a:xfrm>
-            <a:off x="685800" y="1143000"/>
-            <a:ext cx="5486400" cy="3086100"/>
-          </a:xfrm>
-          <a:prstGeom prst="rect">
-            <a:avLst/>
-          </a:prstGeom>
-          <a:noFill/>
-          <a:ln w="12700">
-            <a:solidFill>
-              <a:prstClr val="black"/>
-            </a:solidFill>
-          </a:ln>
-        </p:spPr>
-        <p:txBody>
-          <a:bodyPr vert="horz" lIns="91440" tIns="45720" rIns="91440" bIns="45720" rtlCol="0" anchor="ctr"/>
-          <a:lstStyle/>
-          <a:p>
-            <a:endParaRPr lang="en-US"/>
-          </a:p>
-        </p:txBody>
-      </p:sp>
-      <p:sp>
-        <p:nvSpPr>
-          <p:cNvPr id="5" name="Notes Placeholder 4"/>
-          <p:cNvSpPr>
-            <a:spLocks noGrp="1"/>
-          </p:cNvSpPr>
-          <p:nvPr>
-            <p:ph type="body" sz="quarter" idx="3"/>
-          </p:nvPr>
-        </p:nvSpPr>
-        <p:spPr>
-          <a:xfrm>
-            <a:off x="685800" y="4400550"/>
-            <a:ext cx="5486400" cy="3600450"/>
-          </a:xfrm>
-          <a:prstGeom prst="rect">
-            <a:avLst/>
-          </a:prstGeom>
-        </p:spPr>
-        <p:txBody>
-          <a:bodyPr vert="horz" lIns="91440" tIns="45720" rIns="91440" bIns="45720" rtlCol="0"/>
-          <a:lstStyle/>
-          <a:p>
-            <a:pPr lvl="0"/>
-            <a:r>
-              <a:rPr lang="en-US"/>
-              <a:t>Click to edit Master text styles</a:t>
-            </a:r>
-          </a:p>
-          <a:p>
-            <a:pPr lvl="1"/>
-            <a:r>
-              <a:rPr lang="en-US"/>
-              <a:t>Second level</a:t>
-            </a:r>
-          </a:p>
-          <a:p>
-            <a:pPr lvl="2"/>
-            <a:r>
-              <a:rPr lang="en-US"/>
-              <a:t>Third level</a:t>
-            </a:r>
-          </a:p>
-          <a:p>
-            <a:pPr lvl="3"/>
-            <a:r>
-              <a:rPr lang="en-US"/>
-              <a:t>Fourth level</a:t>
-            </a:r>
-          </a:p>
-          <a:p>
-            <a:pPr lvl="4"/>
-            <a:r>
-              <a:rPr lang="en-US"/>
-              <a:t>Fifth level</a:t>
-            </a:r>
-          </a:p>
-        </p:txBody>
-      </p:sp>
-      <p:sp>
-        <p:nvSpPr>
-          <p:cNvPr id="6" name="Footer Placeholder 5"/>
-          <p:cNvSpPr>
-            <a:spLocks noGrp="1"/>
-          </p:cNvSpPr>
-          <p:nvPr>
-            <p:ph type="ftr" sz="quarter" idx="4"/>
-          </p:nvPr>
-        </p:nvSpPr>
-        <p:spPr>
-          <a:xfrm>
-            <a:off x="0" y="8685213"/>
-            <a:ext cx="2971800" cy="458787"/>
-          </a:xfrm>
-          <a:prstGeom prst="rect">
-            <a:avLst/>
-          </a:prstGeom>
-        </p:spPr>
-        <p:txBody>
-          <a:bodyPr vert="horz" lIns="91440" tIns="45720" rIns="91440" bIns="45720" rtlCol="0" anchor="b"/>
-          <a:lstStyle>
-            <a:lvl1pPr algn="l">
-              <a:defRPr sz="1200"/>
-            </a:lvl1pPr>
-          </a:lstStyle>
-          <a:p>
-            <a:endParaRPr lang="en-US"/>
-          </a:p>
-        </p:txBody>
-      </p:sp>
-      <p:sp>
-        <p:nvSpPr>
-          <p:cNvPr id="7" name="Slide Number Placeholder 6"/>
-          <p:cNvSpPr>
-            <a:spLocks noGrp="1"/>
-          </p:cNvSpPr>
-          <p:nvPr>
-            <p:ph type="sldNum" sz="quarter" idx="5"/>
-          </p:nvPr>
-        </p:nvSpPr>
-        <p:spPr>
-          <a:xfrm>
-            <a:off x="3884613" y="8685213"/>
-            <a:ext cx="2971800" cy="458787"/>
-          </a:xfrm>
-          <a:prstGeom prst="rect">
-            <a:avLst/>
-          </a:prstGeom>
-        </p:spPr>
-        <p:txBody>
-          <a:bodyPr vert="horz" lIns="91440" tIns="45720" rIns="91440" bIns="45720" rtlCol="0" anchor="b"/>
-          <a:lstStyle>
-            <a:lvl1pPr algn="r">
-              <a:defRPr sz="1200"/>
-            </a:lvl1pPr>
-          </a:lstStyle>
-          <a:p>
-            <a:fld id="{CE5E9CC1-C706-0F49-92D6-E571CC5EEA8F}" type="slidenum">
-              <a:rPr lang="en-US"/>
-              <a:t>‹#›</a:t>
-            </a:fld>
-            <a:endParaRPr lang="en-US"/>
-          </a:p>
-        </p:txBody>
-      </p:sp>
     </p:spTree>
     <p:extLst>
       <p:ext uri="{BB962C8B-B14F-4D97-AF65-F5344CB8AC3E}">
-        <p14:creationId xmlns:p14="http://schemas.microsoft.com/office/powerpoint/2010/main" val="1024086991"/>
+        <p14:creationId xmlns:p14="http://schemas.microsoft.com/office/powerpoint/2010/main" val="991570703"/>
       </p:ext>
     </p:extLst>
   </p:cSld>
@@ -520,10 +301,6 @@
           <a:bodyPr/>
           <a:lstStyle/>
           <a:p>
-            <a:r>
-              <a:rPr lang="en-US" dirty="0"/>
-              <a:t/>
-            </a:r>
             <a:endParaRPr lang="en-US" dirty="0"/>
           </a:p>
         </p:txBody>
@@ -608,10 +385,6 @@
           <a:bodyPr/>
           <a:lstStyle/>
           <a:p>
-            <a:r>
-              <a:rPr lang="en-US" dirty="0"/>
-              <a:t/>
-            </a:r>
             <a:endParaRPr lang="en-US" dirty="0"/>
           </a:p>
         </p:txBody>
@@ -696,10 +469,6 @@
           <a:bodyPr/>
           <a:lstStyle/>
           <a:p>
-            <a:r>
-              <a:rPr lang="en-US" dirty="0"/>
-              <a:t/>
-            </a:r>
             <a:endParaRPr lang="en-US" dirty="0"/>
           </a:p>
         </p:txBody>
@@ -784,10 +553,6 @@
           <a:bodyPr/>
           <a:lstStyle/>
           <a:p>
-            <a:r>
-              <a:rPr lang="en-US" dirty="0"/>
-              <a:t/>
-            </a:r>
             <a:endParaRPr lang="en-US" dirty="0"/>
           </a:p>
         </p:txBody>
@@ -872,10 +637,6 @@
           <a:bodyPr/>
           <a:lstStyle/>
           <a:p>
-            <a:r>
-              <a:rPr lang="en-US" dirty="0"/>
-              <a:t/>
-            </a:r>
             <a:endParaRPr lang="en-US" dirty="0"/>
           </a:p>
         </p:txBody>
@@ -960,10 +721,6 @@
           <a:bodyPr/>
           <a:lstStyle/>
           <a:p>
-            <a:r>
-              <a:rPr lang="en-US" dirty="0"/>
-              <a:t/>
-            </a:r>
             <a:endParaRPr lang="en-US" dirty="0"/>
           </a:p>
         </p:txBody>
@@ -1048,10 +805,6 @@
           <a:bodyPr/>
           <a:lstStyle/>
           <a:p>
-            <a:r>
-              <a:rPr lang="en-US" dirty="0"/>
-              <a:t/>
-            </a:r>
             <a:endParaRPr lang="en-US" dirty="0"/>
           </a:p>
         </p:txBody>
@@ -1136,10 +889,6 @@
           <a:bodyPr/>
           <a:lstStyle/>
           <a:p>
-            <a:r>
-              <a:rPr lang="en-US" dirty="0"/>
-              <a:t/>
-            </a:r>
             <a:endParaRPr lang="en-US" dirty="0"/>
           </a:p>
         </p:txBody>
@@ -1224,10 +973,6 @@
           <a:bodyPr/>
           <a:lstStyle/>
           <a:p>
-            <a:r>
-              <a:rPr lang="en-US" dirty="0"/>
-              <a:t/>
-            </a:r>
             <a:endParaRPr lang="en-US" dirty="0"/>
           </a:p>
         </p:txBody>
@@ -1312,10 +1057,6 @@
           <a:bodyPr/>
           <a:lstStyle/>
           <a:p>
-            <a:r>
-              <a:rPr lang="en-US" dirty="0"/>
-              <a:t/>
-            </a:r>
             <a:endParaRPr lang="en-US" dirty="0"/>
           </a:p>
         </p:txBody>
@@ -1400,10 +1141,6 @@
           <a:bodyPr/>
           <a:lstStyle/>
           <a:p>
-            <a:r>
-              <a:rPr lang="en-US" dirty="0"/>
-              <a:t/>
-            </a:r>
             <a:endParaRPr lang="en-US" dirty="0"/>
           </a:p>
         </p:txBody>
@@ -1488,10 +1225,6 @@
           <a:bodyPr/>
           <a:lstStyle/>
           <a:p>
-            <a:r>
-              <a:rPr lang="en-US" dirty="0"/>
-              <a:t/>
-            </a:r>
             <a:endParaRPr lang="en-US" dirty="0"/>
           </a:p>
         </p:txBody>
@@ -1576,10 +1309,6 @@
           <a:bodyPr/>
           <a:lstStyle/>
           <a:p>
-            <a:r>
-              <a:rPr lang="en-US" dirty="0"/>
-              <a:t/>
-            </a:r>
             <a:endParaRPr lang="en-US" dirty="0"/>
           </a:p>
         </p:txBody>
@@ -1664,10 +1393,6 @@
           <a:bodyPr/>
           <a:lstStyle/>
           <a:p>
-            <a:r>
-              <a:rPr lang="en-US" dirty="0"/>
-              <a:t/>
-            </a:r>
             <a:endParaRPr lang="en-US" dirty="0"/>
           </a:p>
         </p:txBody>
@@ -1752,10 +1477,6 @@
           <a:bodyPr/>
           <a:lstStyle/>
           <a:p>
-            <a:r>
-              <a:rPr lang="en-US" dirty="0"/>
-              <a:t/>
-            </a:r>
             <a:endParaRPr lang="en-US" dirty="0"/>
           </a:p>
         </p:txBody>
@@ -1840,10 +1561,6 @@
           <a:bodyPr/>
           <a:lstStyle/>
           <a:p>
-            <a:r>
-              <a:rPr lang="en-US" dirty="0"/>
-              <a:t/>
-            </a:r>
             <a:endParaRPr lang="en-US" dirty="0"/>
           </a:p>
         </p:txBody>
@@ -1928,10 +1645,6 @@
           <a:bodyPr/>
           <a:lstStyle/>
           <a:p>
-            <a:r>
-              <a:rPr lang="en-US" dirty="0"/>
-              <a:t/>
-            </a:r>
             <a:endParaRPr lang="en-US" dirty="0"/>
           </a:p>
         </p:txBody>
@@ -2016,10 +1729,6 @@
           <a:bodyPr/>
           <a:lstStyle/>
           <a:p>
-            <a:r>
-              <a:rPr lang="en-US" dirty="0"/>
-              <a:t/>
-            </a:r>
             <a:endParaRPr lang="en-US" dirty="0"/>
           </a:p>
         </p:txBody>
@@ -2104,10 +1813,6 @@
           <a:bodyPr/>
           <a:lstStyle/>
           <a:p>
-            <a:r>
-              <a:rPr lang="en-US" dirty="0"/>
-              <a:t/>
-            </a:r>
             <a:endParaRPr lang="en-US" dirty="0"/>
           </a:p>
         </p:txBody>
@@ -2192,10 +1897,6 @@
           <a:bodyPr/>
           <a:lstStyle/>
           <a:p>
-            <a:r>
-              <a:rPr lang="en-US" dirty="0"/>
-              <a:t/>
-            </a:r>
             <a:endParaRPr lang="en-US" dirty="0"/>
           </a:p>
         </p:txBody>
@@ -2280,10 +1981,6 @@
           <a:bodyPr/>
           <a:lstStyle/>
           <a:p>
-            <a:r>
-              <a:rPr lang="en-US" dirty="0"/>
-              <a:t/>
-            </a:r>
             <a:endParaRPr lang="en-US" dirty="0"/>
           </a:p>
         </p:txBody>
@@ -2357,6 +2054,11 @@
 <file path=ppt/slideMasters/slideMaster1.xml><?xml version="1.0" encoding="utf-8"?>
 <p:sldMaster xmlns:a="http://schemas.openxmlformats.org/drawingml/2006/main" xmlns:r="http://schemas.openxmlformats.org/officeDocument/2006/relationships" xmlns:p="http://schemas.openxmlformats.org/presentationml/2006/main">
   <p:cSld>
+    <p:bg>
+      <p:bgRef idx="1001">
+        <a:schemeClr val="bg1"/>
+      </p:bgRef>
+    </p:bg>
     <p:spTree>
       <p:nvGrpSpPr>
         <p:cNvPr id="1" name=""/>
@@ -2639,6 +2341,7 @@
         <a:solidFill>
           <a:srgbClr val="1E295C"/>
         </a:solidFill>
+        <a:effectLst/>
       </p:bgPr>
     </p:bg>
     <p:spTree>
@@ -2676,7 +2379,7 @@
           <a:bodyPr wrap="square" rtlCol="0" anchor="ctr"/>
           <a:lstStyle/>
           <a:p>
-            <a:pPr algn="ctr" indent="0" marL="0">
+            <a:pPr marL="0" indent="0" algn="ctr">
               <a:lnSpc>
                 <a:spcPct val="120000"/>
               </a:lnSpc>
@@ -2696,7 +2399,7 @@
             <a:endParaRPr lang="en-US" sz="950" dirty="0"/>
           </a:p>
           <a:p>
-            <a:pPr algn="ctr" indent="0" marL="0">
+            <a:pPr marL="0" indent="0" algn="ctr">
               <a:lnSpc>
                 <a:spcPct val="120000"/>
               </a:lnSpc>
@@ -2738,7 +2441,7 @@
           <a:bodyPr wrap="square" rtlCol="0" anchor="ctr"/>
           <a:lstStyle/>
           <a:p>
-            <a:pPr algn="ctr" indent="0" marL="0">
+            <a:pPr marL="0" indent="0" algn="ctr">
               <a:buNone/>
             </a:pPr>
             <a:r>
@@ -2777,7 +2480,7 @@
           <a:bodyPr wrap="square" rtlCol="0" anchor="ctr"/>
           <a:lstStyle/>
           <a:p>
-            <a:pPr algn="ctr" indent="0" marL="0">
+            <a:pPr marL="0" indent="0" algn="ctr">
               <a:buNone/>
             </a:pPr>
             <a:r>
@@ -2816,7 +2519,7 @@
           <a:bodyPr wrap="square" rtlCol="0" anchor="ctr"/>
           <a:lstStyle/>
           <a:p>
-            <a:pPr algn="ctr" indent="0" marL="0">
+            <a:pPr marL="0" indent="0" algn="ctr">
               <a:buNone/>
             </a:pPr>
             <a:r>
@@ -2856,6 +2559,13 @@
             <a:prstDash val="solid"/>
           </a:ln>
         </p:spPr>
+        <p:txBody>
+          <a:bodyPr/>
+          <a:lstStyle/>
+          <a:p>
+            <a:endParaRPr lang="en-VN"/>
+          </a:p>
+        </p:txBody>
       </p:sp>
       <p:sp>
         <p:nvSpPr>
@@ -2878,7 +2588,7 @@
           <a:bodyPr wrap="square" rtlCol="0" anchor="ctr"/>
           <a:lstStyle/>
           <a:p>
-            <a:pPr algn="ctr" indent="0" marL="0">
+            <a:pPr marL="0" indent="0" algn="ctr">
               <a:buNone/>
             </a:pPr>
             <a:r>
@@ -2918,6 +2628,13 @@
             <a:prstDash val="solid"/>
           </a:ln>
         </p:spPr>
+        <p:txBody>
+          <a:bodyPr/>
+          <a:lstStyle/>
+          <a:p>
+            <a:endParaRPr lang="en-VN"/>
+          </a:p>
+        </p:txBody>
       </p:sp>
       <p:sp>
         <p:nvSpPr>
@@ -2927,8 +2644,8 @@
         </p:nvSpPr>
         <p:spPr>
           <a:xfrm>
-            <a:off x="502920" y="3337560"/>
-            <a:ext cx="8138160" cy="502920"/>
+            <a:off x="3774523" y="3154681"/>
+            <a:ext cx="2113613" cy="1444737"/>
           </a:xfrm>
           <a:prstGeom prst="rect">
             <a:avLst/>
@@ -2940,7 +2657,7 @@
           <a:bodyPr wrap="square" rtlCol="0" anchor="ctr"/>
           <a:lstStyle/>
           <a:p>
-            <a:pPr algn="ctr" indent="0" marL="0">
+            <a:pPr marL="0" indent="0">
               <a:lnSpc>
                 <a:spcPct val="130000"/>
               </a:lnSpc>
@@ -2955,16 +2672,36 @@
                 <a:ea typeface="Segoe UI" pitchFamily="34" charset="-122"/>
                 <a:cs typeface="Segoe UI" pitchFamily="34" charset="-120"/>
               </a:rPr>
-              <a:t>Trần Hoàng Hôn (26410046)  •  Đặng Chí Thanh (25730067)  •  Nguyễn Duy Khang (26410055)</a:t>
+              <a:t>Trần Hoàng Hôn (26410046)</a:t>
+            </a:r>
+            <a:br>
+              <a:rPr lang="en-US" sz="1000" dirty="0">
+                <a:solidFill>
+                  <a:srgbClr val="CBD5E1"/>
+                </a:solidFill>
+                <a:latin typeface="Segoe UI" pitchFamily="34" charset="0"/>
+                <a:ea typeface="Segoe UI" pitchFamily="34" charset="-122"/>
+                <a:cs typeface="Segoe UI" pitchFamily="34" charset="-120"/>
+              </a:rPr>
+            </a:br>
+            <a:r>
+              <a:rPr lang="en-US" sz="1000" dirty="0">
+                <a:solidFill>
+                  <a:srgbClr val="CBD5E1"/>
+                </a:solidFill>
+                <a:latin typeface="Segoe UI" pitchFamily="34" charset="0"/>
+                <a:ea typeface="Segoe UI" pitchFamily="34" charset="-122"/>
+                <a:cs typeface="Segoe UI" pitchFamily="34" charset="-120"/>
+              </a:rPr>
+              <a:t>Đặng Chí Thanh (25730067)  </a:t>
             </a:r>
             <a:endParaRPr lang="en-US" sz="1000" dirty="0"/>
           </a:p>
           <a:p>
-            <a:pPr algn="ctr" indent="0" marL="0">
+            <a:pPr>
               <a:lnSpc>
                 <a:spcPct val="130000"/>
               </a:lnSpc>
-              <a:buNone/>
             </a:pPr>
             <a:r>
               <a:rPr lang="en-US" sz="1000" dirty="0">
@@ -2975,7 +2712,91 @@
                 <a:ea typeface="Segoe UI" pitchFamily="34" charset="-122"/>
                 <a:cs typeface="Segoe UI" pitchFamily="34" charset="-120"/>
               </a:rPr>
-              <a:t>Hoàng Cao Sơn (25730061)  •  Vũ Văn Duy (26410031)  •  Bùi Thị Mỷ Cẩm (25730013)  •  Phạm Thành Trung (26410141)</a:t>
+              <a:t>Hoàng Cao Sơn (25730061)  </a:t>
+            </a:r>
+            <a:br>
+              <a:rPr lang="en-US" sz="1000" dirty="0">
+                <a:solidFill>
+                  <a:srgbClr val="CBD5E1"/>
+                </a:solidFill>
+                <a:latin typeface="Segoe UI" pitchFamily="34" charset="0"/>
+                <a:ea typeface="Segoe UI" pitchFamily="34" charset="-122"/>
+                <a:cs typeface="Segoe UI" pitchFamily="34" charset="-120"/>
+              </a:rPr>
+            </a:br>
+            <a:r>
+              <a:rPr lang="en-US" sz="1000" dirty="0">
+                <a:solidFill>
+                  <a:srgbClr val="CBD5E1"/>
+                </a:solidFill>
+                <a:latin typeface="Segoe UI" pitchFamily="34" charset="0"/>
+                <a:ea typeface="Segoe UI" pitchFamily="34" charset="-122"/>
+                <a:cs typeface="Segoe UI" pitchFamily="34" charset="-120"/>
+              </a:rPr>
+              <a:t>Bùi Thị Mỷ Cẩm (25730013)</a:t>
+            </a:r>
+            <a:br>
+              <a:rPr lang="en-US" sz="1000" dirty="0">
+                <a:solidFill>
+                  <a:srgbClr val="CBD5E1"/>
+                </a:solidFill>
+                <a:latin typeface="Segoe UI" pitchFamily="34" charset="0"/>
+                <a:ea typeface="Segoe UI" pitchFamily="34" charset="-122"/>
+                <a:cs typeface="Segoe UI" pitchFamily="34" charset="-120"/>
+              </a:rPr>
+            </a:br>
+            <a:r>
+              <a:rPr lang="en-US" sz="1000" dirty="0">
+                <a:solidFill>
+                  <a:srgbClr val="CBD5E1"/>
+                </a:solidFill>
+                <a:latin typeface="Segoe UI" pitchFamily="34" charset="0"/>
+                <a:ea typeface="Segoe UI" pitchFamily="34" charset="-122"/>
+                <a:cs typeface="Segoe UI" pitchFamily="34" charset="-120"/>
+              </a:rPr>
+              <a:t>Nguyễn Duy Khang (26410055)</a:t>
+            </a:r>
+            <a:br>
+              <a:rPr lang="en-US" sz="1000" dirty="0">
+                <a:solidFill>
+                  <a:srgbClr val="CBD5E1"/>
+                </a:solidFill>
+                <a:latin typeface="Segoe UI" pitchFamily="34" charset="0"/>
+                <a:ea typeface="Segoe UI" pitchFamily="34" charset="-122"/>
+                <a:cs typeface="Segoe UI" pitchFamily="34" charset="-120"/>
+              </a:rPr>
+            </a:br>
+            <a:r>
+              <a:rPr lang="en-US" sz="1000" dirty="0">
+                <a:solidFill>
+                  <a:srgbClr val="CBD5E1"/>
+                </a:solidFill>
+                <a:latin typeface="Segoe UI" pitchFamily="34" charset="0"/>
+                <a:ea typeface="Segoe UI" pitchFamily="34" charset="-122"/>
+                <a:cs typeface="Segoe UI" pitchFamily="34" charset="-120"/>
+              </a:rPr>
+              <a:t>Vũ Văn Duy (26410031)  </a:t>
+            </a:r>
+            <a:br>
+              <a:rPr lang="en-US" sz="1000" dirty="0">
+                <a:solidFill>
+                  <a:srgbClr val="CBD5E1"/>
+                </a:solidFill>
+                <a:latin typeface="Segoe UI" pitchFamily="34" charset="0"/>
+                <a:ea typeface="Segoe UI" pitchFamily="34" charset="-122"/>
+                <a:cs typeface="Segoe UI" pitchFamily="34" charset="-120"/>
+              </a:rPr>
+            </a:br>
+            <a:r>
+              <a:rPr lang="en-US" sz="1000" dirty="0">
+                <a:solidFill>
+                  <a:srgbClr val="CBD5E1"/>
+                </a:solidFill>
+                <a:latin typeface="Segoe UI" pitchFamily="34" charset="0"/>
+                <a:ea typeface="Segoe UI" pitchFamily="34" charset="-122"/>
+                <a:cs typeface="Segoe UI" pitchFamily="34" charset="-120"/>
+              </a:rPr>
+              <a:t>Phạm Thành Trung (26410141)</a:t>
             </a:r>
             <a:endParaRPr lang="en-US" sz="1000" dirty="0"/>
           </a:p>
@@ -2989,7 +2810,7 @@
         </p:nvSpPr>
         <p:spPr>
           <a:xfrm>
-            <a:off x="502920" y="4434840"/>
+            <a:off x="502920" y="4732020"/>
             <a:ext cx="8138160" cy="228600"/>
           </a:xfrm>
           <a:prstGeom prst="rect">
@@ -3002,7 +2823,7 @@
           <a:bodyPr wrap="square" rtlCol="0" anchor="ctr"/>
           <a:lstStyle/>
           <a:p>
-            <a:pPr algn="ctr" indent="0" marL="0">
+            <a:pPr marL="0" indent="0" algn="ctr">
               <a:buNone/>
             </a:pPr>
             <a:r>
@@ -3036,6 +2857,7 @@
         <a:solidFill>
           <a:srgbClr val="1E295C"/>
         </a:solidFill>
+        <a:effectLst/>
       </p:bgPr>
     </p:bg>
     <p:spTree>
@@ -3073,7 +2895,7 @@
           <a:bodyPr wrap="square" rtlCol="0" anchor="ctr"/>
           <a:lstStyle/>
           <a:p>
-            <a:pPr algn="ctr" indent="0" marL="0">
+            <a:pPr marL="0" indent="0" algn="ctr">
               <a:buNone/>
             </a:pPr>
             <a:r>
@@ -3117,6 +2939,13 @@
             <a:prstDash val="solid"/>
           </a:ln>
         </p:spPr>
+        <p:txBody>
+          <a:bodyPr/>
+          <a:lstStyle/>
+          <a:p>
+            <a:endParaRPr lang="en-VN"/>
+          </a:p>
+        </p:txBody>
       </p:sp>
       <p:sp>
         <p:nvSpPr>
@@ -3139,7 +2968,7 @@
           <a:bodyPr wrap="square" rtlCol="0" anchor="ctr"/>
           <a:lstStyle/>
           <a:p>
-            <a:pPr algn="ctr" indent="0" marL="0">
+            <a:pPr marL="0" indent="0" algn="ctr">
               <a:buNone/>
             </a:pPr>
             <a:r>
@@ -3180,7 +3009,7 @@
           </a:bodyPr>
           <a:lstStyle/>
           <a:p>
-            <a:pPr algn="ctr" indent="0" marL="0">
+            <a:pPr marL="0" indent="0" algn="ctr">
               <a:buNone/>
             </a:pPr>
             <a:r>
@@ -3220,6 +3049,13 @@
             <a:prstDash val="solid"/>
           </a:ln>
         </p:spPr>
+        <p:txBody>
+          <a:bodyPr/>
+          <a:lstStyle/>
+          <a:p>
+            <a:endParaRPr lang="en-VN"/>
+          </a:p>
+        </p:txBody>
       </p:sp>
       <p:sp>
         <p:nvSpPr>
@@ -3247,6 +3083,13 @@
             <a:prstDash val="solid"/>
           </a:ln>
         </p:spPr>
+        <p:txBody>
+          <a:bodyPr/>
+          <a:lstStyle/>
+          <a:p>
+            <a:endParaRPr lang="en-VN"/>
+          </a:p>
+        </p:txBody>
       </p:sp>
       <p:sp>
         <p:nvSpPr>
@@ -3360,6 +3203,7 @@
         <a:solidFill>
           <a:srgbClr val="FFFFFF"/>
         </a:solidFill>
+        <a:effectLst/>
       </p:bgPr>
     </p:bg>
     <p:spTree>
@@ -3397,7 +3241,7 @@
           <a:bodyPr wrap="square" rtlCol="0" anchor="ctr"/>
           <a:lstStyle/>
           <a:p>
-            <a:pPr algn="ctr" indent="0" marL="0">
+            <a:pPr marL="0" indent="0" algn="ctr">
               <a:buNone/>
             </a:pPr>
             <a:r>
@@ -3438,7 +3282,7 @@
           </a:bodyPr>
           <a:lstStyle/>
           <a:p>
-            <a:pPr indent="0" marL="0">
+            <a:pPr marL="0" indent="0">
               <a:buNone/>
             </a:pPr>
             <a:r>
@@ -3478,6 +3322,13 @@
             <a:prstDash val="solid"/>
           </a:ln>
         </p:spPr>
+        <p:txBody>
+          <a:bodyPr/>
+          <a:lstStyle/>
+          <a:p>
+            <a:endParaRPr lang="en-VN"/>
+          </a:p>
+        </p:txBody>
       </p:sp>
       <p:sp>
         <p:nvSpPr>
@@ -3500,7 +3351,7 @@
           <a:bodyPr wrap="square" rtlCol="0" anchor="ctr"/>
           <a:lstStyle/>
           <a:p>
-            <a:pPr indent="0" marL="0">
+            <a:pPr marL="0" indent="0">
               <a:buNone/>
             </a:pPr>
             <a:r>
@@ -3539,7 +3390,7 @@
           <a:bodyPr wrap="square" rtlCol="0" anchor="ctr"/>
           <a:lstStyle/>
           <a:p>
-            <a:pPr algn="r" indent="0" marL="0">
+            <a:pPr marL="0" indent="0" algn="r">
               <a:buNone/>
             </a:pPr>
             <a:r>
@@ -3581,6 +3432,13 @@
             <a:prstDash val="solid"/>
           </a:ln>
         </p:spPr>
+        <p:txBody>
+          <a:bodyPr/>
+          <a:lstStyle/>
+          <a:p>
+            <a:endParaRPr lang="en-VN"/>
+          </a:p>
+        </p:txBody>
       </p:sp>
       <p:sp>
         <p:nvSpPr>
@@ -3601,6 +3459,13 @@
           </a:solidFill>
           <a:ln/>
         </p:spPr>
+        <p:txBody>
+          <a:bodyPr/>
+          <a:lstStyle/>
+          <a:p>
+            <a:endParaRPr lang="en-VN"/>
+          </a:p>
+        </p:txBody>
       </p:sp>
       <p:sp>
         <p:nvSpPr>
@@ -3623,7 +3488,7 @@
           <a:bodyPr wrap="square" rtlCol="0" anchor="ctr"/>
           <a:lstStyle/>
           <a:p>
-            <a:pPr algn="ctr" indent="0" marL="0">
+            <a:pPr marL="0" indent="0" algn="ctr">
               <a:buNone/>
             </a:pPr>
             <a:r>
@@ -3661,7 +3526,7 @@
           </a:bodyPr>
           <a:lstStyle/>
           <a:p>
-            <a:pPr algn="ctr" indent="0" marL="0">
+            <a:pPr marL="0" indent="0" algn="ctr">
               <a:lnSpc>
                 <a:spcPct val="115000"/>
               </a:lnSpc>
@@ -3678,7 +3543,7 @@
             <a:endParaRPr lang="en-US" sz="880" dirty="0"/>
           </a:p>
           <a:p>
-            <a:pPr algn="ctr" indent="0" marL="0">
+            <a:pPr marL="0" indent="0" algn="ctr">
               <a:lnSpc>
                 <a:spcPct val="115000"/>
               </a:lnSpc>
@@ -3695,7 +3560,7 @@
             <a:endParaRPr lang="en-US" sz="880" dirty="0"/>
           </a:p>
           <a:p>
-            <a:pPr algn="ctr" indent="0" marL="0">
+            <a:pPr marL="0" indent="0" algn="ctr">
               <a:lnSpc>
                 <a:spcPct val="115000"/>
               </a:lnSpc>
@@ -3734,7 +3599,7 @@
           <a:bodyPr wrap="square" rtlCol="0" anchor="ctr"/>
           <a:lstStyle/>
           <a:p>
-            <a:pPr algn="ctr" indent="0" marL="0">
+            <a:pPr marL="0" indent="0" algn="ctr">
               <a:buNone/>
             </a:pPr>
             <a:r>
@@ -3773,6 +3638,13 @@
             <a:prstDash val="solid"/>
           </a:ln>
         </p:spPr>
+        <p:txBody>
+          <a:bodyPr/>
+          <a:lstStyle/>
+          <a:p>
+            <a:endParaRPr lang="en-VN"/>
+          </a:p>
+        </p:txBody>
       </p:sp>
       <p:sp>
         <p:nvSpPr>
@@ -3793,6 +3665,13 @@
           </a:solidFill>
           <a:ln/>
         </p:spPr>
+        <p:txBody>
+          <a:bodyPr/>
+          <a:lstStyle/>
+          <a:p>
+            <a:endParaRPr lang="en-VN"/>
+          </a:p>
+        </p:txBody>
       </p:sp>
       <p:sp>
         <p:nvSpPr>
@@ -3815,7 +3694,7 @@
           <a:bodyPr wrap="square" rtlCol="0" anchor="ctr"/>
           <a:lstStyle/>
           <a:p>
-            <a:pPr algn="ctr" indent="0" marL="0">
+            <a:pPr marL="0" indent="0" algn="ctr">
               <a:buNone/>
             </a:pPr>
             <a:r>
@@ -3853,7 +3732,7 @@
           </a:bodyPr>
           <a:lstStyle/>
           <a:p>
-            <a:pPr algn="ctr" indent="0" marL="0">
+            <a:pPr marL="0" indent="0" algn="ctr">
               <a:lnSpc>
                 <a:spcPct val="115000"/>
               </a:lnSpc>
@@ -3870,7 +3749,7 @@
             <a:endParaRPr lang="en-US" sz="880" dirty="0"/>
           </a:p>
           <a:p>
-            <a:pPr algn="ctr" indent="0" marL="0">
+            <a:pPr marL="0" indent="0" algn="ctr">
               <a:lnSpc>
                 <a:spcPct val="115000"/>
               </a:lnSpc>
@@ -3887,7 +3766,7 @@
             <a:endParaRPr lang="en-US" sz="880" dirty="0"/>
           </a:p>
           <a:p>
-            <a:pPr algn="ctr" indent="0" marL="0">
+            <a:pPr marL="0" indent="0" algn="ctr">
               <a:lnSpc>
                 <a:spcPct val="115000"/>
               </a:lnSpc>
@@ -3926,7 +3805,7 @@
           <a:bodyPr wrap="square" rtlCol="0" anchor="ctr"/>
           <a:lstStyle/>
           <a:p>
-            <a:pPr algn="ctr" indent="0" marL="0">
+            <a:pPr marL="0" indent="0" algn="ctr">
               <a:buNone/>
             </a:pPr>
             <a:r>
@@ -3965,6 +3844,13 @@
             <a:prstDash val="solid"/>
           </a:ln>
         </p:spPr>
+        <p:txBody>
+          <a:bodyPr/>
+          <a:lstStyle/>
+          <a:p>
+            <a:endParaRPr lang="en-VN"/>
+          </a:p>
+        </p:txBody>
       </p:sp>
       <p:sp>
         <p:nvSpPr>
@@ -3985,6 +3871,13 @@
           </a:solidFill>
           <a:ln/>
         </p:spPr>
+        <p:txBody>
+          <a:bodyPr/>
+          <a:lstStyle/>
+          <a:p>
+            <a:endParaRPr lang="en-VN"/>
+          </a:p>
+        </p:txBody>
       </p:sp>
       <p:sp>
         <p:nvSpPr>
@@ -4007,7 +3900,7 @@
           <a:bodyPr wrap="square" rtlCol="0" anchor="ctr"/>
           <a:lstStyle/>
           <a:p>
-            <a:pPr algn="ctr" indent="0" marL="0">
+            <a:pPr marL="0" indent="0" algn="ctr">
               <a:buNone/>
             </a:pPr>
             <a:r>
@@ -4045,7 +3938,7 @@
           </a:bodyPr>
           <a:lstStyle/>
           <a:p>
-            <a:pPr algn="ctr" indent="0" marL="0">
+            <a:pPr marL="0" indent="0" algn="ctr">
               <a:lnSpc>
                 <a:spcPct val="115000"/>
               </a:lnSpc>
@@ -4062,7 +3955,7 @@
             <a:endParaRPr lang="en-US" sz="880" dirty="0"/>
           </a:p>
           <a:p>
-            <a:pPr algn="ctr" indent="0" marL="0">
+            <a:pPr marL="0" indent="0" algn="ctr">
               <a:lnSpc>
                 <a:spcPct val="115000"/>
               </a:lnSpc>
@@ -4079,7 +3972,7 @@
             <a:endParaRPr lang="en-US" sz="880" dirty="0"/>
           </a:p>
           <a:p>
-            <a:pPr algn="ctr" indent="0" marL="0">
+            <a:pPr marL="0" indent="0" algn="ctr">
               <a:lnSpc>
                 <a:spcPct val="115000"/>
               </a:lnSpc>
@@ -4118,7 +4011,7 @@
           <a:bodyPr wrap="square" rtlCol="0" anchor="ctr"/>
           <a:lstStyle/>
           <a:p>
-            <a:pPr algn="ctr" indent="0" marL="0">
+            <a:pPr marL="0" indent="0" algn="ctr">
               <a:buNone/>
             </a:pPr>
             <a:r>
@@ -4157,6 +4050,13 @@
             <a:prstDash val="solid"/>
           </a:ln>
         </p:spPr>
+        <p:txBody>
+          <a:bodyPr/>
+          <a:lstStyle/>
+          <a:p>
+            <a:endParaRPr lang="en-VN"/>
+          </a:p>
+        </p:txBody>
       </p:sp>
       <p:sp>
         <p:nvSpPr>
@@ -4177,6 +4077,13 @@
           </a:solidFill>
           <a:ln/>
         </p:spPr>
+        <p:txBody>
+          <a:bodyPr/>
+          <a:lstStyle/>
+          <a:p>
+            <a:endParaRPr lang="en-VN"/>
+          </a:p>
+        </p:txBody>
       </p:sp>
       <p:sp>
         <p:nvSpPr>
@@ -4199,7 +4106,7 @@
           <a:bodyPr wrap="square" rtlCol="0" anchor="ctr"/>
           <a:lstStyle/>
           <a:p>
-            <a:pPr algn="ctr" indent="0" marL="0">
+            <a:pPr marL="0" indent="0" algn="ctr">
               <a:buNone/>
             </a:pPr>
             <a:r>
@@ -4237,7 +4144,7 @@
           </a:bodyPr>
           <a:lstStyle/>
           <a:p>
-            <a:pPr algn="ctr" indent="0" marL="0">
+            <a:pPr marL="0" indent="0" algn="ctr">
               <a:lnSpc>
                 <a:spcPct val="115000"/>
               </a:lnSpc>
@@ -4254,7 +4161,7 @@
             <a:endParaRPr lang="en-US" sz="880" dirty="0"/>
           </a:p>
           <a:p>
-            <a:pPr algn="ctr" indent="0" marL="0">
+            <a:pPr marL="0" indent="0" algn="ctr">
               <a:lnSpc>
                 <a:spcPct val="115000"/>
               </a:lnSpc>
@@ -4271,7 +4178,7 @@
             <a:endParaRPr lang="en-US" sz="880" dirty="0"/>
           </a:p>
           <a:p>
-            <a:pPr algn="ctr" indent="0" marL="0">
+            <a:pPr marL="0" indent="0" algn="ctr">
               <a:lnSpc>
                 <a:spcPct val="115000"/>
               </a:lnSpc>
@@ -4310,7 +4217,7 @@
           <a:bodyPr wrap="square" rtlCol="0" anchor="ctr"/>
           <a:lstStyle/>
           <a:p>
-            <a:pPr algn="ctr" indent="0" marL="0">
+            <a:pPr marL="0" indent="0" algn="ctr">
               <a:buNone/>
             </a:pPr>
             <a:r>
@@ -4349,6 +4256,13 @@
             <a:prstDash val="solid"/>
           </a:ln>
         </p:spPr>
+        <p:txBody>
+          <a:bodyPr/>
+          <a:lstStyle/>
+          <a:p>
+            <a:endParaRPr lang="en-VN"/>
+          </a:p>
+        </p:txBody>
       </p:sp>
       <p:sp>
         <p:nvSpPr>
@@ -4369,6 +4283,13 @@
           </a:solidFill>
           <a:ln/>
         </p:spPr>
+        <p:txBody>
+          <a:bodyPr/>
+          <a:lstStyle/>
+          <a:p>
+            <a:endParaRPr lang="en-VN"/>
+          </a:p>
+        </p:txBody>
       </p:sp>
       <p:sp>
         <p:nvSpPr>
@@ -4391,7 +4312,7 @@
           <a:bodyPr wrap="square" rtlCol="0" anchor="ctr"/>
           <a:lstStyle/>
           <a:p>
-            <a:pPr algn="ctr" indent="0" marL="0">
+            <a:pPr marL="0" indent="0" algn="ctr">
               <a:buNone/>
             </a:pPr>
             <a:r>
@@ -4429,7 +4350,7 @@
           </a:bodyPr>
           <a:lstStyle/>
           <a:p>
-            <a:pPr algn="ctr" indent="0" marL="0">
+            <a:pPr marL="0" indent="0" algn="ctr">
               <a:lnSpc>
                 <a:spcPct val="115000"/>
               </a:lnSpc>
@@ -4446,7 +4367,7 @@
             <a:endParaRPr lang="en-US" sz="880" dirty="0"/>
           </a:p>
           <a:p>
-            <a:pPr algn="ctr" indent="0" marL="0">
+            <a:pPr marL="0" indent="0" algn="ctr">
               <a:lnSpc>
                 <a:spcPct val="115000"/>
               </a:lnSpc>
@@ -4463,7 +4384,7 @@
             <a:endParaRPr lang="en-US" sz="880" dirty="0"/>
           </a:p>
           <a:p>
-            <a:pPr algn="ctr" indent="0" marL="0">
+            <a:pPr marL="0" indent="0" algn="ctr">
               <a:lnSpc>
                 <a:spcPct val="115000"/>
               </a:lnSpc>
@@ -4502,7 +4423,7 @@
           <a:bodyPr wrap="square" rtlCol="0" anchor="ctr"/>
           <a:lstStyle/>
           <a:p>
-            <a:pPr algn="ctr" indent="0" marL="0">
+            <a:pPr marL="0" indent="0" algn="ctr">
               <a:buNone/>
             </a:pPr>
             <a:r>
@@ -4541,6 +4462,13 @@
             <a:prstDash val="solid"/>
           </a:ln>
         </p:spPr>
+        <p:txBody>
+          <a:bodyPr/>
+          <a:lstStyle/>
+          <a:p>
+            <a:endParaRPr lang="en-VN"/>
+          </a:p>
+        </p:txBody>
       </p:sp>
       <p:sp>
         <p:nvSpPr>
@@ -4561,6 +4489,13 @@
           </a:solidFill>
           <a:ln/>
         </p:spPr>
+        <p:txBody>
+          <a:bodyPr/>
+          <a:lstStyle/>
+          <a:p>
+            <a:endParaRPr lang="en-VN"/>
+          </a:p>
+        </p:txBody>
       </p:sp>
       <p:sp>
         <p:nvSpPr>
@@ -4583,7 +4518,7 @@
           <a:bodyPr wrap="square" rtlCol="0" anchor="ctr"/>
           <a:lstStyle/>
           <a:p>
-            <a:pPr algn="ctr" indent="0" marL="0">
+            <a:pPr marL="0" indent="0" algn="ctr">
               <a:buNone/>
             </a:pPr>
             <a:r>
@@ -4621,7 +4556,7 @@
           </a:bodyPr>
           <a:lstStyle/>
           <a:p>
-            <a:pPr algn="ctr" indent="0" marL="0">
+            <a:pPr marL="0" indent="0" algn="ctr">
               <a:lnSpc>
                 <a:spcPct val="115000"/>
               </a:lnSpc>
@@ -4638,7 +4573,7 @@
             <a:endParaRPr lang="en-US" sz="880" dirty="0"/>
           </a:p>
           <a:p>
-            <a:pPr algn="ctr" indent="0" marL="0">
+            <a:pPr marL="0" indent="0" algn="ctr">
               <a:lnSpc>
                 <a:spcPct val="115000"/>
               </a:lnSpc>
@@ -4655,7 +4590,7 @@
             <a:endParaRPr lang="en-US" sz="880" dirty="0"/>
           </a:p>
           <a:p>
-            <a:pPr algn="ctr" indent="0" marL="0">
+            <a:pPr marL="0" indent="0" algn="ctr">
               <a:lnSpc>
                 <a:spcPct val="115000"/>
               </a:lnSpc>
@@ -4697,6 +4632,13 @@
             <a:prstDash val="solid"/>
           </a:ln>
         </p:spPr>
+        <p:txBody>
+          <a:bodyPr/>
+          <a:lstStyle/>
+          <a:p>
+            <a:endParaRPr lang="en-VN"/>
+          </a:p>
+        </p:txBody>
       </p:sp>
       <p:sp>
         <p:nvSpPr>
@@ -4719,7 +4661,7 @@
           <a:bodyPr wrap="square" rtlCol="0" anchor="ctr"/>
           <a:lstStyle/>
           <a:p>
-            <a:pPr indent="0" marL="0">
+            <a:pPr marL="0" indent="0">
               <a:buNone/>
             </a:pPr>
             <a:r>
@@ -4873,6 +4815,7 @@
         <a:solidFill>
           <a:srgbClr val="FFFFFF"/>
         </a:solidFill>
+        <a:effectLst/>
       </p:bgPr>
     </p:bg>
     <p:spTree>
@@ -4910,7 +4853,7 @@
           <a:bodyPr wrap="square" rtlCol="0" anchor="ctr"/>
           <a:lstStyle/>
           <a:p>
-            <a:pPr algn="ctr" indent="0" marL="0">
+            <a:pPr marL="0" indent="0" algn="ctr">
               <a:buNone/>
             </a:pPr>
             <a:r>
@@ -4951,7 +4894,7 @@
           </a:bodyPr>
           <a:lstStyle/>
           <a:p>
-            <a:pPr indent="0" marL="0">
+            <a:pPr marL="0" indent="0">
               <a:buNone/>
             </a:pPr>
             <a:r>
@@ -4991,6 +4934,13 @@
             <a:prstDash val="solid"/>
           </a:ln>
         </p:spPr>
+        <p:txBody>
+          <a:bodyPr/>
+          <a:lstStyle/>
+          <a:p>
+            <a:endParaRPr lang="en-VN"/>
+          </a:p>
+        </p:txBody>
       </p:sp>
       <p:sp>
         <p:nvSpPr>
@@ -5013,7 +4963,7 @@
           <a:bodyPr wrap="square" rtlCol="0" anchor="ctr"/>
           <a:lstStyle/>
           <a:p>
-            <a:pPr indent="0" marL="0">
+            <a:pPr marL="0" indent="0">
               <a:buNone/>
             </a:pPr>
             <a:r>
@@ -5052,7 +5002,7 @@
           <a:bodyPr wrap="square" rtlCol="0" anchor="ctr"/>
           <a:lstStyle/>
           <a:p>
-            <a:pPr algn="r" indent="0" marL="0">
+            <a:pPr marL="0" indent="0" algn="r">
               <a:buNone/>
             </a:pPr>
             <a:r>
@@ -5094,6 +5044,13 @@
             <a:prstDash val="solid"/>
           </a:ln>
         </p:spPr>
+        <p:txBody>
+          <a:bodyPr/>
+          <a:lstStyle/>
+          <a:p>
+            <a:endParaRPr lang="en-VN"/>
+          </a:p>
+        </p:txBody>
       </p:sp>
       <p:sp>
         <p:nvSpPr>
@@ -5114,6 +5071,13 @@
           </a:solidFill>
           <a:ln/>
         </p:spPr>
+        <p:txBody>
+          <a:bodyPr/>
+          <a:lstStyle/>
+          <a:p>
+            <a:endParaRPr lang="en-VN"/>
+          </a:p>
+        </p:txBody>
       </p:sp>
       <p:sp>
         <p:nvSpPr>
@@ -5136,7 +5100,7 @@
           <a:bodyPr wrap="square" rtlCol="0" anchor="ctr"/>
           <a:lstStyle/>
           <a:p>
-            <a:pPr algn="ctr" indent="0" marL="0">
+            <a:pPr marL="0" indent="0" algn="ctr">
               <a:buNone/>
             </a:pPr>
             <a:r>
@@ -5159,8 +5123,8 @@
         </p:nvSpPr>
         <p:spPr>
           <a:xfrm>
-            <a:off x="640080" y="1444752"/>
-            <a:ext cx="3680460" cy="329184"/>
+            <a:off x="640080" y="1444751"/>
+            <a:ext cx="3680460" cy="482983"/>
           </a:xfrm>
           <a:prstGeom prst="rect">
             <a:avLst/>
@@ -5175,25 +5139,32 @@
             <a:prstDash val="solid"/>
           </a:ln>
         </p:spPr>
+        <p:txBody>
+          <a:bodyPr/>
+          <a:lstStyle/>
+          <a:p>
+            <a:endParaRPr lang="en-VN"/>
+          </a:p>
+        </p:txBody>
       </p:sp>
       <p:pic>
         <p:nvPicPr>
-          <p:cNvPr id="11" name="Image 0" descr="D:\Trí tuệ nhân tạo\HK2\Trí tuệ nhân tạo\CS106-Team09-Fraud-Detection\draft\fraud-detection\slide\slide_assets\formula_rf_gini.png">    </p:cNvPr>
+          <p:cNvPr id="11" name="Image 0" descr="D:\Trí tuệ nhân tạo\HK2\Trí tuệ nhân tạo\CS106-Team09-Fraud-Detection\draft\fraud-detection\slide\slide_assets\formula_rf_gini.png"/>
           <p:cNvPicPr>
             <a:picLocks noChangeAspect="1"/>
           </p:cNvPicPr>
           <p:nvPr/>
         </p:nvPicPr>
         <p:blipFill>
-          <a:blip r:embed="rId1"/>
+          <a:blip r:embed="rId3"/>
           <a:stretch>
             <a:fillRect/>
           </a:stretch>
         </p:blipFill>
         <p:spPr>
           <a:xfrm>
-            <a:off x="905256" y="1463040"/>
-            <a:ext cx="2770632" cy="301752"/>
+            <a:off x="1324981" y="1489645"/>
+            <a:ext cx="2770632" cy="393193"/>
           </a:xfrm>
           <a:prstGeom prst="rect">
             <a:avLst/>
@@ -5208,7 +5179,7 @@
         </p:nvSpPr>
         <p:spPr>
           <a:xfrm>
-            <a:off x="640080" y="1828800"/>
+            <a:off x="640080" y="2019175"/>
             <a:ext cx="3680460" cy="384048"/>
           </a:xfrm>
           <a:prstGeom prst="rect">
@@ -5224,6 +5195,13 @@
             <a:prstDash val="solid"/>
           </a:ln>
         </p:spPr>
+        <p:txBody>
+          <a:bodyPr/>
+          <a:lstStyle/>
+          <a:p>
+            <a:endParaRPr lang="en-VN"/>
+          </a:p>
+        </p:txBody>
       </p:sp>
       <p:sp>
         <p:nvSpPr>
@@ -5233,7 +5211,7 @@
         </p:nvSpPr>
         <p:spPr>
           <a:xfrm>
-            <a:off x="685800" y="1856232"/>
+            <a:off x="685800" y="2048256"/>
             <a:ext cx="3589020" cy="329184"/>
           </a:xfrm>
           <a:prstGeom prst="rect">
@@ -5246,7 +5224,7 @@
           <a:bodyPr wrap="square" rtlCol="0" anchor="ctr"/>
           <a:lstStyle/>
           <a:p>
-            <a:pPr indent="0" marL="0">
+            <a:pPr marL="0" indent="0">
               <a:lnSpc>
                 <a:spcPct val="115000"/>
               </a:lnSpc>
@@ -5266,7 +5244,7 @@
             <a:endParaRPr lang="en-US" sz="820" dirty="0"/>
           </a:p>
           <a:p>
-            <a:pPr indent="0" marL="0">
+            <a:pPr marL="0" indent="0">
               <a:lnSpc>
                 <a:spcPct val="115000"/>
               </a:lnSpc>
@@ -5310,7 +5288,7 @@
           </a:bodyPr>
           <a:lstStyle/>
           <a:p>
-            <a:pPr indent="0" marL="0">
+            <a:pPr marL="0" indent="0">
               <a:lnSpc>
                 <a:spcPct val="120000"/>
               </a:lnSpc>
@@ -5324,12 +5302,6 @@
               </a:rPr>
               <a:t>• Cơ chế: </a:t>
             </a:r>
-            <a:pPr indent="0" marL="0">
-              <a:lnSpc>
-                <a:spcPct val="120000"/>
-              </a:lnSpc>
-              <a:buNone/>
-            </a:pPr>
             <a:r>
               <a:rPr lang="en-US" sz="900" dirty="0">
                 <a:solidFill>
@@ -5339,12 +5311,6 @@
               <a:t>Tập hợp 200 cây quyết định độc lập (Bagging) với kỹ thuật lấy mẫu ngẫu nhiên không gian con đặc trưng (Random Subspace).
 </a:t>
             </a:r>
-            <a:pPr indent="0" marL="0">
-              <a:lnSpc>
-                <a:spcPct val="120000"/>
-              </a:lnSpc>
-              <a:buNone/>
-            </a:pPr>
             <a:r>
               <a:rPr lang="en-US" sz="900" b="1" dirty="0">
                 <a:solidFill>
@@ -5353,12 +5319,6 @@
               </a:rPr>
               <a:t>• Peak Precision: </a:t>
             </a:r>
-            <a:pPr indent="0" marL="0">
-              <a:lnSpc>
-                <a:spcPct val="120000"/>
-              </a:lnSpc>
-              <a:buNone/>
-            </a:pPr>
             <a:r>
               <a:rPr lang="en-US" sz="900" dirty="0">
                 <a:solidFill>
@@ -5368,12 +5328,6 @@
               <a:t>Chỉ sinh duy nhất 1 False Positive trên 38,357 giao dịch hợp lệ (Precision = 99.94%).
 </a:t>
             </a:r>
-            <a:pPr indent="0" marL="0">
-              <a:lnSpc>
-                <a:spcPct val="120000"/>
-              </a:lnSpc>
-              <a:buNone/>
-            </a:pPr>
             <a:r>
               <a:rPr lang="en-US" sz="900" b="1" dirty="0">
                 <a:solidFill>
@@ -5382,12 +5336,6 @@
               </a:rPr>
               <a:t>• Hạn chế: </a:t>
             </a:r>
-            <a:pPr indent="0" marL="0">
-              <a:lnSpc>
-                <a:spcPct val="120000"/>
-              </a:lnSpc>
-              <a:buNone/>
-            </a:pPr>
             <a:r>
               <a:rPr lang="en-US" sz="900" dirty="0">
                 <a:solidFill>
@@ -5424,6 +5372,13 @@
             <a:prstDash val="solid"/>
           </a:ln>
         </p:spPr>
+        <p:txBody>
+          <a:bodyPr/>
+          <a:lstStyle/>
+          <a:p>
+            <a:endParaRPr lang="en-VN"/>
+          </a:p>
+        </p:txBody>
       </p:sp>
       <p:sp>
         <p:nvSpPr>
@@ -5444,6 +5399,13 @@
           </a:solidFill>
           <a:ln/>
         </p:spPr>
+        <p:txBody>
+          <a:bodyPr/>
+          <a:lstStyle/>
+          <a:p>
+            <a:endParaRPr lang="en-VN"/>
+          </a:p>
+        </p:txBody>
       </p:sp>
       <p:sp>
         <p:nvSpPr>
@@ -5466,7 +5428,7 @@
           <a:bodyPr wrap="square" rtlCol="0" anchor="ctr"/>
           <a:lstStyle/>
           <a:p>
-            <a:pPr algn="ctr" indent="0" marL="0">
+            <a:pPr marL="0" indent="0" algn="ctr">
               <a:buNone/>
             </a:pPr>
             <a:r>
@@ -5490,7 +5452,7 @@
         <p:spPr>
           <a:xfrm>
             <a:off x="4823460" y="1444752"/>
-            <a:ext cx="3680460" cy="329184"/>
+            <a:ext cx="3680460" cy="482982"/>
           </a:xfrm>
           <a:prstGeom prst="rect">
             <a:avLst/>
@@ -5505,25 +5467,32 @@
             <a:prstDash val="solid"/>
           </a:ln>
         </p:spPr>
+        <p:txBody>
+          <a:bodyPr/>
+          <a:lstStyle/>
+          <a:p>
+            <a:endParaRPr lang="en-VN"/>
+          </a:p>
+        </p:txBody>
       </p:sp>
       <p:pic>
         <p:nvPicPr>
-          <p:cNvPr id="19" name="Image 1" descr="D:\Trí tuệ nhân tạo\HK2\Trí tuệ nhân tạo\CS106-Team09-Fraud-Detection\draft\fraud-detection\slide\slide_assets\formula_xgb_objective.png">    </p:cNvPr>
+          <p:cNvPr id="19" name="Image 1" descr="D:\Trí tuệ nhân tạo\HK2\Trí tuệ nhân tạo\CS106-Team09-Fraud-Detection\draft\fraud-detection\slide\slide_assets\formula_xgb_objective.png"/>
           <p:cNvPicPr>
             <a:picLocks noChangeAspect="1"/>
           </p:cNvPicPr>
           <p:nvPr/>
         </p:nvPicPr>
         <p:blipFill>
-          <a:blip r:embed="rId2"/>
+          <a:blip r:embed="rId4"/>
           <a:stretch>
             <a:fillRect/>
           </a:stretch>
         </p:blipFill>
         <p:spPr>
           <a:xfrm>
-            <a:off x="4849978" y="1463040"/>
-            <a:ext cx="3281782" cy="274320"/>
+            <a:off x="5005441" y="1468659"/>
+            <a:ext cx="3281782" cy="419798"/>
           </a:xfrm>
           <a:prstGeom prst="rect">
             <a:avLst/>
@@ -5538,7 +5507,7 @@
         </p:nvSpPr>
         <p:spPr>
           <a:xfrm>
-            <a:off x="4823460" y="1828800"/>
+            <a:off x="4823460" y="2019175"/>
             <a:ext cx="3680460" cy="384048"/>
           </a:xfrm>
           <a:prstGeom prst="rect">
@@ -5554,6 +5523,13 @@
             <a:prstDash val="solid"/>
           </a:ln>
         </p:spPr>
+        <p:txBody>
+          <a:bodyPr/>
+          <a:lstStyle/>
+          <a:p>
+            <a:endParaRPr lang="en-VN"/>
+          </a:p>
+        </p:txBody>
       </p:sp>
       <p:sp>
         <p:nvSpPr>
@@ -5563,7 +5539,7 @@
         </p:nvSpPr>
         <p:spPr>
           <a:xfrm>
-            <a:off x="4869180" y="1856232"/>
+            <a:off x="4869180" y="2035738"/>
             <a:ext cx="3589020" cy="329184"/>
           </a:xfrm>
           <a:prstGeom prst="rect">
@@ -5576,7 +5552,7 @@
           <a:bodyPr wrap="square" rtlCol="0" anchor="ctr"/>
           <a:lstStyle/>
           <a:p>
-            <a:pPr indent="0" marL="0">
+            <a:pPr marL="0" indent="0">
               <a:lnSpc>
                 <a:spcPct val="115000"/>
               </a:lnSpc>
@@ -5596,7 +5572,7 @@
             <a:endParaRPr lang="en-US" sz="800" dirty="0"/>
           </a:p>
           <a:p>
-            <a:pPr indent="0" marL="0">
+            <a:pPr marL="0" indent="0">
               <a:lnSpc>
                 <a:spcPct val="115000"/>
               </a:lnSpc>
@@ -5640,7 +5616,7 @@
           </a:bodyPr>
           <a:lstStyle/>
           <a:p>
-            <a:pPr indent="0" marL="0">
+            <a:pPr marL="0" indent="0">
               <a:lnSpc>
                 <a:spcPct val="120000"/>
               </a:lnSpc>
@@ -5654,12 +5630,6 @@
               </a:rPr>
               <a:t>• Cơ chế: </a:t>
             </a:r>
-            <a:pPr indent="0" marL="0">
-              <a:lnSpc>
-                <a:spcPct val="120000"/>
-              </a:lnSpc>
-              <a:buNone/>
-            </a:pPr>
             <a:r>
               <a:rPr lang="en-US" sz="900" dirty="0">
                 <a:solidFill>
@@ -5669,12 +5639,6 @@
               <a:t>Gradient Boosting cải tiến với gradient bậc 1 (g_i) và Hessian bậc 2 (h_i), bổ sung L2 regularization chống Overfitting.
 </a:t>
             </a:r>
-            <a:pPr indent="0" marL="0">
-              <a:lnSpc>
-                <a:spcPct val="120000"/>
-              </a:lnSpc>
-              <a:buNone/>
-            </a:pPr>
             <a:r>
               <a:rPr lang="en-US" sz="900" b="1" dirty="0">
                 <a:solidFill>
@@ -5683,12 +5647,6 @@
               </a:rPr>
               <a:t>• Ưu thế Vượt trội: </a:t>
             </a:r>
-            <a:pPr indent="0" marL="0">
-              <a:lnSpc>
-                <a:spcPct val="120000"/>
-              </a:lnSpc>
-              <a:buNone/>
-            </a:pPr>
             <a:r>
               <a:rPr lang="en-US" sz="900" dirty="0">
                 <a:solidFill>
@@ -5698,12 +5656,6 @@
               <a:t>F1-Score đạt 99.63% tương đương RF, nhưng tốc độ huấn luyện nhanh hơn ~20 lần (57.94s; xgb_smote_summary).
 </a:t>
             </a:r>
-            <a:pPr indent="0" marL="0">
-              <a:lnSpc>
-                <a:spcPct val="120000"/>
-              </a:lnSpc>
-              <a:buNone/>
-            </a:pPr>
             <a:r>
               <a:rPr lang="en-US" sz="900" b="1" dirty="0">
                 <a:solidFill>
@@ -5712,12 +5664,6 @@
               </a:rPr>
               <a:t>• Production Ready: </a:t>
             </a:r>
-            <a:pPr indent="0" marL="0">
-              <a:lnSpc>
-                <a:spcPct val="120000"/>
-              </a:lnSpc>
-              <a:buNone/>
-            </a:pPr>
             <a:r>
               <a:rPr lang="en-US" sz="900" dirty="0">
                 <a:solidFill>
@@ -5746,6 +5692,7 @@
         <a:solidFill>
           <a:srgbClr val="FFFFFF"/>
         </a:solidFill>
+        <a:effectLst/>
       </p:bgPr>
     </p:bg>
     <p:spTree>
@@ -5783,7 +5730,7 @@
           <a:bodyPr wrap="square" rtlCol="0" anchor="ctr"/>
           <a:lstStyle/>
           <a:p>
-            <a:pPr algn="ctr" indent="0" marL="0">
+            <a:pPr marL="0" indent="0" algn="ctr">
               <a:buNone/>
             </a:pPr>
             <a:r>
@@ -5824,7 +5771,7 @@
           </a:bodyPr>
           <a:lstStyle/>
           <a:p>
-            <a:pPr indent="0" marL="0">
+            <a:pPr marL="0" indent="0">
               <a:buNone/>
             </a:pPr>
             <a:r>
@@ -5864,6 +5811,13 @@
             <a:prstDash val="solid"/>
           </a:ln>
         </p:spPr>
+        <p:txBody>
+          <a:bodyPr/>
+          <a:lstStyle/>
+          <a:p>
+            <a:endParaRPr lang="en-VN"/>
+          </a:p>
+        </p:txBody>
       </p:sp>
       <p:sp>
         <p:nvSpPr>
@@ -5886,7 +5840,7 @@
           <a:bodyPr wrap="square" rtlCol="0" anchor="ctr"/>
           <a:lstStyle/>
           <a:p>
-            <a:pPr indent="0" marL="0">
+            <a:pPr marL="0" indent="0">
               <a:buNone/>
             </a:pPr>
             <a:r>
@@ -5925,7 +5879,7 @@
           <a:bodyPr wrap="square" rtlCol="0" anchor="ctr"/>
           <a:lstStyle/>
           <a:p>
-            <a:pPr algn="r" indent="0" marL="0">
+            <a:pPr marL="0" indent="0" algn="r">
               <a:buNone/>
             </a:pPr>
             <a:r>
@@ -5967,6 +5921,13 @@
             <a:prstDash val="solid"/>
           </a:ln>
         </p:spPr>
+        <p:txBody>
+          <a:bodyPr/>
+          <a:lstStyle/>
+          <a:p>
+            <a:endParaRPr lang="en-VN"/>
+          </a:p>
+        </p:txBody>
       </p:sp>
       <p:sp>
         <p:nvSpPr>
@@ -5989,7 +5950,7 @@
           <a:bodyPr wrap="square" rtlCol="0" anchor="ctr"/>
           <a:lstStyle/>
           <a:p>
-            <a:pPr indent="0" marL="0">
+            <a:pPr marL="0" indent="0">
               <a:buNone/>
             </a:pPr>
             <a:r>
@@ -6028,6 +5989,13 @@
             <a:prstDash val="solid"/>
           </a:ln>
         </p:spPr>
+        <p:txBody>
+          <a:bodyPr/>
+          <a:lstStyle/>
+          <a:p>
+            <a:endParaRPr lang="en-VN"/>
+          </a:p>
+        </p:txBody>
       </p:sp>
       <p:sp>
         <p:nvSpPr>
@@ -6050,7 +6018,7 @@
           <a:bodyPr wrap="square" rtlCol="0" anchor="ctr"/>
           <a:lstStyle/>
           <a:p>
-            <a:pPr indent="0" marL="0">
+            <a:pPr marL="0" indent="0">
               <a:buNone/>
             </a:pPr>
             <a:r>
@@ -6076,8 +6044,8 @@
         </p:nvSpPr>
         <p:spPr>
           <a:xfrm>
-            <a:off x="640080" y="1627632"/>
-            <a:ext cx="4114800" cy="402336"/>
+            <a:off x="640080" y="1755649"/>
+            <a:ext cx="4114800" cy="506576"/>
           </a:xfrm>
           <a:prstGeom prst="rect">
             <a:avLst/>
@@ -6092,24 +6060,31 @@
             <a:prstDash val="solid"/>
           </a:ln>
         </p:spPr>
+        <p:txBody>
+          <a:bodyPr/>
+          <a:lstStyle/>
+          <a:p>
+            <a:endParaRPr lang="en-VN"/>
+          </a:p>
+        </p:txBody>
       </p:sp>
       <p:pic>
         <p:nvPicPr>
-          <p:cNvPr id="12" name="Image 0" descr="D:\Trí tuệ nhân tạo\HK2\Trí tuệ nhân tạo\CS106-Team09-Fraud-Detection\draft\fraud-detection\slide\slide_assets\formula_ae_reconstruction.png">    </p:cNvPr>
+          <p:cNvPr id="12" name="Image 0" descr="D:\Trí tuệ nhân tạo\HK2\Trí tuệ nhân tạo\CS106-Team09-Fraud-Detection\draft\fraud-detection\slide\slide_assets\formula_ae_reconstruction.png"/>
           <p:cNvPicPr>
             <a:picLocks noChangeAspect="1"/>
           </p:cNvPicPr>
           <p:nvPr/>
         </p:nvPicPr>
         <p:blipFill>
-          <a:blip r:embed="rId1"/>
+          <a:blip r:embed="rId3"/>
           <a:stretch>
             <a:fillRect/>
           </a:stretch>
         </p:blipFill>
         <p:spPr>
           <a:xfrm>
-            <a:off x="1028700" y="1633118"/>
+            <a:off x="1571853" y="1837943"/>
             <a:ext cx="2251253" cy="391363"/>
           </a:xfrm>
           <a:prstGeom prst="rect">
@@ -6140,7 +6115,7 @@
           </a:bodyPr>
           <a:lstStyle/>
           <a:p>
-            <a:pPr indent="0" marL="0">
+            <a:pPr marL="0" indent="0">
               <a:lnSpc>
                 <a:spcPct val="118000"/>
               </a:lnSpc>
@@ -6155,12 +6130,6 @@
               <a:t>1. Giai đoạn Học Chuẩn (Normal Manifold):
 </a:t>
             </a:r>
-            <a:pPr indent="0" marL="0">
-              <a:lnSpc>
-                <a:spcPct val="118000"/>
-              </a:lnSpc>
-              <a:buNone/>
-            </a:pPr>
             <a:r>
               <a:rPr lang="en-US" sz="900" dirty="0">
                 <a:solidFill>
@@ -6170,12 +6139,6 @@
               <a:t>• Mạng chỉ huấn luyện trên giao dịch HỢP LỆ, học cách nén và tái tạo cấu trúc luồng tiền bình thường.
 </a:t>
             </a:r>
-            <a:pPr indent="0" marL="0">
-              <a:lnSpc>
-                <a:spcPct val="118000"/>
-              </a:lnSpc>
-              <a:buNone/>
-            </a:pPr>
             <a:r>
               <a:rPr lang="en-US" sz="900" b="1" dirty="0">
                 <a:solidFill>
@@ -6185,12 +6148,6 @@
               <a:t>2. Giai đoạn Bắt Lỗi (Anomaly Spike):
 </a:t>
             </a:r>
-            <a:pPr indent="0" marL="0">
-              <a:lnSpc>
-                <a:spcPct val="118000"/>
-              </a:lnSpc>
-              <a:buNone/>
-            </a:pPr>
             <a:r>
               <a:rPr lang="en-US" sz="900" dirty="0">
                 <a:solidFill>
@@ -6200,12 +6157,6 @@
               <a:t>• Khi gặp giao dịch gian lận bất thường, mạng không thể tái tạo chính xác → Sai số MSE tăng vọt.
 </a:t>
             </a:r>
-            <a:pPr indent="0" marL="0">
-              <a:lnSpc>
-                <a:spcPct val="118000"/>
-              </a:lnSpc>
-              <a:buNone/>
-            </a:pPr>
             <a:r>
               <a:rPr lang="en-US" sz="900" b="1" dirty="0">
                 <a:solidFill>
@@ -6215,12 +6166,6 @@
               <a:t>3. Giai đoạn Ra Quyết định (Thresholding):
 </a:t>
             </a:r>
-            <a:pPr indent="0" marL="0">
-              <a:lnSpc>
-                <a:spcPct val="118000"/>
-              </a:lnSpc>
-              <a:buNone/>
-            </a:pPr>
             <a:r>
               <a:rPr lang="en-US" sz="900" dirty="0">
                 <a:solidFill>
@@ -6257,6 +6202,13 @@
             <a:prstDash val="solid"/>
           </a:ln>
         </p:spPr>
+        <p:txBody>
+          <a:bodyPr/>
+          <a:lstStyle/>
+          <a:p>
+            <a:endParaRPr lang="en-VN"/>
+          </a:p>
+        </p:txBody>
       </p:sp>
       <p:sp>
         <p:nvSpPr>
@@ -6279,7 +6231,7 @@
           <a:bodyPr wrap="square" rtlCol="0" anchor="ctr"/>
           <a:lstStyle/>
           <a:p>
-            <a:pPr indent="0" marL="0">
+            <a:pPr marL="0" indent="0">
               <a:buNone/>
             </a:pPr>
             <a:r>
@@ -6299,7 +6251,7 @@
       </p:sp>
       <p:graphicFrame>
         <p:nvGraphicFramePr>
-          <p:cNvPr id="14" name="Table 0"/>
+          <p:cNvPr id="16" name="Table 0"/>
           <p:cNvGraphicFramePr>
             <a:graphicFrameLocks noGrp="1"/>
           </p:cNvGraphicFramePr>
@@ -6313,16 +6265,34 @@
         </p:nvGraphicFramePr>
         <p:xfrm>
           <a:off x="5120640" y="1243584"/>
-          <a:ext cx="3520440" cy="914400"/>
+          <a:ext cx="3520440" cy="1653540"/>
         </p:xfrm>
         <a:graphic>
           <a:graphicData uri="http://schemas.openxmlformats.org/drawingml/2006/table">
             <a:tbl>
               <a:tblPr/>
               <a:tblGrid>
-                <a:gridCol w="1232154"/>
-                <a:gridCol w="1056132"/>
-                <a:gridCol w="1232154"/>
+                <a:gridCol w="1232154">
+                  <a:extLst>
+                    <a:ext uri="{9D8B030D-6E8A-4147-A177-3AD203B41FA5}">
+                      <a16:colId xmlns:a16="http://schemas.microsoft.com/office/drawing/2014/main" val="20000"/>
+                    </a:ext>
+                  </a:extLst>
+                </a:gridCol>
+                <a:gridCol w="1056132">
+                  <a:extLst>
+                    <a:ext uri="{9D8B030D-6E8A-4147-A177-3AD203B41FA5}">
+                      <a16:colId xmlns:a16="http://schemas.microsoft.com/office/drawing/2014/main" val="20001"/>
+                    </a:ext>
+                  </a:extLst>
+                </a:gridCol>
+                <a:gridCol w="1232154">
+                  <a:extLst>
+                    <a:ext uri="{9D8B030D-6E8A-4147-A177-3AD203B41FA5}">
+                      <a16:colId xmlns:a16="http://schemas.microsoft.com/office/drawing/2014/main" val="20002"/>
+                    </a:ext>
+                  </a:extLst>
+                </a:gridCol>
               </a:tblGrid>
               <a:tr h="0">
                 <a:tc>
@@ -6330,7 +6300,7 @@
                     <a:bodyPr/>
                     <a:lstStyle/>
                     <a:p>
-                      <a:pPr algn="ctr" indent="0" marL="0">
+                      <a:pPr marL="0" indent="0" algn="ctr">
                         <a:buNone/>
                       </a:pPr>
                       <a:r>
@@ -6398,7 +6368,7 @@
                     <a:bodyPr/>
                     <a:lstStyle/>
                     <a:p>
-                      <a:pPr algn="ctr" indent="0" marL="0">
+                      <a:pPr marL="0" indent="0" algn="ctr">
                         <a:buNone/>
                       </a:pPr>
                       <a:r>
@@ -6466,7 +6436,7 @@
                     <a:bodyPr/>
                     <a:lstStyle/>
                     <a:p>
-                      <a:pPr algn="ctr" indent="0" marL="0">
+                      <a:pPr marL="0" indent="0" algn="ctr">
                         <a:buNone/>
                       </a:pPr>
                       <a:r>
@@ -6529,6 +6499,11 @@
                     </a:solidFill>
                   </a:tcPr>
                 </a:tc>
+                <a:extLst>
+                  <a:ext uri="{0D108BD9-81ED-4DB2-BD59-A6C34878D82A}">
+                    <a16:rowId xmlns:a16="http://schemas.microsoft.com/office/drawing/2014/main" val="10000"/>
+                  </a:ext>
+                </a:extLst>
               </a:tr>
               <a:tr h="0">
                 <a:tc>
@@ -6536,7 +6511,7 @@
                     <a:bodyPr/>
                     <a:lstStyle/>
                     <a:p>
-                      <a:pPr indent="0" marL="0">
+                      <a:pPr marL="0" indent="0">
                         <a:buNone/>
                       </a:pPr>
                       <a:r>
@@ -6604,7 +6579,7 @@
                     <a:bodyPr/>
                     <a:lstStyle/>
                     <a:p>
-                      <a:pPr indent="0" marL="0">
+                      <a:pPr marL="0" indent="0">
                         <a:buNone/>
                       </a:pPr>
                       <a:r>
@@ -6672,7 +6647,7 @@
                     <a:bodyPr/>
                     <a:lstStyle/>
                     <a:p>
-                      <a:pPr indent="0" marL="0">
+                      <a:pPr marL="0" indent="0">
                         <a:buNone/>
                       </a:pPr>
                       <a:r>
@@ -6735,6 +6710,11 @@
                     </a:solidFill>
                   </a:tcPr>
                 </a:tc>
+                <a:extLst>
+                  <a:ext uri="{0D108BD9-81ED-4DB2-BD59-A6C34878D82A}">
+                    <a16:rowId xmlns:a16="http://schemas.microsoft.com/office/drawing/2014/main" val="10001"/>
+                  </a:ext>
+                </a:extLst>
               </a:tr>
               <a:tr h="0">
                 <a:tc>
@@ -6742,7 +6722,7 @@
                     <a:bodyPr/>
                     <a:lstStyle/>
                     <a:p>
-                      <a:pPr indent="0" marL="0">
+                      <a:pPr marL="0" indent="0">
                         <a:buNone/>
                       </a:pPr>
                       <a:r>
@@ -6810,7 +6790,7 @@
                     <a:bodyPr/>
                     <a:lstStyle/>
                     <a:p>
-                      <a:pPr indent="0" marL="0">
+                      <a:pPr marL="0" indent="0">
                         <a:buNone/>
                       </a:pPr>
                       <a:r>
@@ -6878,7 +6858,7 @@
                     <a:bodyPr/>
                     <a:lstStyle/>
                     <a:p>
-                      <a:pPr indent="0" marL="0">
+                      <a:pPr marL="0" indent="0">
                         <a:buNone/>
                       </a:pPr>
                       <a:r>
@@ -6941,6 +6921,11 @@
                     </a:solidFill>
                   </a:tcPr>
                 </a:tc>
+                <a:extLst>
+                  <a:ext uri="{0D108BD9-81ED-4DB2-BD59-A6C34878D82A}">
+                    <a16:rowId xmlns:a16="http://schemas.microsoft.com/office/drawing/2014/main" val="10002"/>
+                  </a:ext>
+                </a:extLst>
               </a:tr>
               <a:tr h="0">
                 <a:tc>
@@ -6948,7 +6933,7 @@
                     <a:bodyPr/>
                     <a:lstStyle/>
                     <a:p>
-                      <a:pPr indent="0" marL="0">
+                      <a:pPr marL="0" indent="0">
                         <a:buNone/>
                       </a:pPr>
                       <a:r>
@@ -7016,7 +7001,7 @@
                     <a:bodyPr/>
                     <a:lstStyle/>
                     <a:p>
-                      <a:pPr indent="0" marL="0">
+                      <a:pPr marL="0" indent="0">
                         <a:buNone/>
                       </a:pPr>
                       <a:r>
@@ -7084,7 +7069,7 @@
                     <a:bodyPr/>
                     <a:lstStyle/>
                     <a:p>
-                      <a:pPr indent="0" marL="0">
+                      <a:pPr marL="0" indent="0">
                         <a:buNone/>
                       </a:pPr>
                       <a:r>
@@ -7147,6 +7132,11 @@
                     </a:solidFill>
                   </a:tcPr>
                 </a:tc>
+                <a:extLst>
+                  <a:ext uri="{0D108BD9-81ED-4DB2-BD59-A6C34878D82A}">
+                    <a16:rowId xmlns:a16="http://schemas.microsoft.com/office/drawing/2014/main" val="10003"/>
+                  </a:ext>
+                </a:extLst>
               </a:tr>
               <a:tr h="0">
                 <a:tc>
@@ -7154,7 +7144,7 @@
                     <a:bodyPr/>
                     <a:lstStyle/>
                     <a:p>
-                      <a:pPr indent="0" marL="0">
+                      <a:pPr marL="0" indent="0">
                         <a:buNone/>
                       </a:pPr>
                       <a:r>
@@ -7222,7 +7212,7 @@
                     <a:bodyPr/>
                     <a:lstStyle/>
                     <a:p>
-                      <a:pPr indent="0" marL="0">
+                      <a:pPr marL="0" indent="0">
                         <a:buNone/>
                       </a:pPr>
                       <a:r>
@@ -7290,7 +7280,7 @@
                     <a:bodyPr/>
                     <a:lstStyle/>
                     <a:p>
-                      <a:pPr indent="0" marL="0">
+                      <a:pPr marL="0" indent="0">
                         <a:buNone/>
                       </a:pPr>
                       <a:r>
@@ -7353,6 +7343,11 @@
                     </a:solidFill>
                   </a:tcPr>
                 </a:tc>
+                <a:extLst>
+                  <a:ext uri="{0D108BD9-81ED-4DB2-BD59-A6C34878D82A}">
+                    <a16:rowId xmlns:a16="http://schemas.microsoft.com/office/drawing/2014/main" val="10004"/>
+                  </a:ext>
+                </a:extLst>
               </a:tr>
               <a:tr h="0">
                 <a:tc>
@@ -7360,7 +7355,7 @@
                     <a:bodyPr/>
                     <a:lstStyle/>
                     <a:p>
-                      <a:pPr indent="0" marL="0">
+                      <a:pPr marL="0" indent="0">
                         <a:buNone/>
                       </a:pPr>
                       <a:r>
@@ -7428,7 +7423,7 @@
                     <a:bodyPr/>
                     <a:lstStyle/>
                     <a:p>
-                      <a:pPr indent="0" marL="0">
+                      <a:pPr marL="0" indent="0">
                         <a:buNone/>
                       </a:pPr>
                       <a:r>
@@ -7496,7 +7491,7 @@
                     <a:bodyPr/>
                     <a:lstStyle/>
                     <a:p>
-                      <a:pPr indent="0" marL="0">
+                      <a:pPr marL="0" indent="0">
                         <a:buNone/>
                       </a:pPr>
                       <a:r>
@@ -7559,6 +7554,11 @@
                     </a:solidFill>
                   </a:tcPr>
                 </a:tc>
+                <a:extLst>
+                  <a:ext uri="{0D108BD9-81ED-4DB2-BD59-A6C34878D82A}">
+                    <a16:rowId xmlns:a16="http://schemas.microsoft.com/office/drawing/2014/main" val="10005"/>
+                  </a:ext>
+                </a:extLst>
               </a:tr>
             </a:tbl>
           </a:graphicData>
@@ -7572,8 +7572,8 @@
         </p:nvSpPr>
         <p:spPr>
           <a:xfrm>
-            <a:off x="5120640" y="2816352"/>
-            <a:ext cx="3520440" cy="1755648"/>
+            <a:off x="5120640" y="2975548"/>
+            <a:ext cx="3520440" cy="1596452"/>
           </a:xfrm>
           <a:prstGeom prst="rect">
             <a:avLst/>
@@ -7588,6 +7588,13 @@
             <a:prstDash val="solid"/>
           </a:ln>
         </p:spPr>
+        <p:txBody>
+          <a:bodyPr/>
+          <a:lstStyle/>
+          <a:p>
+            <a:endParaRPr lang="en-VN"/>
+          </a:p>
+        </p:txBody>
       </p:sp>
       <p:sp>
         <p:nvSpPr>
@@ -7597,7 +7604,7 @@
         </p:nvSpPr>
         <p:spPr>
           <a:xfrm>
-            <a:off x="5257800" y="2889504"/>
+            <a:off x="5257800" y="3137616"/>
             <a:ext cx="3246120" cy="219456"/>
           </a:xfrm>
           <a:prstGeom prst="rect">
@@ -7610,7 +7617,7 @@
           <a:bodyPr wrap="square" rtlCol="0" anchor="ctr"/>
           <a:lstStyle/>
           <a:p>
-            <a:pPr indent="0" marL="0">
+            <a:pPr marL="0" indent="0">
               <a:buNone/>
             </a:pPr>
             <a:r>
@@ -7636,8 +7643,8 @@
         </p:nvSpPr>
         <p:spPr>
           <a:xfrm>
-            <a:off x="5257800" y="3108960"/>
-            <a:ext cx="3246120" cy="1389888"/>
+            <a:off x="5257800" y="3360420"/>
+            <a:ext cx="3246120" cy="1138428"/>
           </a:xfrm>
           <a:prstGeom prst="rect">
             <a:avLst/>
@@ -7647,7 +7654,7 @@
         </p:spPr>
         <p:txBody>
           <a:bodyPr wrap="square" lIns="25400" tIns="50800" rIns="50800" bIns="25400" rtlCol="0" anchor="ctr">
-            <a:normAutofit/>
+            <a:normAutofit fontScale="92500" lnSpcReduction="10000"/>
           </a:bodyPr>
           <a:lstStyle/>
           <a:p>
@@ -7740,6 +7747,7 @@
         <a:solidFill>
           <a:srgbClr val="1E295C"/>
         </a:solidFill>
+        <a:effectLst/>
       </p:bgPr>
     </p:bg>
     <p:spTree>
@@ -7777,7 +7785,7 @@
           <a:bodyPr wrap="square" rtlCol="0" anchor="ctr"/>
           <a:lstStyle/>
           <a:p>
-            <a:pPr algn="ctr" indent="0" marL="0">
+            <a:pPr marL="0" indent="0" algn="ctr">
               <a:buNone/>
             </a:pPr>
             <a:r>
@@ -7821,6 +7829,13 @@
             <a:prstDash val="solid"/>
           </a:ln>
         </p:spPr>
+        <p:txBody>
+          <a:bodyPr/>
+          <a:lstStyle/>
+          <a:p>
+            <a:endParaRPr lang="en-VN"/>
+          </a:p>
+        </p:txBody>
       </p:sp>
       <p:sp>
         <p:nvSpPr>
@@ -7843,7 +7858,7 @@
           <a:bodyPr wrap="square" rtlCol="0" anchor="ctr"/>
           <a:lstStyle/>
           <a:p>
-            <a:pPr algn="ctr" indent="0" marL="0">
+            <a:pPr marL="0" indent="0" algn="ctr">
               <a:buNone/>
             </a:pPr>
             <a:r>
@@ -7884,7 +7899,7 @@
           </a:bodyPr>
           <a:lstStyle/>
           <a:p>
-            <a:pPr algn="ctr" indent="0" marL="0">
+            <a:pPr marL="0" indent="0" algn="ctr">
               <a:buNone/>
             </a:pPr>
             <a:r>
@@ -7924,6 +7939,13 @@
             <a:prstDash val="solid"/>
           </a:ln>
         </p:spPr>
+        <p:txBody>
+          <a:bodyPr/>
+          <a:lstStyle/>
+          <a:p>
+            <a:endParaRPr lang="en-VN"/>
+          </a:p>
+        </p:txBody>
       </p:sp>
       <p:sp>
         <p:nvSpPr>
@@ -7951,6 +7973,13 @@
             <a:prstDash val="solid"/>
           </a:ln>
         </p:spPr>
+        <p:txBody>
+          <a:bodyPr/>
+          <a:lstStyle/>
+          <a:p>
+            <a:endParaRPr lang="en-VN"/>
+          </a:p>
+        </p:txBody>
       </p:sp>
       <p:sp>
         <p:nvSpPr>
@@ -8088,6 +8117,7 @@
         <a:solidFill>
           <a:srgbClr val="FFFFFF"/>
         </a:solidFill>
+        <a:effectLst/>
       </p:bgPr>
     </p:bg>
     <p:spTree>
@@ -8125,7 +8155,7 @@
           <a:bodyPr wrap="square" rtlCol="0" anchor="ctr"/>
           <a:lstStyle/>
           <a:p>
-            <a:pPr algn="ctr" indent="0" marL="0">
+            <a:pPr marL="0" indent="0" algn="ctr">
               <a:buNone/>
             </a:pPr>
             <a:r>
@@ -8166,7 +8196,7 @@
           </a:bodyPr>
           <a:lstStyle/>
           <a:p>
-            <a:pPr indent="0" marL="0">
+            <a:pPr marL="0" indent="0">
               <a:buNone/>
             </a:pPr>
             <a:r>
@@ -8206,6 +8236,13 @@
             <a:prstDash val="solid"/>
           </a:ln>
         </p:spPr>
+        <p:txBody>
+          <a:bodyPr/>
+          <a:lstStyle/>
+          <a:p>
+            <a:endParaRPr lang="en-VN"/>
+          </a:p>
+        </p:txBody>
       </p:sp>
       <p:sp>
         <p:nvSpPr>
@@ -8228,7 +8265,7 @@
           <a:bodyPr wrap="square" rtlCol="0" anchor="ctr"/>
           <a:lstStyle/>
           <a:p>
-            <a:pPr indent="0" marL="0">
+            <a:pPr marL="0" indent="0">
               <a:buNone/>
             </a:pPr>
             <a:r>
@@ -8267,7 +8304,7 @@
           <a:bodyPr wrap="square" rtlCol="0" anchor="ctr"/>
           <a:lstStyle/>
           <a:p>
-            <a:pPr algn="r" indent="0" marL="0">
+            <a:pPr marL="0" indent="0" algn="r">
               <a:buNone/>
             </a:pPr>
             <a:r>
@@ -8294,34 +8331,70 @@
           <p:nvPr>
             <p:extLst>
               <p:ext uri="{D42A27DB-BD31-4B8C-83A1-F6EECF244321}">
-                <p14:modId xmlns:p14="http://schemas.microsoft.com/office/powerpoint/2010/main" val="1579011935"/>
+                <p14:modId xmlns:p14="http://schemas.microsoft.com/office/powerpoint/2010/main" val="4228685837"/>
               </p:ext>
             </p:extLst>
           </p:nvPr>
         </p:nvGraphicFramePr>
         <p:xfrm>
-          <a:off x="502920" y="987552"/>
-          <a:ext cx="4069080" cy="914400"/>
+          <a:off x="502920" y="987551"/>
+          <a:ext cx="4069082" cy="1719065"/>
         </p:xfrm>
         <a:graphic>
           <a:graphicData uri="http://schemas.openxmlformats.org/drawingml/2006/table">
             <a:tbl>
               <a:tblPr/>
               <a:tblGrid>
-                <a:gridCol w="1302106"/>
-                <a:gridCol w="813816"/>
-                <a:gridCol w="488290"/>
-                <a:gridCol w="488290"/>
-                <a:gridCol w="488290"/>
-                <a:gridCol w="488290"/>
+                <a:gridCol w="1302106">
+                  <a:extLst>
+                    <a:ext uri="{9D8B030D-6E8A-4147-A177-3AD203B41FA5}">
+                      <a16:colId xmlns:a16="http://schemas.microsoft.com/office/drawing/2014/main" val="20000"/>
+                    </a:ext>
+                  </a:extLst>
+                </a:gridCol>
+                <a:gridCol w="813816">
+                  <a:extLst>
+                    <a:ext uri="{9D8B030D-6E8A-4147-A177-3AD203B41FA5}">
+                      <a16:colId xmlns:a16="http://schemas.microsoft.com/office/drawing/2014/main" val="20001"/>
+                    </a:ext>
+                  </a:extLst>
+                </a:gridCol>
+                <a:gridCol w="488290">
+                  <a:extLst>
+                    <a:ext uri="{9D8B030D-6E8A-4147-A177-3AD203B41FA5}">
+                      <a16:colId xmlns:a16="http://schemas.microsoft.com/office/drawing/2014/main" val="20002"/>
+                    </a:ext>
+                  </a:extLst>
+                </a:gridCol>
+                <a:gridCol w="488290">
+                  <a:extLst>
+                    <a:ext uri="{9D8B030D-6E8A-4147-A177-3AD203B41FA5}">
+                      <a16:colId xmlns:a16="http://schemas.microsoft.com/office/drawing/2014/main" val="20003"/>
+                    </a:ext>
+                  </a:extLst>
+                </a:gridCol>
+                <a:gridCol w="488290">
+                  <a:extLst>
+                    <a:ext uri="{9D8B030D-6E8A-4147-A177-3AD203B41FA5}">
+                      <a16:colId xmlns:a16="http://schemas.microsoft.com/office/drawing/2014/main" val="20004"/>
+                    </a:ext>
+                  </a:extLst>
+                </a:gridCol>
+                <a:gridCol w="488290">
+                  <a:extLst>
+                    <a:ext uri="{9D8B030D-6E8A-4147-A177-3AD203B41FA5}">
+                      <a16:colId xmlns:a16="http://schemas.microsoft.com/office/drawing/2014/main" val="20005"/>
+                    </a:ext>
+                  </a:extLst>
+                </a:gridCol>
               </a:tblGrid>
-              <a:tr h="0">
+              <a:tr h="256157">
                 <a:tc>
                   <a:txBody>
                     <a:bodyPr/>
                     <a:lstStyle/>
                     <a:p>
-                      <a:pPr algn="ctr" indent="0" marL="0">
+                      <a:pPr marL="0" indent="0" algn="ctr">
                         <a:buNone/>
                       </a:pPr>
                       <a:r>
@@ -8389,7 +8462,7 @@
                     <a:bodyPr/>
                     <a:lstStyle/>
                     <a:p>
-                      <a:pPr algn="ctr" indent="0" marL="0">
+                      <a:pPr marL="0" indent="0" algn="ctr">
                         <a:buNone/>
                       </a:pPr>
                       <a:r>
@@ -8457,7 +8530,7 @@
                     <a:bodyPr/>
                     <a:lstStyle/>
                     <a:p>
-                      <a:pPr algn="ctr" indent="0" marL="0">
+                      <a:pPr marL="0" indent="0" algn="ctr">
                         <a:buNone/>
                       </a:pPr>
                       <a:r>
@@ -8525,7 +8598,7 @@
                     <a:bodyPr/>
                     <a:lstStyle/>
                     <a:p>
-                      <a:pPr algn="ctr" indent="0" marL="0">
+                      <a:pPr marL="0" indent="0" algn="ctr">
                         <a:buNone/>
                       </a:pPr>
                       <a:r>
@@ -8593,7 +8666,7 @@
                     <a:bodyPr/>
                     <a:lstStyle/>
                     <a:p>
-                      <a:pPr algn="ctr" indent="0" marL="0">
+                      <a:pPr marL="0" indent="0" algn="ctr">
                         <a:buNone/>
                       </a:pPr>
                       <a:r>
@@ -8661,7 +8734,7 @@
                     <a:bodyPr/>
                     <a:lstStyle/>
                     <a:p>
-                      <a:pPr algn="ctr" indent="0" marL="0">
+                      <a:pPr marL="0" indent="0" algn="ctr">
                         <a:buNone/>
                       </a:pPr>
                       <a:r>
@@ -8724,14 +8797,19 @@
                     </a:solidFill>
                   </a:tcPr>
                 </a:tc>
+                <a:extLst>
+                  <a:ext uri="{0D108BD9-81ED-4DB2-BD59-A6C34878D82A}">
+                    <a16:rowId xmlns:a16="http://schemas.microsoft.com/office/drawing/2014/main" val="10000"/>
+                  </a:ext>
+                </a:extLst>
               </a:tr>
-              <a:tr h="0">
+              <a:tr h="256157">
                 <a:tc>
                   <a:txBody>
                     <a:bodyPr/>
                     <a:lstStyle/>
                     <a:p>
-                      <a:pPr indent="0" marL="0">
+                      <a:pPr marL="0" indent="0">
                         <a:buNone/>
                       </a:pPr>
                       <a:r>
@@ -8799,7 +8877,7 @@
                     <a:bodyPr/>
                     <a:lstStyle/>
                     <a:p>
-                      <a:pPr indent="0" marL="0">
+                      <a:pPr marL="0" indent="0">
                         <a:buNone/>
                       </a:pPr>
                       <a:r>
@@ -8867,7 +8945,7 @@
                     <a:bodyPr/>
                     <a:lstStyle/>
                     <a:p>
-                      <a:pPr indent="0" marL="0">
+                      <a:pPr marL="0" indent="0">
                         <a:buNone/>
                       </a:pPr>
                       <a:r>
@@ -8935,7 +9013,7 @@
                     <a:bodyPr/>
                     <a:lstStyle/>
                     <a:p>
-                      <a:pPr indent="0" marL="0">
+                      <a:pPr marL="0" indent="0">
                         <a:buNone/>
                       </a:pPr>
                       <a:r>
@@ -9003,7 +9081,7 @@
                     <a:bodyPr/>
                     <a:lstStyle/>
                     <a:p>
-                      <a:pPr indent="0" marL="0">
+                      <a:pPr marL="0" indent="0">
                         <a:buNone/>
                       </a:pPr>
                       <a:r>
@@ -9071,7 +9149,7 @@
                     <a:bodyPr/>
                     <a:lstStyle/>
                     <a:p>
-                      <a:pPr indent="0" marL="0">
+                      <a:pPr marL="0" indent="0">
                         <a:buNone/>
                       </a:pPr>
                       <a:r>
@@ -9134,14 +9212,19 @@
                     </a:solidFill>
                   </a:tcPr>
                 </a:tc>
+                <a:extLst>
+                  <a:ext uri="{0D108BD9-81ED-4DB2-BD59-A6C34878D82A}">
+                    <a16:rowId xmlns:a16="http://schemas.microsoft.com/office/drawing/2014/main" val="10001"/>
+                  </a:ext>
+                </a:extLst>
               </a:tr>
-              <a:tr h="0">
+              <a:tr h="256157">
                 <a:tc>
                   <a:txBody>
                     <a:bodyPr/>
                     <a:lstStyle/>
                     <a:p>
-                      <a:pPr indent="0" marL="0">
+                      <a:pPr marL="0" indent="0">
                         <a:buNone/>
                       </a:pPr>
                       <a:r>
@@ -9209,7 +9292,7 @@
                     <a:bodyPr/>
                     <a:lstStyle/>
                     <a:p>
-                      <a:pPr indent="0" marL="0">
+                      <a:pPr marL="0" indent="0">
                         <a:buNone/>
                       </a:pPr>
                       <a:r>
@@ -9277,7 +9360,7 @@
                     <a:bodyPr/>
                     <a:lstStyle/>
                     <a:p>
-                      <a:pPr indent="0" marL="0">
+                      <a:pPr marL="0" indent="0">
                         <a:buNone/>
                       </a:pPr>
                       <a:r>
@@ -9345,7 +9428,7 @@
                     <a:bodyPr/>
                     <a:lstStyle/>
                     <a:p>
-                      <a:pPr indent="0" marL="0">
+                      <a:pPr marL="0" indent="0">
                         <a:buNone/>
                       </a:pPr>
                       <a:r>
@@ -9413,7 +9496,7 @@
                     <a:bodyPr/>
                     <a:lstStyle/>
                     <a:p>
-                      <a:pPr indent="0" marL="0">
+                      <a:pPr marL="0" indent="0">
                         <a:buNone/>
                       </a:pPr>
                       <a:r>
@@ -9481,7 +9564,7 @@
                     <a:bodyPr/>
                     <a:lstStyle/>
                     <a:p>
-                      <a:pPr indent="0" marL="0">
+                      <a:pPr marL="0" indent="0">
                         <a:buNone/>
                       </a:pPr>
                       <a:r>
@@ -9544,14 +9627,19 @@
                     </a:solidFill>
                   </a:tcPr>
                 </a:tc>
+                <a:extLst>
+                  <a:ext uri="{0D108BD9-81ED-4DB2-BD59-A6C34878D82A}">
+                    <a16:rowId xmlns:a16="http://schemas.microsoft.com/office/drawing/2014/main" val="10002"/>
+                  </a:ext>
+                </a:extLst>
               </a:tr>
-              <a:tr h="0">
+              <a:tr h="256157">
                 <a:tc>
                   <a:txBody>
                     <a:bodyPr/>
                     <a:lstStyle/>
                     <a:p>
-                      <a:pPr indent="0" marL="0">
+                      <a:pPr marL="0" indent="0">
                         <a:buNone/>
                       </a:pPr>
                       <a:r>
@@ -9619,7 +9707,7 @@
                     <a:bodyPr/>
                     <a:lstStyle/>
                     <a:p>
-                      <a:pPr indent="0" marL="0">
+                      <a:pPr marL="0" indent="0">
                         <a:buNone/>
                       </a:pPr>
                       <a:r>
@@ -9687,7 +9775,7 @@
                     <a:bodyPr/>
                     <a:lstStyle/>
                     <a:p>
-                      <a:pPr indent="0" marL="0">
+                      <a:pPr marL="0" indent="0">
                         <a:buNone/>
                       </a:pPr>
                       <a:r>
@@ -9755,7 +9843,7 @@
                     <a:bodyPr/>
                     <a:lstStyle/>
                     <a:p>
-                      <a:pPr indent="0" marL="0">
+                      <a:pPr marL="0" indent="0">
                         <a:buNone/>
                       </a:pPr>
                       <a:r>
@@ -9823,7 +9911,7 @@
                     <a:bodyPr/>
                     <a:lstStyle/>
                     <a:p>
-                      <a:pPr indent="0" marL="0">
+                      <a:pPr marL="0" indent="0">
                         <a:buNone/>
                       </a:pPr>
                       <a:r>
@@ -9891,7 +9979,7 @@
                     <a:bodyPr/>
                     <a:lstStyle/>
                     <a:p>
-                      <a:pPr indent="0" marL="0">
+                      <a:pPr marL="0" indent="0">
                         <a:buNone/>
                       </a:pPr>
                       <a:r>
@@ -9954,14 +10042,19 @@
                     </a:solidFill>
                   </a:tcPr>
                 </a:tc>
+                <a:extLst>
+                  <a:ext uri="{0D108BD9-81ED-4DB2-BD59-A6C34878D82A}">
+                    <a16:rowId xmlns:a16="http://schemas.microsoft.com/office/drawing/2014/main" val="10003"/>
+                  </a:ext>
+                </a:extLst>
               </a:tr>
-              <a:tr h="0">
+              <a:tr h="256157">
                 <a:tc>
                   <a:txBody>
                     <a:bodyPr/>
                     <a:lstStyle/>
                     <a:p>
-                      <a:pPr indent="0" marL="0">
+                      <a:pPr marL="0" indent="0">
                         <a:buNone/>
                       </a:pPr>
                       <a:r>
@@ -10029,7 +10122,7 @@
                     <a:bodyPr/>
                     <a:lstStyle/>
                     <a:p>
-                      <a:pPr indent="0" marL="0">
+                      <a:pPr marL="0" indent="0">
                         <a:buNone/>
                       </a:pPr>
                       <a:r>
@@ -10097,7 +10190,7 @@
                     <a:bodyPr/>
                     <a:lstStyle/>
                     <a:p>
-                      <a:pPr indent="0" marL="0">
+                      <a:pPr marL="0" indent="0">
                         <a:buNone/>
                       </a:pPr>
                       <a:r>
@@ -10165,7 +10258,7 @@
                     <a:bodyPr/>
                     <a:lstStyle/>
                     <a:p>
-                      <a:pPr indent="0" marL="0">
+                      <a:pPr marL="0" indent="0">
                         <a:buNone/>
                       </a:pPr>
                       <a:r>
@@ -10233,7 +10326,7 @@
                     <a:bodyPr/>
                     <a:lstStyle/>
                     <a:p>
-                      <a:pPr indent="0" marL="0">
+                      <a:pPr marL="0" indent="0">
                         <a:buNone/>
                       </a:pPr>
                       <a:r>
@@ -10301,7 +10394,7 @@
                     <a:bodyPr/>
                     <a:lstStyle/>
                     <a:p>
-                      <a:pPr indent="0" marL="0">
+                      <a:pPr marL="0" indent="0">
                         <a:buNone/>
                       </a:pPr>
                       <a:r>
@@ -10364,14 +10457,19 @@
                     </a:solidFill>
                   </a:tcPr>
                 </a:tc>
+                <a:extLst>
+                  <a:ext uri="{0D108BD9-81ED-4DB2-BD59-A6C34878D82A}">
+                    <a16:rowId xmlns:a16="http://schemas.microsoft.com/office/drawing/2014/main" val="10004"/>
+                  </a:ext>
+                </a:extLst>
               </a:tr>
-              <a:tr h="0">
+              <a:tr h="438280">
                 <a:tc>
                   <a:txBody>
                     <a:bodyPr/>
                     <a:lstStyle/>
                     <a:p>
-                      <a:pPr indent="0" marL="0">
+                      <a:pPr marL="0" indent="0">
                         <a:buNone/>
                       </a:pPr>
                       <a:r>
@@ -10439,7 +10537,7 @@
                     <a:bodyPr/>
                     <a:lstStyle/>
                     <a:p>
-                      <a:pPr indent="0" marL="0">
+                      <a:pPr marL="0" indent="0">
                         <a:buNone/>
                       </a:pPr>
                       <a:r>
@@ -10507,7 +10605,7 @@
                     <a:bodyPr/>
                     <a:lstStyle/>
                     <a:p>
-                      <a:pPr indent="0" marL="0">
+                      <a:pPr marL="0" indent="0">
                         <a:buNone/>
                       </a:pPr>
                       <a:r>
@@ -10575,7 +10673,7 @@
                     <a:bodyPr/>
                     <a:lstStyle/>
                     <a:p>
-                      <a:pPr indent="0" marL="0">
+                      <a:pPr marL="0" indent="0">
                         <a:buNone/>
                       </a:pPr>
                       <a:r>
@@ -10643,7 +10741,7 @@
                     <a:bodyPr/>
                     <a:lstStyle/>
                     <a:p>
-                      <a:pPr indent="0" marL="0">
+                      <a:pPr marL="0" indent="0">
                         <a:buNone/>
                       </a:pPr>
                       <a:r>
@@ -10711,7 +10809,7 @@
                     <a:bodyPr/>
                     <a:lstStyle/>
                     <a:p>
-                      <a:pPr indent="0" marL="0">
+                      <a:pPr marL="0" indent="0">
                         <a:buNone/>
                       </a:pPr>
                       <a:r>
@@ -10774,6 +10872,11 @@
                     </a:solidFill>
                   </a:tcPr>
                 </a:tc>
+                <a:extLst>
+                  <a:ext uri="{0D108BD9-81ED-4DB2-BD59-A6C34878D82A}">
+                    <a16:rowId xmlns:a16="http://schemas.microsoft.com/office/drawing/2014/main" val="10005"/>
+                  </a:ext>
+                </a:extLst>
               </a:tr>
             </a:tbl>
           </a:graphicData>
@@ -10803,6 +10906,13 @@
             <a:prstDash val="solid"/>
           </a:ln>
         </p:spPr>
+        <p:txBody>
+          <a:bodyPr/>
+          <a:lstStyle/>
+          <a:p>
+            <a:endParaRPr lang="en-VN"/>
+          </a:p>
+        </p:txBody>
       </p:sp>
       <p:sp>
         <p:nvSpPr>
@@ -10825,7 +10935,7 @@
           <a:bodyPr wrap="square" rtlCol="0" anchor="ctr"/>
           <a:lstStyle/>
           <a:p>
-            <a:pPr indent="0" marL="0">
+            <a:pPr marL="0" indent="0">
               <a:buNone/>
             </a:pPr>
             <a:r>
@@ -10941,14 +11051,14 @@
       </p:sp>
       <p:pic>
         <p:nvPicPr>
-          <p:cNvPr id="11" name="Image 0" descr="D:\Trí tuệ nhân tạo\HK2\Trí tuệ nhân tạo\CS106-Team09-Fraud-Detection\draft\fraud-detection\slide\slide_assets\academic_metrics_comparison.png">    </p:cNvPr>
+          <p:cNvPr id="11" name="Image 0" descr="D:\Trí tuệ nhân tạo\HK2\Trí tuệ nhân tạo\CS106-Team09-Fraud-Detection\draft\fraud-detection\slide\slide_assets\academic_metrics_comparison.png"/>
           <p:cNvPicPr>
             <a:picLocks noChangeAspect="1"/>
           </p:cNvPicPr>
           <p:nvPr/>
         </p:nvPicPr>
         <p:blipFill>
-          <a:blip r:embed="rId1"/>
+          <a:blip r:embed="rId3"/>
           <a:stretch>
             <a:fillRect/>
           </a:stretch>
@@ -10987,6 +11097,13 @@
             <a:prstDash val="solid"/>
           </a:ln>
         </p:spPr>
+        <p:txBody>
+          <a:bodyPr/>
+          <a:lstStyle/>
+          <a:p>
+            <a:endParaRPr lang="en-VN"/>
+          </a:p>
+        </p:txBody>
       </p:sp>
       <p:sp>
         <p:nvSpPr>
@@ -11009,7 +11126,7 @@
           <a:bodyPr wrap="square" rtlCol="0" anchor="ctr"/>
           <a:lstStyle/>
           <a:p>
-            <a:pPr indent="0" marL="0">
+            <a:pPr marL="0" indent="0">
               <a:buNone/>
             </a:pPr>
             <a:r>
@@ -11115,6 +11232,7 @@
         <a:solidFill>
           <a:srgbClr val="FFFFFF"/>
         </a:solidFill>
+        <a:effectLst/>
       </p:bgPr>
     </p:bg>
     <p:spTree>
@@ -11152,7 +11270,7 @@
           <a:bodyPr wrap="square" rtlCol="0" anchor="ctr"/>
           <a:lstStyle/>
           <a:p>
-            <a:pPr algn="ctr" indent="0" marL="0">
+            <a:pPr marL="0" indent="0" algn="ctr">
               <a:buNone/>
             </a:pPr>
             <a:r>
@@ -11193,7 +11311,7 @@
           </a:bodyPr>
           <a:lstStyle/>
           <a:p>
-            <a:pPr indent="0" marL="0">
+            <a:pPr marL="0" indent="0">
               <a:buNone/>
             </a:pPr>
             <a:r>
@@ -11233,6 +11351,13 @@
             <a:prstDash val="solid"/>
           </a:ln>
         </p:spPr>
+        <p:txBody>
+          <a:bodyPr/>
+          <a:lstStyle/>
+          <a:p>
+            <a:endParaRPr lang="en-VN"/>
+          </a:p>
+        </p:txBody>
       </p:sp>
       <p:sp>
         <p:nvSpPr>
@@ -11255,7 +11380,7 @@
           <a:bodyPr wrap="square" rtlCol="0" anchor="ctr"/>
           <a:lstStyle/>
           <a:p>
-            <a:pPr indent="0" marL="0">
+            <a:pPr marL="0" indent="0">
               <a:buNone/>
             </a:pPr>
             <a:r>
@@ -11294,7 +11419,7 @@
           <a:bodyPr wrap="square" rtlCol="0" anchor="ctr"/>
           <a:lstStyle/>
           <a:p>
-            <a:pPr algn="r" indent="0" marL="0">
+            <a:pPr marL="0" indent="0" algn="r">
               <a:buNone/>
             </a:pPr>
             <a:r>
@@ -11314,21 +11439,21 @@
       </p:sp>
       <p:pic>
         <p:nvPicPr>
-          <p:cNvPr id="7" name="Image 0" descr="D:\Trí tuệ nhân tạo\HK2\Trí tuệ nhân tạo\CS106-Team09-Fraud-Detection\draft\fraud-detection\slide\slide_assets\academic_confusion_matrices.png">    </p:cNvPr>
+          <p:cNvPr id="7" name="Image 0" descr="D:\Trí tuệ nhân tạo\HK2\Trí tuệ nhân tạo\CS106-Team09-Fraud-Detection\draft\fraud-detection\slide\slide_assets\academic_confusion_matrices.png"/>
           <p:cNvPicPr>
             <a:picLocks noChangeAspect="1"/>
           </p:cNvPicPr>
           <p:nvPr/>
         </p:nvPicPr>
         <p:blipFill>
-          <a:blip r:embed="rId1"/>
+          <a:blip r:embed="rId3"/>
           <a:stretch>
             <a:fillRect/>
           </a:stretch>
         </p:blipFill>
         <p:spPr>
           <a:xfrm>
-            <a:off x="778703" y="969264"/>
+            <a:off x="594360" y="987552"/>
             <a:ext cx="7586594" cy="2194560"/>
           </a:xfrm>
           <a:prstGeom prst="rect">
@@ -11360,6 +11485,13 @@
             <a:prstDash val="solid"/>
           </a:ln>
         </p:spPr>
+        <p:txBody>
+          <a:bodyPr/>
+          <a:lstStyle/>
+          <a:p>
+            <a:endParaRPr lang="en-VN"/>
+          </a:p>
+        </p:txBody>
       </p:sp>
       <p:sp>
         <p:nvSpPr>
@@ -11382,7 +11514,7 @@
           <a:bodyPr wrap="square" rtlCol="0" anchor="ctr"/>
           <a:lstStyle/>
           <a:p>
-            <a:pPr indent="0" marL="0">
+            <a:pPr marL="0" indent="0">
               <a:buNone/>
             </a:pPr>
             <a:r>
@@ -11418,7 +11550,7 @@
           <a:bodyPr wrap="square" rtlCol="0" anchor="ctr"/>
           <a:lstStyle/>
           <a:p>
-            <a:pPr indent="0" marL="0">
+            <a:pPr marL="0" indent="0">
               <a:buNone/>
             </a:pPr>
             <a:r>
@@ -11435,7 +11567,7 @@
             <a:endParaRPr lang="en-US" sz="850" dirty="0"/>
           </a:p>
           <a:p>
-            <a:pPr indent="0" marL="0">
+            <a:pPr marL="0" indent="0">
               <a:buNone/>
             </a:pPr>
             <a:r>
@@ -11476,7 +11608,7 @@
           </a:bodyPr>
           <a:lstStyle/>
           <a:p>
-            <a:pPr indent="0" marL="0">
+            <a:pPr marL="0" indent="0">
               <a:lnSpc>
                 <a:spcPct val="115000"/>
               </a:lnSpc>
@@ -11493,7 +11625,7 @@
             <a:endParaRPr lang="en-US" sz="820" dirty="0"/>
           </a:p>
           <a:p>
-            <a:pPr indent="0" marL="0">
+            <a:pPr marL="0" indent="0">
               <a:lnSpc>
                 <a:spcPct val="115000"/>
               </a:lnSpc>
@@ -11535,6 +11667,13 @@
             <a:prstDash val="solid"/>
           </a:ln>
         </p:spPr>
+        <p:txBody>
+          <a:bodyPr/>
+          <a:lstStyle/>
+          <a:p>
+            <a:endParaRPr lang="en-VN"/>
+          </a:p>
+        </p:txBody>
       </p:sp>
       <p:sp>
         <p:nvSpPr>
@@ -11557,7 +11696,7 @@
           <a:bodyPr wrap="square" rtlCol="0" anchor="ctr"/>
           <a:lstStyle/>
           <a:p>
-            <a:pPr indent="0" marL="0">
+            <a:pPr marL="0" indent="0">
               <a:buNone/>
             </a:pPr>
             <a:r>
@@ -11593,7 +11732,7 @@
           <a:bodyPr wrap="square" rtlCol="0" anchor="ctr"/>
           <a:lstStyle/>
           <a:p>
-            <a:pPr indent="0" marL="0">
+            <a:pPr marL="0" indent="0">
               <a:buNone/>
             </a:pPr>
             <a:r>
@@ -11610,7 +11749,7 @@
             <a:endParaRPr lang="en-US" sz="850" dirty="0"/>
           </a:p>
           <a:p>
-            <a:pPr indent="0" marL="0">
+            <a:pPr marL="0" indent="0">
               <a:buNone/>
             </a:pPr>
             <a:r>
@@ -11651,7 +11790,7 @@
           </a:bodyPr>
           <a:lstStyle/>
           <a:p>
-            <a:pPr indent="0" marL="0">
+            <a:pPr marL="0" indent="0">
               <a:lnSpc>
                 <a:spcPct val="115000"/>
               </a:lnSpc>
@@ -11668,7 +11807,7 @@
             <a:endParaRPr lang="en-US" sz="820" dirty="0"/>
           </a:p>
           <a:p>
-            <a:pPr indent="0" marL="0">
+            <a:pPr marL="0" indent="0">
               <a:lnSpc>
                 <a:spcPct val="115000"/>
               </a:lnSpc>
@@ -11710,6 +11849,13 @@
             <a:prstDash val="solid"/>
           </a:ln>
         </p:spPr>
+        <p:txBody>
+          <a:bodyPr/>
+          <a:lstStyle/>
+          <a:p>
+            <a:endParaRPr lang="en-VN"/>
+          </a:p>
+        </p:txBody>
       </p:sp>
       <p:sp>
         <p:nvSpPr>
@@ -11732,7 +11878,7 @@
           <a:bodyPr wrap="square" rtlCol="0" anchor="ctr"/>
           <a:lstStyle/>
           <a:p>
-            <a:pPr indent="0" marL="0">
+            <a:pPr marL="0" indent="0">
               <a:buNone/>
             </a:pPr>
             <a:r>
@@ -11768,7 +11914,7 @@
           <a:bodyPr wrap="square" rtlCol="0" anchor="ctr"/>
           <a:lstStyle/>
           <a:p>
-            <a:pPr indent="0" marL="0">
+            <a:pPr marL="0" indent="0">
               <a:buNone/>
             </a:pPr>
             <a:r>
@@ -11785,7 +11931,7 @@
             <a:endParaRPr lang="en-US" sz="850" dirty="0"/>
           </a:p>
           <a:p>
-            <a:pPr indent="0" marL="0">
+            <a:pPr marL="0" indent="0">
               <a:buNone/>
             </a:pPr>
             <a:r>
@@ -11826,7 +11972,7 @@
           </a:bodyPr>
           <a:lstStyle/>
           <a:p>
-            <a:pPr indent="0" marL="0">
+            <a:pPr marL="0" indent="0">
               <a:lnSpc>
                 <a:spcPct val="115000"/>
               </a:lnSpc>
@@ -11843,7 +11989,7 @@
             <a:endParaRPr lang="en-US" sz="820" dirty="0"/>
           </a:p>
           <a:p>
-            <a:pPr indent="0" marL="0">
+            <a:pPr marL="0" indent="0">
               <a:lnSpc>
                 <a:spcPct val="115000"/>
               </a:lnSpc>
@@ -11877,6 +12023,7 @@
         <a:solidFill>
           <a:srgbClr val="FFFFFF"/>
         </a:solidFill>
+        <a:effectLst/>
       </p:bgPr>
     </p:bg>
     <p:spTree>
@@ -11914,7 +12061,7 @@
           <a:bodyPr wrap="square" rtlCol="0" anchor="ctr"/>
           <a:lstStyle/>
           <a:p>
-            <a:pPr algn="ctr" indent="0" marL="0">
+            <a:pPr marL="0" indent="0" algn="ctr">
               <a:buNone/>
             </a:pPr>
             <a:r>
@@ -11955,7 +12102,7 @@
           </a:bodyPr>
           <a:lstStyle/>
           <a:p>
-            <a:pPr indent="0" marL="0">
+            <a:pPr marL="0" indent="0">
               <a:buNone/>
             </a:pPr>
             <a:r>
@@ -11995,6 +12142,13 @@
             <a:prstDash val="solid"/>
           </a:ln>
         </p:spPr>
+        <p:txBody>
+          <a:bodyPr/>
+          <a:lstStyle/>
+          <a:p>
+            <a:endParaRPr lang="en-VN"/>
+          </a:p>
+        </p:txBody>
       </p:sp>
       <p:sp>
         <p:nvSpPr>
@@ -12017,7 +12171,7 @@
           <a:bodyPr wrap="square" rtlCol="0" anchor="ctr"/>
           <a:lstStyle/>
           <a:p>
-            <a:pPr indent="0" marL="0">
+            <a:pPr marL="0" indent="0">
               <a:buNone/>
             </a:pPr>
             <a:r>
@@ -12056,7 +12210,7 @@
           <a:bodyPr wrap="square" rtlCol="0" anchor="ctr"/>
           <a:lstStyle/>
           <a:p>
-            <a:pPr algn="r" indent="0" marL="0">
+            <a:pPr marL="0" indent="0" algn="r">
               <a:buNone/>
             </a:pPr>
             <a:r>
@@ -12076,14 +12230,14 @@
       </p:sp>
       <p:pic>
         <p:nvPicPr>
-          <p:cNvPr id="7" name="Image 0" descr="D:\Trí tuệ nhân tạo\HK2\Trí tuệ nhân tạo\CS106-Team09-Fraud-Detection\draft\fraud-detection\slide\slide_assets\academic_feature_importance.png">    </p:cNvPr>
+          <p:cNvPr id="7" name="Image 0" descr="D:\Trí tuệ nhân tạo\HK2\Trí tuệ nhân tạo\CS106-Team09-Fraud-Detection\draft\fraud-detection\slide\slide_assets\academic_feature_importance.png"/>
           <p:cNvPicPr>
             <a:picLocks noChangeAspect="1"/>
           </p:cNvPicPr>
           <p:nvPr/>
         </p:nvPicPr>
         <p:blipFill>
-          <a:blip r:embed="rId1"/>
+          <a:blip r:embed="rId3"/>
           <a:stretch>
             <a:fillRect/>
           </a:stretch>
@@ -12122,6 +12276,13 @@
             <a:prstDash val="solid"/>
           </a:ln>
         </p:spPr>
+        <p:txBody>
+          <a:bodyPr/>
+          <a:lstStyle/>
+          <a:p>
+            <a:endParaRPr lang="en-VN"/>
+          </a:p>
+        </p:txBody>
       </p:sp>
       <p:sp>
         <p:nvSpPr>
@@ -12144,7 +12305,7 @@
           <a:bodyPr wrap="square" rtlCol="0" anchor="ctr"/>
           <a:lstStyle/>
           <a:p>
-            <a:pPr indent="0" marL="0">
+            <a:pPr marL="0" indent="0">
               <a:buNone/>
             </a:pPr>
             <a:r>
@@ -12243,31 +12404,49 @@
           <p:nvPr>
             <p:extLst>
               <p:ext uri="{D42A27DB-BD31-4B8C-83A1-F6EECF244321}">
-                <p14:modId xmlns:p14="http://schemas.microsoft.com/office/powerpoint/2010/main" val="1579011935"/>
+                <p14:modId xmlns:p14="http://schemas.microsoft.com/office/powerpoint/2010/main" val="3102909233"/>
               </p:ext>
             </p:extLst>
           </p:nvPr>
         </p:nvGraphicFramePr>
         <p:xfrm>
-          <a:off x="4754880" y="987552"/>
-          <a:ext cx="3886200" cy="914400"/>
+          <a:off x="4754880" y="987551"/>
+          <a:ext cx="3886200" cy="1643222"/>
         </p:xfrm>
         <a:graphic>
           <a:graphicData uri="http://schemas.openxmlformats.org/drawingml/2006/table">
             <a:tbl>
               <a:tblPr/>
               <a:tblGrid>
-                <a:gridCol w="1476756"/>
-                <a:gridCol w="854964"/>
-                <a:gridCol w="1554480"/>
+                <a:gridCol w="1476756">
+                  <a:extLst>
+                    <a:ext uri="{9D8B030D-6E8A-4147-A177-3AD203B41FA5}">
+                      <a16:colId xmlns:a16="http://schemas.microsoft.com/office/drawing/2014/main" val="20000"/>
+                    </a:ext>
+                  </a:extLst>
+                </a:gridCol>
+                <a:gridCol w="854964">
+                  <a:extLst>
+                    <a:ext uri="{9D8B030D-6E8A-4147-A177-3AD203B41FA5}">
+                      <a16:colId xmlns:a16="http://schemas.microsoft.com/office/drawing/2014/main" val="20001"/>
+                    </a:ext>
+                  </a:extLst>
+                </a:gridCol>
+                <a:gridCol w="1554480">
+                  <a:extLst>
+                    <a:ext uri="{9D8B030D-6E8A-4147-A177-3AD203B41FA5}">
+                      <a16:colId xmlns:a16="http://schemas.microsoft.com/office/drawing/2014/main" val="20002"/>
+                    </a:ext>
+                  </a:extLst>
+                </a:gridCol>
               </a:tblGrid>
-              <a:tr h="0">
+              <a:tr h="221400">
                 <a:tc>
                   <a:txBody>
                     <a:bodyPr/>
                     <a:lstStyle/>
                     <a:p>
-                      <a:pPr algn="ctr" indent="0" marL="0">
+                      <a:pPr marL="0" indent="0" algn="ctr">
                         <a:buNone/>
                       </a:pPr>
                       <a:r>
@@ -12335,7 +12514,7 @@
                     <a:bodyPr/>
                     <a:lstStyle/>
                     <a:p>
-                      <a:pPr algn="ctr" indent="0" marL="0">
+                      <a:pPr marL="0" indent="0" algn="ctr">
                         <a:buNone/>
                       </a:pPr>
                       <a:r>
@@ -12403,7 +12582,7 @@
                     <a:bodyPr/>
                     <a:lstStyle/>
                     <a:p>
-                      <a:pPr algn="ctr" indent="0" marL="0">
+                      <a:pPr marL="0" indent="0" algn="ctr">
                         <a:buNone/>
                       </a:pPr>
                       <a:r>
@@ -12466,14 +12645,19 @@
                     </a:solidFill>
                   </a:tcPr>
                 </a:tc>
+                <a:extLst>
+                  <a:ext uri="{0D108BD9-81ED-4DB2-BD59-A6C34878D82A}">
+                    <a16:rowId xmlns:a16="http://schemas.microsoft.com/office/drawing/2014/main" val="10000"/>
+                  </a:ext>
+                </a:extLst>
               </a:tr>
-              <a:tr h="0">
+              <a:tr h="221400">
                 <a:tc>
                   <a:txBody>
                     <a:bodyPr/>
                     <a:lstStyle/>
                     <a:p>
-                      <a:pPr indent="0" marL="0">
+                      <a:pPr marL="0" indent="0">
                         <a:buNone/>
                       </a:pPr>
                       <a:r>
@@ -12541,7 +12725,7 @@
                     <a:bodyPr/>
                     <a:lstStyle/>
                     <a:p>
-                      <a:pPr indent="0" marL="0">
+                      <a:pPr marL="0" indent="0">
                         <a:buNone/>
                       </a:pPr>
                       <a:r>
@@ -12609,7 +12793,7 @@
                     <a:bodyPr/>
                     <a:lstStyle/>
                     <a:p>
-                      <a:pPr indent="0" marL="0">
+                      <a:pPr marL="0" indent="0">
                         <a:buNone/>
                       </a:pPr>
                       <a:r>
@@ -12672,14 +12856,19 @@
                     </a:solidFill>
                   </a:tcPr>
                 </a:tc>
+                <a:extLst>
+                  <a:ext uri="{0D108BD9-81ED-4DB2-BD59-A6C34878D82A}">
+                    <a16:rowId xmlns:a16="http://schemas.microsoft.com/office/drawing/2014/main" val="10001"/>
+                  </a:ext>
+                </a:extLst>
               </a:tr>
-              <a:tr h="0">
+              <a:tr h="378811">
                 <a:tc>
                   <a:txBody>
                     <a:bodyPr/>
                     <a:lstStyle/>
                     <a:p>
-                      <a:pPr indent="0" marL="0">
+                      <a:pPr marL="0" indent="0">
                         <a:buNone/>
                       </a:pPr>
                       <a:r>
@@ -12747,7 +12936,7 @@
                     <a:bodyPr/>
                     <a:lstStyle/>
                     <a:p>
-                      <a:pPr indent="0" marL="0">
+                      <a:pPr marL="0" indent="0">
                         <a:buNone/>
                       </a:pPr>
                       <a:r>
@@ -12815,7 +13004,7 @@
                     <a:bodyPr/>
                     <a:lstStyle/>
                     <a:p>
-                      <a:pPr indent="0" marL="0">
+                      <a:pPr marL="0" indent="0">
                         <a:buNone/>
                       </a:pPr>
                       <a:r>
@@ -12878,14 +13067,19 @@
                     </a:solidFill>
                   </a:tcPr>
                 </a:tc>
+                <a:extLst>
+                  <a:ext uri="{0D108BD9-81ED-4DB2-BD59-A6C34878D82A}">
+                    <a16:rowId xmlns:a16="http://schemas.microsoft.com/office/drawing/2014/main" val="10002"/>
+                  </a:ext>
+                </a:extLst>
               </a:tr>
-              <a:tr h="0">
+              <a:tr h="221400">
                 <a:tc>
                   <a:txBody>
                     <a:bodyPr/>
                     <a:lstStyle/>
                     <a:p>
-                      <a:pPr indent="0" marL="0">
+                      <a:pPr marL="0" indent="0">
                         <a:buNone/>
                       </a:pPr>
                       <a:r>
@@ -12953,7 +13147,7 @@
                     <a:bodyPr/>
                     <a:lstStyle/>
                     <a:p>
-                      <a:pPr indent="0" marL="0">
+                      <a:pPr marL="0" indent="0">
                         <a:buNone/>
                       </a:pPr>
                       <a:r>
@@ -13021,7 +13215,7 @@
                     <a:bodyPr/>
                     <a:lstStyle/>
                     <a:p>
-                      <a:pPr indent="0" marL="0">
+                      <a:pPr marL="0" indent="0">
                         <a:buNone/>
                       </a:pPr>
                       <a:r>
@@ -13084,14 +13278,19 @@
                     </a:solidFill>
                   </a:tcPr>
                 </a:tc>
+                <a:extLst>
+                  <a:ext uri="{0D108BD9-81ED-4DB2-BD59-A6C34878D82A}">
+                    <a16:rowId xmlns:a16="http://schemas.microsoft.com/office/drawing/2014/main" val="10003"/>
+                  </a:ext>
+                </a:extLst>
               </a:tr>
-              <a:tr h="0">
+              <a:tr h="378811">
                 <a:tc>
                   <a:txBody>
                     <a:bodyPr/>
                     <a:lstStyle/>
                     <a:p>
-                      <a:pPr indent="0" marL="0">
+                      <a:pPr marL="0" indent="0">
                         <a:buNone/>
                       </a:pPr>
                       <a:r>
@@ -13159,7 +13358,7 @@
                     <a:bodyPr/>
                     <a:lstStyle/>
                     <a:p>
-                      <a:pPr indent="0" marL="0">
+                      <a:pPr marL="0" indent="0">
                         <a:buNone/>
                       </a:pPr>
                       <a:r>
@@ -13227,7 +13426,7 @@
                     <a:bodyPr/>
                     <a:lstStyle/>
                     <a:p>
-                      <a:pPr indent="0" marL="0">
+                      <a:pPr marL="0" indent="0">
                         <a:buNone/>
                       </a:pPr>
                       <a:r>
@@ -13290,14 +13489,19 @@
                     </a:solidFill>
                   </a:tcPr>
                 </a:tc>
+                <a:extLst>
+                  <a:ext uri="{0D108BD9-81ED-4DB2-BD59-A6C34878D82A}">
+                    <a16:rowId xmlns:a16="http://schemas.microsoft.com/office/drawing/2014/main" val="10004"/>
+                  </a:ext>
+                </a:extLst>
               </a:tr>
-              <a:tr h="0">
+              <a:tr h="221400">
                 <a:tc>
                   <a:txBody>
                     <a:bodyPr/>
                     <a:lstStyle/>
                     <a:p>
-                      <a:pPr indent="0" marL="0">
+                      <a:pPr marL="0" indent="0">
                         <a:buNone/>
                       </a:pPr>
                       <a:r>
@@ -13365,7 +13569,7 @@
                     <a:bodyPr/>
                     <a:lstStyle/>
                     <a:p>
-                      <a:pPr indent="0" marL="0">
+                      <a:pPr marL="0" indent="0">
                         <a:buNone/>
                       </a:pPr>
                       <a:r>
@@ -13433,7 +13637,7 @@
                     <a:bodyPr/>
                     <a:lstStyle/>
                     <a:p>
-                      <a:pPr indent="0" marL="0">
+                      <a:pPr marL="0" indent="0">
                         <a:buNone/>
                       </a:pPr>
                       <a:r>
@@ -13496,6 +13700,11 @@
                     </a:solidFill>
                   </a:tcPr>
                 </a:tc>
+                <a:extLst>
+                  <a:ext uri="{0D108BD9-81ED-4DB2-BD59-A6C34878D82A}">
+                    <a16:rowId xmlns:a16="http://schemas.microsoft.com/office/drawing/2014/main" val="10005"/>
+                  </a:ext>
+                </a:extLst>
               </a:tr>
             </a:tbl>
           </a:graphicData>
@@ -13525,6 +13734,13 @@
             <a:prstDash val="solid"/>
           </a:ln>
         </p:spPr>
+        <p:txBody>
+          <a:bodyPr/>
+          <a:lstStyle/>
+          <a:p>
+            <a:endParaRPr lang="en-VN"/>
+          </a:p>
+        </p:txBody>
       </p:sp>
       <p:sp>
         <p:nvSpPr>
@@ -13547,7 +13763,7 @@
           <a:bodyPr wrap="square" rtlCol="0" anchor="ctr"/>
           <a:lstStyle/>
           <a:p>
-            <a:pPr indent="0" marL="0">
+            <a:pPr marL="0" indent="0">
               <a:buNone/>
             </a:pPr>
             <a:r>
@@ -13677,6 +13893,7 @@
         <a:solidFill>
           <a:srgbClr val="FFFFFF"/>
         </a:solidFill>
+        <a:effectLst/>
       </p:bgPr>
     </p:bg>
     <p:spTree>
@@ -13714,7 +13931,7 @@
           <a:bodyPr wrap="square" rtlCol="0" anchor="ctr"/>
           <a:lstStyle/>
           <a:p>
-            <a:pPr algn="ctr" indent="0" marL="0">
+            <a:pPr marL="0" indent="0" algn="ctr">
               <a:buNone/>
             </a:pPr>
             <a:r>
@@ -13755,7 +13972,7 @@
           </a:bodyPr>
           <a:lstStyle/>
           <a:p>
-            <a:pPr indent="0" marL="0">
+            <a:pPr marL="0" indent="0">
               <a:buNone/>
             </a:pPr>
             <a:r>
@@ -13795,6 +14012,13 @@
             <a:prstDash val="solid"/>
           </a:ln>
         </p:spPr>
+        <p:txBody>
+          <a:bodyPr/>
+          <a:lstStyle/>
+          <a:p>
+            <a:endParaRPr lang="en-VN"/>
+          </a:p>
+        </p:txBody>
       </p:sp>
       <p:sp>
         <p:nvSpPr>
@@ -13817,7 +14041,7 @@
           <a:bodyPr wrap="square" rtlCol="0" anchor="ctr"/>
           <a:lstStyle/>
           <a:p>
-            <a:pPr indent="0" marL="0">
+            <a:pPr marL="0" indent="0">
               <a:buNone/>
             </a:pPr>
             <a:r>
@@ -13856,7 +14080,7 @@
           <a:bodyPr wrap="square" rtlCol="0" anchor="ctr"/>
           <a:lstStyle/>
           <a:p>
-            <a:pPr algn="r" indent="0" marL="0">
+            <a:pPr marL="0" indent="0" algn="r">
               <a:buNone/>
             </a:pPr>
             <a:r>
@@ -13876,14 +14100,14 @@
       </p:sp>
       <p:pic>
         <p:nvPicPr>
-          <p:cNvPr id="7" name="Image 0" descr="D:\Trí tuệ nhân tạo\HK2\Trí tuệ nhân tạo\CS106-Team09-Fraud-Detection\draft\fraud-detection\slide\slide_assets\academic_autoencoder_dist.png">    </p:cNvPr>
+          <p:cNvPr id="7" name="Image 0" descr="D:\Trí tuệ nhân tạo\HK2\Trí tuệ nhân tạo\CS106-Team09-Fraud-Detection\draft\fraud-detection\slide\slide_assets\academic_autoencoder_dist.png"/>
           <p:cNvPicPr>
             <a:picLocks noChangeAspect="1"/>
           </p:cNvPicPr>
           <p:nvPr/>
         </p:nvPicPr>
         <p:blipFill>
-          <a:blip r:embed="rId1"/>
+          <a:blip r:embed="rId3"/>
           <a:stretch>
             <a:fillRect/>
           </a:stretch>
@@ -13922,6 +14146,13 @@
             <a:prstDash val="solid"/>
           </a:ln>
         </p:spPr>
+        <p:txBody>
+          <a:bodyPr/>
+          <a:lstStyle/>
+          <a:p>
+            <a:endParaRPr lang="en-VN"/>
+          </a:p>
+        </p:txBody>
       </p:sp>
       <p:sp>
         <p:nvSpPr>
@@ -13944,7 +14175,7 @@
           <a:bodyPr wrap="square" rtlCol="0" anchor="ctr"/>
           <a:lstStyle/>
           <a:p>
-            <a:pPr indent="0" marL="0">
+            <a:pPr marL="0" indent="0">
               <a:buNone/>
             </a:pPr>
             <a:r>
@@ -14043,32 +14274,56 @@
           <p:nvPr>
             <p:extLst>
               <p:ext uri="{D42A27DB-BD31-4B8C-83A1-F6EECF244321}">
-                <p14:modId xmlns:p14="http://schemas.microsoft.com/office/powerpoint/2010/main" val="1579011935"/>
+                <p14:modId xmlns:p14="http://schemas.microsoft.com/office/powerpoint/2010/main" val="120582034"/>
               </p:ext>
             </p:extLst>
           </p:nvPr>
         </p:nvGraphicFramePr>
         <p:xfrm>
-          <a:off x="4754880" y="987552"/>
-          <a:ext cx="3886200" cy="914400"/>
+          <a:off x="4754880" y="987551"/>
+          <a:ext cx="3886200" cy="1367020"/>
         </p:xfrm>
         <a:graphic>
           <a:graphicData uri="http://schemas.openxmlformats.org/drawingml/2006/table">
             <a:tbl>
               <a:tblPr/>
               <a:tblGrid>
-                <a:gridCol w="1088136"/>
-                <a:gridCol w="932688"/>
-                <a:gridCol w="932688"/>
-                <a:gridCol w="932688"/>
+                <a:gridCol w="1088136">
+                  <a:extLst>
+                    <a:ext uri="{9D8B030D-6E8A-4147-A177-3AD203B41FA5}">
+                      <a16:colId xmlns:a16="http://schemas.microsoft.com/office/drawing/2014/main" val="20000"/>
+                    </a:ext>
+                  </a:extLst>
+                </a:gridCol>
+                <a:gridCol w="932688">
+                  <a:extLst>
+                    <a:ext uri="{9D8B030D-6E8A-4147-A177-3AD203B41FA5}">
+                      <a16:colId xmlns:a16="http://schemas.microsoft.com/office/drawing/2014/main" val="20001"/>
+                    </a:ext>
+                  </a:extLst>
+                </a:gridCol>
+                <a:gridCol w="932688">
+                  <a:extLst>
+                    <a:ext uri="{9D8B030D-6E8A-4147-A177-3AD203B41FA5}">
+                      <a16:colId xmlns:a16="http://schemas.microsoft.com/office/drawing/2014/main" val="20002"/>
+                    </a:ext>
+                  </a:extLst>
+                </a:gridCol>
+                <a:gridCol w="932688">
+                  <a:extLst>
+                    <a:ext uri="{9D8B030D-6E8A-4147-A177-3AD203B41FA5}">
+                      <a16:colId xmlns:a16="http://schemas.microsoft.com/office/drawing/2014/main" val="20003"/>
+                    </a:ext>
+                  </a:extLst>
+                </a:gridCol>
               </a:tblGrid>
-              <a:tr h="0">
+              <a:tr h="273404">
                 <a:tc>
                   <a:txBody>
                     <a:bodyPr/>
                     <a:lstStyle/>
                     <a:p>
-                      <a:pPr algn="ctr" indent="0" marL="0">
+                      <a:pPr marL="0" indent="0" algn="ctr">
                         <a:buNone/>
                       </a:pPr>
                       <a:r>
@@ -14136,7 +14391,7 @@
                     <a:bodyPr/>
                     <a:lstStyle/>
                     <a:p>
-                      <a:pPr algn="ctr" indent="0" marL="0">
+                      <a:pPr marL="0" indent="0" algn="ctr">
                         <a:buNone/>
                       </a:pPr>
                       <a:r>
@@ -14204,7 +14459,7 @@
                     <a:bodyPr/>
                     <a:lstStyle/>
                     <a:p>
-                      <a:pPr algn="ctr" indent="0" marL="0">
+                      <a:pPr marL="0" indent="0" algn="ctr">
                         <a:buNone/>
                       </a:pPr>
                       <a:r>
@@ -14272,7 +14527,7 @@
                     <a:bodyPr/>
                     <a:lstStyle/>
                     <a:p>
-                      <a:pPr algn="ctr" indent="0" marL="0">
+                      <a:pPr marL="0" indent="0" algn="ctr">
                         <a:buNone/>
                       </a:pPr>
                       <a:r>
@@ -14335,14 +14590,19 @@
                     </a:solidFill>
                   </a:tcPr>
                 </a:tc>
+                <a:extLst>
+                  <a:ext uri="{0D108BD9-81ED-4DB2-BD59-A6C34878D82A}">
+                    <a16:rowId xmlns:a16="http://schemas.microsoft.com/office/drawing/2014/main" val="10000"/>
+                  </a:ext>
+                </a:extLst>
               </a:tr>
-              <a:tr h="0">
+              <a:tr h="273404">
                 <a:tc>
                   <a:txBody>
                     <a:bodyPr/>
                     <a:lstStyle/>
                     <a:p>
-                      <a:pPr indent="0" marL="0">
+                      <a:pPr marL="0" indent="0">
                         <a:buNone/>
                       </a:pPr>
                       <a:r>
@@ -14410,7 +14670,7 @@
                     <a:bodyPr/>
                     <a:lstStyle/>
                     <a:p>
-                      <a:pPr indent="0" marL="0">
+                      <a:pPr marL="0" indent="0">
                         <a:buNone/>
                       </a:pPr>
                       <a:r>
@@ -14478,7 +14738,7 @@
                     <a:bodyPr/>
                     <a:lstStyle/>
                     <a:p>
-                      <a:pPr indent="0" marL="0">
+                      <a:pPr marL="0" indent="0">
                         <a:buNone/>
                       </a:pPr>
                       <a:r>
@@ -14546,7 +14806,7 @@
                     <a:bodyPr/>
                     <a:lstStyle/>
                     <a:p>
-                      <a:pPr indent="0" marL="0">
+                      <a:pPr marL="0" indent="0">
                         <a:buNone/>
                       </a:pPr>
                       <a:r>
@@ -14609,14 +14869,19 @@
                     </a:solidFill>
                   </a:tcPr>
                 </a:tc>
+                <a:extLst>
+                  <a:ext uri="{0D108BD9-81ED-4DB2-BD59-A6C34878D82A}">
+                    <a16:rowId xmlns:a16="http://schemas.microsoft.com/office/drawing/2014/main" val="10001"/>
+                  </a:ext>
+                </a:extLst>
               </a:tr>
-              <a:tr h="0">
+              <a:tr h="273404">
                 <a:tc>
                   <a:txBody>
                     <a:bodyPr/>
                     <a:lstStyle/>
                     <a:p>
-                      <a:pPr indent="0" marL="0">
+                      <a:pPr marL="0" indent="0">
                         <a:buNone/>
                       </a:pPr>
                       <a:r>
@@ -14684,7 +14949,7 @@
                     <a:bodyPr/>
                     <a:lstStyle/>
                     <a:p>
-                      <a:pPr indent="0" marL="0">
+                      <a:pPr marL="0" indent="0">
                         <a:buNone/>
                       </a:pPr>
                       <a:r>
@@ -14752,7 +15017,7 @@
                     <a:bodyPr/>
                     <a:lstStyle/>
                     <a:p>
-                      <a:pPr indent="0" marL="0">
+                      <a:pPr marL="0" indent="0">
                         <a:buNone/>
                       </a:pPr>
                       <a:r>
@@ -14820,7 +15085,7 @@
                     <a:bodyPr/>
                     <a:lstStyle/>
                     <a:p>
-                      <a:pPr indent="0" marL="0">
+                      <a:pPr marL="0" indent="0">
                         <a:buNone/>
                       </a:pPr>
                       <a:r>
@@ -14883,14 +15148,19 @@
                     </a:solidFill>
                   </a:tcPr>
                 </a:tc>
+                <a:extLst>
+                  <a:ext uri="{0D108BD9-81ED-4DB2-BD59-A6C34878D82A}">
+                    <a16:rowId xmlns:a16="http://schemas.microsoft.com/office/drawing/2014/main" val="10002"/>
+                  </a:ext>
+                </a:extLst>
               </a:tr>
-              <a:tr h="0">
+              <a:tr h="273404">
                 <a:tc>
                   <a:txBody>
                     <a:bodyPr/>
                     <a:lstStyle/>
                     <a:p>
-                      <a:pPr indent="0" marL="0">
+                      <a:pPr marL="0" indent="0">
                         <a:buNone/>
                       </a:pPr>
                       <a:r>
@@ -14958,7 +15228,7 @@
                     <a:bodyPr/>
                     <a:lstStyle/>
                     <a:p>
-                      <a:pPr indent="0" marL="0">
+                      <a:pPr marL="0" indent="0">
                         <a:buNone/>
                       </a:pPr>
                       <a:r>
@@ -15026,7 +15296,7 @@
                     <a:bodyPr/>
                     <a:lstStyle/>
                     <a:p>
-                      <a:pPr indent="0" marL="0">
+                      <a:pPr marL="0" indent="0">
                         <a:buNone/>
                       </a:pPr>
                       <a:r>
@@ -15094,7 +15364,7 @@
                     <a:bodyPr/>
                     <a:lstStyle/>
                     <a:p>
-                      <a:pPr indent="0" marL="0">
+                      <a:pPr marL="0" indent="0">
                         <a:buNone/>
                       </a:pPr>
                       <a:r>
@@ -15157,14 +15427,19 @@
                     </a:solidFill>
                   </a:tcPr>
                 </a:tc>
+                <a:extLst>
+                  <a:ext uri="{0D108BD9-81ED-4DB2-BD59-A6C34878D82A}">
+                    <a16:rowId xmlns:a16="http://schemas.microsoft.com/office/drawing/2014/main" val="10003"/>
+                  </a:ext>
+                </a:extLst>
               </a:tr>
-              <a:tr h="0">
+              <a:tr h="273404">
                 <a:tc>
                   <a:txBody>
                     <a:bodyPr/>
                     <a:lstStyle/>
                     <a:p>
-                      <a:pPr indent="0" marL="0">
+                      <a:pPr marL="0" indent="0">
                         <a:buNone/>
                       </a:pPr>
                       <a:r>
@@ -15232,7 +15507,7 @@
                     <a:bodyPr/>
                     <a:lstStyle/>
                     <a:p>
-                      <a:pPr indent="0" marL="0">
+                      <a:pPr marL="0" indent="0">
                         <a:buNone/>
                       </a:pPr>
                       <a:r>
@@ -15300,7 +15575,7 @@
                     <a:bodyPr/>
                     <a:lstStyle/>
                     <a:p>
-                      <a:pPr indent="0" marL="0">
+                      <a:pPr marL="0" indent="0">
                         <a:buNone/>
                       </a:pPr>
                       <a:r>
@@ -15368,7 +15643,7 @@
                     <a:bodyPr/>
                     <a:lstStyle/>
                     <a:p>
-                      <a:pPr indent="0" marL="0">
+                      <a:pPr marL="0" indent="0">
                         <a:buNone/>
                       </a:pPr>
                       <a:r>
@@ -15431,6 +15706,11 @@
                     </a:solidFill>
                   </a:tcPr>
                 </a:tc>
+                <a:extLst>
+                  <a:ext uri="{0D108BD9-81ED-4DB2-BD59-A6C34878D82A}">
+                    <a16:rowId xmlns:a16="http://schemas.microsoft.com/office/drawing/2014/main" val="10004"/>
+                  </a:ext>
+                </a:extLst>
               </a:tr>
             </a:tbl>
           </a:graphicData>
@@ -15460,6 +15740,13 @@
             <a:prstDash val="solid"/>
           </a:ln>
         </p:spPr>
+        <p:txBody>
+          <a:bodyPr/>
+          <a:lstStyle/>
+          <a:p>
+            <a:endParaRPr lang="en-VN"/>
+          </a:p>
+        </p:txBody>
       </p:sp>
       <p:sp>
         <p:nvSpPr>
@@ -15482,7 +15769,7 @@
           <a:bodyPr wrap="square" rtlCol="0" anchor="ctr"/>
           <a:lstStyle/>
           <a:p>
-            <a:pPr indent="0" marL="0">
+            <a:pPr marL="0" indent="0">
               <a:buNone/>
             </a:pPr>
             <a:r>
@@ -15612,6 +15899,7 @@
         <a:solidFill>
           <a:srgbClr val="1E295C"/>
         </a:solidFill>
+        <a:effectLst/>
       </p:bgPr>
     </p:bg>
     <p:spTree>
@@ -15649,7 +15937,7 @@
           <a:bodyPr wrap="square" rtlCol="0" anchor="ctr"/>
           <a:lstStyle/>
           <a:p>
-            <a:pPr algn="ctr" indent="0" marL="0">
+            <a:pPr marL="0" indent="0" algn="ctr">
               <a:buNone/>
             </a:pPr>
             <a:r>
@@ -15693,6 +15981,13 @@
             <a:prstDash val="solid"/>
           </a:ln>
         </p:spPr>
+        <p:txBody>
+          <a:bodyPr/>
+          <a:lstStyle/>
+          <a:p>
+            <a:endParaRPr lang="en-VN"/>
+          </a:p>
+        </p:txBody>
       </p:sp>
       <p:sp>
         <p:nvSpPr>
@@ -15715,7 +16010,7 @@
           <a:bodyPr wrap="square" rtlCol="0" anchor="ctr"/>
           <a:lstStyle/>
           <a:p>
-            <a:pPr algn="ctr" indent="0" marL="0">
+            <a:pPr marL="0" indent="0" algn="ctr">
               <a:buNone/>
             </a:pPr>
             <a:r>
@@ -15756,7 +16051,7 @@
           </a:bodyPr>
           <a:lstStyle/>
           <a:p>
-            <a:pPr algn="ctr" indent="0" marL="0">
+            <a:pPr marL="0" indent="0" algn="ctr">
               <a:buNone/>
             </a:pPr>
             <a:r>
@@ -15796,6 +16091,13 @@
             <a:prstDash val="solid"/>
           </a:ln>
         </p:spPr>
+        <p:txBody>
+          <a:bodyPr/>
+          <a:lstStyle/>
+          <a:p>
+            <a:endParaRPr lang="en-VN"/>
+          </a:p>
+        </p:txBody>
       </p:sp>
       <p:sp>
         <p:nvSpPr>
@@ -15823,6 +16125,13 @@
             <a:prstDash val="solid"/>
           </a:ln>
         </p:spPr>
+        <p:txBody>
+          <a:bodyPr/>
+          <a:lstStyle/>
+          <a:p>
+            <a:endParaRPr lang="en-VN"/>
+          </a:p>
+        </p:txBody>
       </p:sp>
       <p:sp>
         <p:nvSpPr>
@@ -15936,6 +16245,7 @@
         <a:solidFill>
           <a:srgbClr val="FFFFFF"/>
         </a:solidFill>
+        <a:effectLst/>
       </p:bgPr>
     </p:bg>
     <p:spTree>
@@ -15973,7 +16283,7 @@
           <a:bodyPr wrap="square" rtlCol="0" anchor="ctr"/>
           <a:lstStyle/>
           <a:p>
-            <a:pPr algn="ctr" indent="0" marL="0">
+            <a:pPr marL="0" indent="0" algn="ctr">
               <a:buNone/>
             </a:pPr>
             <a:r>
@@ -16014,7 +16324,7 @@
           </a:bodyPr>
           <a:lstStyle/>
           <a:p>
-            <a:pPr indent="0" marL="0">
+            <a:pPr marL="0" indent="0">
               <a:buNone/>
             </a:pPr>
             <a:r>
@@ -16054,6 +16364,13 @@
             <a:prstDash val="solid"/>
           </a:ln>
         </p:spPr>
+        <p:txBody>
+          <a:bodyPr/>
+          <a:lstStyle/>
+          <a:p>
+            <a:endParaRPr lang="en-VN"/>
+          </a:p>
+        </p:txBody>
       </p:sp>
       <p:sp>
         <p:nvSpPr>
@@ -16076,7 +16393,7 @@
           <a:bodyPr wrap="square" rtlCol="0" anchor="ctr"/>
           <a:lstStyle/>
           <a:p>
-            <a:pPr indent="0" marL="0">
+            <a:pPr marL="0" indent="0">
               <a:buNone/>
             </a:pPr>
             <a:r>
@@ -16115,7 +16432,7 @@
           <a:bodyPr wrap="square" rtlCol="0" anchor="ctr"/>
           <a:lstStyle/>
           <a:p>
-            <a:pPr algn="r" indent="0" marL="0">
+            <a:pPr marL="0" indent="0" algn="r">
               <a:buNone/>
             </a:pPr>
             <a:r>
@@ -16152,6 +16469,13 @@
           </a:solidFill>
           <a:ln/>
         </p:spPr>
+        <p:txBody>
+          <a:bodyPr/>
+          <a:lstStyle/>
+          <a:p>
+            <a:endParaRPr lang="en-VN"/>
+          </a:p>
+        </p:txBody>
       </p:sp>
       <p:sp>
         <p:nvSpPr>
@@ -16174,7 +16498,7 @@
           <a:bodyPr wrap="square" rtlCol="0" anchor="ctr"/>
           <a:lstStyle/>
           <a:p>
-            <a:pPr algn="ctr" indent="0" marL="0">
+            <a:pPr marL="0" indent="0" algn="ctr">
               <a:buNone/>
             </a:pPr>
             <a:r>
@@ -16215,7 +16539,7 @@
           </a:bodyPr>
           <a:lstStyle/>
           <a:p>
-            <a:pPr indent="0" marL="0">
+            <a:pPr marL="0" indent="0">
               <a:buNone/>
             </a:pPr>
             <a:r>
@@ -16227,12 +16551,6 @@
               <a:t>Giới thiệu &amp; Phát biểu Bài toán
 </a:t>
             </a:r>
-            <a:pPr indent="0" marL="0">
-              <a:lnSpc>
-                <a:spcPct val="115000"/>
-              </a:lnSpc>
-              <a:buNone/>
-            </a:pPr>
             <a:r>
               <a:rPr lang="en-US" sz="1000" dirty="0">
                 <a:solidFill>
@@ -16264,6 +16582,13 @@
           </a:solidFill>
           <a:ln/>
         </p:spPr>
+        <p:txBody>
+          <a:bodyPr/>
+          <a:lstStyle/>
+          <a:p>
+            <a:endParaRPr lang="en-VN"/>
+          </a:p>
+        </p:txBody>
       </p:sp>
       <p:sp>
         <p:nvSpPr>
@@ -16286,7 +16611,7 @@
           <a:bodyPr wrap="square" rtlCol="0" anchor="ctr"/>
           <a:lstStyle/>
           <a:p>
-            <a:pPr algn="ctr" indent="0" marL="0">
+            <a:pPr marL="0" indent="0" algn="ctr">
               <a:buNone/>
             </a:pPr>
             <a:r>
@@ -16327,7 +16652,7 @@
           </a:bodyPr>
           <a:lstStyle/>
           <a:p>
-            <a:pPr indent="0" marL="0">
+            <a:pPr marL="0" indent="0">
               <a:buNone/>
             </a:pPr>
             <a:r>
@@ -16339,12 +16664,6 @@
               <a:t>Phân tích Khám phá Dữ liệu &amp; Kỹ thuật Đặc trưng
 </a:t>
             </a:r>
-            <a:pPr indent="0" marL="0">
-              <a:lnSpc>
-                <a:spcPct val="115000"/>
-              </a:lnSpc>
-              <a:buNone/>
-            </a:pPr>
             <a:r>
               <a:rPr lang="en-US" sz="1000" dirty="0">
                 <a:solidFill>
@@ -16376,6 +16695,13 @@
           </a:solidFill>
           <a:ln/>
         </p:spPr>
+        <p:txBody>
+          <a:bodyPr/>
+          <a:lstStyle/>
+          <a:p>
+            <a:endParaRPr lang="en-VN"/>
+          </a:p>
+        </p:txBody>
       </p:sp>
       <p:sp>
         <p:nvSpPr>
@@ -16398,7 +16724,7 @@
           <a:bodyPr wrap="square" rtlCol="0" anchor="ctr"/>
           <a:lstStyle/>
           <a:p>
-            <a:pPr algn="ctr" indent="0" marL="0">
+            <a:pPr marL="0" indent="0" algn="ctr">
               <a:buNone/>
             </a:pPr>
             <a:r>
@@ -16439,7 +16765,7 @@
           </a:bodyPr>
           <a:lstStyle/>
           <a:p>
-            <a:pPr indent="0" marL="0">
+            <a:pPr marL="0" indent="0">
               <a:buNone/>
             </a:pPr>
             <a:r>
@@ -16451,12 +16777,6 @@
               <a:t>Phương pháp Đề xuất &amp; Kiến trúc Pipeline
 </a:t>
             </a:r>
-            <a:pPr indent="0" marL="0">
-              <a:lnSpc>
-                <a:spcPct val="115000"/>
-              </a:lnSpc>
-              <a:buNone/>
-            </a:pPr>
             <a:r>
               <a:rPr lang="en-US" sz="1000" dirty="0">
                 <a:solidFill>
@@ -16488,6 +16808,13 @@
           </a:solidFill>
           <a:ln/>
         </p:spPr>
+        <p:txBody>
+          <a:bodyPr/>
+          <a:lstStyle/>
+          <a:p>
+            <a:endParaRPr lang="en-VN"/>
+          </a:p>
+        </p:txBody>
       </p:sp>
       <p:sp>
         <p:nvSpPr>
@@ -16510,7 +16837,7 @@
           <a:bodyPr wrap="square" rtlCol="0" anchor="ctr"/>
           <a:lstStyle/>
           <a:p>
-            <a:pPr algn="ctr" indent="0" marL="0">
+            <a:pPr marL="0" indent="0" algn="ctr">
               <a:buNone/>
             </a:pPr>
             <a:r>
@@ -16551,7 +16878,7 @@
           </a:bodyPr>
           <a:lstStyle/>
           <a:p>
-            <a:pPr indent="0" marL="0">
+            <a:pPr marL="0" indent="0">
               <a:buNone/>
             </a:pPr>
             <a:r>
@@ -16563,12 +16890,6 @@
               <a:t>Kết quả Thực nghiệm &amp; Đánh giá So sánh
 </a:t>
             </a:r>
-            <a:pPr indent="0" marL="0">
-              <a:lnSpc>
-                <a:spcPct val="115000"/>
-              </a:lnSpc>
-              <a:buNone/>
-            </a:pPr>
             <a:r>
               <a:rPr lang="en-US" sz="1000" dirty="0">
                 <a:solidFill>
@@ -16600,6 +16921,13 @@
           </a:solidFill>
           <a:ln/>
         </p:spPr>
+        <p:txBody>
+          <a:bodyPr/>
+          <a:lstStyle/>
+          <a:p>
+            <a:endParaRPr lang="en-VN"/>
+          </a:p>
+        </p:txBody>
       </p:sp>
       <p:sp>
         <p:nvSpPr>
@@ -16622,7 +16950,7 @@
           <a:bodyPr wrap="square" rtlCol="0" anchor="ctr"/>
           <a:lstStyle/>
           <a:p>
-            <a:pPr algn="ctr" indent="0" marL="0">
+            <a:pPr marL="0" indent="0" algn="ctr">
               <a:buNone/>
             </a:pPr>
             <a:r>
@@ -16663,7 +16991,7 @@
           </a:bodyPr>
           <a:lstStyle/>
           <a:p>
-            <a:pPr indent="0" marL="0">
+            <a:pPr marL="0" indent="0">
               <a:buNone/>
             </a:pPr>
             <a:r>
@@ -16675,12 +17003,6 @@
               <a:t>Hệ thống Demo &amp; Định hướng Tương lai
 </a:t>
             </a:r>
-            <a:pPr indent="0" marL="0">
-              <a:lnSpc>
-                <a:spcPct val="115000"/>
-              </a:lnSpc>
-              <a:buNone/>
-            </a:pPr>
             <a:r>
               <a:rPr lang="en-US" sz="1000" dirty="0">
                 <a:solidFill>
@@ -16709,6 +17031,7 @@
         <a:solidFill>
           <a:srgbClr val="FFFFFF"/>
         </a:solidFill>
+        <a:effectLst/>
       </p:bgPr>
     </p:bg>
     <p:spTree>
@@ -16746,7 +17069,7 @@
           <a:bodyPr wrap="square" rtlCol="0" anchor="ctr"/>
           <a:lstStyle/>
           <a:p>
-            <a:pPr algn="ctr" indent="0" marL="0">
+            <a:pPr marL="0" indent="0" algn="ctr">
               <a:buNone/>
             </a:pPr>
             <a:r>
@@ -16787,7 +17110,7 @@
           </a:bodyPr>
           <a:lstStyle/>
           <a:p>
-            <a:pPr indent="0" marL="0">
+            <a:pPr marL="0" indent="0">
               <a:buNone/>
             </a:pPr>
             <a:r>
@@ -16827,6 +17150,13 @@
             <a:prstDash val="solid"/>
           </a:ln>
         </p:spPr>
+        <p:txBody>
+          <a:bodyPr/>
+          <a:lstStyle/>
+          <a:p>
+            <a:endParaRPr lang="en-VN"/>
+          </a:p>
+        </p:txBody>
       </p:sp>
       <p:sp>
         <p:nvSpPr>
@@ -16849,7 +17179,7 @@
           <a:bodyPr wrap="square" rtlCol="0" anchor="ctr"/>
           <a:lstStyle/>
           <a:p>
-            <a:pPr indent="0" marL="0">
+            <a:pPr marL="0" indent="0">
               <a:buNone/>
             </a:pPr>
             <a:r>
@@ -16888,7 +17218,7 @@
           <a:bodyPr wrap="square" rtlCol="0" anchor="ctr"/>
           <a:lstStyle/>
           <a:p>
-            <a:pPr algn="r" indent="0" marL="0">
+            <a:pPr marL="0" indent="0" algn="r">
               <a:buNone/>
             </a:pPr>
             <a:r>
@@ -16932,17 +17262,24 @@
             <a:prstDash val="solid"/>
           </a:ln>
         </p:spPr>
+        <p:txBody>
+          <a:bodyPr/>
+          <a:lstStyle/>
+          <a:p>
+            <a:endParaRPr lang="en-VN"/>
+          </a:p>
+        </p:txBody>
       </p:sp>
       <p:pic>
         <p:nvPicPr>
-          <p:cNvPr id="8" name="Image 0" descr="D:\Trí tuệ nhân tạo\HK2\Trí tuệ nhân tạo\CS106-Team09-Fraud-Detection\draft\fraud-detection\slide\slide_assets\demo_ui_slide20.png">    </p:cNvPr>
+          <p:cNvPr id="8" name="Image 0" descr="D:\Trí tuệ nhân tạo\HK2\Trí tuệ nhân tạo\CS106-Team09-Fraud-Detection\draft\fraud-detection\slide\slide_assets\demo_ui_slide20.png"/>
           <p:cNvPicPr>
             <a:picLocks noChangeAspect="1"/>
           </p:cNvPicPr>
           <p:nvPr/>
         </p:nvPicPr>
         <p:blipFill>
-          <a:blip r:embed="rId1"/>
+          <a:blip r:embed="rId3"/>
           <a:stretch>
             <a:fillRect/>
           </a:stretch>
@@ -16981,6 +17318,13 @@
             <a:prstDash val="solid"/>
           </a:ln>
         </p:spPr>
+        <p:txBody>
+          <a:bodyPr/>
+          <a:lstStyle/>
+          <a:p>
+            <a:endParaRPr lang="en-VN"/>
+          </a:p>
+        </p:txBody>
       </p:sp>
       <p:sp>
         <p:nvSpPr>
@@ -17003,7 +17347,7 @@
           <a:bodyPr wrap="square" rtlCol="0" anchor="ctr"/>
           <a:lstStyle/>
           <a:p>
-            <a:pPr indent="0" marL="0">
+            <a:pPr marL="0" indent="0">
               <a:buNone/>
             </a:pPr>
             <a:r>
@@ -17040,7 +17384,7 @@
         </p:spPr>
         <p:txBody>
           <a:bodyPr wrap="square" lIns="25400" tIns="50800" rIns="50800" bIns="25400" rtlCol="0" anchor="ctr">
-            <a:normAutofit/>
+            <a:normAutofit fontScale="92500" lnSpcReduction="20000"/>
           </a:bodyPr>
           <a:lstStyle/>
           <a:p>
@@ -17165,6 +17509,13 @@
             <a:prstDash val="solid"/>
           </a:ln>
         </p:spPr>
+        <p:txBody>
+          <a:bodyPr/>
+          <a:lstStyle/>
+          <a:p>
+            <a:endParaRPr lang="en-VN"/>
+          </a:p>
+        </p:txBody>
       </p:sp>
       <p:sp>
         <p:nvSpPr>
@@ -17187,7 +17538,7 @@
           <a:bodyPr wrap="square" rtlCol="0" anchor="ctr"/>
           <a:lstStyle/>
           <a:p>
-            <a:pPr indent="0" marL="0">
+            <a:pPr marL="0" indent="0">
               <a:buNone/>
             </a:pPr>
             <a:r>
@@ -17317,6 +17668,7 @@
         <a:solidFill>
           <a:srgbClr val="1E295C"/>
         </a:solidFill>
+        <a:effectLst/>
       </p:bgPr>
     </p:bg>
     <p:spTree>
@@ -17354,7 +17706,7 @@
           <a:bodyPr wrap="square" rtlCol="0" anchor="ctr"/>
           <a:lstStyle/>
           <a:p>
-            <a:pPr algn="ctr" indent="0" marL="0">
+            <a:pPr marL="0" indent="0" algn="ctr">
               <a:lnSpc>
                 <a:spcPct val="125000"/>
               </a:lnSpc>
@@ -17374,7 +17726,7 @@
             <a:endParaRPr lang="en-US" sz="2200" dirty="0"/>
           </a:p>
           <a:p>
-            <a:pPr algn="ctr" indent="0" marL="0">
+            <a:pPr marL="0" indent="0" algn="ctr">
               <a:lnSpc>
                 <a:spcPct val="125000"/>
               </a:lnSpc>
@@ -17403,7 +17755,7 @@
         </p:nvSpPr>
         <p:spPr>
           <a:xfrm>
-            <a:off x="502920" y="1325880"/>
+            <a:off x="502920" y="1389888"/>
             <a:ext cx="8138160" cy="256032"/>
           </a:xfrm>
           <a:prstGeom prst="rect">
@@ -17416,7 +17768,7 @@
           <a:bodyPr wrap="square" rtlCol="0" anchor="ctr"/>
           <a:lstStyle/>
           <a:p>
-            <a:pPr algn="ctr" indent="0" marL="0">
+            <a:pPr marL="0" indent="0" algn="ctr">
               <a:buNone/>
             </a:pPr>
             <a:r>
@@ -17458,6 +17810,13 @@
             <a:prstDash val="solid"/>
           </a:ln>
         </p:spPr>
+        <p:txBody>
+          <a:bodyPr/>
+          <a:lstStyle/>
+          <a:p>
+            <a:endParaRPr lang="en-VN"/>
+          </a:p>
+        </p:txBody>
       </p:sp>
       <p:sp>
         <p:nvSpPr>
@@ -17480,7 +17839,7 @@
           <a:bodyPr wrap="square" rtlCol="0" anchor="ctr"/>
           <a:lstStyle/>
           <a:p>
-            <a:pPr algn="ctr" indent="0" marL="0">
+            <a:pPr marL="0" indent="0" algn="ctr">
               <a:buNone/>
             </a:pPr>
             <a:r>
@@ -17521,7 +17880,7 @@
           </a:bodyPr>
           <a:lstStyle/>
           <a:p>
-            <a:pPr algn="l" indent="0" marL="0">
+            <a:pPr marL="0" indent="0" algn="l">
               <a:lnSpc>
                 <a:spcPct val="125000"/>
               </a:lnSpc>
@@ -17536,137 +17895,141 @@
                 <a:ea typeface="Segoe UI" pitchFamily="34" charset="-122"/>
                 <a:cs typeface="Segoe UI" pitchFamily="34" charset="-120"/>
               </a:rPr>
-              <a:t>• Mã nguồn Dự án (Gói nộp bài &amp; GitHub Repo): </a:t>
-            </a:r>
-            <a:pPr algn="l" indent="0" marL="0">
+              <a:t>• Mã nguồn Dự </a:t>
+            </a:r>
+            <a:r>
+              <a:rPr lang="en-US" sz="930" b="1" dirty="0" err="1">
+                <a:solidFill>
+                  <a:srgbClr val="60A5FA"/>
+                </a:solidFill>
+                <a:latin typeface="Segoe UI" pitchFamily="34" charset="0"/>
+                <a:ea typeface="Segoe UI" pitchFamily="34" charset="-122"/>
+                <a:cs typeface="Segoe UI" pitchFamily="34" charset="-120"/>
+              </a:rPr>
+              <a:t>án</a:t>
+            </a:r>
+            <a:r>
+              <a:rPr lang="en-US" sz="930" b="1" dirty="0">
+                <a:solidFill>
+                  <a:srgbClr val="60A5FA"/>
+                </a:solidFill>
+                <a:latin typeface="Segoe UI" pitchFamily="34" charset="0"/>
+                <a:ea typeface="Segoe UI" pitchFamily="34" charset="-122"/>
+                <a:cs typeface="Segoe UI" pitchFamily="34" charset="-120"/>
+              </a:rPr>
+              <a:t> (Public Repo): </a:t>
+            </a:r>
+            <a:r>
+              <a:rPr lang="en-US" sz="930" dirty="0">
+                <a:solidFill>
+                  <a:schemeClr val="bg1"/>
+                </a:solidFill>
+                <a:latin typeface="Segoe UI" pitchFamily="34" charset="0"/>
+                <a:ea typeface="Segoe UI" pitchFamily="34" charset="-122"/>
+                <a:cs typeface="Segoe UI" pitchFamily="34" charset="-120"/>
+              </a:rPr>
+              <a:t>https://github.com/uit-25730067-chithanh/CS106-Team09-Fraud-Detection</a:t>
+            </a:r>
+            <a:r>
+              <a:rPr lang="en-US" sz="930" b="1" dirty="0">
+                <a:solidFill>
+                  <a:srgbClr val="38BDF8"/>
+                </a:solidFill>
+                <a:latin typeface="Segoe UI" pitchFamily="34" charset="0"/>
+                <a:ea typeface="Segoe UI" pitchFamily="34" charset="-122"/>
+                <a:cs typeface="Segoe UI" pitchFamily="34" charset="-120"/>
+              </a:rPr>
+              <a:t>
+</a:t>
+            </a:r>
+            <a:r>
+              <a:rPr lang="en-US" sz="930" b="1" dirty="0">
+                <a:solidFill>
+                  <a:srgbClr val="60A5FA"/>
+                </a:solidFill>
+                <a:latin typeface="Segoe UI" pitchFamily="34" charset="0"/>
+                <a:ea typeface="Segoe UI" pitchFamily="34" charset="-122"/>
+                <a:cs typeface="Segoe UI" pitchFamily="34" charset="-120"/>
+              </a:rPr>
+              <a:t>• PaySim Simulator: </a:t>
+            </a:r>
+            <a:r>
+              <a:rPr lang="en-US" sz="930" dirty="0">
+                <a:solidFill>
+                  <a:srgbClr val="E2E8F0"/>
+                </a:solidFill>
+                <a:latin typeface="Segoe UI" pitchFamily="34" charset="0"/>
+                <a:ea typeface="Segoe UI" pitchFamily="34" charset="-122"/>
+                <a:cs typeface="Segoe UI" pitchFamily="34" charset="-120"/>
+              </a:rPr>
+              <a:t>E. A. Lopez-Rojas, A. Elmir, and S. Axelsson, "PaySim: A financial mobile money simulator for fraud      detection," in Proc. 28th Eur. Model. Simul. Symp., 2016, pp. 249-255.
+</a:t>
+            </a:r>
+            <a:r>
+              <a:rPr lang="en-US" sz="930" b="1" dirty="0">
+                <a:solidFill>
+                  <a:srgbClr val="60A5FA"/>
+                </a:solidFill>
+                <a:latin typeface="Segoe UI" pitchFamily="34" charset="0"/>
+                <a:ea typeface="Segoe UI" pitchFamily="34" charset="-122"/>
+                <a:cs typeface="Segoe UI" pitchFamily="34" charset="-120"/>
+              </a:rPr>
+              <a:t>• XGBoost GBDT: </a:t>
+            </a:r>
+            <a:r>
+              <a:rPr lang="en-US" sz="930" dirty="0">
+                <a:solidFill>
+                  <a:srgbClr val="E2E8F0"/>
+                </a:solidFill>
+                <a:latin typeface="Segoe UI" pitchFamily="34" charset="0"/>
+                <a:ea typeface="Segoe UI" pitchFamily="34" charset="-122"/>
+                <a:cs typeface="Segoe UI" pitchFamily="34" charset="-120"/>
+              </a:rPr>
+              <a:t>T. Chen and C. Guestrin, "XGBoost: A scalable tree boosting system," in Proc. 22nd ACM SIGKDD, 2016, pp. 785-794.
+</a:t>
+            </a:r>
+            <a:r>
+              <a:rPr lang="en-US" sz="930" b="1" dirty="0">
+                <a:solidFill>
+                  <a:srgbClr val="60A5FA"/>
+                </a:solidFill>
+                <a:latin typeface="Segoe UI" pitchFamily="34" charset="0"/>
+                <a:ea typeface="Segoe UI" pitchFamily="34" charset="-122"/>
+                <a:cs typeface="Segoe UI" pitchFamily="34" charset="-120"/>
+              </a:rPr>
+              <a:t>• SMOTE Resampling: </a:t>
+            </a:r>
+            <a:r>
+              <a:rPr lang="en-US" sz="930" dirty="0">
+                <a:solidFill>
+                  <a:srgbClr val="E2E8F0"/>
+                </a:solidFill>
+                <a:latin typeface="Segoe UI" pitchFamily="34" charset="0"/>
+                <a:ea typeface="Segoe UI" pitchFamily="34" charset="-122"/>
+                <a:cs typeface="Segoe UI" pitchFamily="34" charset="-120"/>
+              </a:rPr>
+              <a:t>N. V. Chawla et al., "SMOTE: Synthetic minority over-sampling technique," J. Artif. Intell. Res., vol. 16, pp. 321-357, 2002.</a:t>
+            </a:r>
+          </a:p>
+          <a:p>
+            <a:pPr marL="0" indent="0" algn="ctr">
               <a:lnSpc>
                 <a:spcPct val="125000"/>
               </a:lnSpc>
               <a:buNone/>
             </a:pPr>
             <a:r>
-              <a:rPr lang="en-US" sz="930" b="1" dirty="0">
-                <a:solidFill>
-                  <a:srgbClr val="38BDF8"/>
+              <a:rPr lang="en-US" sz="930" dirty="0">
+                <a:solidFill>
+                  <a:srgbClr val="E2E8F0"/>
                 </a:solidFill>
                 <a:latin typeface="Segoe UI" pitchFamily="34" charset="0"/>
                 <a:ea typeface="Segoe UI" pitchFamily="34" charset="-122"/>
                 <a:cs typeface="Segoe UI" pitchFamily="34" charset="-120"/>
               </a:rPr>
-              <a:t>https://github.com/uit-25730067-chithanh/CS106-Team09-Fraud-Detection
+              <a:t>
 </a:t>
             </a:r>
-            <a:pPr algn="l" indent="0" marL="0">
-              <a:lnSpc>
-                <a:spcPct val="125000"/>
-              </a:lnSpc>
-              <a:buNone/>
-            </a:pPr>
-            <a:r>
-              <a:rPr lang="en-US" sz="930" b="1" dirty="0">
-                <a:solidFill>
-                  <a:srgbClr val="60A5FA"/>
-                </a:solidFill>
-                <a:latin typeface="Segoe UI" pitchFamily="34" charset="0"/>
-                <a:ea typeface="Segoe UI" pitchFamily="34" charset="-122"/>
-                <a:cs typeface="Segoe UI" pitchFamily="34" charset="-120"/>
-              </a:rPr>
-              <a:t>• PaySim Simulator: </a:t>
-            </a:r>
-            <a:pPr algn="l" indent="0" marL="0">
-              <a:lnSpc>
-                <a:spcPct val="125000"/>
-              </a:lnSpc>
-              <a:buNone/>
-            </a:pPr>
-            <a:r>
-              <a:rPr lang="en-US" sz="930" dirty="0">
-                <a:solidFill>
-                  <a:srgbClr val="E2E8F0"/>
-                </a:solidFill>
-                <a:latin typeface="Segoe UI" pitchFamily="34" charset="0"/>
-                <a:ea typeface="Segoe UI" pitchFamily="34" charset="-122"/>
-                <a:cs typeface="Segoe UI" pitchFamily="34" charset="-120"/>
-              </a:rPr>
-              <a:t>E. A. Lopez-Rojas, A. Elmir, and S. Axelsson, "PaySim: A financial mobile money simulator for fraud detection," in Proc. 28th Eur. Model. Simul. Symp., 2016, pp. 249-255.
-</a:t>
-            </a:r>
-            <a:pPr algn="l" indent="0" marL="0">
-              <a:lnSpc>
-                <a:spcPct val="125000"/>
-              </a:lnSpc>
-              <a:buNone/>
-            </a:pPr>
-            <a:r>
-              <a:rPr lang="en-US" sz="930" b="1" dirty="0">
-                <a:solidFill>
-                  <a:srgbClr val="60A5FA"/>
-                </a:solidFill>
-                <a:latin typeface="Segoe UI" pitchFamily="34" charset="0"/>
-                <a:ea typeface="Segoe UI" pitchFamily="34" charset="-122"/>
-                <a:cs typeface="Segoe UI" pitchFamily="34" charset="-120"/>
-              </a:rPr>
-              <a:t>• XGBoost GBDT: </a:t>
-            </a:r>
-            <a:pPr algn="l" indent="0" marL="0">
-              <a:lnSpc>
-                <a:spcPct val="125000"/>
-              </a:lnSpc>
-              <a:buNone/>
-            </a:pPr>
-            <a:r>
-              <a:rPr lang="en-US" sz="930" dirty="0">
-                <a:solidFill>
-                  <a:srgbClr val="E2E8F0"/>
-                </a:solidFill>
-                <a:latin typeface="Segoe UI" pitchFamily="34" charset="0"/>
-                <a:ea typeface="Segoe UI" pitchFamily="34" charset="-122"/>
-                <a:cs typeface="Segoe UI" pitchFamily="34" charset="-120"/>
-              </a:rPr>
-              <a:t>T. Chen and C. Guestrin, "XGBoost: A scalable tree boosting system," in Proc. 22nd ACM SIGKDD, 2016, pp. 785-794.
-</a:t>
-            </a:r>
-            <a:pPr algn="l" indent="0" marL="0">
-              <a:lnSpc>
-                <a:spcPct val="125000"/>
-              </a:lnSpc>
-              <a:buNone/>
-            </a:pPr>
-            <a:r>
-              <a:rPr lang="en-US" sz="930" b="1" dirty="0">
-                <a:solidFill>
-                  <a:srgbClr val="60A5FA"/>
-                </a:solidFill>
-                <a:latin typeface="Segoe UI" pitchFamily="34" charset="0"/>
-                <a:ea typeface="Segoe UI" pitchFamily="34" charset="-122"/>
-                <a:cs typeface="Segoe UI" pitchFamily="34" charset="-120"/>
-              </a:rPr>
-              <a:t>• SMOTE Resampling: </a:t>
-            </a:r>
-            <a:pPr algn="l" indent="0" marL="0">
-              <a:lnSpc>
-                <a:spcPct val="125000"/>
-              </a:lnSpc>
-              <a:buNone/>
-            </a:pPr>
-            <a:r>
-              <a:rPr lang="en-US" sz="930" dirty="0">
-                <a:solidFill>
-                  <a:srgbClr val="E2E8F0"/>
-                </a:solidFill>
-                <a:latin typeface="Segoe UI" pitchFamily="34" charset="0"/>
-                <a:ea typeface="Segoe UI" pitchFamily="34" charset="-122"/>
-                <a:cs typeface="Segoe UI" pitchFamily="34" charset="-120"/>
-              </a:rPr>
-              <a:t>N. V. Chawla et al., "SMOTE: Synthetic minority over-sampling technique," J. Artif. Intell. Res., vol. 16, pp. 321-357, 2002.
-</a:t>
-            </a:r>
-            <a:pPr algn="l" indent="0" marL="0">
-              <a:lnSpc>
-                <a:spcPct val="125000"/>
-              </a:lnSpc>
-              <a:buNone/>
-            </a:pPr>
             <a:r>
               <a:rPr lang="en-US" sz="930" i="1" dirty="0">
                 <a:solidFill>
@@ -17698,6 +18061,7 @@
         <a:solidFill>
           <a:srgbClr val="1E295C"/>
         </a:solidFill>
+        <a:effectLst/>
       </p:bgPr>
     </p:bg>
     <p:spTree>
@@ -17735,7 +18099,7 @@
           <a:bodyPr wrap="square" rtlCol="0" anchor="ctr"/>
           <a:lstStyle/>
           <a:p>
-            <a:pPr algn="ctr" indent="0" marL="0">
+            <a:pPr marL="0" indent="0" algn="ctr">
               <a:buNone/>
             </a:pPr>
             <a:r>
@@ -17779,6 +18143,13 @@
             <a:prstDash val="solid"/>
           </a:ln>
         </p:spPr>
+        <p:txBody>
+          <a:bodyPr/>
+          <a:lstStyle/>
+          <a:p>
+            <a:endParaRPr lang="en-VN"/>
+          </a:p>
+        </p:txBody>
       </p:sp>
       <p:sp>
         <p:nvSpPr>
@@ -17801,7 +18172,7 @@
           <a:bodyPr wrap="square" rtlCol="0" anchor="ctr"/>
           <a:lstStyle/>
           <a:p>
-            <a:pPr algn="ctr" indent="0" marL="0">
+            <a:pPr marL="0" indent="0" algn="ctr">
               <a:buNone/>
             </a:pPr>
             <a:r>
@@ -17842,7 +18213,7 @@
           </a:bodyPr>
           <a:lstStyle/>
           <a:p>
-            <a:pPr algn="ctr" indent="0" marL="0">
+            <a:pPr marL="0" indent="0" algn="ctr">
               <a:buNone/>
             </a:pPr>
             <a:r>
@@ -17882,6 +18253,13 @@
             <a:prstDash val="solid"/>
           </a:ln>
         </p:spPr>
+        <p:txBody>
+          <a:bodyPr/>
+          <a:lstStyle/>
+          <a:p>
+            <a:endParaRPr lang="en-VN"/>
+          </a:p>
+        </p:txBody>
       </p:sp>
       <p:sp>
         <p:nvSpPr>
@@ -17909,6 +18287,13 @@
             <a:prstDash val="solid"/>
           </a:ln>
         </p:spPr>
+        <p:txBody>
+          <a:bodyPr/>
+          <a:lstStyle/>
+          <a:p>
+            <a:endParaRPr lang="en-VN"/>
+          </a:p>
+        </p:txBody>
       </p:sp>
       <p:sp>
         <p:nvSpPr>
@@ -18022,6 +18407,7 @@
         <a:solidFill>
           <a:srgbClr val="FFFFFF"/>
         </a:solidFill>
+        <a:effectLst/>
       </p:bgPr>
     </p:bg>
     <p:spTree>
@@ -18059,7 +18445,7 @@
           <a:bodyPr wrap="square" rtlCol="0" anchor="ctr"/>
           <a:lstStyle/>
           <a:p>
-            <a:pPr algn="ctr" indent="0" marL="0">
+            <a:pPr marL="0" indent="0" algn="ctr">
               <a:buNone/>
             </a:pPr>
             <a:r>
@@ -18100,7 +18486,7 @@
           </a:bodyPr>
           <a:lstStyle/>
           <a:p>
-            <a:pPr indent="0" marL="0">
+            <a:pPr marL="0" indent="0">
               <a:buNone/>
             </a:pPr>
             <a:r>
@@ -18140,6 +18526,13 @@
             <a:prstDash val="solid"/>
           </a:ln>
         </p:spPr>
+        <p:txBody>
+          <a:bodyPr/>
+          <a:lstStyle/>
+          <a:p>
+            <a:endParaRPr lang="en-VN"/>
+          </a:p>
+        </p:txBody>
       </p:sp>
       <p:sp>
         <p:nvSpPr>
@@ -18162,7 +18555,7 @@
           <a:bodyPr wrap="square" rtlCol="0" anchor="ctr"/>
           <a:lstStyle/>
           <a:p>
-            <a:pPr indent="0" marL="0">
+            <a:pPr marL="0" indent="0">
               <a:buNone/>
             </a:pPr>
             <a:r>
@@ -18201,7 +18594,7 @@
           <a:bodyPr wrap="square" rtlCol="0" anchor="ctr"/>
           <a:lstStyle/>
           <a:p>
-            <a:pPr algn="r" indent="0" marL="0">
+            <a:pPr marL="0" indent="0" algn="r">
               <a:buNone/>
             </a:pPr>
             <a:r>
@@ -18242,7 +18635,7 @@
           </a:bodyPr>
           <a:lstStyle/>
           <a:p>
-            <a:pPr indent="0" marL="0">
+            <a:pPr marL="0" indent="0">
               <a:buNone/>
             </a:pPr>
             <a:r>
@@ -18254,12 +18647,6 @@
               <a:t>1. Bối cảnh Thực tiễn &amp; Quy mô
 </a:t>
             </a:r>
-            <a:pPr indent="0" marL="0">
-              <a:lnSpc>
-                <a:spcPct val="120000"/>
-              </a:lnSpc>
-              <a:buNone/>
-            </a:pPr>
             <a:r>
               <a:rPr lang="en-US" sz="1050" dirty="0">
                 <a:solidFill>
@@ -18267,26 +18654,9 @@
                 </a:solidFill>
               </a:rPr>
               <a:t>• Giao dịch Mobile Money tăng trưởng bùng nổ, kéo theo các thủ đoạn gian lận tinh vi.
+• Hệ thống phòng thủ đòi hỏi độ trễ suy luận real-time (&lt; 100ms) trước khi tiền bị tẩu tán.
 </a:t>
             </a:r>
-            <a:pPr indent="0" marL="0">
-              <a:lnSpc>
-                <a:spcPct val="120000"/>
-              </a:lnSpc>
-              <a:buNone/>
-            </a:pPr>
-            <a:r>
-              <a:rPr lang="en-US" sz="1050" dirty="0">
-                <a:solidFill>
-                  <a:srgbClr val="1F2937"/>
-                </a:solidFill>
-              </a:rPr>
-              <a:t>• Hệ thống phòng thủ đòi hỏi độ trễ suy luận real-time (&lt; 100ms) trước khi tiền bị tẩu tán.
-</a:t>
-            </a:r>
-            <a:pPr indent="0" marL="0">
-              <a:buNone/>
-            </a:pPr>
             <a:r>
               <a:rPr lang="en-US" sz="1200" b="1" dirty="0">
                 <a:solidFill>
@@ -18296,12 +18666,6 @@
               <a:t>2. Thách thức Extreme Class Imbalance (~0.13%)
 </a:t>
             </a:r>
-            <a:pPr indent="0" marL="0">
-              <a:lnSpc>
-                <a:spcPct val="120000"/>
-              </a:lnSpc>
-              <a:buNone/>
-            </a:pPr>
             <a:r>
               <a:rPr lang="en-US" sz="1050" dirty="0">
                 <a:solidFill>
@@ -18309,26 +18673,9 @@
                 </a:solidFill>
               </a:rPr>
               <a:t>• Gian lận chỉ chiếm ~1 trên 775 giao dịch (8,213 ca trên 6.36M sự kiện trong PaySim).
+• Cost Asymmetry: Bỏ sót gian lận (FN) gây mất vốn trực tiếp, trong khi Báo động nhầm (FP) chỉ gây gián đoạn trải nghiệm người dùng.
 </a:t>
             </a:r>
-            <a:pPr indent="0" marL="0">
-              <a:lnSpc>
-                <a:spcPct val="120000"/>
-              </a:lnSpc>
-              <a:buNone/>
-            </a:pPr>
-            <a:r>
-              <a:rPr lang="en-US" sz="1050" dirty="0">
-                <a:solidFill>
-                  <a:srgbClr val="1F2937"/>
-                </a:solidFill>
-              </a:rPr>
-              <a:t>• Cost Asymmetry: Bỏ sót gian lận (FN) gây mất vốn trực tiếp, trong khi Báo động nhầm (FP) chỉ gây gián đoạn trải nghiệm người dùng.
-</a:t>
-            </a:r>
-            <a:pPr indent="0" marL="0">
-              <a:buNone/>
-            </a:pPr>
             <a:r>
               <a:rPr lang="en-US" sz="1200" b="1" dirty="0">
                 <a:solidFill>
@@ -18338,12 +18685,6 @@
               <a:t>3. Hành vi Gian lận Phi tĩnh (Non-Stationary)
 </a:t>
             </a:r>
-            <a:pPr indent="0" marL="0">
-              <a:lnSpc>
-                <a:spcPct val="120000"/>
-              </a:lnSpc>
-              <a:buNone/>
-            </a:pPr>
             <a:r>
               <a:rPr lang="en-US" sz="1050" dirty="0">
                 <a:solidFill>
@@ -18380,6 +18721,13 @@
             <a:prstDash val="solid"/>
           </a:ln>
         </p:spPr>
+        <p:txBody>
+          <a:bodyPr/>
+          <a:lstStyle/>
+          <a:p>
+            <a:endParaRPr lang="en-VN"/>
+          </a:p>
+        </p:txBody>
       </p:sp>
       <p:sp>
         <p:nvSpPr>
@@ -18402,7 +18750,7 @@
           <a:bodyPr wrap="square" rtlCol="0" anchor="ctr"/>
           <a:lstStyle/>
           <a:p>
-            <a:pPr indent="0" marL="0">
+            <a:pPr marL="0" indent="0">
               <a:buNone/>
             </a:pPr>
             <a:r>
@@ -18422,7 +18770,7 @@
       </p:sp>
       <p:graphicFrame>
         <p:nvGraphicFramePr>
-          <p:cNvPr id="5" name="Table 0"/>
+          <p:cNvPr id="10" name="Table 0"/>
           <p:cNvGraphicFramePr>
             <a:graphicFrameLocks noGrp="1"/>
           </p:cNvGraphicFramePr>
@@ -18436,16 +18784,34 @@
         </p:nvGraphicFramePr>
         <p:xfrm>
           <a:off x="5074920" y="1243584"/>
-          <a:ext cx="3566160" cy="914400"/>
+          <a:ext cx="3566160" cy="1358900"/>
         </p:xfrm>
         <a:graphic>
           <a:graphicData uri="http://schemas.openxmlformats.org/drawingml/2006/table">
             <a:tbl>
               <a:tblPr/>
               <a:tblGrid>
-                <a:gridCol w="1141171"/>
-                <a:gridCol w="998525"/>
-                <a:gridCol w="1426464"/>
+                <a:gridCol w="1141171">
+                  <a:extLst>
+                    <a:ext uri="{9D8B030D-6E8A-4147-A177-3AD203B41FA5}">
+                      <a16:colId xmlns:a16="http://schemas.microsoft.com/office/drawing/2014/main" val="20000"/>
+                    </a:ext>
+                  </a:extLst>
+                </a:gridCol>
+                <a:gridCol w="998525">
+                  <a:extLst>
+                    <a:ext uri="{9D8B030D-6E8A-4147-A177-3AD203B41FA5}">
+                      <a16:colId xmlns:a16="http://schemas.microsoft.com/office/drawing/2014/main" val="20001"/>
+                    </a:ext>
+                  </a:extLst>
+                </a:gridCol>
+                <a:gridCol w="1426464">
+                  <a:extLst>
+                    <a:ext uri="{9D8B030D-6E8A-4147-A177-3AD203B41FA5}">
+                      <a16:colId xmlns:a16="http://schemas.microsoft.com/office/drawing/2014/main" val="20002"/>
+                    </a:ext>
+                  </a:extLst>
+                </a:gridCol>
               </a:tblGrid>
               <a:tr h="0">
                 <a:tc>
@@ -18453,7 +18819,7 @@
                     <a:bodyPr/>
                     <a:lstStyle/>
                     <a:p>
-                      <a:pPr algn="ctr" indent="0" marL="0">
+                      <a:pPr marL="0" indent="0" algn="ctr">
                         <a:buNone/>
                       </a:pPr>
                       <a:r>
@@ -18521,7 +18887,7 @@
                     <a:bodyPr/>
                     <a:lstStyle/>
                     <a:p>
-                      <a:pPr algn="ctr" indent="0" marL="0">
+                      <a:pPr marL="0" indent="0" algn="ctr">
                         <a:buNone/>
                       </a:pPr>
                       <a:r>
@@ -18589,7 +18955,7 @@
                     <a:bodyPr/>
                     <a:lstStyle/>
                     <a:p>
-                      <a:pPr algn="ctr" indent="0" marL="0">
+                      <a:pPr marL="0" indent="0" algn="ctr">
                         <a:buNone/>
                       </a:pPr>
                       <a:r>
@@ -18652,6 +19018,11 @@
                     </a:solidFill>
                   </a:tcPr>
                 </a:tc>
+                <a:extLst>
+                  <a:ext uri="{0D108BD9-81ED-4DB2-BD59-A6C34878D82A}">
+                    <a16:rowId xmlns:a16="http://schemas.microsoft.com/office/drawing/2014/main" val="10000"/>
+                  </a:ext>
+                </a:extLst>
               </a:tr>
               <a:tr h="0">
                 <a:tc>
@@ -18659,7 +19030,7 @@
                     <a:bodyPr/>
                     <a:lstStyle/>
                     <a:p>
-                      <a:pPr indent="0" marL="0">
+                      <a:pPr marL="0" indent="0">
                         <a:buNone/>
                       </a:pPr>
                       <a:r>
@@ -18727,7 +19098,7 @@
                     <a:bodyPr/>
                     <a:lstStyle/>
                     <a:p>
-                      <a:pPr indent="0" marL="0">
+                      <a:pPr marL="0" indent="0">
                         <a:buNone/>
                       </a:pPr>
                       <a:r>
@@ -18795,7 +19166,7 @@
                     <a:bodyPr/>
                     <a:lstStyle/>
                     <a:p>
-                      <a:pPr indent="0" marL="0">
+                      <a:pPr marL="0" indent="0">
                         <a:buNone/>
                       </a:pPr>
                       <a:r>
@@ -18858,6 +19229,11 @@
                     </a:solidFill>
                   </a:tcPr>
                 </a:tc>
+                <a:extLst>
+                  <a:ext uri="{0D108BD9-81ED-4DB2-BD59-A6C34878D82A}">
+                    <a16:rowId xmlns:a16="http://schemas.microsoft.com/office/drawing/2014/main" val="10001"/>
+                  </a:ext>
+                </a:extLst>
               </a:tr>
               <a:tr h="0">
                 <a:tc>
@@ -18865,7 +19241,7 @@
                     <a:bodyPr/>
                     <a:lstStyle/>
                     <a:p>
-                      <a:pPr indent="0" marL="0">
+                      <a:pPr marL="0" indent="0">
                         <a:buNone/>
                       </a:pPr>
                       <a:r>
@@ -18933,7 +19309,7 @@
                     <a:bodyPr/>
                     <a:lstStyle/>
                     <a:p>
-                      <a:pPr indent="0" marL="0">
+                      <a:pPr marL="0" indent="0">
                         <a:buNone/>
                       </a:pPr>
                       <a:r>
@@ -19001,7 +19377,7 @@
                     <a:bodyPr/>
                     <a:lstStyle/>
                     <a:p>
-                      <a:pPr indent="0" marL="0">
+                      <a:pPr marL="0" indent="0">
                         <a:buNone/>
                       </a:pPr>
                       <a:r>
@@ -19064,6 +19440,11 @@
                     </a:solidFill>
                   </a:tcPr>
                 </a:tc>
+                <a:extLst>
+                  <a:ext uri="{0D108BD9-81ED-4DB2-BD59-A6C34878D82A}">
+                    <a16:rowId xmlns:a16="http://schemas.microsoft.com/office/drawing/2014/main" val="10002"/>
+                  </a:ext>
+                </a:extLst>
               </a:tr>
               <a:tr h="0">
                 <a:tc>
@@ -19071,7 +19452,7 @@
                     <a:bodyPr/>
                     <a:lstStyle/>
                     <a:p>
-                      <a:pPr indent="0" marL="0">
+                      <a:pPr marL="0" indent="0">
                         <a:buNone/>
                       </a:pPr>
                       <a:r>
@@ -19139,7 +19520,7 @@
                     <a:bodyPr/>
                     <a:lstStyle/>
                     <a:p>
-                      <a:pPr indent="0" marL="0">
+                      <a:pPr marL="0" indent="0">
                         <a:buNone/>
                       </a:pPr>
                       <a:r>
@@ -19207,7 +19588,7 @@
                     <a:bodyPr/>
                     <a:lstStyle/>
                     <a:p>
-                      <a:pPr indent="0" marL="0">
+                      <a:pPr marL="0" indent="0">
                         <a:buNone/>
                       </a:pPr>
                       <a:r>
@@ -19270,6 +19651,11 @@
                     </a:solidFill>
                   </a:tcPr>
                 </a:tc>
+                <a:extLst>
+                  <a:ext uri="{0D108BD9-81ED-4DB2-BD59-A6C34878D82A}">
+                    <a16:rowId xmlns:a16="http://schemas.microsoft.com/office/drawing/2014/main" val="10003"/>
+                  </a:ext>
+                </a:extLst>
               </a:tr>
               <a:tr h="0">
                 <a:tc>
@@ -19277,7 +19663,7 @@
                     <a:bodyPr/>
                     <a:lstStyle/>
                     <a:p>
-                      <a:pPr indent="0" marL="0">
+                      <a:pPr marL="0" indent="0">
                         <a:buNone/>
                       </a:pPr>
                       <a:r>
@@ -19345,7 +19731,7 @@
                     <a:bodyPr/>
                     <a:lstStyle/>
                     <a:p>
-                      <a:pPr indent="0" marL="0">
+                      <a:pPr marL="0" indent="0">
                         <a:buNone/>
                       </a:pPr>
                       <a:r>
@@ -19413,7 +19799,7 @@
                     <a:bodyPr/>
                     <a:lstStyle/>
                     <a:p>
-                      <a:pPr indent="0" marL="0">
+                      <a:pPr marL="0" indent="0">
                         <a:buNone/>
                       </a:pPr>
                       <a:r>
@@ -19476,6 +19862,11 @@
                     </a:solidFill>
                   </a:tcPr>
                 </a:tc>
+                <a:extLst>
+                  <a:ext uri="{0D108BD9-81ED-4DB2-BD59-A6C34878D82A}">
+                    <a16:rowId xmlns:a16="http://schemas.microsoft.com/office/drawing/2014/main" val="10004"/>
+                  </a:ext>
+                </a:extLst>
               </a:tr>
             </a:tbl>
           </a:graphicData>
@@ -19505,6 +19896,13 @@
             <a:prstDash val="solid"/>
           </a:ln>
         </p:spPr>
+        <p:txBody>
+          <a:bodyPr/>
+          <a:lstStyle/>
+          <a:p>
+            <a:endParaRPr lang="en-VN"/>
+          </a:p>
+        </p:txBody>
       </p:sp>
       <p:sp>
         <p:nvSpPr>
@@ -19527,7 +19925,7 @@
           <a:bodyPr wrap="square" rtlCol="0" anchor="ctr"/>
           <a:lstStyle/>
           <a:p>
-            <a:pPr indent="0" marL="0">
+            <a:pPr marL="0" indent="0">
               <a:buNone/>
             </a:pPr>
             <a:r>
@@ -19681,6 +20079,7 @@
         <a:solidFill>
           <a:srgbClr val="FFFFFF"/>
         </a:solidFill>
+        <a:effectLst/>
       </p:bgPr>
     </p:bg>
     <p:spTree>
@@ -19718,7 +20117,7 @@
           <a:bodyPr wrap="square" rtlCol="0" anchor="ctr"/>
           <a:lstStyle/>
           <a:p>
-            <a:pPr algn="ctr" indent="0" marL="0">
+            <a:pPr marL="0" indent="0" algn="ctr">
               <a:buNone/>
             </a:pPr>
             <a:r>
@@ -19759,7 +20158,7 @@
           </a:bodyPr>
           <a:lstStyle/>
           <a:p>
-            <a:pPr indent="0" marL="0">
+            <a:pPr marL="0" indent="0">
               <a:buNone/>
             </a:pPr>
             <a:r>
@@ -19799,6 +20198,13 @@
             <a:prstDash val="solid"/>
           </a:ln>
         </p:spPr>
+        <p:txBody>
+          <a:bodyPr/>
+          <a:lstStyle/>
+          <a:p>
+            <a:endParaRPr lang="en-VN"/>
+          </a:p>
+        </p:txBody>
       </p:sp>
       <p:sp>
         <p:nvSpPr>
@@ -19821,7 +20227,7 @@
           <a:bodyPr wrap="square" rtlCol="0" anchor="ctr"/>
           <a:lstStyle/>
           <a:p>
-            <a:pPr indent="0" marL="0">
+            <a:pPr marL="0" indent="0">
               <a:buNone/>
             </a:pPr>
             <a:r>
@@ -19860,7 +20266,7 @@
           <a:bodyPr wrap="square" rtlCol="0" anchor="ctr"/>
           <a:lstStyle/>
           <a:p>
-            <a:pPr algn="r" indent="0" marL="0">
+            <a:pPr marL="0" indent="0" algn="r">
               <a:buNone/>
             </a:pPr>
             <a:r>
@@ -19902,6 +20308,13 @@
             <a:prstDash val="solid"/>
           </a:ln>
         </p:spPr>
+        <p:txBody>
+          <a:bodyPr/>
+          <a:lstStyle/>
+          <a:p>
+            <a:endParaRPr lang="en-VN"/>
+          </a:p>
+        </p:txBody>
       </p:sp>
       <p:sp>
         <p:nvSpPr>
@@ -19924,7 +20337,7 @@
           <a:bodyPr wrap="square" rtlCol="0" anchor="ctr"/>
           <a:lstStyle/>
           <a:p>
-            <a:pPr indent="0" marL="0">
+            <a:pPr marL="0" indent="0">
               <a:buNone/>
             </a:pPr>
             <a:r>
@@ -19960,7 +20373,7 @@
           <a:bodyPr wrap="square" rtlCol="0" anchor="ctr"/>
           <a:lstStyle/>
           <a:p>
-            <a:pPr indent="0" marL="0">
+            <a:pPr marL="0" indent="0">
               <a:buNone/>
             </a:pPr>
             <a:r>
@@ -19996,7 +20409,7 @@
           <a:bodyPr wrap="square" rtlCol="0" anchor="ctr"/>
           <a:lstStyle/>
           <a:p>
-            <a:pPr indent="0" marL="0">
+            <a:pPr marL="0" indent="0">
               <a:buNone/>
             </a:pPr>
             <a:r>
@@ -20035,6 +20448,13 @@
             <a:prstDash val="solid"/>
           </a:ln>
         </p:spPr>
+        <p:txBody>
+          <a:bodyPr/>
+          <a:lstStyle/>
+          <a:p>
+            <a:endParaRPr lang="en-VN"/>
+          </a:p>
+        </p:txBody>
       </p:sp>
       <p:sp>
         <p:nvSpPr>
@@ -20057,7 +20477,7 @@
           <a:bodyPr wrap="square" rtlCol="0" anchor="ctr"/>
           <a:lstStyle/>
           <a:p>
-            <a:pPr indent="0" marL="0">
+            <a:pPr marL="0" indent="0">
               <a:buNone/>
             </a:pPr>
             <a:r>
@@ -20093,7 +20513,7 @@
           <a:bodyPr wrap="square" rtlCol="0" anchor="ctr"/>
           <a:lstStyle/>
           <a:p>
-            <a:pPr indent="0" marL="0">
+            <a:pPr marL="0" indent="0">
               <a:buNone/>
             </a:pPr>
             <a:r>
@@ -20129,7 +20549,7 @@
           <a:bodyPr wrap="square" rtlCol="0" anchor="ctr"/>
           <a:lstStyle/>
           <a:p>
-            <a:pPr indent="0" marL="0">
+            <a:pPr marL="0" indent="0">
               <a:buNone/>
             </a:pPr>
             <a:r>
@@ -20168,6 +20588,13 @@
             <a:prstDash val="solid"/>
           </a:ln>
         </p:spPr>
+        <p:txBody>
+          <a:bodyPr/>
+          <a:lstStyle/>
+          <a:p>
+            <a:endParaRPr lang="en-VN"/>
+          </a:p>
+        </p:txBody>
       </p:sp>
       <p:sp>
         <p:nvSpPr>
@@ -20190,7 +20617,7 @@
           <a:bodyPr wrap="square" rtlCol="0" anchor="ctr"/>
           <a:lstStyle/>
           <a:p>
-            <a:pPr indent="0" marL="0">
+            <a:pPr marL="0" indent="0">
               <a:buNone/>
             </a:pPr>
             <a:r>
@@ -20226,7 +20653,7 @@
           <a:bodyPr wrap="square" rtlCol="0" anchor="ctr"/>
           <a:lstStyle/>
           <a:p>
-            <a:pPr indent="0" marL="0">
+            <a:pPr marL="0" indent="0">
               <a:buNone/>
             </a:pPr>
             <a:r>
@@ -20262,7 +20689,7 @@
           <a:bodyPr wrap="square" rtlCol="0" anchor="ctr"/>
           <a:lstStyle/>
           <a:p>
-            <a:pPr indent="0" marL="0">
+            <a:pPr marL="0" indent="0">
               <a:buNone/>
             </a:pPr>
             <a:r>
@@ -20279,38 +20706,56 @@
       </p:sp>
       <p:graphicFrame>
         <p:nvGraphicFramePr>
-          <p:cNvPr id="6" name="Table 0"/>
+          <p:cNvPr id="19" name="Table 0"/>
           <p:cNvGraphicFramePr>
             <a:graphicFrameLocks noGrp="1"/>
           </p:cNvGraphicFramePr>
           <p:nvPr>
             <p:extLst>
               <p:ext uri="{D42A27DB-BD31-4B8C-83A1-F6EECF244321}">
-                <p14:modId xmlns:p14="http://schemas.microsoft.com/office/powerpoint/2010/main" val="1579011935"/>
+                <p14:modId xmlns:p14="http://schemas.microsoft.com/office/powerpoint/2010/main" val="475222325"/>
               </p:ext>
             </p:extLst>
           </p:nvPr>
         </p:nvGraphicFramePr>
         <p:xfrm>
-          <a:off x="502920" y="1847088"/>
-          <a:ext cx="8138160" cy="914400"/>
+          <a:off x="502920" y="1995191"/>
+          <a:ext cx="8138160" cy="1278361"/>
         </p:xfrm>
         <a:graphic>
           <a:graphicData uri="http://schemas.openxmlformats.org/drawingml/2006/table">
             <a:tbl>
               <a:tblPr/>
               <a:tblGrid>
-                <a:gridCol w="2604211"/>
-                <a:gridCol w="1871777"/>
-                <a:gridCol w="3662172"/>
+                <a:gridCol w="2604211">
+                  <a:extLst>
+                    <a:ext uri="{9D8B030D-6E8A-4147-A177-3AD203B41FA5}">
+                      <a16:colId xmlns:a16="http://schemas.microsoft.com/office/drawing/2014/main" val="20000"/>
+                    </a:ext>
+                  </a:extLst>
+                </a:gridCol>
+                <a:gridCol w="1871777">
+                  <a:extLst>
+                    <a:ext uri="{9D8B030D-6E8A-4147-A177-3AD203B41FA5}">
+                      <a16:colId xmlns:a16="http://schemas.microsoft.com/office/drawing/2014/main" val="20001"/>
+                    </a:ext>
+                  </a:extLst>
+                </a:gridCol>
+                <a:gridCol w="3662172">
+                  <a:extLst>
+                    <a:ext uri="{9D8B030D-6E8A-4147-A177-3AD203B41FA5}">
+                      <a16:colId xmlns:a16="http://schemas.microsoft.com/office/drawing/2014/main" val="20002"/>
+                    </a:ext>
+                  </a:extLst>
+                </a:gridCol>
               </a:tblGrid>
-              <a:tr h="0">
+              <a:tr h="223206">
                 <a:tc>
                   <a:txBody>
                     <a:bodyPr/>
                     <a:lstStyle/>
                     <a:p>
-                      <a:pPr algn="ctr" indent="0" marL="0">
+                      <a:pPr marL="0" indent="0" algn="ctr">
                         <a:buNone/>
                       </a:pPr>
                       <a:r>
@@ -20378,7 +20823,7 @@
                     <a:bodyPr/>
                     <a:lstStyle/>
                     <a:p>
-                      <a:pPr algn="ctr" indent="0" marL="0">
+                      <a:pPr marL="0" indent="0" algn="ctr">
                         <a:buNone/>
                       </a:pPr>
                       <a:r>
@@ -20446,7 +20891,7 @@
                     <a:bodyPr/>
                     <a:lstStyle/>
                     <a:p>
-                      <a:pPr algn="ctr" indent="0" marL="0">
+                      <a:pPr marL="0" indent="0" algn="ctr">
                         <a:buNone/>
                       </a:pPr>
                       <a:r>
@@ -20509,14 +20954,19 @@
                     </a:solidFill>
                   </a:tcPr>
                 </a:tc>
+                <a:extLst>
+                  <a:ext uri="{0D108BD9-81ED-4DB2-BD59-A6C34878D82A}">
+                    <a16:rowId xmlns:a16="http://schemas.microsoft.com/office/drawing/2014/main" val="10000"/>
+                  </a:ext>
+                </a:extLst>
               </a:tr>
-              <a:tr h="0">
+              <a:tr h="211031">
                 <a:tc>
                   <a:txBody>
                     <a:bodyPr/>
                     <a:lstStyle/>
                     <a:p>
-                      <a:pPr indent="0" marL="0">
+                      <a:pPr marL="0" indent="0">
                         <a:buNone/>
                       </a:pPr>
                       <a:r>
@@ -20584,7 +21034,7 @@
                     <a:bodyPr/>
                     <a:lstStyle/>
                     <a:p>
-                      <a:pPr indent="0" marL="0">
+                      <a:pPr marL="0" indent="0">
                         <a:buNone/>
                       </a:pPr>
                       <a:r>
@@ -20652,7 +21102,7 @@
                     <a:bodyPr/>
                     <a:lstStyle/>
                     <a:p>
-                      <a:pPr indent="0" marL="0">
+                      <a:pPr marL="0" indent="0">
                         <a:buNone/>
                       </a:pPr>
                       <a:r>
@@ -20715,14 +21165,19 @@
                     </a:solidFill>
                   </a:tcPr>
                 </a:tc>
+                <a:extLst>
+                  <a:ext uri="{0D108BD9-81ED-4DB2-BD59-A6C34878D82A}">
+                    <a16:rowId xmlns:a16="http://schemas.microsoft.com/office/drawing/2014/main" val="10001"/>
+                  </a:ext>
+                </a:extLst>
               </a:tr>
-              <a:tr h="0">
+              <a:tr h="211031">
                 <a:tc>
                   <a:txBody>
                     <a:bodyPr/>
                     <a:lstStyle/>
                     <a:p>
-                      <a:pPr indent="0" marL="0">
+                      <a:pPr marL="0" indent="0">
                         <a:buNone/>
                       </a:pPr>
                       <a:r>
@@ -20790,7 +21245,7 @@
                     <a:bodyPr/>
                     <a:lstStyle/>
                     <a:p>
-                      <a:pPr indent="0" marL="0">
+                      <a:pPr marL="0" indent="0">
                         <a:buNone/>
                       </a:pPr>
                       <a:r>
@@ -20858,7 +21313,7 @@
                     <a:bodyPr/>
                     <a:lstStyle/>
                     <a:p>
-                      <a:pPr indent="0" marL="0">
+                      <a:pPr marL="0" indent="0">
                         <a:buNone/>
                       </a:pPr>
                       <a:r>
@@ -20921,14 +21376,19 @@
                     </a:solidFill>
                   </a:tcPr>
                 </a:tc>
+                <a:extLst>
+                  <a:ext uri="{0D108BD9-81ED-4DB2-BD59-A6C34878D82A}">
+                    <a16:rowId xmlns:a16="http://schemas.microsoft.com/office/drawing/2014/main" val="10002"/>
+                  </a:ext>
+                </a:extLst>
               </a:tr>
-              <a:tr h="0">
+              <a:tr h="211031">
                 <a:tc>
                   <a:txBody>
                     <a:bodyPr/>
                     <a:lstStyle/>
                     <a:p>
-                      <a:pPr indent="0" marL="0">
+                      <a:pPr marL="0" indent="0">
                         <a:buNone/>
                       </a:pPr>
                       <a:r>
@@ -20996,7 +21456,7 @@
                     <a:bodyPr/>
                     <a:lstStyle/>
                     <a:p>
-                      <a:pPr indent="0" marL="0">
+                      <a:pPr marL="0" indent="0">
                         <a:buNone/>
                       </a:pPr>
                       <a:r>
@@ -21064,7 +21524,7 @@
                     <a:bodyPr/>
                     <a:lstStyle/>
                     <a:p>
-                      <a:pPr indent="0" marL="0">
+                      <a:pPr marL="0" indent="0">
                         <a:buNone/>
                       </a:pPr>
                       <a:r>
@@ -21127,14 +21587,19 @@
                     </a:solidFill>
                   </a:tcPr>
                 </a:tc>
+                <a:extLst>
+                  <a:ext uri="{0D108BD9-81ED-4DB2-BD59-A6C34878D82A}">
+                    <a16:rowId xmlns:a16="http://schemas.microsoft.com/office/drawing/2014/main" val="10003"/>
+                  </a:ext>
+                </a:extLst>
               </a:tr>
-              <a:tr h="0">
+              <a:tr h="211031">
                 <a:tc>
                   <a:txBody>
                     <a:bodyPr/>
                     <a:lstStyle/>
                     <a:p>
-                      <a:pPr indent="0" marL="0">
+                      <a:pPr marL="0" indent="0">
                         <a:buNone/>
                       </a:pPr>
                       <a:r>
@@ -21202,7 +21667,7 @@
                     <a:bodyPr/>
                     <a:lstStyle/>
                     <a:p>
-                      <a:pPr indent="0" marL="0">
+                      <a:pPr marL="0" indent="0">
                         <a:buNone/>
                       </a:pPr>
                       <a:r>
@@ -21270,7 +21735,7 @@
                     <a:bodyPr/>
                     <a:lstStyle/>
                     <a:p>
-                      <a:pPr indent="0" marL="0">
+                      <a:pPr marL="0" indent="0">
                         <a:buNone/>
                       </a:pPr>
                       <a:r>
@@ -21333,14 +21798,19 @@
                     </a:solidFill>
                   </a:tcPr>
                 </a:tc>
+                <a:extLst>
+                  <a:ext uri="{0D108BD9-81ED-4DB2-BD59-A6C34878D82A}">
+                    <a16:rowId xmlns:a16="http://schemas.microsoft.com/office/drawing/2014/main" val="10004"/>
+                  </a:ext>
+                </a:extLst>
               </a:tr>
-              <a:tr h="0">
+              <a:tr h="211031">
                 <a:tc>
                   <a:txBody>
                     <a:bodyPr/>
                     <a:lstStyle/>
                     <a:p>
-                      <a:pPr indent="0" marL="0">
+                      <a:pPr marL="0" indent="0">
                         <a:buNone/>
                       </a:pPr>
                       <a:r>
@@ -21408,7 +21878,7 @@
                     <a:bodyPr/>
                     <a:lstStyle/>
                     <a:p>
-                      <a:pPr indent="0" marL="0">
+                      <a:pPr marL="0" indent="0">
                         <a:buNone/>
                       </a:pPr>
                       <a:r>
@@ -21476,7 +21946,7 @@
                     <a:bodyPr/>
                     <a:lstStyle/>
                     <a:p>
-                      <a:pPr indent="0" marL="0">
+                      <a:pPr marL="0" indent="0">
                         <a:buNone/>
                       </a:pPr>
                       <a:r>
@@ -21539,6 +22009,11 @@
                     </a:solidFill>
                   </a:tcPr>
                 </a:tc>
+                <a:extLst>
+                  <a:ext uri="{0D108BD9-81ED-4DB2-BD59-A6C34878D82A}">
+                    <a16:rowId xmlns:a16="http://schemas.microsoft.com/office/drawing/2014/main" val="10005"/>
+                  </a:ext>
+                </a:extLst>
               </a:tr>
             </a:tbl>
           </a:graphicData>
@@ -21568,6 +22043,13 @@
             <a:prstDash val="solid"/>
           </a:ln>
         </p:spPr>
+        <p:txBody>
+          <a:bodyPr/>
+          <a:lstStyle/>
+          <a:p>
+            <a:endParaRPr lang="en-VN"/>
+          </a:p>
+        </p:txBody>
       </p:sp>
       <p:sp>
         <p:nvSpPr>
@@ -21590,7 +22072,7 @@
           <a:bodyPr wrap="square" rtlCol="0" anchor="ctr"/>
           <a:lstStyle/>
           <a:p>
-            <a:pPr indent="0" marL="0">
+            <a:pPr marL="0" indent="0">
               <a:buNone/>
             </a:pPr>
             <a:r>
@@ -21631,7 +22113,7 @@
           </a:bodyPr>
           <a:lstStyle/>
           <a:p>
-            <a:pPr indent="0" marL="0">
+            <a:pPr marL="0" indent="0">
               <a:lnSpc>
                 <a:spcPct val="120000"/>
               </a:lnSpc>
@@ -21668,6 +22150,7 @@
         <a:solidFill>
           <a:srgbClr val="1E295C"/>
         </a:solidFill>
+        <a:effectLst/>
       </p:bgPr>
     </p:bg>
     <p:spTree>
@@ -21705,7 +22188,7 @@
           <a:bodyPr wrap="square" rtlCol="0" anchor="ctr"/>
           <a:lstStyle/>
           <a:p>
-            <a:pPr algn="ctr" indent="0" marL="0">
+            <a:pPr marL="0" indent="0" algn="ctr">
               <a:buNone/>
             </a:pPr>
             <a:r>
@@ -21749,6 +22232,13 @@
             <a:prstDash val="solid"/>
           </a:ln>
         </p:spPr>
+        <p:txBody>
+          <a:bodyPr/>
+          <a:lstStyle/>
+          <a:p>
+            <a:endParaRPr lang="en-VN"/>
+          </a:p>
+        </p:txBody>
       </p:sp>
       <p:sp>
         <p:nvSpPr>
@@ -21771,7 +22261,7 @@
           <a:bodyPr wrap="square" rtlCol="0" anchor="ctr"/>
           <a:lstStyle/>
           <a:p>
-            <a:pPr algn="ctr" indent="0" marL="0">
+            <a:pPr marL="0" indent="0" algn="ctr">
               <a:buNone/>
             </a:pPr>
             <a:r>
@@ -21812,7 +22302,7 @@
           </a:bodyPr>
           <a:lstStyle/>
           <a:p>
-            <a:pPr algn="ctr" indent="0" marL="0">
+            <a:pPr marL="0" indent="0" algn="ctr">
               <a:buNone/>
             </a:pPr>
             <a:r>
@@ -21852,6 +22342,13 @@
             <a:prstDash val="solid"/>
           </a:ln>
         </p:spPr>
+        <p:txBody>
+          <a:bodyPr/>
+          <a:lstStyle/>
+          <a:p>
+            <a:endParaRPr lang="en-VN"/>
+          </a:p>
+        </p:txBody>
       </p:sp>
       <p:sp>
         <p:nvSpPr>
@@ -21879,6 +22376,13 @@
             <a:prstDash val="solid"/>
           </a:ln>
         </p:spPr>
+        <p:txBody>
+          <a:bodyPr/>
+          <a:lstStyle/>
+          <a:p>
+            <a:endParaRPr lang="en-VN"/>
+          </a:p>
+        </p:txBody>
       </p:sp>
       <p:sp>
         <p:nvSpPr>
@@ -21992,6 +22496,7 @@
         <a:solidFill>
           <a:srgbClr val="FFFFFF"/>
         </a:solidFill>
+        <a:effectLst/>
       </p:bgPr>
     </p:bg>
     <p:spTree>
@@ -22029,7 +22534,7 @@
           <a:bodyPr wrap="square" rtlCol="0" anchor="ctr"/>
           <a:lstStyle/>
           <a:p>
-            <a:pPr algn="ctr" indent="0" marL="0">
+            <a:pPr marL="0" indent="0" algn="ctr">
               <a:buNone/>
             </a:pPr>
             <a:r>
@@ -22070,7 +22575,7 @@
           </a:bodyPr>
           <a:lstStyle/>
           <a:p>
-            <a:pPr indent="0" marL="0">
+            <a:pPr marL="0" indent="0">
               <a:buNone/>
             </a:pPr>
             <a:r>
@@ -22110,6 +22615,13 @@
             <a:prstDash val="solid"/>
           </a:ln>
         </p:spPr>
+        <p:txBody>
+          <a:bodyPr/>
+          <a:lstStyle/>
+          <a:p>
+            <a:endParaRPr lang="en-VN"/>
+          </a:p>
+        </p:txBody>
       </p:sp>
       <p:sp>
         <p:nvSpPr>
@@ -22132,7 +22644,7 @@
           <a:bodyPr wrap="square" rtlCol="0" anchor="ctr"/>
           <a:lstStyle/>
           <a:p>
-            <a:pPr indent="0" marL="0">
+            <a:pPr marL="0" indent="0">
               <a:buNone/>
             </a:pPr>
             <a:r>
@@ -22171,7 +22683,7 @@
           <a:bodyPr wrap="square" rtlCol="0" anchor="ctr"/>
           <a:lstStyle/>
           <a:p>
-            <a:pPr algn="r" indent="0" marL="0">
+            <a:pPr marL="0" indent="0" algn="r">
               <a:buNone/>
             </a:pPr>
             <a:r>
@@ -22213,6 +22725,13 @@
             <a:prstDash val="solid"/>
           </a:ln>
         </p:spPr>
+        <p:txBody>
+          <a:bodyPr/>
+          <a:lstStyle/>
+          <a:p>
+            <a:endParaRPr lang="en-VN"/>
+          </a:p>
+        </p:txBody>
       </p:sp>
       <p:sp>
         <p:nvSpPr>
@@ -22233,6 +22752,13 @@
           </a:solidFill>
           <a:ln/>
         </p:spPr>
+        <p:txBody>
+          <a:bodyPr/>
+          <a:lstStyle/>
+          <a:p>
+            <a:endParaRPr lang="en-VN"/>
+          </a:p>
+        </p:txBody>
       </p:sp>
       <p:sp>
         <p:nvSpPr>
@@ -22255,7 +22781,7 @@
           <a:bodyPr wrap="square" rtlCol="0" anchor="ctr"/>
           <a:lstStyle/>
           <a:p>
-            <a:pPr algn="ctr" indent="0" marL="0">
+            <a:pPr marL="0" indent="0" algn="ctr">
               <a:buNone/>
             </a:pPr>
             <a:r>
@@ -22291,7 +22817,7 @@
           <a:bodyPr wrap="square" rtlCol="0" anchor="ctr"/>
           <a:lstStyle/>
           <a:p>
-            <a:pPr indent="0" marL="0">
+            <a:pPr marL="0" indent="0">
               <a:buNone/>
             </a:pPr>
             <a:r>
@@ -22329,7 +22855,7 @@
           </a:bodyPr>
           <a:lstStyle/>
           <a:p>
-            <a:pPr indent="0" marL="0">
+            <a:pPr marL="0" indent="0">
               <a:lnSpc>
                 <a:spcPct val="122000"/>
               </a:lnSpc>
@@ -22343,12 +22869,6 @@
               </a:rPr>
               <a:t>• 100% gian lận xảy ra duy nhất ở 2 loại giao dịch: </a:t>
             </a:r>
-            <a:pPr indent="0" marL="0">
-              <a:lnSpc>
-                <a:spcPct val="122000"/>
-              </a:lnSpc>
-              <a:buNone/>
-            </a:pPr>
             <a:r>
               <a:rPr lang="en-US" sz="980" b="1" dirty="0">
                 <a:solidFill>
@@ -22358,12 +22878,6 @@
               <a:t>TRANSFER và CASH_OUT.
 </a:t>
             </a:r>
-            <a:pPr indent="0" marL="0">
-              <a:lnSpc>
-                <a:spcPct val="122000"/>
-              </a:lnSpc>
-              <a:buNone/>
-            </a:pPr>
             <a:r>
               <a:rPr lang="en-US" sz="980" dirty="0">
                 <a:solidFill>
@@ -22373,12 +22887,6 @@
               <a:t>• Các loại PAYMENT, CASH_IN, DEBIT hoàn toàn không có gian lận (0%).
 </a:t>
             </a:r>
-            <a:pPr indent="0" marL="0">
-              <a:lnSpc>
-                <a:spcPct val="122000"/>
-              </a:lnSpc>
-              <a:buNone/>
-            </a:pPr>
             <a:r>
               <a:rPr lang="en-US" sz="980" b="1" dirty="0">
                 <a:solidFill>
@@ -22387,12 +22895,6 @@
               </a:rPr>
               <a:t>• Hành động Pipeline: </a:t>
             </a:r>
-            <a:pPr indent="0" marL="0">
-              <a:lnSpc>
-                <a:spcPct val="122000"/>
-              </a:lnSpc>
-              <a:buNone/>
-            </a:pPr>
             <a:r>
               <a:rPr lang="en-US" sz="980" dirty="0">
                 <a:solidFill>
@@ -22429,6 +22931,13 @@
             <a:prstDash val="solid"/>
           </a:ln>
         </p:spPr>
+        <p:txBody>
+          <a:bodyPr/>
+          <a:lstStyle/>
+          <a:p>
+            <a:endParaRPr lang="en-VN"/>
+          </a:p>
+        </p:txBody>
       </p:sp>
       <p:sp>
         <p:nvSpPr>
@@ -22449,6 +22958,13 @@
           </a:solidFill>
           <a:ln/>
         </p:spPr>
+        <p:txBody>
+          <a:bodyPr/>
+          <a:lstStyle/>
+          <a:p>
+            <a:endParaRPr lang="en-VN"/>
+          </a:p>
+        </p:txBody>
       </p:sp>
       <p:sp>
         <p:nvSpPr>
@@ -22471,7 +22987,7 @@
           <a:bodyPr wrap="square" rtlCol="0" anchor="ctr"/>
           <a:lstStyle/>
           <a:p>
-            <a:pPr algn="ctr" indent="0" marL="0">
+            <a:pPr marL="0" indent="0" algn="ctr">
               <a:buNone/>
             </a:pPr>
             <a:r>
@@ -22507,7 +23023,7 @@
           <a:bodyPr wrap="square" rtlCol="0" anchor="ctr"/>
           <a:lstStyle/>
           <a:p>
-            <a:pPr indent="0" marL="0">
+            <a:pPr marL="0" indent="0">
               <a:buNone/>
             </a:pPr>
             <a:r>
@@ -22545,7 +23061,7 @@
           </a:bodyPr>
           <a:lstStyle/>
           <a:p>
-            <a:pPr indent="0" marL="0">
+            <a:pPr marL="0" indent="0">
               <a:lnSpc>
                 <a:spcPct val="122000"/>
               </a:lnSpc>
@@ -22559,12 +23075,6 @@
               </a:rPr>
               <a:t>• Trong 97.55% giao dịch gian lận, tài khoản nạn nhân bị rút cạn sạch về 0: </a:t>
             </a:r>
-            <a:pPr indent="0" marL="0">
-              <a:lnSpc>
-                <a:spcPct val="122000"/>
-              </a:lnSpc>
-              <a:buNone/>
-            </a:pPr>
             <a:r>
               <a:rPr lang="en-US" sz="980" b="1" dirty="0">
                 <a:solidFill>
@@ -22574,12 +23084,6 @@
               <a:t>newbalanceOrig == 0.
 </a:t>
             </a:r>
-            <a:pPr indent="0" marL="0">
-              <a:lnSpc>
-                <a:spcPct val="122000"/>
-              </a:lnSpc>
-              <a:buNone/>
-            </a:pPr>
             <a:r>
               <a:rPr lang="en-US" sz="980" dirty="0">
                 <a:solidFill>
@@ -22589,12 +23093,6 @@
               <a:t>• Kẻ gian tối đa hóa số tiền lấy cắp trong 1 lần duy nhất trước khi bị khóa thẻ.
 </a:t>
             </a:r>
-            <a:pPr indent="0" marL="0">
-              <a:lnSpc>
-                <a:spcPct val="122000"/>
-              </a:lnSpc>
-              <a:buNone/>
-            </a:pPr>
             <a:r>
               <a:rPr lang="en-US" sz="980" b="1" dirty="0">
                 <a:solidFill>
@@ -22603,12 +23101,6 @@
               </a:rPr>
               <a:t>• Tín hiệu Cốt lõi: </a:t>
             </a:r>
-            <a:pPr indent="0" marL="0">
-              <a:lnSpc>
-                <a:spcPct val="122000"/>
-              </a:lnSpc>
-              <a:buNone/>
-            </a:pPr>
             <a:r>
               <a:rPr lang="en-US" sz="980" dirty="0">
                 <a:solidFill>
@@ -22645,6 +23137,13 @@
             <a:prstDash val="solid"/>
           </a:ln>
         </p:spPr>
+        <p:txBody>
+          <a:bodyPr/>
+          <a:lstStyle/>
+          <a:p>
+            <a:endParaRPr lang="en-VN"/>
+          </a:p>
+        </p:txBody>
       </p:sp>
       <p:sp>
         <p:nvSpPr>
@@ -22665,6 +23164,13 @@
           </a:solidFill>
           <a:ln/>
         </p:spPr>
+        <p:txBody>
+          <a:bodyPr/>
+          <a:lstStyle/>
+          <a:p>
+            <a:endParaRPr lang="en-VN"/>
+          </a:p>
+        </p:txBody>
       </p:sp>
       <p:sp>
         <p:nvSpPr>
@@ -22687,7 +23193,7 @@
           <a:bodyPr wrap="square" rtlCol="0" anchor="ctr"/>
           <a:lstStyle/>
           <a:p>
-            <a:pPr algn="ctr" indent="0" marL="0">
+            <a:pPr marL="0" indent="0" algn="ctr">
               <a:buNone/>
             </a:pPr>
             <a:r>
@@ -22723,7 +23229,7 @@
           <a:bodyPr wrap="square" rtlCol="0" anchor="ctr"/>
           <a:lstStyle/>
           <a:p>
-            <a:pPr indent="0" marL="0">
+            <a:pPr marL="0" indent="0">
               <a:buNone/>
             </a:pPr>
             <a:r>
@@ -22761,7 +23267,7 @@
           </a:bodyPr>
           <a:lstStyle/>
           <a:p>
-            <a:pPr indent="0" marL="0">
+            <a:pPr marL="0" indent="0">
               <a:lnSpc>
                 <a:spcPct val="122000"/>
               </a:lnSpc>
@@ -22775,12 +23281,6 @@
               </a:rPr>
               <a:t>• Tỷ lệ lớn giao dịch gian lận không làm tăng số dư tài khoản đích theo sổ sách: </a:t>
             </a:r>
-            <a:pPr indent="0" marL="0">
-              <a:lnSpc>
-                <a:spcPct val="122000"/>
-              </a:lnSpc>
-              <a:buNone/>
-            </a:pPr>
             <a:r>
               <a:rPr lang="en-US" sz="980" b="1" dirty="0">
                 <a:solidFill>
@@ -22790,12 +23290,6 @@
               <a:t>newbalanceDest ≈ 0.
 </a:t>
             </a:r>
-            <a:pPr indent="0" marL="0">
-              <a:lnSpc>
-                <a:spcPct val="122000"/>
-              </a:lnSpc>
-              <a:buNone/>
-            </a:pPr>
             <a:r>
               <a:rPr lang="en-US" sz="980" dirty="0">
                 <a:solidFill>
@@ -22805,12 +23299,6 @@
               <a:t>• Phản ánh tài khoản rác hoặc luân chuyển rửa tiền đa tầng tức thì (diễn giải, dữ liệu mô phỏng).
 </a:t>
             </a:r>
-            <a:pPr indent="0" marL="0">
-              <a:lnSpc>
-                <a:spcPct val="122000"/>
-              </a:lnSpc>
-              <a:buNone/>
-            </a:pPr>
             <a:r>
               <a:rPr lang="en-US" sz="980" b="1" dirty="0">
                 <a:solidFill>
@@ -22819,12 +23307,6 @@
               </a:rPr>
               <a:t>• Tín hiệu Cốt lõi: </a:t>
             </a:r>
-            <a:pPr indent="0" marL="0">
-              <a:lnSpc>
-                <a:spcPct val="122000"/>
-              </a:lnSpc>
-              <a:buNone/>
-            </a:pPr>
             <a:r>
               <a:rPr lang="en-US" sz="980" dirty="0">
                 <a:solidFill>
@@ -22853,6 +23335,7 @@
         <a:solidFill>
           <a:srgbClr val="FFFFFF"/>
         </a:solidFill>
+        <a:effectLst/>
       </p:bgPr>
     </p:bg>
     <p:spTree>
@@ -22890,7 +23373,7 @@
           <a:bodyPr wrap="square" rtlCol="0" anchor="ctr"/>
           <a:lstStyle/>
           <a:p>
-            <a:pPr algn="ctr" indent="0" marL="0">
+            <a:pPr marL="0" indent="0" algn="ctr">
               <a:buNone/>
             </a:pPr>
             <a:r>
@@ -22931,7 +23414,7 @@
           </a:bodyPr>
           <a:lstStyle/>
           <a:p>
-            <a:pPr indent="0" marL="0">
+            <a:pPr marL="0" indent="0">
               <a:buNone/>
             </a:pPr>
             <a:r>
@@ -22971,6 +23454,13 @@
             <a:prstDash val="solid"/>
           </a:ln>
         </p:spPr>
+        <p:txBody>
+          <a:bodyPr/>
+          <a:lstStyle/>
+          <a:p>
+            <a:endParaRPr lang="en-VN"/>
+          </a:p>
+        </p:txBody>
       </p:sp>
       <p:sp>
         <p:nvSpPr>
@@ -22993,7 +23483,7 @@
           <a:bodyPr wrap="square" rtlCol="0" anchor="ctr"/>
           <a:lstStyle/>
           <a:p>
-            <a:pPr indent="0" marL="0">
+            <a:pPr marL="0" indent="0">
               <a:buNone/>
             </a:pPr>
             <a:r>
@@ -23032,7 +23522,7 @@
           <a:bodyPr wrap="square" rtlCol="0" anchor="ctr"/>
           <a:lstStyle/>
           <a:p>
-            <a:pPr algn="r" indent="0" marL="0">
+            <a:pPr marL="0" indent="0" algn="r">
               <a:buNone/>
             </a:pPr>
             <a:r>
@@ -23074,6 +23564,13 @@
             <a:prstDash val="solid"/>
           </a:ln>
         </p:spPr>
+        <p:txBody>
+          <a:bodyPr/>
+          <a:lstStyle/>
+          <a:p>
+            <a:endParaRPr lang="en-VN"/>
+          </a:p>
+        </p:txBody>
       </p:sp>
       <p:sp>
         <p:nvSpPr>
@@ -23096,7 +23593,7 @@
           <a:bodyPr wrap="square" rtlCol="0" anchor="ctr"/>
           <a:lstStyle/>
           <a:p>
-            <a:pPr indent="0" marL="0">
+            <a:pPr marL="0" indent="0">
               <a:buNone/>
             </a:pPr>
             <a:r>
@@ -23132,7 +23629,7 @@
           <a:bodyPr wrap="square" rtlCol="0" anchor="ctr"/>
           <a:lstStyle/>
           <a:p>
-            <a:pPr indent="0" marL="0">
+            <a:pPr marL="0" indent="0">
               <a:buNone/>
             </a:pPr>
             <a:r>
@@ -23171,7 +23668,7 @@
           <a:bodyPr wrap="square" rtlCol="0" anchor="ctr"/>
           <a:lstStyle/>
           <a:p>
-            <a:pPr indent="0" marL="0">
+            <a:pPr marL="0" indent="0">
               <a:lnSpc>
                 <a:spcPct val="120000"/>
               </a:lnSpc>
@@ -23213,6 +23710,13 @@
             <a:prstDash val="solid"/>
           </a:ln>
         </p:spPr>
+        <p:txBody>
+          <a:bodyPr/>
+          <a:lstStyle/>
+          <a:p>
+            <a:endParaRPr lang="en-VN"/>
+          </a:p>
+        </p:txBody>
       </p:sp>
       <p:sp>
         <p:nvSpPr>
@@ -23235,7 +23739,7 @@
           <a:bodyPr wrap="square" rtlCol="0" anchor="ctr"/>
           <a:lstStyle/>
           <a:p>
-            <a:pPr indent="0" marL="0">
+            <a:pPr marL="0" indent="0">
               <a:buNone/>
             </a:pPr>
             <a:r>
@@ -23271,7 +23775,7 @@
           <a:bodyPr wrap="square" rtlCol="0" anchor="ctr"/>
           <a:lstStyle/>
           <a:p>
-            <a:pPr indent="0" marL="0">
+            <a:pPr marL="0" indent="0">
               <a:buNone/>
             </a:pPr>
             <a:r>
@@ -23310,7 +23814,7 @@
           <a:bodyPr wrap="square" rtlCol="0" anchor="ctr"/>
           <a:lstStyle/>
           <a:p>
-            <a:pPr indent="0" marL="0">
+            <a:pPr marL="0" indent="0">
               <a:lnSpc>
                 <a:spcPct val="120000"/>
               </a:lnSpc>
@@ -23352,6 +23856,13 @@
             <a:prstDash val="solid"/>
           </a:ln>
         </p:spPr>
+        <p:txBody>
+          <a:bodyPr/>
+          <a:lstStyle/>
+          <a:p>
+            <a:endParaRPr lang="en-VN"/>
+          </a:p>
+        </p:txBody>
       </p:sp>
       <p:sp>
         <p:nvSpPr>
@@ -23374,7 +23885,7 @@
           <a:bodyPr wrap="square" rtlCol="0" anchor="ctr"/>
           <a:lstStyle/>
           <a:p>
-            <a:pPr indent="0" marL="0">
+            <a:pPr marL="0" indent="0">
               <a:buNone/>
             </a:pPr>
             <a:r>
@@ -23410,7 +23921,7 @@
           <a:bodyPr wrap="square" rtlCol="0" anchor="ctr"/>
           <a:lstStyle/>
           <a:p>
-            <a:pPr indent="0" marL="0">
+            <a:pPr marL="0" indent="0">
               <a:buNone/>
             </a:pPr>
             <a:r>
@@ -23427,7 +23938,7 @@
             <a:endParaRPr lang="en-US" sz="850" dirty="0"/>
           </a:p>
           <a:p>
-            <a:pPr indent="0" marL="0">
+            <a:pPr marL="0" indent="0">
               <a:buNone/>
             </a:pPr>
             <a:r>
@@ -23466,7 +23977,7 @@
           <a:bodyPr wrap="square" rtlCol="0" anchor="ctr"/>
           <a:lstStyle/>
           <a:p>
-            <a:pPr indent="0" marL="0">
+            <a:pPr marL="0" indent="0">
               <a:lnSpc>
                 <a:spcPct val="120000"/>
               </a:lnSpc>
@@ -23508,6 +24019,13 @@
             <a:prstDash val="solid"/>
           </a:ln>
         </p:spPr>
+        <p:txBody>
+          <a:bodyPr/>
+          <a:lstStyle/>
+          <a:p>
+            <a:endParaRPr lang="en-VN"/>
+          </a:p>
+        </p:txBody>
       </p:sp>
       <p:sp>
         <p:nvSpPr>
@@ -23530,7 +24048,7 @@
           <a:bodyPr wrap="square" rtlCol="0" anchor="ctr"/>
           <a:lstStyle/>
           <a:p>
-            <a:pPr indent="0" marL="0">
+            <a:pPr marL="0" indent="0">
               <a:buNone/>
             </a:pPr>
             <a:r>
@@ -23550,7 +24068,7 @@
       </p:sp>
       <p:graphicFrame>
         <p:nvGraphicFramePr>
-          <p:cNvPr id="9" name="Table 0"/>
+          <p:cNvPr id="21" name="Table 0"/>
           <p:cNvGraphicFramePr>
             <a:graphicFrameLocks noGrp="1"/>
           </p:cNvGraphicFramePr>
@@ -23564,16 +24082,34 @@
         </p:nvGraphicFramePr>
         <p:xfrm>
           <a:off x="4983480" y="1243584"/>
-          <a:ext cx="3657600" cy="914400"/>
+          <a:ext cx="3657600" cy="1724660"/>
         </p:xfrm>
         <a:graphic>
           <a:graphicData uri="http://schemas.openxmlformats.org/drawingml/2006/table">
             <a:tbl>
               <a:tblPr/>
               <a:tblGrid>
-                <a:gridCol w="1536192"/>
-                <a:gridCol w="914400"/>
-                <a:gridCol w="1207008"/>
+                <a:gridCol w="1536192">
+                  <a:extLst>
+                    <a:ext uri="{9D8B030D-6E8A-4147-A177-3AD203B41FA5}">
+                      <a16:colId xmlns:a16="http://schemas.microsoft.com/office/drawing/2014/main" val="20000"/>
+                    </a:ext>
+                  </a:extLst>
+                </a:gridCol>
+                <a:gridCol w="914400">
+                  <a:extLst>
+                    <a:ext uri="{9D8B030D-6E8A-4147-A177-3AD203B41FA5}">
+                      <a16:colId xmlns:a16="http://schemas.microsoft.com/office/drawing/2014/main" val="20001"/>
+                    </a:ext>
+                  </a:extLst>
+                </a:gridCol>
+                <a:gridCol w="1207008">
+                  <a:extLst>
+                    <a:ext uri="{9D8B030D-6E8A-4147-A177-3AD203B41FA5}">
+                      <a16:colId xmlns:a16="http://schemas.microsoft.com/office/drawing/2014/main" val="20002"/>
+                    </a:ext>
+                  </a:extLst>
+                </a:gridCol>
               </a:tblGrid>
               <a:tr h="0">
                 <a:tc>
@@ -23581,7 +24117,7 @@
                     <a:bodyPr/>
                     <a:lstStyle/>
                     <a:p>
-                      <a:pPr algn="ctr" indent="0" marL="0">
+                      <a:pPr marL="0" indent="0" algn="ctr">
                         <a:buNone/>
                       </a:pPr>
                       <a:r>
@@ -23649,7 +24185,7 @@
                     <a:bodyPr/>
                     <a:lstStyle/>
                     <a:p>
-                      <a:pPr algn="ctr" indent="0" marL="0">
+                      <a:pPr marL="0" indent="0" algn="ctr">
                         <a:buNone/>
                       </a:pPr>
                       <a:r>
@@ -23717,7 +24253,7 @@
                     <a:bodyPr/>
                     <a:lstStyle/>
                     <a:p>
-                      <a:pPr algn="ctr" indent="0" marL="0">
+                      <a:pPr marL="0" indent="0" algn="ctr">
                         <a:buNone/>
                       </a:pPr>
                       <a:r>
@@ -23780,6 +24316,11 @@
                     </a:solidFill>
                   </a:tcPr>
                 </a:tc>
+                <a:extLst>
+                  <a:ext uri="{0D108BD9-81ED-4DB2-BD59-A6C34878D82A}">
+                    <a16:rowId xmlns:a16="http://schemas.microsoft.com/office/drawing/2014/main" val="10000"/>
+                  </a:ext>
+                </a:extLst>
               </a:tr>
               <a:tr h="0">
                 <a:tc>
@@ -23787,7 +24328,7 @@
                     <a:bodyPr/>
                     <a:lstStyle/>
                     <a:p>
-                      <a:pPr indent="0" marL="0">
+                      <a:pPr marL="0" indent="0">
                         <a:buNone/>
                       </a:pPr>
                       <a:r>
@@ -23855,7 +24396,7 @@
                     <a:bodyPr/>
                     <a:lstStyle/>
                     <a:p>
-                      <a:pPr indent="0" marL="0">
+                      <a:pPr marL="0" indent="0">
                         <a:buNone/>
                       </a:pPr>
                       <a:r>
@@ -23923,7 +24464,7 @@
                     <a:bodyPr/>
                     <a:lstStyle/>
                     <a:p>
-                      <a:pPr indent="0" marL="0">
+                      <a:pPr marL="0" indent="0">
                         <a:buNone/>
                       </a:pPr>
                       <a:r>
@@ -23986,6 +24527,11 @@
                     </a:solidFill>
                   </a:tcPr>
                 </a:tc>
+                <a:extLst>
+                  <a:ext uri="{0D108BD9-81ED-4DB2-BD59-A6C34878D82A}">
+                    <a16:rowId xmlns:a16="http://schemas.microsoft.com/office/drawing/2014/main" val="10001"/>
+                  </a:ext>
+                </a:extLst>
               </a:tr>
               <a:tr h="0">
                 <a:tc>
@@ -23993,7 +24539,7 @@
                     <a:bodyPr/>
                     <a:lstStyle/>
                     <a:p>
-                      <a:pPr indent="0" marL="0">
+                      <a:pPr marL="0" indent="0">
                         <a:buNone/>
                       </a:pPr>
                       <a:r>
@@ -24061,7 +24607,7 @@
                     <a:bodyPr/>
                     <a:lstStyle/>
                     <a:p>
-                      <a:pPr indent="0" marL="0">
+                      <a:pPr marL="0" indent="0">
                         <a:buNone/>
                       </a:pPr>
                       <a:r>
@@ -24129,7 +24675,7 @@
                     <a:bodyPr/>
                     <a:lstStyle/>
                     <a:p>
-                      <a:pPr indent="0" marL="0">
+                      <a:pPr marL="0" indent="0">
                         <a:buNone/>
                       </a:pPr>
                       <a:r>
@@ -24192,6 +24738,11 @@
                     </a:solidFill>
                   </a:tcPr>
                 </a:tc>
+                <a:extLst>
+                  <a:ext uri="{0D108BD9-81ED-4DB2-BD59-A6C34878D82A}">
+                    <a16:rowId xmlns:a16="http://schemas.microsoft.com/office/drawing/2014/main" val="10002"/>
+                  </a:ext>
+                </a:extLst>
               </a:tr>
               <a:tr h="0">
                 <a:tc>
@@ -24199,7 +24750,7 @@
                     <a:bodyPr/>
                     <a:lstStyle/>
                     <a:p>
-                      <a:pPr indent="0" marL="0">
+                      <a:pPr marL="0" indent="0">
                         <a:buNone/>
                       </a:pPr>
                       <a:r>
@@ -24267,7 +24818,7 @@
                     <a:bodyPr/>
                     <a:lstStyle/>
                     <a:p>
-                      <a:pPr indent="0" marL="0">
+                      <a:pPr marL="0" indent="0">
                         <a:buNone/>
                       </a:pPr>
                       <a:r>
@@ -24335,7 +24886,7 @@
                     <a:bodyPr/>
                     <a:lstStyle/>
                     <a:p>
-                      <a:pPr indent="0" marL="0">
+                      <a:pPr marL="0" indent="0">
                         <a:buNone/>
                       </a:pPr>
                       <a:r>
@@ -24398,6 +24949,11 @@
                     </a:solidFill>
                   </a:tcPr>
                 </a:tc>
+                <a:extLst>
+                  <a:ext uri="{0D108BD9-81ED-4DB2-BD59-A6C34878D82A}">
+                    <a16:rowId xmlns:a16="http://schemas.microsoft.com/office/drawing/2014/main" val="10003"/>
+                  </a:ext>
+                </a:extLst>
               </a:tr>
               <a:tr h="0">
                 <a:tc>
@@ -24405,7 +24961,7 @@
                     <a:bodyPr/>
                     <a:lstStyle/>
                     <a:p>
-                      <a:pPr indent="0" marL="0">
+                      <a:pPr marL="0" indent="0">
                         <a:buNone/>
                       </a:pPr>
                       <a:r>
@@ -24473,7 +25029,7 @@
                     <a:bodyPr/>
                     <a:lstStyle/>
                     <a:p>
-                      <a:pPr indent="0" marL="0">
+                      <a:pPr marL="0" indent="0">
                         <a:buNone/>
                       </a:pPr>
                       <a:r>
@@ -24541,7 +25097,7 @@
                     <a:bodyPr/>
                     <a:lstStyle/>
                     <a:p>
-                      <a:pPr indent="0" marL="0">
+                      <a:pPr marL="0" indent="0">
                         <a:buNone/>
                       </a:pPr>
                       <a:r>
@@ -24604,6 +25160,11 @@
                     </a:solidFill>
                   </a:tcPr>
                 </a:tc>
+                <a:extLst>
+                  <a:ext uri="{0D108BD9-81ED-4DB2-BD59-A6C34878D82A}">
+                    <a16:rowId xmlns:a16="http://schemas.microsoft.com/office/drawing/2014/main" val="10004"/>
+                  </a:ext>
+                </a:extLst>
               </a:tr>
             </a:tbl>
           </a:graphicData>
@@ -24617,8 +25178,8 @@
         </p:nvSpPr>
         <p:spPr>
           <a:xfrm>
-            <a:off x="4983480" y="2697480"/>
-            <a:ext cx="3657600" cy="1874520"/>
+            <a:off x="4983480" y="3062224"/>
+            <a:ext cx="3657600" cy="1509776"/>
           </a:xfrm>
           <a:prstGeom prst="rect">
             <a:avLst/>
@@ -24633,6 +25194,13 @@
             <a:prstDash val="solid"/>
           </a:ln>
         </p:spPr>
+        <p:txBody>
+          <a:bodyPr/>
+          <a:lstStyle/>
+          <a:p>
+            <a:endParaRPr lang="en-VN"/>
+          </a:p>
+        </p:txBody>
       </p:sp>
       <p:sp>
         <p:nvSpPr>
@@ -24642,7 +25210,7 @@
         </p:nvSpPr>
         <p:spPr>
           <a:xfrm>
-            <a:off x="5120640" y="2770632"/>
+            <a:off x="5120640" y="3093974"/>
             <a:ext cx="3383280" cy="219456"/>
           </a:xfrm>
           <a:prstGeom prst="rect">
@@ -24655,7 +25223,7 @@
           <a:bodyPr wrap="square" rtlCol="0" anchor="ctr"/>
           <a:lstStyle/>
           <a:p>
-            <a:pPr indent="0" marL="0">
+            <a:pPr marL="0" indent="0">
               <a:buNone/>
             </a:pPr>
             <a:r>
@@ -24681,8 +25249,8 @@
         </p:nvSpPr>
         <p:spPr>
           <a:xfrm>
-            <a:off x="5120640" y="2990088"/>
-            <a:ext cx="3383280" cy="1508760"/>
+            <a:off x="5120640" y="3219704"/>
+            <a:ext cx="3383280" cy="1279144"/>
           </a:xfrm>
           <a:prstGeom prst="rect">
             <a:avLst/>
@@ -24785,6 +25353,7 @@
         <a:solidFill>
           <a:srgbClr val="FFFFFF"/>
         </a:solidFill>
+        <a:effectLst/>
       </p:bgPr>
     </p:bg>
     <p:spTree>
@@ -24822,7 +25391,7 @@
           <a:bodyPr wrap="square" rtlCol="0" anchor="ctr"/>
           <a:lstStyle/>
           <a:p>
-            <a:pPr algn="ctr" indent="0" marL="0">
+            <a:pPr marL="0" indent="0" algn="ctr">
               <a:buNone/>
             </a:pPr>
             <a:r>
@@ -24863,7 +25432,7 @@
           </a:bodyPr>
           <a:lstStyle/>
           <a:p>
-            <a:pPr indent="0" marL="0">
+            <a:pPr marL="0" indent="0">
               <a:buNone/>
             </a:pPr>
             <a:r>
@@ -24903,6 +25472,13 @@
             <a:prstDash val="solid"/>
           </a:ln>
         </p:spPr>
+        <p:txBody>
+          <a:bodyPr/>
+          <a:lstStyle/>
+          <a:p>
+            <a:endParaRPr lang="en-VN"/>
+          </a:p>
+        </p:txBody>
       </p:sp>
       <p:sp>
         <p:nvSpPr>
@@ -24925,7 +25501,7 @@
           <a:bodyPr wrap="square" rtlCol="0" anchor="ctr"/>
           <a:lstStyle/>
           <a:p>
-            <a:pPr indent="0" marL="0">
+            <a:pPr marL="0" indent="0">
               <a:buNone/>
             </a:pPr>
             <a:r>
@@ -24964,7 +25540,7 @@
           <a:bodyPr wrap="square" rtlCol="0" anchor="ctr"/>
           <a:lstStyle/>
           <a:p>
-            <a:pPr algn="r" indent="0" marL="0">
+            <a:pPr marL="0" indent="0" algn="r">
               <a:buNone/>
             </a:pPr>
             <a:r>
@@ -25006,6 +25582,13 @@
             <a:prstDash val="solid"/>
           </a:ln>
         </p:spPr>
+        <p:txBody>
+          <a:bodyPr/>
+          <a:lstStyle/>
+          <a:p>
+            <a:endParaRPr lang="en-VN"/>
+          </a:p>
+        </p:txBody>
       </p:sp>
       <p:sp>
         <p:nvSpPr>
@@ -25028,7 +25611,7 @@
           <a:bodyPr wrap="square" rtlCol="0" anchor="ctr"/>
           <a:lstStyle/>
           <a:p>
-            <a:pPr indent="0" marL="0">
+            <a:pPr marL="0" indent="0">
               <a:buNone/>
             </a:pPr>
             <a:r>
@@ -25064,7 +25647,7 @@
           <a:bodyPr wrap="square" rtlCol="0" anchor="ctr"/>
           <a:lstStyle/>
           <a:p>
-            <a:pPr indent="0" marL="0">
+            <a:pPr marL="0" indent="0">
               <a:lnSpc>
                 <a:spcPct val="120000"/>
               </a:lnSpc>
@@ -25106,6 +25689,13 @@
             <a:prstDash val="solid"/>
           </a:ln>
         </p:spPr>
+        <p:txBody>
+          <a:bodyPr/>
+          <a:lstStyle/>
+          <a:p>
+            <a:endParaRPr lang="en-VN"/>
+          </a:p>
+        </p:txBody>
       </p:sp>
       <p:sp>
         <p:nvSpPr>
@@ -25128,7 +25718,7 @@
           <a:bodyPr wrap="square" rtlCol="0" anchor="ctr"/>
           <a:lstStyle/>
           <a:p>
-            <a:pPr indent="0" marL="0">
+            <a:pPr marL="0" indent="0">
               <a:buNone/>
             </a:pPr>
             <a:r>
@@ -25167,6 +25757,13 @@
             <a:prstDash val="solid"/>
           </a:ln>
         </p:spPr>
+        <p:txBody>
+          <a:bodyPr/>
+          <a:lstStyle/>
+          <a:p>
+            <a:endParaRPr lang="en-VN"/>
+          </a:p>
+        </p:txBody>
       </p:sp>
       <p:sp>
         <p:nvSpPr>
@@ -25189,7 +25786,7 @@
           <a:bodyPr wrap="square" rtlCol="0" anchor="ctr"/>
           <a:lstStyle/>
           <a:p>
-            <a:pPr indent="0" marL="0">
+            <a:pPr marL="0" indent="0">
               <a:buNone/>
             </a:pPr>
             <a:r>
@@ -25230,7 +25827,7 @@
           </a:bodyPr>
           <a:lstStyle/>
           <a:p>
-            <a:pPr indent="0" marL="0">
+            <a:pPr marL="0" indent="0">
               <a:lnSpc>
                 <a:spcPct val="120000"/>
               </a:lnSpc>
@@ -25244,12 +25841,6 @@
               </a:rPr>
               <a:t>• Cơ chế: </a:t>
             </a:r>
-            <a:pPr indent="0" marL="0">
-              <a:lnSpc>
-                <a:spcPct val="120000"/>
-              </a:lnSpc>
-              <a:buNone/>
-            </a:pPr>
             <a:r>
               <a:rPr lang="en-US" sz="920" dirty="0">
                 <a:solidFill>
@@ -25259,12 +25850,6 @@
               <a:t>Nội suy mẫu nhân tạo thiểu số dọc theo đoạn thẳng nối các láng giềng k-NN trong không gian đặc trưng.
 </a:t>
             </a:r>
-            <a:pPr indent="0" marL="0">
-              <a:lnSpc>
-                <a:spcPct val="120000"/>
-              </a:lnSpc>
-              <a:buNone/>
-            </a:pPr>
             <a:r>
               <a:rPr lang="en-US" sz="920" b="1" dirty="0">
                 <a:solidFill>
@@ -25273,12 +25858,6 @@
               </a:rPr>
               <a:t>• Ưu điểm: </a:t>
             </a:r>
-            <a:pPr indent="0" marL="0">
-              <a:lnSpc>
-                <a:spcPct val="120000"/>
-              </a:lnSpc>
-              <a:buNone/>
-            </a:pPr>
             <a:r>
               <a:rPr lang="en-US" sz="920" dirty="0">
                 <a:solidFill>
@@ -25288,12 +25867,6 @@
               <a:t>Tạo Decision Boundary rõ nét, phân tách tốt giữa Fraud và Legitimate.
 </a:t>
             </a:r>
-            <a:pPr indent="0" marL="0">
-              <a:lnSpc>
-                <a:spcPct val="120000"/>
-              </a:lnSpc>
-              <a:buNone/>
-            </a:pPr>
             <a:r>
               <a:rPr lang="en-US" sz="920" b="1" dirty="0">
                 <a:solidFill>
@@ -25302,12 +25875,6 @@
               </a:rPr>
               <a:t>• Kết quả Thực nghiệm: </a:t>
             </a:r>
-            <a:pPr indent="0" marL="0">
-              <a:lnSpc>
-                <a:spcPct val="120000"/>
-              </a:lnSpc>
-              <a:buNone/>
-            </a:pPr>
             <a:r>
               <a:rPr lang="en-US" sz="920" dirty="0">
                 <a:solidFill>
@@ -25344,6 +25911,13 @@
             <a:prstDash val="solid"/>
           </a:ln>
         </p:spPr>
+        <p:txBody>
+          <a:bodyPr/>
+          <a:lstStyle/>
+          <a:p>
+            <a:endParaRPr lang="en-VN"/>
+          </a:p>
+        </p:txBody>
       </p:sp>
       <p:sp>
         <p:nvSpPr>
@@ -25366,7 +25940,7 @@
           <a:bodyPr wrap="square" rtlCol="0" anchor="ctr"/>
           <a:lstStyle/>
           <a:p>
-            <a:pPr indent="0" marL="0">
+            <a:pPr marL="0" indent="0">
               <a:buNone/>
             </a:pPr>
             <a:r>
@@ -25386,7 +25960,7 @@
       </p:sp>
       <p:graphicFrame>
         <p:nvGraphicFramePr>
-          <p:cNvPr id="10" name="Table 0"/>
+          <p:cNvPr id="17" name="Table 0"/>
           <p:cNvGraphicFramePr>
             <a:graphicFrameLocks noGrp="1"/>
           </p:cNvGraphicFramePr>
@@ -25400,16 +25974,34 @@
         </p:nvGraphicFramePr>
         <p:xfrm>
           <a:off x="4686300" y="1993392"/>
-          <a:ext cx="3954780" cy="914400"/>
+          <a:ext cx="3954780" cy="1358900"/>
         </p:xfrm>
         <a:graphic>
           <a:graphicData uri="http://schemas.openxmlformats.org/drawingml/2006/table">
             <a:tbl>
               <a:tblPr/>
               <a:tblGrid>
-                <a:gridCol w="1423721"/>
-                <a:gridCol w="1107338"/>
-                <a:gridCol w="1423721"/>
+                <a:gridCol w="1423721">
+                  <a:extLst>
+                    <a:ext uri="{9D8B030D-6E8A-4147-A177-3AD203B41FA5}">
+                      <a16:colId xmlns:a16="http://schemas.microsoft.com/office/drawing/2014/main" val="20000"/>
+                    </a:ext>
+                  </a:extLst>
+                </a:gridCol>
+                <a:gridCol w="1107338">
+                  <a:extLst>
+                    <a:ext uri="{9D8B030D-6E8A-4147-A177-3AD203B41FA5}">
+                      <a16:colId xmlns:a16="http://schemas.microsoft.com/office/drawing/2014/main" val="20001"/>
+                    </a:ext>
+                  </a:extLst>
+                </a:gridCol>
+                <a:gridCol w="1423721">
+                  <a:extLst>
+                    <a:ext uri="{9D8B030D-6E8A-4147-A177-3AD203B41FA5}">
+                      <a16:colId xmlns:a16="http://schemas.microsoft.com/office/drawing/2014/main" val="20002"/>
+                    </a:ext>
+                  </a:extLst>
+                </a:gridCol>
               </a:tblGrid>
               <a:tr h="0">
                 <a:tc>
@@ -25417,7 +26009,7 @@
                     <a:bodyPr/>
                     <a:lstStyle/>
                     <a:p>
-                      <a:pPr algn="ctr" indent="0" marL="0">
+                      <a:pPr marL="0" indent="0" algn="ctr">
                         <a:buNone/>
                       </a:pPr>
                       <a:r>
@@ -25485,7 +26077,7 @@
                     <a:bodyPr/>
                     <a:lstStyle/>
                     <a:p>
-                      <a:pPr algn="ctr" indent="0" marL="0">
+                      <a:pPr marL="0" indent="0" algn="ctr">
                         <a:buNone/>
                       </a:pPr>
                       <a:r>
@@ -25553,7 +26145,7 @@
                     <a:bodyPr/>
                     <a:lstStyle/>
                     <a:p>
-                      <a:pPr algn="ctr" indent="0" marL="0">
+                      <a:pPr marL="0" indent="0" algn="ctr">
                         <a:buNone/>
                       </a:pPr>
                       <a:r>
@@ -25616,6 +26208,11 @@
                     </a:solidFill>
                   </a:tcPr>
                 </a:tc>
+                <a:extLst>
+                  <a:ext uri="{0D108BD9-81ED-4DB2-BD59-A6C34878D82A}">
+                    <a16:rowId xmlns:a16="http://schemas.microsoft.com/office/drawing/2014/main" val="10000"/>
+                  </a:ext>
+                </a:extLst>
               </a:tr>
               <a:tr h="0">
                 <a:tc>
@@ -25623,7 +26220,7 @@
                     <a:bodyPr/>
                     <a:lstStyle/>
                     <a:p>
-                      <a:pPr indent="0" marL="0">
+                      <a:pPr marL="0" indent="0">
                         <a:buNone/>
                       </a:pPr>
                       <a:r>
@@ -25691,7 +26288,7 @@
                     <a:bodyPr/>
                     <a:lstStyle/>
                     <a:p>
-                      <a:pPr indent="0" marL="0">
+                      <a:pPr marL="0" indent="0">
                         <a:buNone/>
                       </a:pPr>
                       <a:r>
@@ -25759,7 +26356,7 @@
                     <a:bodyPr/>
                     <a:lstStyle/>
                     <a:p>
-                      <a:pPr indent="0" marL="0">
+                      <a:pPr marL="0" indent="0">
                         <a:buNone/>
                       </a:pPr>
                       <a:r>
@@ -25822,6 +26419,11 @@
                     </a:solidFill>
                   </a:tcPr>
                 </a:tc>
+                <a:extLst>
+                  <a:ext uri="{0D108BD9-81ED-4DB2-BD59-A6C34878D82A}">
+                    <a16:rowId xmlns:a16="http://schemas.microsoft.com/office/drawing/2014/main" val="10001"/>
+                  </a:ext>
+                </a:extLst>
               </a:tr>
               <a:tr h="0">
                 <a:tc>
@@ -25829,7 +26431,7 @@
                     <a:bodyPr/>
                     <a:lstStyle/>
                     <a:p>
-                      <a:pPr indent="0" marL="0">
+                      <a:pPr marL="0" indent="0">
                         <a:buNone/>
                       </a:pPr>
                       <a:r>
@@ -25897,7 +26499,7 @@
                     <a:bodyPr/>
                     <a:lstStyle/>
                     <a:p>
-                      <a:pPr indent="0" marL="0">
+                      <a:pPr marL="0" indent="0">
                         <a:buNone/>
                       </a:pPr>
                       <a:r>
@@ -25965,7 +26567,7 @@
                     <a:bodyPr/>
                     <a:lstStyle/>
                     <a:p>
-                      <a:pPr indent="0" marL="0">
+                      <a:pPr marL="0" indent="0">
                         <a:buNone/>
                       </a:pPr>
                       <a:r>
@@ -26028,6 +26630,11 @@
                     </a:solidFill>
                   </a:tcPr>
                 </a:tc>
+                <a:extLst>
+                  <a:ext uri="{0D108BD9-81ED-4DB2-BD59-A6C34878D82A}">
+                    <a16:rowId xmlns:a16="http://schemas.microsoft.com/office/drawing/2014/main" val="10002"/>
+                  </a:ext>
+                </a:extLst>
               </a:tr>
               <a:tr h="0">
                 <a:tc>
@@ -26035,7 +26642,7 @@
                     <a:bodyPr/>
                     <a:lstStyle/>
                     <a:p>
-                      <a:pPr indent="0" marL="0">
+                      <a:pPr marL="0" indent="0">
                         <a:buNone/>
                       </a:pPr>
                       <a:r>
@@ -26103,7 +26710,7 @@
                     <a:bodyPr/>
                     <a:lstStyle/>
                     <a:p>
-                      <a:pPr indent="0" marL="0">
+                      <a:pPr marL="0" indent="0">
                         <a:buNone/>
                       </a:pPr>
                       <a:r>
@@ -26171,7 +26778,7 @@
                     <a:bodyPr/>
                     <a:lstStyle/>
                     <a:p>
-                      <a:pPr indent="0" marL="0">
+                      <a:pPr marL="0" indent="0">
                         <a:buNone/>
                       </a:pPr>
                       <a:r>
@@ -26234,6 +26841,11 @@
                     </a:solidFill>
                   </a:tcPr>
                 </a:tc>
+                <a:extLst>
+                  <a:ext uri="{0D108BD9-81ED-4DB2-BD59-A6C34878D82A}">
+                    <a16:rowId xmlns:a16="http://schemas.microsoft.com/office/drawing/2014/main" val="10003"/>
+                  </a:ext>
+                </a:extLst>
               </a:tr>
               <a:tr h="0">
                 <a:tc>
@@ -26241,7 +26853,7 @@
                     <a:bodyPr/>
                     <a:lstStyle/>
                     <a:p>
-                      <a:pPr indent="0" marL="0">
+                      <a:pPr marL="0" indent="0">
                         <a:buNone/>
                       </a:pPr>
                       <a:r>
@@ -26309,7 +26921,7 @@
                     <a:bodyPr/>
                     <a:lstStyle/>
                     <a:p>
-                      <a:pPr indent="0" marL="0">
+                      <a:pPr marL="0" indent="0">
                         <a:buNone/>
                       </a:pPr>
                       <a:r>
@@ -26377,7 +26989,7 @@
                     <a:bodyPr/>
                     <a:lstStyle/>
                     <a:p>
-                      <a:pPr indent="0" marL="0">
+                      <a:pPr marL="0" indent="0">
                         <a:buNone/>
                       </a:pPr>
                       <a:r>
@@ -26440,6 +27052,11 @@
                     </a:solidFill>
                   </a:tcPr>
                 </a:tc>
+                <a:extLst>
+                  <a:ext uri="{0D108BD9-81ED-4DB2-BD59-A6C34878D82A}">
+                    <a16:rowId xmlns:a16="http://schemas.microsoft.com/office/drawing/2014/main" val="10004"/>
+                  </a:ext>
+                </a:extLst>
               </a:tr>
             </a:tbl>
           </a:graphicData>
@@ -26453,8 +27070,8 @@
         </p:nvSpPr>
         <p:spPr>
           <a:xfrm>
-            <a:off x="4686300" y="3337560"/>
-            <a:ext cx="3954780" cy="1234440"/>
+            <a:off x="4686300" y="3427984"/>
+            <a:ext cx="3954780" cy="1144016"/>
           </a:xfrm>
           <a:prstGeom prst="rect">
             <a:avLst/>
@@ -26469,6 +27086,13 @@
             <a:prstDash val="solid"/>
           </a:ln>
         </p:spPr>
+        <p:txBody>
+          <a:bodyPr/>
+          <a:lstStyle/>
+          <a:p>
+            <a:endParaRPr lang="en-VN"/>
+          </a:p>
+        </p:txBody>
       </p:sp>
       <p:sp>
         <p:nvSpPr>
@@ -26478,7 +27102,7 @@
         </p:nvSpPr>
         <p:spPr>
           <a:xfrm>
-            <a:off x="4777740" y="3383280"/>
+            <a:off x="4777740" y="3506724"/>
             <a:ext cx="3771900" cy="201168"/>
           </a:xfrm>
           <a:prstGeom prst="rect">
@@ -26491,7 +27115,7 @@
           <a:bodyPr wrap="square" rtlCol="0" anchor="ctr"/>
           <a:lstStyle/>
           <a:p>
-            <a:pPr indent="0" marL="0">
+            <a:pPr marL="0" indent="0">
               <a:buNone/>
             </a:pPr>
             <a:r>
@@ -26514,8 +27138,8 @@
         </p:nvSpPr>
         <p:spPr>
           <a:xfrm>
-            <a:off x="4777740" y="3602736"/>
-            <a:ext cx="3771900" cy="914400"/>
+            <a:off x="4777740" y="3603752"/>
+            <a:ext cx="3771900" cy="913383"/>
           </a:xfrm>
           <a:prstGeom prst="rect">
             <a:avLst/>
@@ -26529,7 +27153,7 @@
           </a:bodyPr>
           <a:lstStyle/>
           <a:p>
-            <a:pPr indent="0" marL="0">
+            <a:pPr marL="0" indent="0">
               <a:lnSpc>
                 <a:spcPct val="118000"/>
               </a:lnSpc>
@@ -26544,12 +27168,6 @@
               <a:t>• ADASYN sinh mẫu tỷ lệ thuận theo mật độ vùng biên khó, tuy nhiên dễ over-synthesize ở vùng chồng lấn nhiễu gây tăng nhẹ False Alarm.
 </a:t>
             </a:r>
-            <a:pPr indent="0" marL="0">
-              <a:lnSpc>
-                <a:spcPct val="118000"/>
-              </a:lnSpc>
-              <a:buNone/>
-            </a:pPr>
             <a:r>
               <a:rPr lang="en-US" sz="880" b="1" dirty="0">
                 <a:solidFill>
@@ -26863,4 +27481,319 @@
     </a:ext>
   </a:extLst>
 </a:theme>
+</file>
+
+<file path=ppt/theme/theme2.xml><?xml version="1.0" encoding="utf-8"?>
+<a:theme xmlns:a="http://schemas.openxmlformats.org/drawingml/2006/main" name="Office Theme">
+  <a:themeElements>
+    <a:clrScheme name="Office">
+      <a:dk1>
+        <a:sysClr val="windowText" lastClr="000000"/>
+      </a:dk1>
+      <a:lt1>
+        <a:sysClr val="window" lastClr="FFFFFF"/>
+      </a:lt1>
+      <a:dk2>
+        <a:srgbClr val="0E2841"/>
+      </a:dk2>
+      <a:lt2>
+        <a:srgbClr val="E8E8E8"/>
+      </a:lt2>
+      <a:accent1>
+        <a:srgbClr val="156082"/>
+      </a:accent1>
+      <a:accent2>
+        <a:srgbClr val="E97132"/>
+      </a:accent2>
+      <a:accent3>
+        <a:srgbClr val="196B24"/>
+      </a:accent3>
+      <a:accent4>
+        <a:srgbClr val="0F9ED5"/>
+      </a:accent4>
+      <a:accent5>
+        <a:srgbClr val="A02B93"/>
+      </a:accent5>
+      <a:accent6>
+        <a:srgbClr val="4EA72E"/>
+      </a:accent6>
+      <a:hlink>
+        <a:srgbClr val="467886"/>
+      </a:hlink>
+      <a:folHlink>
+        <a:srgbClr val="96607D"/>
+      </a:folHlink>
+    </a:clrScheme>
+    <a:fontScheme name="Office">
+      <a:majorFont>
+        <a:latin typeface="Aptos Display" panose="02110004020202020204"/>
+        <a:ea typeface=""/>
+        <a:cs typeface=""/>
+        <a:font script="Jpan" typeface="游ゴシック Light"/>
+        <a:font script="Hang" typeface="맑은 고딕"/>
+        <a:font script="Hans" typeface="等线 Light"/>
+        <a:font script="Hant" typeface="新細明體"/>
+        <a:font script="Arab" typeface="Times New Roman"/>
+        <a:font script="Hebr" typeface="Times New Roman"/>
+        <a:font script="Thai" typeface="Angsana New"/>
+        <a:font script="Ethi" typeface="Nyala"/>
+        <a:font script="Beng" typeface="Vrinda"/>
+        <a:font script="Gujr" typeface="Shruti"/>
+        <a:font script="Khmr" typeface="MoolBoran"/>
+        <a:font script="Knda" typeface="Tunga"/>
+        <a:font script="Guru" typeface="Raavi"/>
+        <a:font script="Cans" typeface="Euphemia"/>
+        <a:font script="Cher" typeface="Plantagenet Cherokee"/>
+        <a:font script="Yiii" typeface="Microsoft Yi Baiti"/>
+        <a:font script="Tibt" typeface="Microsoft Himalaya"/>
+        <a:font script="Thaa" typeface="MV Boli"/>
+        <a:font script="Deva" typeface="Mangal"/>
+        <a:font script="Telu" typeface="Gautami"/>
+        <a:font script="Taml" typeface="Latha"/>
+        <a:font script="Syrc" typeface="Estrangelo Edessa"/>
+        <a:font script="Orya" typeface="Kalinga"/>
+        <a:font script="Mlym" typeface="Kartika"/>
+        <a:font script="Laoo" typeface="DokChampa"/>
+        <a:font script="Sinh" typeface="Iskoola Pota"/>
+        <a:font script="Mong" typeface="Mongolian Baiti"/>
+        <a:font script="Viet" typeface="Times New Roman"/>
+        <a:font script="Uigh" typeface="Microsoft Uighur"/>
+        <a:font script="Geor" typeface="Sylfaen"/>
+        <a:font script="Armn" typeface="Arial"/>
+        <a:font script="Bugi" typeface="Leelawadee UI"/>
+        <a:font script="Bopo" typeface="Microsoft JhengHei"/>
+        <a:font script="Java" typeface="Javanese Text"/>
+        <a:font script="Lisu" typeface="Segoe UI"/>
+        <a:font script="Mymr" typeface="Myanmar Text"/>
+        <a:font script="Nkoo" typeface="Ebrima"/>
+        <a:font script="Olck" typeface="Nirmala UI"/>
+        <a:font script="Osma" typeface="Ebrima"/>
+        <a:font script="Phag" typeface="Phagspa"/>
+        <a:font script="Syrn" typeface="Estrangelo Edessa"/>
+        <a:font script="Syrj" typeface="Estrangelo Edessa"/>
+        <a:font script="Syre" typeface="Estrangelo Edessa"/>
+        <a:font script="Sora" typeface="Nirmala UI"/>
+        <a:font script="Tale" typeface="Microsoft Tai Le"/>
+        <a:font script="Talu" typeface="Microsoft New Tai Lue"/>
+        <a:font script="Tfng" typeface="Ebrima"/>
+      </a:majorFont>
+      <a:minorFont>
+        <a:latin typeface="Aptos" panose="02110004020202020204"/>
+        <a:ea typeface=""/>
+        <a:cs typeface=""/>
+        <a:font script="Jpan" typeface="游ゴシック"/>
+        <a:font script="Hang" typeface="맑은 고딕"/>
+        <a:font script="Hans" typeface="等线"/>
+        <a:font script="Hant" typeface="新細明體"/>
+        <a:font script="Arab" typeface="Arial"/>
+        <a:font script="Hebr" typeface="Arial"/>
+        <a:font script="Thai" typeface="Cordia New"/>
+        <a:font script="Ethi" typeface="Nyala"/>
+        <a:font script="Beng" typeface="Vrinda"/>
+        <a:font script="Gujr" typeface="Shruti"/>
+        <a:font script="Khmr" typeface="DaunPenh"/>
+        <a:font script="Knda" typeface="Tunga"/>
+        <a:font script="Guru" typeface="Raavi"/>
+        <a:font script="Cans" typeface="Euphemia"/>
+        <a:font script="Cher" typeface="Plantagenet Cherokee"/>
+        <a:font script="Yiii" typeface="Microsoft Yi Baiti"/>
+        <a:font script="Tibt" typeface="Microsoft Himalaya"/>
+        <a:font script="Thaa" typeface="MV Boli"/>
+        <a:font script="Deva" typeface="Mangal"/>
+        <a:font script="Telu" typeface="Gautami"/>
+        <a:font script="Taml" typeface="Latha"/>
+        <a:font script="Syrc" typeface="Estrangelo Edessa"/>
+        <a:font script="Orya" typeface="Kalinga"/>
+        <a:font script="Mlym" typeface="Kartika"/>
+        <a:font script="Laoo" typeface="DokChampa"/>
+        <a:font script="Sinh" typeface="Iskoola Pota"/>
+        <a:font script="Mong" typeface="Mongolian Baiti"/>
+        <a:font script="Viet" typeface="Arial"/>
+        <a:font script="Uigh" typeface="Microsoft Uighur"/>
+        <a:font script="Geor" typeface="Sylfaen"/>
+        <a:font script="Armn" typeface="Arial"/>
+        <a:font script="Bugi" typeface="Leelawadee UI"/>
+        <a:font script="Bopo" typeface="Microsoft JhengHei"/>
+        <a:font script="Java" typeface="Javanese Text"/>
+        <a:font script="Lisu" typeface="Segoe UI"/>
+        <a:font script="Mymr" typeface="Myanmar Text"/>
+        <a:font script="Nkoo" typeface="Ebrima"/>
+        <a:font script="Olck" typeface="Nirmala UI"/>
+        <a:font script="Osma" typeface="Ebrima"/>
+        <a:font script="Phag" typeface="Phagspa"/>
+        <a:font script="Syrn" typeface="Estrangelo Edessa"/>
+        <a:font script="Syrj" typeface="Estrangelo Edessa"/>
+        <a:font script="Syre" typeface="Estrangelo Edessa"/>
+        <a:font script="Sora" typeface="Nirmala UI"/>
+        <a:font script="Tale" typeface="Microsoft Tai Le"/>
+        <a:font script="Talu" typeface="Microsoft New Tai Lue"/>
+        <a:font script="Tfng" typeface="Ebrima"/>
+      </a:minorFont>
+    </a:fontScheme>
+    <a:fmtScheme name="Office">
+      <a:fillStyleLst>
+        <a:solidFill>
+          <a:schemeClr val="phClr"/>
+        </a:solidFill>
+        <a:gradFill rotWithShape="1">
+          <a:gsLst>
+            <a:gs pos="0">
+              <a:schemeClr val="phClr">
+                <a:lumMod val="110000"/>
+                <a:satMod val="105000"/>
+                <a:tint val="67000"/>
+              </a:schemeClr>
+            </a:gs>
+            <a:gs pos="50000">
+              <a:schemeClr val="phClr">
+                <a:lumMod val="105000"/>
+                <a:satMod val="103000"/>
+                <a:tint val="73000"/>
+              </a:schemeClr>
+            </a:gs>
+            <a:gs pos="100000">
+              <a:schemeClr val="phClr">
+                <a:lumMod val="105000"/>
+                <a:satMod val="109000"/>
+                <a:tint val="81000"/>
+              </a:schemeClr>
+            </a:gs>
+          </a:gsLst>
+          <a:lin ang="5400000" scaled="0"/>
+        </a:gradFill>
+        <a:gradFill rotWithShape="1">
+          <a:gsLst>
+            <a:gs pos="0">
+              <a:schemeClr val="phClr">
+                <a:satMod val="103000"/>
+                <a:lumMod val="102000"/>
+                <a:tint val="94000"/>
+              </a:schemeClr>
+            </a:gs>
+            <a:gs pos="50000">
+              <a:schemeClr val="phClr">
+                <a:satMod val="110000"/>
+                <a:lumMod val="100000"/>
+                <a:shade val="100000"/>
+              </a:schemeClr>
+            </a:gs>
+            <a:gs pos="100000">
+              <a:schemeClr val="phClr">
+                <a:lumMod val="99000"/>
+                <a:satMod val="120000"/>
+                <a:shade val="78000"/>
+              </a:schemeClr>
+            </a:gs>
+          </a:gsLst>
+          <a:lin ang="5400000" scaled="0"/>
+        </a:gradFill>
+      </a:fillStyleLst>
+      <a:lnStyleLst>
+        <a:ln w="12700" cap="flat" cmpd="sng" algn="ctr">
+          <a:solidFill>
+            <a:schemeClr val="phClr"/>
+          </a:solidFill>
+          <a:prstDash val="solid"/>
+          <a:miter lim="800000"/>
+        </a:ln>
+        <a:ln w="19050" cap="flat" cmpd="sng" algn="ctr">
+          <a:solidFill>
+            <a:schemeClr val="phClr"/>
+          </a:solidFill>
+          <a:prstDash val="solid"/>
+          <a:miter lim="800000"/>
+        </a:ln>
+        <a:ln w="25400" cap="flat" cmpd="sng" algn="ctr">
+          <a:solidFill>
+            <a:schemeClr val="phClr"/>
+          </a:solidFill>
+          <a:prstDash val="solid"/>
+          <a:miter lim="800000"/>
+        </a:ln>
+      </a:lnStyleLst>
+      <a:effectStyleLst>
+        <a:effectStyle>
+          <a:effectLst/>
+        </a:effectStyle>
+        <a:effectStyle>
+          <a:effectLst/>
+        </a:effectStyle>
+        <a:effectStyle>
+          <a:effectLst>
+            <a:outerShdw blurRad="57150" dist="19050" dir="5400000" algn="ctr" rotWithShape="0">
+              <a:srgbClr val="000000">
+                <a:alpha val="63000"/>
+              </a:srgbClr>
+            </a:outerShdw>
+          </a:effectLst>
+        </a:effectStyle>
+      </a:effectStyleLst>
+      <a:bgFillStyleLst>
+        <a:solidFill>
+          <a:schemeClr val="phClr"/>
+        </a:solidFill>
+        <a:solidFill>
+          <a:schemeClr val="phClr">
+            <a:tint val="95000"/>
+            <a:satMod val="170000"/>
+          </a:schemeClr>
+        </a:solidFill>
+        <a:gradFill rotWithShape="1">
+          <a:gsLst>
+            <a:gs pos="0">
+              <a:schemeClr val="phClr">
+                <a:tint val="93000"/>
+                <a:satMod val="150000"/>
+                <a:shade val="98000"/>
+                <a:lumMod val="102000"/>
+              </a:schemeClr>
+            </a:gs>
+            <a:gs pos="50000">
+              <a:schemeClr val="phClr">
+                <a:tint val="98000"/>
+                <a:satMod val="130000"/>
+                <a:shade val="90000"/>
+                <a:lumMod val="103000"/>
+              </a:schemeClr>
+            </a:gs>
+            <a:gs pos="100000">
+              <a:schemeClr val="phClr">
+                <a:shade val="63000"/>
+                <a:satMod val="120000"/>
+              </a:schemeClr>
+            </a:gs>
+          </a:gsLst>
+          <a:lin ang="5400000" scaled="0"/>
+        </a:gradFill>
+      </a:bgFillStyleLst>
+    </a:fmtScheme>
+  </a:themeElements>
+  <a:objectDefaults>
+    <a:lnDef>
+      <a:spPr/>
+      <a:bodyPr/>
+      <a:lstStyle/>
+      <a:style>
+        <a:lnRef idx="2">
+          <a:schemeClr val="accent1"/>
+        </a:lnRef>
+        <a:fillRef idx="0">
+          <a:schemeClr val="accent1"/>
+        </a:fillRef>
+        <a:effectRef idx="1">
+          <a:schemeClr val="accent1"/>
+        </a:effectRef>
+        <a:fontRef idx="minor">
+          <a:schemeClr val="tx1"/>
+        </a:fontRef>
+      </a:style>
+    </a:lnDef>
+  </a:objectDefaults>
+  <a:extraClrSchemeLst/>
+  <a:extLst>
+    <a:ext uri="{05A4C25C-085E-4340-85A3-A5531E510DB2}">
+      <thm15:themeFamily xmlns:thm15="http://schemas.microsoft.com/office/thememl/2012/main" name="Office Theme" id="{2E142A2C-CD16-42D6-873A-C26D2A0506FA}" vid="{1BDDFF52-6CD6-40A5-AB3C-68EB2F1E4D0A}"/>
+    </a:ext>
+  </a:extLst>
+</a:theme>
 </file>